--- a/docs/trabalhos-relacionados.pptx
+++ b/docs/trabalhos-relacionados.pptx
@@ -3100,7 +3100,7 @@
     <p:bg>
       <p:bgPr>
         <a:solidFill>
-          <a:srgbClr val="0D1B2A"/>
+          <a:srgbClr val="FFFFFF"/>
         </a:solidFill>
         <a:effectLst/>
       </p:bgPr>
@@ -3121,13 +3121,13 @@
         <p:spPr>
           <a:xfrm>
             <a:off x="0" y="0"/>
-            <a:ext cx="137160" cy="6858000"/>
+            <a:ext cx="12191695" cy="1097280"/>
           </a:xfrm>
           <a:prstGeom prst="rect">
             <a:avLst/>
           </a:prstGeom>
           <a:solidFill>
-            <a:srgbClr val="007ACC"/>
+            <a:srgbClr val="2F9E41"/>
           </a:solidFill>
           <a:ln>
             <a:noFill/>
@@ -3163,14 +3163,14 @@
         </p:nvSpPr>
         <p:spPr>
           <a:xfrm>
-            <a:off x="0" y="6492240"/>
-            <a:ext cx="12191695" cy="54864"/>
+            <a:off x="0" y="1097280"/>
+            <a:ext cx="12191695" cy="73152"/>
           </a:xfrm>
           <a:prstGeom prst="rect">
             <a:avLst/>
           </a:prstGeom>
           <a:solidFill>
-            <a:srgbClr val="416D9F"/>
+            <a:srgbClr val="CD191E"/>
           </a:solidFill>
           <a:ln>
             <a:noFill/>
@@ -3206,8 +3206,8 @@
         </p:nvSpPr>
         <p:spPr>
           <a:xfrm>
-            <a:off x="1371600" y="1371600"/>
-            <a:ext cx="9144000" cy="914400"/>
+            <a:off x="1371600" y="137160"/>
+            <a:ext cx="9144000" cy="411480"/>
           </a:xfrm>
           <a:prstGeom prst="rect">
             <a:avLst/>
@@ -3221,7 +3221,7 @@
           <a:lstStyle/>
           <a:p>
             <a:pPr algn="ctr">
-              <a:defRPr sz="3600" b="1">
+              <a:defRPr sz="1600" b="1">
                 <a:solidFill>
                   <a:srgbClr val="FFFFFF"/>
                 </a:solidFill>
@@ -3229,7 +3229,7 @@
               </a:defRPr>
             </a:pPr>
             <a:r>
-              <a:t>TRABALHOS RELACIONADOS E ESTADO DA ARTE</a:t>
+              <a:t>INSTITUTO FEDERAL DE EDUCAÇÃO, CIÊNCIA E TECNOLOGIA DA BAHIA</a:t>
             </a:r>
           </a:p>
         </p:txBody>
@@ -3242,8 +3242,8 @@
         </p:nvSpPr>
         <p:spPr>
           <a:xfrm>
-            <a:off x="1371600" y="2286000"/>
-            <a:ext cx="9144000" cy="731520"/>
+            <a:off x="1371600" y="548640"/>
+            <a:ext cx="9144000" cy="365760"/>
           </a:xfrm>
           <a:prstGeom prst="rect">
             <a:avLst/>
@@ -3257,15 +3257,87 @@
           <a:lstStyle/>
           <a:p>
             <a:pPr algn="ctr">
-              <a:defRPr sz="2000" b="0">
-                <a:solidFill>
-                  <a:srgbClr val="AACCEE"/>
+              <a:defRPr sz="2400" b="1">
+                <a:solidFill>
+                  <a:srgbClr val="FFFFFF"/>
                 </a:solidFill>
                 <a:latin typeface="Segoe UI"/>
               </a:defRPr>
             </a:pPr>
             <a:r>
-              <a:t>Autenticacao Adaptativa com Inteligencia Artificial,</a:t>
+              <a:t>IFBA</a:t>
+            </a:r>
+          </a:p>
+        </p:txBody>
+      </p:sp>
+      <p:sp>
+        <p:nvSpPr>
+          <p:cNvPr id="6" name="TextBox 5"/>
+          <p:cNvSpPr txBox="1"/>
+          <p:nvPr/>
+        </p:nvSpPr>
+        <p:spPr>
+          <a:xfrm>
+            <a:off x="1097280" y="1645920"/>
+            <a:ext cx="9966960" cy="1097280"/>
+          </a:xfrm>
+          <a:prstGeom prst="rect">
+            <a:avLst/>
+          </a:prstGeom>
+          <a:noFill/>
+        </p:spPr>
+        <p:txBody>
+          <a:bodyPr wrap="square">
+            <a:spAutoFit/>
+          </a:bodyPr>
+          <a:lstStyle/>
+          <a:p>
+            <a:pPr algn="ctr">
+              <a:defRPr sz="3200" b="1">
+                <a:solidFill>
+                  <a:srgbClr val="1A6B2A"/>
+                </a:solidFill>
+                <a:latin typeface="Segoe UI"/>
+              </a:defRPr>
+            </a:pPr>
+            <a:r>
+              <a:t>TRABALHOS RELACIONADOS E ESTADO DA ARTE</a:t>
+            </a:r>
+          </a:p>
+        </p:txBody>
+      </p:sp>
+      <p:sp>
+        <p:nvSpPr>
+          <p:cNvPr id="7" name="TextBox 6"/>
+          <p:cNvSpPr txBox="1"/>
+          <p:nvPr/>
+        </p:nvSpPr>
+        <p:spPr>
+          <a:xfrm>
+            <a:off x="1371600" y="2743200"/>
+            <a:ext cx="9144000" cy="731520"/>
+          </a:xfrm>
+          <a:prstGeom prst="rect">
+            <a:avLst/>
+          </a:prstGeom>
+          <a:noFill/>
+        </p:spPr>
+        <p:txBody>
+          <a:bodyPr wrap="square">
+            <a:spAutoFit/>
+          </a:bodyPr>
+          <a:lstStyle/>
+          <a:p>
+            <a:pPr algn="ctr">
+              <a:defRPr sz="1800" b="0">
+                <a:solidFill>
+                  <a:srgbClr val="4A4A4A"/>
+                </a:solidFill>
+                <a:latin typeface="Segoe UI"/>
+              </a:defRPr>
+            </a:pPr>
+            <a:r>
+              <a:t>Autenticação Adaptativa com Inteligência Artificial,</a:t>
             </a:r>
             <a:br/>
             <a:r>
@@ -3276,20 +3348,20 @@
       </p:sp>
       <p:sp>
         <p:nvSpPr>
-          <p:cNvPr id="6" name="Rectangle 5"/>
+          <p:cNvPr id="8" name="Rectangle 7"/>
           <p:cNvSpPr/>
           <p:nvPr/>
         </p:nvSpPr>
         <p:spPr>
           <a:xfrm>
-            <a:off x="5029200" y="3200400"/>
-            <a:ext cx="2103120" cy="36576"/>
+            <a:off x="4572000" y="3566160"/>
+            <a:ext cx="3017520" cy="36576"/>
           </a:xfrm>
           <a:prstGeom prst="rect">
             <a:avLst/>
           </a:prstGeom>
           <a:solidFill>
-            <a:srgbClr val="007ACC"/>
+            <a:srgbClr val="2F9E41"/>
           </a:solidFill>
           <a:ln>
             <a:noFill/>
@@ -3319,13 +3391,13 @@
       </p:sp>
       <p:sp>
         <p:nvSpPr>
-          <p:cNvPr id="7" name="TextBox 6"/>
+          <p:cNvPr id="9" name="TextBox 8"/>
           <p:cNvSpPr txBox="1"/>
           <p:nvPr/>
         </p:nvSpPr>
         <p:spPr>
           <a:xfrm>
-            <a:off x="1371600" y="3657600"/>
+            <a:off x="1371600" y="3840480"/>
             <a:ext cx="9144000" cy="457200"/>
           </a:xfrm>
           <a:prstGeom prst="rect">
@@ -3340,29 +3412,29 @@
           <a:lstStyle/>
           <a:p>
             <a:pPr algn="ctr">
-              <a:defRPr sz="1800" b="0">
-                <a:solidFill>
-                  <a:srgbClr val="88AACC"/>
+              <a:defRPr sz="1600" b="1">
+                <a:solidFill>
+                  <a:srgbClr val="1A6B2A"/>
                 </a:solidFill>
                 <a:latin typeface="Segoe UI"/>
               </a:defRPr>
             </a:pPr>
             <a:r>
-              <a:t>Sistema Autonomo de Autenticacao Inteligente</a:t>
-            </a:r>
-          </a:p>
-        </p:txBody>
-      </p:sp>
-      <p:sp>
-        <p:nvSpPr>
-          <p:cNvPr id="8" name="TextBox 7"/>
+              <a:t>Sistema Autônomo de Autenticação Inteligente</a:t>
+            </a:r>
+          </a:p>
+        </p:txBody>
+      </p:sp>
+      <p:sp>
+        <p:nvSpPr>
+          <p:cNvPr id="10" name="TextBox 9"/>
           <p:cNvSpPr txBox="1"/>
           <p:nvPr/>
         </p:nvSpPr>
         <p:spPr>
           <a:xfrm>
-            <a:off x="1371600" y="5029200"/>
-            <a:ext cx="9144000" cy="457200"/>
+            <a:off x="1371600" y="4754880"/>
+            <a:ext cx="9144000" cy="365760"/>
           </a:xfrm>
           <a:prstGeom prst="rect">
             <a:avLst/>
@@ -3378,13 +3450,171 @@
             <a:pPr algn="ctr">
               <a:defRPr sz="1400" b="0">
                 <a:solidFill>
-                  <a:srgbClr val="6688AA"/>
+                  <a:srgbClr val="4A4A4A"/>
                 </a:solidFill>
                 <a:latin typeface="Segoe UI"/>
               </a:defRPr>
             </a:pPr>
             <a:r>
-              <a:t>Abril 2026</a:t>
+              <a:t>Discente: João Guedes de Brito</a:t>
+            </a:r>
+          </a:p>
+        </p:txBody>
+      </p:sp>
+      <p:sp>
+        <p:nvSpPr>
+          <p:cNvPr id="11" name="TextBox 10"/>
+          <p:cNvSpPr txBox="1"/>
+          <p:nvPr/>
+        </p:nvSpPr>
+        <p:spPr>
+          <a:xfrm>
+            <a:off x="1371600" y="5120640"/>
+            <a:ext cx="9144000" cy="365760"/>
+          </a:xfrm>
+          <a:prstGeom prst="rect">
+            <a:avLst/>
+          </a:prstGeom>
+          <a:noFill/>
+        </p:spPr>
+        <p:txBody>
+          <a:bodyPr wrap="square">
+            <a:spAutoFit/>
+          </a:bodyPr>
+          <a:lstStyle/>
+          <a:p>
+            <a:pPr algn="ctr">
+              <a:defRPr sz="1400" b="0">
+                <a:solidFill>
+                  <a:srgbClr val="4A4A4A"/>
+                </a:solidFill>
+                <a:latin typeface="Segoe UI"/>
+              </a:defRPr>
+            </a:pPr>
+            <a:r>
+              <a:t>Orientador: Prof. Cleber Jorge Lira de Santana</a:t>
+            </a:r>
+          </a:p>
+        </p:txBody>
+      </p:sp>
+      <p:sp>
+        <p:nvSpPr>
+          <p:cNvPr id="12" name="Rectangle 11"/>
+          <p:cNvSpPr/>
+          <p:nvPr/>
+        </p:nvSpPr>
+        <p:spPr>
+          <a:xfrm>
+            <a:off x="0" y="6217920"/>
+            <a:ext cx="12191695" cy="73152"/>
+          </a:xfrm>
+          <a:prstGeom prst="rect">
+            <a:avLst/>
+          </a:prstGeom>
+          <a:solidFill>
+            <a:srgbClr val="CD191E"/>
+          </a:solidFill>
+          <a:ln>
+            <a:noFill/>
+          </a:ln>
+        </p:spPr>
+        <p:style>
+          <a:lnRef idx="1">
+            <a:schemeClr val="accent1"/>
+          </a:lnRef>
+          <a:fillRef idx="3">
+            <a:schemeClr val="accent1"/>
+          </a:fillRef>
+          <a:effectRef idx="2">
+            <a:schemeClr val="accent1"/>
+          </a:effectRef>
+          <a:fontRef idx="minor">
+            <a:schemeClr val="lt1"/>
+          </a:fontRef>
+        </p:style>
+        <p:txBody>
+          <a:bodyPr rtlCol="0" anchor="ctr"/>
+          <a:lstStyle/>
+          <a:p>
+            <a:pPr algn="ctr"/>
+          </a:p>
+        </p:txBody>
+      </p:sp>
+      <p:sp>
+        <p:nvSpPr>
+          <p:cNvPr id="13" name="Rectangle 12"/>
+          <p:cNvSpPr/>
+          <p:nvPr/>
+        </p:nvSpPr>
+        <p:spPr>
+          <a:xfrm>
+            <a:off x="0" y="6291072"/>
+            <a:ext cx="12191695" cy="566928"/>
+          </a:xfrm>
+          <a:prstGeom prst="rect">
+            <a:avLst/>
+          </a:prstGeom>
+          <a:solidFill>
+            <a:srgbClr val="2F9E41"/>
+          </a:solidFill>
+          <a:ln>
+            <a:noFill/>
+          </a:ln>
+        </p:spPr>
+        <p:style>
+          <a:lnRef idx="1">
+            <a:schemeClr val="accent1"/>
+          </a:lnRef>
+          <a:fillRef idx="3">
+            <a:schemeClr val="accent1"/>
+          </a:fillRef>
+          <a:effectRef idx="2">
+            <a:schemeClr val="accent1"/>
+          </a:effectRef>
+          <a:fontRef idx="minor">
+            <a:schemeClr val="lt1"/>
+          </a:fontRef>
+        </p:style>
+        <p:txBody>
+          <a:bodyPr rtlCol="0" anchor="ctr"/>
+          <a:lstStyle/>
+          <a:p>
+            <a:pPr algn="ctr"/>
+          </a:p>
+        </p:txBody>
+      </p:sp>
+      <p:sp>
+        <p:nvSpPr>
+          <p:cNvPr id="14" name="TextBox 13"/>
+          <p:cNvSpPr txBox="1"/>
+          <p:nvPr/>
+        </p:nvSpPr>
+        <p:spPr>
+          <a:xfrm>
+            <a:off x="1371600" y="6355080"/>
+            <a:ext cx="9144000" cy="365760"/>
+          </a:xfrm>
+          <a:prstGeom prst="rect">
+            <a:avLst/>
+          </a:prstGeom>
+          <a:noFill/>
+        </p:spPr>
+        <p:txBody>
+          <a:bodyPr wrap="square">
+            <a:spAutoFit/>
+          </a:bodyPr>
+          <a:lstStyle/>
+          <a:p>
+            <a:pPr algn="ctr">
+              <a:defRPr sz="1300" b="0">
+                <a:solidFill>
+                  <a:srgbClr val="FFFFFF"/>
+                </a:solidFill>
+                <a:latin typeface="Segoe UI"/>
+              </a:defRPr>
+            </a:pPr>
+            <a:r>
+              <a:t>Salvador - BA | Abril 2026</a:t>
             </a:r>
           </a:p>
         </p:txBody>
@@ -3430,7 +3660,7 @@
             <a:avLst/>
           </a:prstGeom>
           <a:solidFill>
-            <a:srgbClr val="0D1B2A"/>
+            <a:srgbClr val="1A6B2A"/>
           </a:solidFill>
           <a:ln>
             <a:noFill/>
@@ -3519,7 +3749,7 @@
             <a:pPr algn="l">
               <a:defRPr sz="1400" b="0">
                 <a:solidFill>
-                  <a:srgbClr val="AACCEE"/>
+                  <a:srgbClr val="B0E0B0"/>
                 </a:solidFill>
                 <a:latin typeface="Segoe UI"/>
               </a:defRPr>
@@ -3545,7 +3775,7 @@
             <a:avLst/>
           </a:prstGeom>
           <a:solidFill>
-            <a:srgbClr val="007ACC"/>
+            <a:srgbClr val="CD191E"/>
           </a:solidFill>
           <a:ln>
             <a:noFill/>
@@ -3643,13 +3873,13 @@
             <a:pPr algn="l">
               <a:defRPr sz="1400" b="1">
                 <a:solidFill>
-                  <a:srgbClr val="007ACC"/>
+                  <a:srgbClr val="2F9E41"/>
                 </a:solidFill>
                 <a:latin typeface="Segoe UI"/>
               </a:defRPr>
             </a:pPr>
             <a:r>
-              <a:t>Descricao do Trabalho</a:t>
+              <a:t>Descrição do Trabalho</a:t>
             </a:r>
           </a:p>
         </p:txBody>
@@ -3685,7 +3915,7 @@
               </a:defRPr>
             </a:pPr>
             <a:r>
-              <a:t>O MDPI propoe mecanismo generico de audit trail com smart contracts. Harpocrates implementa logs imutaveis com preservacao de privacidade sobre Hyperledger Fabric em Amazon EC2, combinando tecnicas criptograficas com imutabilidade blockchain.</a:t>
+              <a:t>O MDPI propõe mecanismo genérico de audit trail com smart contracts. Harpocrates implementa logs imutáveis com preservação de privacidade sobre Hyperledger Fabric em Amazon EC2, combinando técnicas criptográficas com imutabilidade blockchain.</a:t>
             </a:r>
           </a:p>
         </p:txBody>
@@ -3760,13 +3990,13 @@
             <a:pPr algn="l">
               <a:defRPr sz="1400" b="1">
                 <a:solidFill>
-                  <a:srgbClr val="27AE60"/>
+                  <a:srgbClr val="2F9E41"/>
                 </a:solidFill>
                 <a:latin typeface="Segoe UI"/>
               </a:defRPr>
             </a:pPr>
             <a:r>
-              <a:t>Comparacao com a Proposta</a:t>
+              <a:t>Comparação com a Proposta</a:t>
             </a:r>
           </a:p>
         </p:txBody>
@@ -3802,7 +4032,7 @@
               </a:defRPr>
             </a:pPr>
             <a:r>
-              <a:t>O sistema proposto registra especificamente eventos de autenticacao (hash, tipo de evento, ID hasheado SHA-3, IP, score, decisao, timestamp) em blockchain dual (Hyperledger Fabric + Ethereum). Opera em modo simulacao para dev e redes reais em producao — flexibilidade nao presente nos comparados.</a:t>
+              <a:t>O sistema proposto registra especificamente eventos de autenticação (hash, tipo de evento, ID hasheado SHA-3, IP, score, decisão, timestamp) em blockchain dual (Hyperledger Fabric + Ethereum). Opera em modo simulação para dev e redes reais em produção — flexibilidade não presente nos comparados.</a:t>
             </a:r>
           </a:p>
         </p:txBody>
@@ -3848,7 +4078,7 @@
             <a:avLst/>
           </a:prstGeom>
           <a:solidFill>
-            <a:srgbClr val="0D1B2A"/>
+            <a:srgbClr val="1A6B2A"/>
           </a:solidFill>
           <a:ln>
             <a:noFill/>
@@ -3937,7 +4167,7 @@
             <a:pPr algn="l">
               <a:defRPr sz="1400" b="0">
                 <a:solidFill>
-                  <a:srgbClr val="AACCEE"/>
+                  <a:srgbClr val="B0E0B0"/>
                 </a:solidFill>
                 <a:latin typeface="Segoe UI"/>
               </a:defRPr>
@@ -3963,7 +4193,7 @@
             <a:avLst/>
           </a:prstGeom>
           <a:solidFill>
-            <a:srgbClr val="007ACC"/>
+            <a:srgbClr val="CD191E"/>
           </a:solidFill>
           <a:ln>
             <a:noFill/>
@@ -4061,13 +4291,13 @@
             <a:pPr algn="l">
               <a:defRPr sz="1400" b="1">
                 <a:solidFill>
-                  <a:srgbClr val="007ACC"/>
+                  <a:srgbClr val="2F9E41"/>
                 </a:solidFill>
                 <a:latin typeface="Segoe UI"/>
               </a:defRPr>
             </a:pPr>
             <a:r>
-              <a:t>Descricao do Trabalho</a:t>
+              <a:t>Descrição do Trabalho</a:t>
             </a:r>
           </a:p>
         </p:txBody>
@@ -4103,7 +4333,7 @@
               </a:defRPr>
             </a:pPr>
             <a:r>
-              <a:t>O trabalho ScienceDirect combina Hyperledger Fabric com OAuth 2.0 para IAM no setor de saude. O IEEE (2018) e um trabalho pioneiro de autenticacao baseada em risco com ML, classificando logins por nivel de risco com features contextuais basicas.</a:t>
+              <a:t>O trabalho ScienceDirect combina Hyperledger Fabric com OAuth 2.0 para IAM no setor de saúde. O IEEE (2018) é um trabalho pioneiro de autenticação baseada em risco com ML, classificando logins por nível de risco com features contextuais básicas.</a:t>
             </a:r>
           </a:p>
         </p:txBody>
@@ -4178,13 +4408,13 @@
             <a:pPr algn="l">
               <a:defRPr sz="1400" b="1">
                 <a:solidFill>
-                  <a:srgbClr val="27AE60"/>
+                  <a:srgbClr val="2F9E41"/>
                 </a:solidFill>
                 <a:latin typeface="Segoe UI"/>
               </a:defRPr>
             </a:pPr>
             <a:r>
-              <a:t>Comparacao com a Proposta</a:t>
+              <a:t>Comparação com a Proposta</a:t>
             </a:r>
           </a:p>
         </p:txBody>
@@ -4220,7 +4450,7 @@
               </a:defRPr>
             </a:pPr>
             <a:r>
-              <a:t>O sistema proposto substitui autenticacao estatica (OAuth) por score dinamico de IA, com 4 niveis de resposta em vez de decisao binaria. Expande o trabalho de 2018 com ensemble de 3 algoritmos, 14 features, biometria comportamental, blockchain e explicabilidade.</a:t>
+              <a:t>O sistema proposto substitui autenticação estática (OAuth) por score dinâmico de IA, com 4 níveis de resposta em vez de decisão binária. Expande o trabalho de 2018 com ensemble de 3 algoritmos, 14 features, biometria comportamental, blockchain e explicabilidade.</a:t>
             </a:r>
           </a:p>
         </p:txBody>
@@ -4266,7 +4496,7 @@
             <a:avLst/>
           </a:prstGeom>
           <a:solidFill>
-            <a:srgbClr val="0D1B2A"/>
+            <a:srgbClr val="1A6B2A"/>
           </a:solidFill>
           <a:ln>
             <a:noFill/>
@@ -4355,7 +4585,7 @@
             <a:pPr algn="l">
               <a:defRPr sz="1400" b="0">
                 <a:solidFill>
-                  <a:srgbClr val="AACCEE"/>
+                  <a:srgbClr val="B0E0B0"/>
                 </a:solidFill>
                 <a:latin typeface="Segoe UI"/>
               </a:defRPr>
@@ -4381,7 +4611,7 @@
             <a:avLst/>
           </a:prstGeom>
           <a:solidFill>
-            <a:srgbClr val="007ACC"/>
+            <a:srgbClr val="CD191E"/>
           </a:solidFill>
           <a:ln>
             <a:noFill/>
@@ -4479,13 +4709,13 @@
             <a:pPr algn="l">
               <a:defRPr sz="1400" b="1">
                 <a:solidFill>
-                  <a:srgbClr val="007ACC"/>
+                  <a:srgbClr val="2F9E41"/>
                 </a:solidFill>
                 <a:latin typeface="Segoe UI"/>
               </a:defRPr>
             </a:pPr>
             <a:r>
-              <a:t>Descricao do Trabalho</a:t>
+              <a:t>Descrição do Trabalho</a:t>
             </a:r>
           </a:p>
         </p:txBody>
@@ -4521,7 +4751,7 @@
               </a:defRPr>
             </a:pPr>
             <a:r>
-              <a:t>Trust Engine: score dinamico passwordless com TAR&gt;90% e FAR&lt;5%. Zero Trust: RL para enforcement adaptativo. XAI: revisao de SHAP/LIME para IDS. Drift Detection: LSTM+Autoencoder com KL-divergence para detectar mudancas de comportamento.</a:t>
+              <a:t>Trust Engine: score dinâmico passwordless com TAR&gt;90% e FAR&lt;5%. Zero Trust: RL para enforcement adaptativo. XAI: revisão de SHAP/LIME para IDS. Drift Detection: LSTM+Autoencoder com KL-divergence para detectar mudanças de comportamento.</a:t>
             </a:r>
           </a:p>
         </p:txBody>
@@ -4596,13 +4826,13 @@
             <a:pPr algn="l">
               <a:defRPr sz="1400" b="1">
                 <a:solidFill>
-                  <a:srgbClr val="27AE60"/>
+                  <a:srgbClr val="2F9E41"/>
                 </a:solidFill>
                 <a:latin typeface="Segoe UI"/>
               </a:defRPr>
             </a:pPr>
             <a:r>
-              <a:t>Comparacao com a Proposta</a:t>
+              <a:t>Comparação com a Proposta</a:t>
             </a:r>
           </a:p>
         </p:txBody>
@@ -4638,7 +4868,7 @@
               </a:defRPr>
             </a:pPr>
             <a:r>
-              <a:t>O sistema proposto integra TODOS esses elementos em uma unica plataforma: score de confianca (como Trust Engine), decisoes adaptativas (como Zero Trust), explicabilidade SHAP (como XAI), e deteccao de deriva (como Drift Detection) — com o diferencial de registro imutavel em blockchain de cada decisao e explicacao.</a:t>
+              <a:t>O sistema proposto integra TODOS esses elementos em uma única plataforma: score de confiança (como Trust Engine), decisões adaptativas (como Zero Trust), explicabilidade SHAP (como XAI), e detecção de deriva (como Drift Detection) — com o diferencial de registro imutável em blockchain de cada decisão e explicação.</a:t>
             </a:r>
           </a:p>
         </p:txBody>
@@ -4684,7 +4914,7 @@
             <a:avLst/>
           </a:prstGeom>
           <a:solidFill>
-            <a:srgbClr val="0D1B2A"/>
+            <a:srgbClr val="1A6B2A"/>
           </a:solidFill>
           <a:ln>
             <a:noFill/>
@@ -4743,7 +4973,7 @@
               </a:defRPr>
             </a:pPr>
             <a:r>
-              <a:t>Solucoes da Industria</a:t>
+              <a:t>Soluções da Indústria</a:t>
             </a:r>
           </a:p>
         </p:txBody>
@@ -4773,7 +5003,7 @@
             <a:pPr algn="l">
               <a:defRPr sz="1400" b="0">
                 <a:solidFill>
-                  <a:srgbClr val="AACCEE"/>
+                  <a:srgbClr val="B0E0B0"/>
                 </a:solidFill>
                 <a:latin typeface="Segoe UI"/>
               </a:defRPr>
@@ -4799,7 +5029,7 @@
             <a:avLst/>
           </a:prstGeom>
           <a:solidFill>
-            <a:srgbClr val="007ACC"/>
+            <a:srgbClr val="CD191E"/>
           </a:solidFill>
           <a:ln>
             <a:noFill/>
@@ -4897,7 +5127,7 @@
             <a:pPr algn="l">
               <a:defRPr sz="1600" b="1">
                 <a:solidFill>
-                  <a:srgbClr val="007ACC"/>
+                  <a:srgbClr val="2F9E41"/>
                 </a:solidFill>
                 <a:latin typeface="Segoe UI"/>
               </a:defRPr>
@@ -4939,7 +5169,7 @@
               </a:defRPr>
             </a:pPr>
             <a:r>
-              <a:t>Suite de prevencao de fraude com IA, biometria comportamental e inteligencia global. Analisa sinais de identidade digital e informacoes de dispositivo. Utilizado por centenas de instituicoes financeiras.</a:t>
+              <a:t>Suíte de prevenção de fraude com IA, biometria comportamental e inteligência global. Analisa sinais de identidade digital e informações de dispositivo. Utilizado por centenas de instituições financeiras.</a:t>
             </a:r>
           </a:p>
         </p:txBody>
@@ -4969,7 +5199,7 @@
             <a:pPr algn="l">
               <a:defRPr sz="1300" b="1">
                 <a:solidFill>
-                  <a:srgbClr val="27AE60"/>
+                  <a:srgbClr val="2F9E41"/>
                 </a:solidFill>
                 <a:latin typeface="Segoe UI"/>
               </a:defRPr>
@@ -5011,7 +5241,7 @@
               </a:defRPr>
             </a:pPr>
             <a:r>
-              <a:t>Trusteer e proprietario/black-box. A proposta oferece: explicabilidade SHAP, blockchain para auditoria, arquitetura aberta e reprodutivel, metricas e decisoes transparentes.</a:t>
+              <a:t>Trusteer é proprietário/black-box. A proposta oferece: explicabilidade SHAP, blockchain para auditoria, arquitetura aberta e reprodutível, métricas e decisões transparentes.</a:t>
             </a:r>
           </a:p>
         </p:txBody>
@@ -5086,7 +5316,7 @@
             <a:pPr algn="l">
               <a:defRPr sz="1600" b="1">
                 <a:solidFill>
-                  <a:srgbClr val="007ACC"/>
+                  <a:srgbClr val="2F9E41"/>
                 </a:solidFill>
                 <a:latin typeface="Segoe UI"/>
               </a:defRPr>
@@ -5128,7 +5358,7 @@
               </a:defRPr>
             </a:pPr>
             <a:r>
-              <a:t>Biometria comportamental cognitiva e fisica para prevencao de fraude. Analisa interacoes humano-dispositivo com IA. Diferencia usuarios legitimos de fraudadores. Adotado por bancos globais.</a:t>
+              <a:t>Biometria comportamental cognitiva e física para prevenção de fraude. Analisa interações humano-dispositivo com IA. Diferencia usuários legítimos de fraudadores. Adotado por bancos globais.</a:t>
             </a:r>
           </a:p>
         </p:txBody>
@@ -5158,7 +5388,7 @@
             <a:pPr algn="l">
               <a:defRPr sz="1300" b="1">
                 <a:solidFill>
-                  <a:srgbClr val="27AE60"/>
+                  <a:srgbClr val="2F9E41"/>
                 </a:solidFill>
                 <a:latin typeface="Segoe UI"/>
               </a:defRPr>
@@ -5200,7 +5430,7 @@
               </a:defRPr>
             </a:pPr>
             <a:r>
-              <a:t>BioCatch e SaaS proprietario para fraude financeira. A proposta e voltada para autenticacao web geral, com ensemble explicito de 3 algoritmos, blockchain dual, explicabilidade SHAP e deteccao de deriva.</a:t>
+              <a:t>BioCatch é SaaS proprietário para fraude financeira. A proposta é voltada para autenticação web geral, com ensemble explícito de 3 algoritmos, blockchain dual, explicabilidade SHAP e detecção de deriva.</a:t>
             </a:r>
           </a:p>
         </p:txBody>
@@ -5246,7 +5476,7 @@
             <a:avLst/>
           </a:prstGeom>
           <a:solidFill>
-            <a:srgbClr val="0D1B2A"/>
+            <a:srgbClr val="1A6B2A"/>
           </a:solidFill>
           <a:ln>
             <a:noFill/>
@@ -5305,7 +5535,7 @@
               </a:defRPr>
             </a:pPr>
             <a:r>
-              <a:t>Sintese Comparativa</a:t>
+              <a:t>Síntese Comparativa</a:t>
             </a:r>
           </a:p>
         </p:txBody>
@@ -5335,7 +5565,7 @@
             <a:pPr algn="l">
               <a:defRPr sz="1400" b="0">
                 <a:solidFill>
-                  <a:srgbClr val="AACCEE"/>
+                  <a:srgbClr val="B0E0B0"/>
                 </a:solidFill>
                 <a:latin typeface="Segoe UI"/>
               </a:defRPr>
@@ -5361,7 +5591,7 @@
             <a:avLst/>
           </a:prstGeom>
           <a:solidFill>
-            <a:srgbClr val="007ACC"/>
+            <a:srgbClr val="CD191E"/>
           </a:solidFill>
           <a:ln>
             <a:noFill/>
@@ -5428,13 +5658,13 @@
                         </a:defRPr>
                       </a:pPr>
                       <a:r>
-                        <a:t>Caracteristica</a:t>
+                        <a:t>Característica</a:t>
                       </a:r>
                     </a:p>
                   </a:txBody>
                   <a:tcPr>
                     <a:solidFill>
-                      <a:srgbClr val="0D1B2A"/>
+                      <a:srgbClr val="1A6B2A"/>
                     </a:solidFill>
                   </a:tcPr>
                 </a:tc>
@@ -5458,7 +5688,7 @@
                   </a:txBody>
                   <a:tcPr>
                     <a:solidFill>
-                      <a:srgbClr val="0D1B2A"/>
+                      <a:srgbClr val="1A6B2A"/>
                     </a:solidFill>
                   </a:tcPr>
                 </a:tc>
@@ -5482,7 +5712,7 @@
                   </a:txBody>
                   <a:tcPr>
                     <a:solidFill>
-                      <a:srgbClr val="0D1B2A"/>
+                      <a:srgbClr val="1A6B2A"/>
                     </a:solidFill>
                   </a:tcPr>
                 </a:tc>
@@ -5500,13 +5730,13 @@
                         </a:defRPr>
                       </a:pPr>
                       <a:r>
-                        <a:t>Industria</a:t>
+                        <a:t>Indústria</a:t>
                       </a:r>
                     </a:p>
                   </a:txBody>
                   <a:tcPr>
                     <a:solidFill>
-                      <a:srgbClr val="0D1B2A"/>
+                      <a:srgbClr val="1A6B2A"/>
                     </a:solidFill>
                   </a:tcPr>
                 </a:tc>
@@ -5526,7 +5756,7 @@
                         </a:defRPr>
                       </a:pPr>
                       <a:r>
-                        <a:t>Ensemble de 3 algoritmos (IF+RF+DL) com pesos configuraveis</a:t>
+                        <a:t>Ensemble de 3 algoritmos (IF+RF+DL) com pesos configuráveis</a:t>
                       </a:r>
                     </a:p>
                   </a:txBody>
@@ -5544,7 +5774,7 @@
                       <a:pPr>
                         <a:defRPr sz="1100" b="1">
                           <a:solidFill>
-                            <a:srgbClr val="27AE60"/>
+                            <a:srgbClr val="2F9E41"/>
                           </a:solidFill>
                           <a:latin typeface="Segoe UI"/>
                         </a:defRPr>
@@ -5598,7 +5828,7 @@
                         </a:defRPr>
                       </a:pPr>
                       <a:r>
-                        <a:t>Nao divulgado</a:t>
+                        <a:t>Não divulgado</a:t>
                       </a:r>
                     </a:p>
                   </a:txBody>
@@ -5624,7 +5854,7 @@
                         </a:defRPr>
                       </a:pPr>
                       <a:r>
-                        <a:t>Score de confianca com 4 niveis de decisao</a:t>
+                        <a:t>Score de confiança com 4 níveis de decisão</a:t>
                       </a:r>
                     </a:p>
                   </a:txBody>
@@ -5642,7 +5872,7 @@
                       <a:pPr>
                         <a:defRPr sz="1100" b="1">
                           <a:solidFill>
-                            <a:srgbClr val="27AE60"/>
+                            <a:srgbClr val="2F9E41"/>
                           </a:solidFill>
                           <a:latin typeface="Segoe UI"/>
                         </a:defRPr>
@@ -5672,7 +5902,7 @@
                         </a:defRPr>
                       </a:pPr>
                       <a:r>
-                        <a:t>Binario ou ternario</a:t>
+                        <a:t>Binário ou ternário</a:t>
                       </a:r>
                     </a:p>
                   </a:txBody>
@@ -5696,7 +5926,7 @@
                         </a:defRPr>
                       </a:pPr>
                       <a:r>
-                        <a:t>Nao divulgado</a:t>
+                        <a:t>Não divulgado</a:t>
                       </a:r>
                     </a:p>
                   </a:txBody>
@@ -5740,7 +5970,7 @@
                       <a:pPr>
                         <a:defRPr sz="1100" b="1">
                           <a:solidFill>
-                            <a:srgbClr val="27AE60"/>
+                            <a:srgbClr val="2F9E41"/>
                           </a:solidFill>
                           <a:latin typeface="Segoe UI"/>
                         </a:defRPr>
@@ -5794,7 +6024,7 @@
                         </a:defRPr>
                       </a:pPr>
                       <a:r>
-                        <a:t>Nao utilizado</a:t>
+                        <a:t>Não utilizado</a:t>
                       </a:r>
                     </a:p>
                   </a:txBody>
@@ -5820,7 +6050,7 @@
                         </a:defRPr>
                       </a:pPr>
                       <a:r>
-                        <a:t>Explicabilidade via SHAP para autenticacao</a:t>
+                        <a:t>Explicabilidade via SHAP para autenticação</a:t>
                       </a:r>
                     </a:p>
                   </a:txBody>
@@ -5838,7 +6068,7 @@
                       <a:pPr>
                         <a:defRPr sz="1100" b="1">
                           <a:solidFill>
-                            <a:srgbClr val="27AE60"/>
+                            <a:srgbClr val="2F9E41"/>
                           </a:solidFill>
                           <a:latin typeface="Segoe UI"/>
                         </a:defRPr>
@@ -5892,7 +6122,7 @@
                         </a:defRPr>
                       </a:pPr>
                       <a:r>
-                        <a:t>Nao disponivel</a:t>
+                        <a:t>Não disponível</a:t>
                       </a:r>
                     </a:p>
                   </a:txBody>
@@ -5918,7 +6148,7 @@
                         </a:defRPr>
                       </a:pPr>
                       <a:r>
-                        <a:t>Deteccao de deriva comportamental integrada</a:t>
+                        <a:t>Detecção de deriva comportamental integrada</a:t>
                       </a:r>
                     </a:p>
                   </a:txBody>
@@ -5936,7 +6166,7 @@
                       <a:pPr>
                         <a:defRPr sz="1100" b="1">
                           <a:solidFill>
-                            <a:srgbClr val="27AE60"/>
+                            <a:srgbClr val="2F9E41"/>
                           </a:solidFill>
                           <a:latin typeface="Segoe UI"/>
                         </a:defRPr>
@@ -6016,7 +6246,7 @@
                         </a:defRPr>
                       </a:pPr>
                       <a:r>
-                        <a:t>Dinamica de digitacao + contexto + geolocalizacao</a:t>
+                        <a:t>Dinâmica de digitação + contexto + geolocalização</a:t>
                       </a:r>
                     </a:p>
                   </a:txBody>
@@ -6034,7 +6264,7 @@
                       <a:pPr>
                         <a:defRPr sz="1100" b="1">
                           <a:solidFill>
-                            <a:srgbClr val="27AE60"/>
+                            <a:srgbClr val="2F9E41"/>
                           </a:solidFill>
                           <a:latin typeface="Segoe UI"/>
                         </a:defRPr>
@@ -6088,7 +6318,7 @@
                         </a:defRPr>
                       </a:pPr>
                       <a:r>
-                        <a:t>Multimodal (proprietario)</a:t>
+                        <a:t>Multimodal (proprietário)</a:t>
                       </a:r>
                     </a:p>
                   </a:txBody>
@@ -6114,7 +6344,7 @@
                         </a:defRPr>
                       </a:pPr>
                       <a:r>
-                        <a:t>Trilha de auditoria imutavel das decisoes de IA</a:t>
+                        <a:t>Trilha de auditoria imutável das decisões de IA</a:t>
                       </a:r>
                     </a:p>
                   </a:txBody>
@@ -6132,7 +6362,7 @@
                       <a:pPr>
                         <a:defRPr sz="1100" b="1">
                           <a:solidFill>
-                            <a:srgbClr val="27AE60"/>
+                            <a:srgbClr val="2F9E41"/>
                           </a:solidFill>
                           <a:latin typeface="Segoe UI"/>
                         </a:defRPr>
@@ -6162,7 +6392,7 @@
                         </a:defRPr>
                       </a:pPr>
                       <a:r>
-                        <a:t>Blockchain generico</a:t>
+                        <a:t>Blockchain genérico</a:t>
                       </a:r>
                     </a:p>
                   </a:txBody>
@@ -6186,7 +6416,7 @@
                         </a:defRPr>
                       </a:pPr>
                       <a:r>
-                        <a:t>Nao disponivel</a:t>
+                        <a:t>Não disponível</a:t>
                       </a:r>
                     </a:p>
                   </a:txBody>
@@ -6212,7 +6442,7 @@
                         </a:defRPr>
                       </a:pPr>
                       <a:r>
-                        <a:t>Codigo aberto e reprodutivel</a:t>
+                        <a:t>Código aberto e reprodutível</a:t>
                       </a:r>
                     </a:p>
                   </a:txBody>
@@ -6230,7 +6460,7 @@
                       <a:pPr>
                         <a:defRPr sz="1100" b="1">
                           <a:solidFill>
-                            <a:srgbClr val="27AE60"/>
+                            <a:srgbClr val="2F9E41"/>
                           </a:solidFill>
                           <a:latin typeface="Segoe UI"/>
                         </a:defRPr>
@@ -6284,7 +6514,7 @@
                         </a:defRPr>
                       </a:pPr>
                       <a:r>
-                        <a:t>Nao</a:t>
+                        <a:t>Não</a:t>
                       </a:r>
                     </a:p>
                   </a:txBody>
@@ -6328,7 +6558,7 @@
                       <a:pPr>
                         <a:defRPr sz="1100" b="1">
                           <a:solidFill>
-                            <a:srgbClr val="27AE60"/>
+                            <a:srgbClr val="2F9E41"/>
                           </a:solidFill>
                           <a:latin typeface="Segoe UI"/>
                         </a:defRPr>
@@ -6438,7 +6668,7 @@
             <a:avLst/>
           </a:prstGeom>
           <a:solidFill>
-            <a:srgbClr val="0D1B2A"/>
+            <a:srgbClr val="1A6B2A"/>
           </a:solidFill>
           <a:ln>
             <a:noFill/>
@@ -6527,13 +6757,13 @@
             <a:pPr algn="l">
               <a:defRPr sz="1400" b="0">
                 <a:solidFill>
-                  <a:srgbClr val="AACCEE"/>
+                  <a:srgbClr val="B0E0B0"/>
                 </a:solidFill>
                 <a:latin typeface="Segoe UI"/>
               </a:defRPr>
             </a:pPr>
             <a:r>
-              <a:t>Contribuicoes originais da proposta</a:t>
+              <a:t>Contribuições originais da proposta</a:t>
             </a:r>
           </a:p>
         </p:txBody>
@@ -6553,7 +6783,7 @@
             <a:avLst/>
           </a:prstGeom>
           <a:solidFill>
-            <a:srgbClr val="007ACC"/>
+            <a:srgbClr val="CD191E"/>
           </a:solidFill>
           <a:ln>
             <a:noFill/>
@@ -6598,7 +6828,7 @@
             </a:avLst>
           </a:prstGeom>
           <a:solidFill>
-            <a:srgbClr val="007ACC"/>
+            <a:srgbClr val="2F9E41"/>
           </a:solidFill>
           <a:ln>
             <a:noFill/>
@@ -6687,13 +6917,13 @@
             <a:pPr algn="l">
               <a:defRPr sz="1600" b="1">
                 <a:solidFill>
-                  <a:srgbClr val="0D1B2A"/>
+                  <a:srgbClr val="1A6B2A"/>
                 </a:solidFill>
                 <a:latin typeface="Segoe UI"/>
               </a:defRPr>
             </a:pPr>
             <a:r>
-              <a:t>Explicabilidade + Autenticacao + Blockchain</a:t>
+              <a:t>Explicabilidade + Autenticação + Blockchain</a:t>
             </a:r>
           </a:p>
         </p:txBody>
@@ -6729,7 +6959,7 @@
               </a:defRPr>
             </a:pPr>
             <a:r>
-              <a:t>Nenhum trabalho revisado implementa explicabilidade de IA especificamente para decisoes de autenticacao com registro em blockchain.</a:t>
+              <a:t>Nenhum trabalho revisado implementa explicabilidade de IA especificamente para decisões de autenticação com registro em blockchain.</a:t>
             </a:r>
           </a:p>
         </p:txBody>
@@ -6751,7 +6981,7 @@
             </a:avLst>
           </a:prstGeom>
           <a:solidFill>
-            <a:srgbClr val="27AE60"/>
+            <a:srgbClr val="2F9E41"/>
           </a:solidFill>
           <a:ln>
             <a:noFill/>
@@ -6840,7 +7070,7 @@
             <a:pPr algn="l">
               <a:defRPr sz="1600" b="1">
                 <a:solidFill>
-                  <a:srgbClr val="0D1B2A"/>
+                  <a:srgbClr val="1A6B2A"/>
                 </a:solidFill>
                 <a:latin typeface="Segoe UI"/>
               </a:defRPr>
@@ -6882,7 +7112,7 @@
               </a:defRPr>
             </a:pPr>
             <a:r>
-              <a:t>A combinacao de Hyperledger Fabric (permissionada) e Ethereum (interoperavel) para auditoria de eventos de autenticacao nao foi encontrada.</a:t>
+              <a:t>A combinação de Hyperledger Fabric (permissionada) e Ethereum (interoperável) para auditoria de eventos de autenticação não foi encontrada.</a:t>
             </a:r>
           </a:p>
         </p:txBody>
@@ -6993,7 +7223,7 @@
             <a:pPr algn="l">
               <a:defRPr sz="1600" b="1">
                 <a:solidFill>
-                  <a:srgbClr val="0D1B2A"/>
+                  <a:srgbClr val="1A6B2A"/>
                 </a:solidFill>
                 <a:latin typeface="Segoe UI"/>
               </a:defRPr>
@@ -7035,7 +7265,7 @@
               </a:defRPr>
             </a:pPr>
             <a:r>
-              <a:t>A combinacao de deteccao de anomalias (IF), classificacao (RF) e aprendizado profundo (DL) com pesos configuraveis para autenticacao e contribuicao original.</a:t>
+              <a:t>A combinação de detecção de anomalias (IF), classificação (RF) e aprendizado profundo (DL) com pesos configuráveis para autenticação é contribuição original.</a:t>
             </a:r>
           </a:p>
         </p:txBody>
@@ -7057,7 +7287,7 @@
             </a:avLst>
           </a:prstGeom>
           <a:solidFill>
-            <a:srgbClr val="C0392B"/>
+            <a:srgbClr val="CD191E"/>
           </a:solidFill>
           <a:ln>
             <a:noFill/>
@@ -7146,13 +7376,13 @@
             <a:pPr algn="l">
               <a:defRPr sz="1600" b="1">
                 <a:solidFill>
-                  <a:srgbClr val="0D1B2A"/>
+                  <a:srgbClr val="1A6B2A"/>
                 </a:solidFill>
                 <a:latin typeface="Segoe UI"/>
               </a:defRPr>
             </a:pPr>
             <a:r>
-              <a:t>Resposta Escalonada em 4 Niveis</a:t>
+              <a:t>Resposta Escalonada em 4 Níveis</a:t>
             </a:r>
           </a:p>
         </p:txBody>
@@ -7188,7 +7418,7 @@
               </a:defRPr>
             </a:pPr>
             <a:r>
-              <a:t>A granularidade de resposta (permitir, MFA, MFA+alerta, bloquear) baseada em score continuo supera as abordagens binarias predominantes.</a:t>
+              <a:t>A granularidade de resposta (permitir, MFA, MFA+alerta, bloquear) baseada em score contínuo supera as abordagens binárias predominantes.</a:t>
             </a:r>
           </a:p>
         </p:txBody>
@@ -7234,7 +7464,7 @@
             <a:avLst/>
           </a:prstGeom>
           <a:solidFill>
-            <a:srgbClr val="0D1B2A"/>
+            <a:srgbClr val="1A6B2A"/>
           </a:solidFill>
           <a:ln>
             <a:noFill/>
@@ -7293,7 +7523,7 @@
               </a:defRPr>
             </a:pPr>
             <a:r>
-              <a:t>Referencias Bibliograficas</a:t>
+              <a:t>Referências Bibliográficas</a:t>
             </a:r>
           </a:p>
         </p:txBody>
@@ -7313,7 +7543,7 @@
             <a:avLst/>
           </a:prstGeom>
           <a:solidFill>
-            <a:srgbClr val="007ACC"/>
+            <a:srgbClr val="CD191E"/>
           </a:solidFill>
           <a:ln>
             <a:noFill/>
@@ -7618,7 +7848,7 @@
     <p:bg>
       <p:bgPr>
         <a:solidFill>
-          <a:srgbClr val="0D1B2A"/>
+          <a:srgbClr val="FFFFFF"/>
         </a:solidFill>
         <a:effectLst/>
       </p:bgPr>
@@ -7639,13 +7869,13 @@
         <p:spPr>
           <a:xfrm>
             <a:off x="0" y="0"/>
-            <a:ext cx="137160" cy="6858000"/>
+            <a:ext cx="12191695" cy="1097280"/>
           </a:xfrm>
           <a:prstGeom prst="rect">
             <a:avLst/>
           </a:prstGeom>
           <a:solidFill>
-            <a:srgbClr val="007ACC"/>
+            <a:srgbClr val="2F9E41"/>
           </a:solidFill>
           <a:ln>
             <a:noFill/>
@@ -7675,56 +7905,20 @@
       </p:sp>
       <p:sp>
         <p:nvSpPr>
-          <p:cNvPr id="3" name="TextBox 2"/>
-          <p:cNvSpPr txBox="1"/>
-          <p:nvPr/>
-        </p:nvSpPr>
-        <p:spPr>
-          <a:xfrm>
-            <a:off x="1371600" y="2286000"/>
-            <a:ext cx="9144000" cy="914400"/>
-          </a:xfrm>
-          <a:prstGeom prst="rect">
-            <a:avLst/>
-          </a:prstGeom>
-          <a:noFill/>
-        </p:spPr>
-        <p:txBody>
-          <a:bodyPr wrap="square">
-            <a:spAutoFit/>
-          </a:bodyPr>
-          <a:lstStyle/>
-          <a:p>
-            <a:pPr algn="ctr">
-              <a:defRPr sz="4400" b="1">
-                <a:solidFill>
-                  <a:srgbClr val="FFFFFF"/>
-                </a:solidFill>
-                <a:latin typeface="Segoe UI"/>
-              </a:defRPr>
-            </a:pPr>
-            <a:r>
-              <a:t>Obrigado!</a:t>
-            </a:r>
-          </a:p>
-        </p:txBody>
-      </p:sp>
-      <p:sp>
-        <p:nvSpPr>
-          <p:cNvPr id="4" name="Rectangle 3"/>
+          <p:cNvPr id="3" name="Rectangle 2"/>
           <p:cNvSpPr/>
           <p:nvPr/>
         </p:nvSpPr>
         <p:spPr>
           <a:xfrm>
-            <a:off x="5029200" y="3291840"/>
-            <a:ext cx="2103120" cy="36576"/>
+            <a:off x="0" y="1097280"/>
+            <a:ext cx="12191695" cy="73152"/>
           </a:xfrm>
           <a:prstGeom prst="rect">
             <a:avLst/>
           </a:prstGeom>
           <a:solidFill>
-            <a:srgbClr val="007ACC"/>
+            <a:srgbClr val="CD191E"/>
           </a:solidFill>
           <a:ln>
             <a:noFill/>
@@ -7754,14 +7948,14 @@
       </p:sp>
       <p:sp>
         <p:nvSpPr>
-          <p:cNvPr id="5" name="TextBox 4"/>
+          <p:cNvPr id="4" name="TextBox 3"/>
           <p:cNvSpPr txBox="1"/>
           <p:nvPr/>
         </p:nvSpPr>
         <p:spPr>
           <a:xfrm>
-            <a:off x="1371600" y="3657600"/>
-            <a:ext cx="9144000" cy="548640"/>
+            <a:off x="1371600" y="320040"/>
+            <a:ext cx="9144000" cy="457200"/>
           </a:xfrm>
           <a:prstGeom prst="rect">
             <a:avLst/>
@@ -7775,29 +7969,29 @@
           <a:lstStyle/>
           <a:p>
             <a:pPr algn="ctr">
-              <a:defRPr sz="1800" b="0">
-                <a:solidFill>
-                  <a:srgbClr val="AACCEE"/>
+              <a:defRPr sz="1800" b="1">
+                <a:solidFill>
+                  <a:srgbClr val="FFFFFF"/>
                 </a:solidFill>
                 <a:latin typeface="Segoe UI"/>
               </a:defRPr>
             </a:pPr>
             <a:r>
-              <a:t>Sistema Autonomo de Autenticacao Inteligente</a:t>
-            </a:r>
-          </a:p>
-        </p:txBody>
-      </p:sp>
-      <p:sp>
-        <p:nvSpPr>
-          <p:cNvPr id="6" name="TextBox 5"/>
+              <a:t>IFBA - Instituto Federal da Bahia</a:t>
+            </a:r>
+          </a:p>
+        </p:txBody>
+      </p:sp>
+      <p:sp>
+        <p:nvSpPr>
+          <p:cNvPr id="5" name="TextBox 4"/>
           <p:cNvSpPr txBox="1"/>
           <p:nvPr/>
         </p:nvSpPr>
         <p:spPr>
           <a:xfrm>
-            <a:off x="1371600" y="4206240"/>
-            <a:ext cx="9144000" cy="457200"/>
+            <a:off x="1371600" y="2286000"/>
+            <a:ext cx="9144000" cy="914400"/>
           </a:xfrm>
           <a:prstGeom prst="rect">
             <a:avLst/>
@@ -7811,9 +8005,124 @@
           <a:lstStyle/>
           <a:p>
             <a:pPr algn="ctr">
+              <a:defRPr sz="4800" b="1">
+                <a:solidFill>
+                  <a:srgbClr val="1A6B2A"/>
+                </a:solidFill>
+                <a:latin typeface="Segoe UI"/>
+              </a:defRPr>
+            </a:pPr>
+            <a:r>
+              <a:t>Obrigado!</a:t>
+            </a:r>
+          </a:p>
+        </p:txBody>
+      </p:sp>
+      <p:sp>
+        <p:nvSpPr>
+          <p:cNvPr id="6" name="Rectangle 5"/>
+          <p:cNvSpPr/>
+          <p:nvPr/>
+        </p:nvSpPr>
+        <p:spPr>
+          <a:xfrm>
+            <a:off x="4572000" y="3291840"/>
+            <a:ext cx="3017520" cy="36576"/>
+          </a:xfrm>
+          <a:prstGeom prst="rect">
+            <a:avLst/>
+          </a:prstGeom>
+          <a:solidFill>
+            <a:srgbClr val="2F9E41"/>
+          </a:solidFill>
+          <a:ln>
+            <a:noFill/>
+          </a:ln>
+        </p:spPr>
+        <p:style>
+          <a:lnRef idx="1">
+            <a:schemeClr val="accent1"/>
+          </a:lnRef>
+          <a:fillRef idx="3">
+            <a:schemeClr val="accent1"/>
+          </a:fillRef>
+          <a:effectRef idx="2">
+            <a:schemeClr val="accent1"/>
+          </a:effectRef>
+          <a:fontRef idx="minor">
+            <a:schemeClr val="lt1"/>
+          </a:fontRef>
+        </p:style>
+        <p:txBody>
+          <a:bodyPr rtlCol="0" anchor="ctr"/>
+          <a:lstStyle/>
+          <a:p>
+            <a:pPr algn="ctr"/>
+          </a:p>
+        </p:txBody>
+      </p:sp>
+      <p:sp>
+        <p:nvSpPr>
+          <p:cNvPr id="7" name="TextBox 6"/>
+          <p:cNvSpPr txBox="1"/>
+          <p:nvPr/>
+        </p:nvSpPr>
+        <p:spPr>
+          <a:xfrm>
+            <a:off x="1371600" y="3657600"/>
+            <a:ext cx="9144000" cy="548640"/>
+          </a:xfrm>
+          <a:prstGeom prst="rect">
+            <a:avLst/>
+          </a:prstGeom>
+          <a:noFill/>
+        </p:spPr>
+        <p:txBody>
+          <a:bodyPr wrap="square">
+            <a:spAutoFit/>
+          </a:bodyPr>
+          <a:lstStyle/>
+          <a:p>
+            <a:pPr algn="ctr">
+              <a:defRPr sz="1800" b="1">
+                <a:solidFill>
+                  <a:srgbClr val="1A6B2A"/>
+                </a:solidFill>
+                <a:latin typeface="Segoe UI"/>
+              </a:defRPr>
+            </a:pPr>
+            <a:r>
+              <a:t>Sistema Autônomo de Autenticação Inteligente</a:t>
+            </a:r>
+          </a:p>
+        </p:txBody>
+      </p:sp>
+      <p:sp>
+        <p:nvSpPr>
+          <p:cNvPr id="8" name="TextBox 7"/>
+          <p:cNvSpPr txBox="1"/>
+          <p:nvPr/>
+        </p:nvSpPr>
+        <p:spPr>
+          <a:xfrm>
+            <a:off x="1371600" y="4206240"/>
+            <a:ext cx="9144000" cy="457200"/>
+          </a:xfrm>
+          <a:prstGeom prst="rect">
+            <a:avLst/>
+          </a:prstGeom>
+          <a:noFill/>
+        </p:spPr>
+        <p:txBody>
+          <a:bodyPr wrap="square">
+            <a:spAutoFit/>
+          </a:bodyPr>
+          <a:lstStyle/>
+          <a:p>
+            <a:pPr algn="ctr">
               <a:defRPr sz="1400" b="0">
                 <a:solidFill>
-                  <a:srgbClr val="88AACC"/>
+                  <a:srgbClr val="4A4A4A"/>
                 </a:solidFill>
                 <a:latin typeface="Segoe UI"/>
               </a:defRPr>
@@ -7821,6 +8130,92 @@
             <a:r>
               <a:t>Trabalhos Relacionados e Estado da Arte</a:t>
             </a:r>
+          </a:p>
+        </p:txBody>
+      </p:sp>
+      <p:sp>
+        <p:nvSpPr>
+          <p:cNvPr id="9" name="Rectangle 8"/>
+          <p:cNvSpPr/>
+          <p:nvPr/>
+        </p:nvSpPr>
+        <p:spPr>
+          <a:xfrm>
+            <a:off x="0" y="6217920"/>
+            <a:ext cx="12191695" cy="73152"/>
+          </a:xfrm>
+          <a:prstGeom prst="rect">
+            <a:avLst/>
+          </a:prstGeom>
+          <a:solidFill>
+            <a:srgbClr val="CD191E"/>
+          </a:solidFill>
+          <a:ln>
+            <a:noFill/>
+          </a:ln>
+        </p:spPr>
+        <p:style>
+          <a:lnRef idx="1">
+            <a:schemeClr val="accent1"/>
+          </a:lnRef>
+          <a:fillRef idx="3">
+            <a:schemeClr val="accent1"/>
+          </a:fillRef>
+          <a:effectRef idx="2">
+            <a:schemeClr val="accent1"/>
+          </a:effectRef>
+          <a:fontRef idx="minor">
+            <a:schemeClr val="lt1"/>
+          </a:fontRef>
+        </p:style>
+        <p:txBody>
+          <a:bodyPr rtlCol="0" anchor="ctr"/>
+          <a:lstStyle/>
+          <a:p>
+            <a:pPr algn="ctr"/>
+          </a:p>
+        </p:txBody>
+      </p:sp>
+      <p:sp>
+        <p:nvSpPr>
+          <p:cNvPr id="10" name="Rectangle 9"/>
+          <p:cNvSpPr/>
+          <p:nvPr/>
+        </p:nvSpPr>
+        <p:spPr>
+          <a:xfrm>
+            <a:off x="0" y="6291072"/>
+            <a:ext cx="12191695" cy="566928"/>
+          </a:xfrm>
+          <a:prstGeom prst="rect">
+            <a:avLst/>
+          </a:prstGeom>
+          <a:solidFill>
+            <a:srgbClr val="2F9E41"/>
+          </a:solidFill>
+          <a:ln>
+            <a:noFill/>
+          </a:ln>
+        </p:spPr>
+        <p:style>
+          <a:lnRef idx="1">
+            <a:schemeClr val="accent1"/>
+          </a:lnRef>
+          <a:fillRef idx="3">
+            <a:schemeClr val="accent1"/>
+          </a:fillRef>
+          <a:effectRef idx="2">
+            <a:schemeClr val="accent1"/>
+          </a:effectRef>
+          <a:fontRef idx="minor">
+            <a:schemeClr val="lt1"/>
+          </a:fontRef>
+        </p:style>
+        <p:txBody>
+          <a:bodyPr rtlCol="0" anchor="ctr"/>
+          <a:lstStyle/>
+          <a:p>
+            <a:pPr algn="ctr"/>
           </a:p>
         </p:txBody>
       </p:sp>
@@ -7865,7 +8260,7 @@
             <a:avLst/>
           </a:prstGeom>
           <a:solidFill>
-            <a:srgbClr val="0D1B2A"/>
+            <a:srgbClr val="1A6B2A"/>
           </a:solidFill>
           <a:ln>
             <a:noFill/>
@@ -7944,7 +8339,7 @@
             <a:avLst/>
           </a:prstGeom>
           <a:solidFill>
-            <a:srgbClr val="007ACC"/>
+            <a:srgbClr val="CD191E"/>
           </a:solidFill>
           <a:ln>
             <a:noFill/>
@@ -7989,7 +8384,7 @@
             </a:avLst>
           </a:prstGeom>
           <a:solidFill>
-            <a:srgbClr val="007ACC"/>
+            <a:srgbClr val="2F9E41"/>
           </a:solidFill>
           <a:ln>
             <a:noFill/>
@@ -8084,7 +8479,7 @@
               </a:defRPr>
             </a:pPr>
             <a:r>
-              <a:t>Contexto e Objetivo da Revisao</a:t>
+              <a:t>Contexto e Objetivo da Revisão</a:t>
             </a:r>
           </a:p>
         </p:txBody>
@@ -8106,7 +8501,7 @@
             </a:avLst>
           </a:prstGeom>
           <a:solidFill>
-            <a:srgbClr val="007ACC"/>
+            <a:srgbClr val="2F9E41"/>
           </a:solidFill>
           <a:ln>
             <a:noFill/>
@@ -8223,7 +8618,7 @@
             </a:avLst>
           </a:prstGeom>
           <a:solidFill>
-            <a:srgbClr val="007ACC"/>
+            <a:srgbClr val="2F9E41"/>
           </a:solidFill>
           <a:ln>
             <a:noFill/>
@@ -8340,7 +8735,7 @@
             </a:avLst>
           </a:prstGeom>
           <a:solidFill>
-            <a:srgbClr val="007ACC"/>
+            <a:srgbClr val="2F9E41"/>
           </a:solidFill>
           <a:ln>
             <a:noFill/>
@@ -8435,7 +8830,7 @@
               </a:defRPr>
             </a:pPr>
             <a:r>
-              <a:t>Trabalhos Academicos (12 estudos)</a:t>
+              <a:t>Trabalhos Acadêmicos (12 estudos)</a:t>
             </a:r>
           </a:p>
         </p:txBody>
@@ -8457,7 +8852,7 @@
             </a:avLst>
           </a:prstGeom>
           <a:solidFill>
-            <a:srgbClr val="007ACC"/>
+            <a:srgbClr val="2F9E41"/>
           </a:solidFill>
           <a:ln>
             <a:noFill/>
@@ -8552,7 +8947,7 @@
               </a:defRPr>
             </a:pPr>
             <a:r>
-              <a:t>Solucoes da Industria</a:t>
+              <a:t>Soluções da Indústria</a:t>
             </a:r>
           </a:p>
         </p:txBody>
@@ -8574,7 +8969,7 @@
             </a:avLst>
           </a:prstGeom>
           <a:solidFill>
-            <a:srgbClr val="007ACC"/>
+            <a:srgbClr val="2F9E41"/>
           </a:solidFill>
           <a:ln>
             <a:noFill/>
@@ -8669,7 +9064,7 @@
               </a:defRPr>
             </a:pPr>
             <a:r>
-              <a:t>Sintese Comparativa e Diferenciais</a:t>
+              <a:t>Síntese Comparativa e Diferenciais</a:t>
             </a:r>
           </a:p>
         </p:txBody>
@@ -8691,7 +9086,7 @@
             </a:avLst>
           </a:prstGeom>
           <a:solidFill>
-            <a:srgbClr val="007ACC"/>
+            <a:srgbClr val="2F9E41"/>
           </a:solidFill>
           <a:ln>
             <a:noFill/>
@@ -8832,7 +9227,7 @@
             <a:avLst/>
           </a:prstGeom>
           <a:solidFill>
-            <a:srgbClr val="0D1B2A"/>
+            <a:srgbClr val="1A6B2A"/>
           </a:solidFill>
           <a:ln>
             <a:noFill/>
@@ -8891,7 +9286,7 @@
               </a:defRPr>
             </a:pPr>
             <a:r>
-              <a:t>Contexto e Objetivo da Revisao</a:t>
+              <a:t>Contexto e Objetivo da Revisão</a:t>
             </a:r>
           </a:p>
         </p:txBody>
@@ -8911,7 +9306,7 @@
             <a:avLst/>
           </a:prstGeom>
           <a:solidFill>
-            <a:srgbClr val="007ACC"/>
+            <a:srgbClr val="CD191E"/>
           </a:solidFill>
           <a:ln>
             <a:noFill/>
@@ -8970,7 +9365,7 @@
               </a:defRPr>
             </a:pPr>
             <a:r>
-              <a:t>O sistema proposto integra multiplas tecnologias em uma plataforma unica de autenticacao inteligente. Esta revisao identifica e compara trabalhos da literatura academica e da industria que abordam, de forma isolada ou parcial, os mesmos eixos tematicos.</a:t>
+              <a:t>O sistema proposto integra múltiplas tecnologias em uma plataforma única de autenticação inteligente. Esta revisão identifica e compara trabalhos da literatura acadêmica e da indústria que abordam, de forma isolada ou parcial, os mesmos eixos temáticos.</a:t>
             </a:r>
           </a:p>
         </p:txBody>
@@ -9045,7 +9440,7 @@
             <a:pPr algn="l">
               <a:defRPr sz="1400" b="1">
                 <a:solidFill>
-                  <a:srgbClr val="007ACC"/>
+                  <a:srgbClr val="2F9E41"/>
                 </a:solidFill>
                 <a:latin typeface="Segoe UI"/>
               </a:defRPr>
@@ -9213,7 +9608,7 @@
             <a:pPr algn="l">
               <a:defRPr sz="1400" b="1">
                 <a:solidFill>
-                  <a:srgbClr val="27AE60"/>
+                  <a:srgbClr val="2F9E41"/>
                 </a:solidFill>
                 <a:latin typeface="Segoe UI"/>
               </a:defRPr>
@@ -9258,7 +9653,7 @@
               </a:defRPr>
             </a:pPr>
             <a:r>
-              <a:t>• Dinamica de digitacao</a:t>
+              <a:t>• Dinâmica de digitação</a:t>
             </a:r>
           </a:p>
           <a:p>
@@ -9274,7 +9669,7 @@
               </a:defRPr>
             </a:pPr>
             <a:r>
-              <a:t>• Geolocalizacao por IP</a:t>
+              <a:t>• Geolocalização por IP</a:t>
             </a:r>
           </a:p>
           <a:p>
@@ -9290,7 +9685,7 @@
               </a:defRPr>
             </a:pPr>
             <a:r>
-              <a:t>• Analise de sessao</a:t>
+              <a:t>• Análise de sessão</a:t>
             </a:r>
           </a:p>
           <a:p>
@@ -9458,7 +9853,7 @@
               </a:defRPr>
             </a:pPr>
             <a:r>
-              <a:t>• Auditoria imutavel</a:t>
+              <a:t>• Auditoria imutável</a:t>
             </a:r>
           </a:p>
           <a:p>
@@ -9520,7 +9915,7 @@
             <a:avLst/>
           </a:prstGeom>
           <a:solidFill>
-            <a:srgbClr val="0D1B2A"/>
+            <a:srgbClr val="1A6B2A"/>
           </a:solidFill>
           <a:ln>
             <a:noFill/>
@@ -9609,13 +10004,13 @@
             <a:pPr algn="l">
               <a:defRPr sz="1400" b="0">
                 <a:solidFill>
-                  <a:srgbClr val="AACCEE"/>
+                  <a:srgbClr val="B0E0B0"/>
                 </a:solidFill>
                 <a:latin typeface="Segoe UI"/>
               </a:defRPr>
             </a:pPr>
             <a:r>
-              <a:t>Trabalhos Academicos (1/2)</a:t>
+              <a:t>Trabalhos Acadêmicos (1/2)</a:t>
             </a:r>
           </a:p>
         </p:txBody>
@@ -9635,7 +10030,7 @@
             <a:avLst/>
           </a:prstGeom>
           <a:solidFill>
-            <a:srgbClr val="007ACC"/>
+            <a:srgbClr val="CD191E"/>
           </a:solidFill>
           <a:ln>
             <a:noFill/>
@@ -9709,7 +10104,7 @@
                   </a:txBody>
                   <a:tcPr>
                     <a:solidFill>
-                      <a:srgbClr val="0D1B2A"/>
+                      <a:srgbClr val="1A6B2A"/>
                     </a:solidFill>
                   </a:tcPr>
                 </a:tc>
@@ -9733,7 +10128,7 @@
                   </a:txBody>
                   <a:tcPr>
                     <a:solidFill>
-                      <a:srgbClr val="0D1B2A"/>
+                      <a:srgbClr val="1A6B2A"/>
                     </a:solidFill>
                   </a:tcPr>
                 </a:tc>
@@ -9757,7 +10152,7 @@
                   </a:txBody>
                   <a:tcPr>
                     <a:solidFill>
-                      <a:srgbClr val="0D1B2A"/>
+                      <a:srgbClr val="1A6B2A"/>
                     </a:solidFill>
                   </a:tcPr>
                 </a:tc>
@@ -9781,7 +10176,7 @@
                   </a:txBody>
                   <a:tcPr>
                     <a:solidFill>
-                      <a:srgbClr val="0D1B2A"/>
+                      <a:srgbClr val="1A6B2A"/>
                     </a:solidFill>
                   </a:tcPr>
                 </a:tc>
@@ -9799,13 +10194,13 @@
                         </a:defRPr>
                       </a:pPr>
                       <a:r>
-                        <a:t>Metricas</a:t>
+                        <a:t>Métricas</a:t>
                       </a:r>
                     </a:p>
                   </a:txBody>
                   <a:tcPr>
                     <a:solidFill>
-                      <a:srgbClr val="0D1B2A"/>
+                      <a:srgbClr val="1A6B2A"/>
                     </a:solidFill>
                   </a:tcPr>
                 </a:tc>
@@ -9873,7 +10268,7 @@
                         </a:defRPr>
                       </a:pPr>
                       <a:r>
-                        <a:t>Mapear estado da arte em autenticacao biometrica adaptativa</a:t>
+                        <a:t>Mapear estado da arte em autenticação biométrica adaptativa</a:t>
                       </a:r>
                     </a:p>
                   </a:txBody>
@@ -9897,7 +10292,7 @@
                         </a:defRPr>
                       </a:pPr>
                       <a:r>
-                        <a:t>Revisao de 80+ trabalhos</a:t>
+                        <a:t>Revisão de 80+ trabalhos</a:t>
                       </a:r>
                     </a:p>
                   </a:txBody>
@@ -10117,7 +10512,7 @@
                         </a:defRPr>
                       </a:pPr>
                       <a:r>
-                        <a:t>Autenticacao continua em dispositivos moveis</a:t>
+                        <a:t>Autenticação contínua em dispositivos móveis</a:t>
                       </a:r>
                     </a:p>
                   </a:txBody>
@@ -10165,7 +10560,7 @@
                         </a:defRPr>
                       </a:pPr>
                       <a:r>
-                        <a:t>Acuracia, EER, F1</a:t>
+                        <a:t>Acurácia, EER, F1</a:t>
                       </a:r>
                     </a:p>
                   </a:txBody>
@@ -10239,7 +10634,7 @@
                         </a:defRPr>
                       </a:pPr>
                       <a:r>
-                        <a:t>Autenticacao por padroes de digitacao</a:t>
+                        <a:t>Autenticação por padrões de digitação</a:t>
                       </a:r>
                     </a:p>
                   </a:txBody>
@@ -10361,7 +10756,7 @@
                         </a:defRPr>
                       </a:pPr>
                       <a:r>
-                        <a:t>Auditoria imutavel com blockchain</a:t>
+                        <a:t>Auditoria imutável com blockchain</a:t>
                       </a:r>
                     </a:p>
                   </a:txBody>
@@ -10409,7 +10804,7 @@
                         </a:defRPr>
                       </a:pPr>
                       <a:r>
-                        <a:t>Throughput, latencia</a:t>
+                        <a:t>Throughput, latência</a:t>
                       </a:r>
                     </a:p>
                   </a:txBody>
@@ -10483,7 +10878,7 @@
                         </a:defRPr>
                       </a:pPr>
                       <a:r>
-                        <a:t>Logs imutaveis com privacidade</a:t>
+                        <a:t>Logs imutáveis com privacidade</a:t>
                       </a:r>
                     </a:p>
                   </a:txBody>
@@ -10531,7 +10926,7 @@
                         </a:defRPr>
                       </a:pPr>
                       <a:r>
-                        <a:t>Latencia, overhead</a:t>
+                        <a:t>Latência, overhead</a:t>
                       </a:r>
                     </a:p>
                   </a:txBody>
@@ -10605,7 +11000,7 @@
                         </a:defRPr>
                       </a:pPr>
                       <a:r>
-                        <a:t>IAM com blockchain para saude</a:t>
+                        <a:t>IAM com blockchain para saúde</a:t>
                       </a:r>
                     </a:p>
                   </a:txBody>
@@ -10629,7 +11024,7 @@
                         </a:defRPr>
                       </a:pPr>
                       <a:r>
-                        <a:t>Prototipo Hyperledger</a:t>
+                        <a:t>Protótipo Hyperledger</a:t>
                       </a:r>
                     </a:p>
                   </a:txBody>
@@ -10653,7 +11048,7 @@
                         </a:defRPr>
                       </a:pPr>
                       <a:r>
-                        <a:t>Escalabilidade, seguranca</a:t>
+                        <a:t>Escalabilidade, segurança</a:t>
                       </a:r>
                     </a:p>
                   </a:txBody>
@@ -10709,7 +11104,7 @@
             <a:avLst/>
           </a:prstGeom>
           <a:solidFill>
-            <a:srgbClr val="0D1B2A"/>
+            <a:srgbClr val="1A6B2A"/>
           </a:solidFill>
           <a:ln>
             <a:noFill/>
@@ -10798,13 +11193,13 @@
             <a:pPr algn="l">
               <a:defRPr sz="1400" b="0">
                 <a:solidFill>
-                  <a:srgbClr val="AACCEE"/>
+                  <a:srgbClr val="B0E0B0"/>
                 </a:solidFill>
                 <a:latin typeface="Segoe UI"/>
               </a:defRPr>
             </a:pPr>
             <a:r>
-              <a:t>Trabalhos Academicos (2/2) + Industria</a:t>
+              <a:t>Trabalhos Acadêmicos (2/2) + Indústria</a:t>
             </a:r>
           </a:p>
         </p:txBody>
@@ -10824,7 +11219,7 @@
             <a:avLst/>
           </a:prstGeom>
           <a:solidFill>
-            <a:srgbClr val="007ACC"/>
+            <a:srgbClr val="CD191E"/>
           </a:solidFill>
           <a:ln>
             <a:noFill/>
@@ -10898,7 +11293,7 @@
                   </a:txBody>
                   <a:tcPr>
                     <a:solidFill>
-                      <a:srgbClr val="0D1B2A"/>
+                      <a:srgbClr val="1A6B2A"/>
                     </a:solidFill>
                   </a:tcPr>
                 </a:tc>
@@ -10922,7 +11317,7 @@
                   </a:txBody>
                   <a:tcPr>
                     <a:solidFill>
-                      <a:srgbClr val="0D1B2A"/>
+                      <a:srgbClr val="1A6B2A"/>
                     </a:solidFill>
                   </a:tcPr>
                 </a:tc>
@@ -10946,7 +11341,7 @@
                   </a:txBody>
                   <a:tcPr>
                     <a:solidFill>
-                      <a:srgbClr val="0D1B2A"/>
+                      <a:srgbClr val="1A6B2A"/>
                     </a:solidFill>
                   </a:tcPr>
                 </a:tc>
@@ -10970,7 +11365,7 @@
                   </a:txBody>
                   <a:tcPr>
                     <a:solidFill>
-                      <a:srgbClr val="0D1B2A"/>
+                      <a:srgbClr val="1A6B2A"/>
                     </a:solidFill>
                   </a:tcPr>
                 </a:tc>
@@ -10988,13 +11383,13 @@
                         </a:defRPr>
                       </a:pPr>
                       <a:r>
-                        <a:t>Metricas</a:t>
+                        <a:t>Métricas</a:t>
                       </a:r>
                     </a:p>
                   </a:txBody>
                   <a:tcPr>
                     <a:solidFill>
-                      <a:srgbClr val="0D1B2A"/>
+                      <a:srgbClr val="1A6B2A"/>
                     </a:solidFill>
                   </a:tcPr>
                 </a:tc>
@@ -11062,7 +11457,7 @@
                         </a:defRPr>
                       </a:pPr>
                       <a:r>
-                        <a:t>Classificar logins por nivel de risco</a:t>
+                        <a:t>Classificar logins por nível de risco</a:t>
                       </a:r>
                     </a:p>
                   </a:txBody>
@@ -11110,7 +11505,7 @@
                         </a:defRPr>
                       </a:pPr>
                       <a:r>
-                        <a:t>Acuracia, precisao, recall</a:t>
+                        <a:t>Acurácia, precisão, recall</a:t>
                       </a:r>
                     </a:p>
                   </a:txBody>
@@ -11184,7 +11579,7 @@
                         </a:defRPr>
                       </a:pPr>
                       <a:r>
-                        <a:t>Score de confianca dinamico passwordless</a:t>
+                        <a:t>Score de confiança dinâmico passwordless</a:t>
                       </a:r>
                     </a:p>
                   </a:txBody>
@@ -11208,7 +11603,7 @@
                         </a:defRPr>
                       </a:pPr>
                       <a:r>
-                        <a:t>Avaliacao em moveis/wearables</a:t>
+                        <a:t>Avaliação em móveis/wearables</a:t>
                       </a:r>
                     </a:p>
                   </a:txBody>
@@ -11306,7 +11701,7 @@
                         </a:defRPr>
                       </a:pPr>
                       <a:r>
-                        <a:t>Decisoes adaptativas com RL</a:t>
+                        <a:t>Decisões adaptativas com RL</a:t>
                       </a:r>
                     </a:p>
                   </a:txBody>
@@ -11354,7 +11749,7 @@
                         </a:defRPr>
                       </a:pPr>
                       <a:r>
-                        <a:t>Reducao falsos positivos</a:t>
+                        <a:t>Redução falsos positivos</a:t>
                       </a:r>
                     </a:p>
                   </a:txBody>
@@ -11428,7 +11823,7 @@
                         </a:defRPr>
                       </a:pPr>
                       <a:r>
-                        <a:t>Explicabilidade em sistemas de seguranca</a:t>
+                        <a:t>Explicabilidade em sistemas de segurança</a:t>
                       </a:r>
                     </a:p>
                   </a:txBody>
@@ -11452,7 +11847,7 @@
                         </a:defRPr>
                       </a:pPr>
                       <a:r>
-                        <a:t>Analise SHAP/LIME em IDS</a:t>
+                        <a:t>Análise SHAP/LIME em IDS</a:t>
                       </a:r>
                     </a:p>
                   </a:txBody>
@@ -11550,7 +11945,7 @@
                         </a:defRPr>
                       </a:pPr>
                       <a:r>
-                        <a:t>Deteccao de deriva comportamental</a:t>
+                        <a:t>Detecção de deriva comportamental</a:t>
                       </a:r>
                     </a:p>
                   </a:txBody>
@@ -11598,7 +11993,7 @@
                         </a:defRPr>
                       </a:pPr>
                       <a:r>
-                        <a:t>Acuracia de deteccao</a:t>
+                        <a:t>Acurácia de detecção</a:t>
                       </a:r>
                     </a:p>
                   </a:txBody>
@@ -11624,7 +12019,7 @@
                         </a:defRPr>
                       </a:pPr>
                       <a:r>
-                        <a:t>IBM Trusteer (Industria)</a:t>
+                        <a:t>IBM Trusteer (Indústria)</a:t>
                       </a:r>
                     </a:p>
                   </a:txBody>
@@ -11672,7 +12067,7 @@
                         </a:defRPr>
                       </a:pPr>
                       <a:r>
-                        <a:t>Prevencao de fraude com biometria IA</a:t>
+                        <a:t>Prevenção de fraude com biometria IA</a:t>
                       </a:r>
                     </a:p>
                   </a:txBody>
@@ -11696,7 +12091,7 @@
                         </a:defRPr>
                       </a:pPr>
                       <a:r>
-                        <a:t>Producao em inst. financeiras</a:t>
+                        <a:t>Produção em inst. financeiras</a:t>
                       </a:r>
                     </a:p>
                   </a:txBody>
@@ -11720,7 +12115,7 @@
                         </a:defRPr>
                       </a:pPr>
                       <a:r>
-                        <a:t>Proprietario (nao publicado)</a:t>
+                        <a:t>Proprietário (não publicado)</a:t>
                       </a:r>
                     </a:p>
                   </a:txBody>
@@ -11746,7 +12141,7 @@
                         </a:defRPr>
                       </a:pPr>
                       <a:r>
-                        <a:t>BioCatch (Industria)</a:t>
+                        <a:t>BioCatch (Indústria)</a:t>
                       </a:r>
                     </a:p>
                   </a:txBody>
@@ -11818,7 +12213,7 @@
                         </a:defRPr>
                       </a:pPr>
                       <a:r>
-                        <a:t>Producao em bancos/fintechs</a:t>
+                        <a:t>Produção em bancos/fintechs</a:t>
                       </a:r>
                     </a:p>
                   </a:txBody>
@@ -11842,7 +12237,7 @@
                         </a:defRPr>
                       </a:pPr>
                       <a:r>
-                        <a:t>Proprietario (nao publicado)</a:t>
+                        <a:t>Proprietário (não publicado)</a:t>
                       </a:r>
                     </a:p>
                   </a:txBody>
@@ -11898,7 +12293,7 @@
             <a:avLst/>
           </a:prstGeom>
           <a:solidFill>
-            <a:srgbClr val="0D1B2A"/>
+            <a:srgbClr val="1A6B2A"/>
           </a:solidFill>
           <a:ln>
             <a:noFill/>
@@ -11987,7 +12382,7 @@
             <a:pPr algn="l">
               <a:defRPr sz="1400" b="0">
                 <a:solidFill>
-                  <a:srgbClr val="AACCEE"/>
+                  <a:srgbClr val="B0E0B0"/>
                 </a:solidFill>
                 <a:latin typeface="Segoe UI"/>
               </a:defRPr>
@@ -12013,7 +12408,7 @@
             <a:avLst/>
           </a:prstGeom>
           <a:solidFill>
-            <a:srgbClr val="007ACC"/>
+            <a:srgbClr val="CD191E"/>
           </a:solidFill>
           <a:ln>
             <a:noFill/>
@@ -12111,7 +12506,7 @@
             <a:pPr algn="l">
               <a:defRPr sz="1600" b="1">
                 <a:solidFill>
-                  <a:srgbClr val="007ACC"/>
+                  <a:srgbClr val="2F9E41"/>
                 </a:solidFill>
                 <a:latin typeface="Segoe UI"/>
               </a:defRPr>
@@ -12204,7 +12599,7 @@
               </a:defRPr>
             </a:pPr>
             <a:r>
-              <a:t>• Termos: autenticacao adaptativa, login inteligente, biometria comportamental</a:t>
+              <a:t>• Termos: autenticação adaptativa, login inteligente, biometria comportamental</a:t>
             </a:r>
           </a:p>
         </p:txBody>
@@ -12279,7 +12674,7 @@
             <a:pPr algn="l">
               <a:defRPr sz="1600" b="1">
                 <a:solidFill>
-                  <a:srgbClr val="007ACC"/>
+                  <a:srgbClr val="2F9E41"/>
                 </a:solidFill>
                 <a:latin typeface="Segoe UI"/>
               </a:defRPr>
@@ -12324,7 +12719,7 @@
               </a:defRPr>
             </a:pPr>
             <a:r>
-              <a:t>• Consulta publica sobre patentes de IA</a:t>
+              <a:t>• Consulta pública sobre patentes de IA</a:t>
             </a:r>
           </a:p>
           <a:p>
@@ -12340,7 +12735,7 @@
               </a:defRPr>
             </a:pPr>
             <a:r>
-              <a:t>• Categorias: modelos de IA, invencoes baseadas em IA, invencoes assistidas por IA</a:t>
+              <a:t>• Categorias: modelos de IA, invenções baseadas em IA, invenções assistidas por IA</a:t>
             </a:r>
           </a:p>
           <a:p>
@@ -12356,7 +12751,7 @@
               </a:defRPr>
             </a:pPr>
             <a:r>
-              <a:t>• Amadurecimento regulatorio para protecao futura</a:t>
+              <a:t>• Amadurecimento regulatório para proteção futura</a:t>
             </a:r>
           </a:p>
         </p:txBody>
@@ -12431,13 +12826,13 @@
             <a:pPr algn="l">
               <a:defRPr sz="1600" b="1">
                 <a:solidFill>
-                  <a:srgbClr val="27AE60"/>
+                  <a:srgbClr val="2F9E41"/>
                 </a:solidFill>
                 <a:latin typeface="Segoe UI"/>
               </a:defRPr>
             </a:pPr>
             <a:r>
-              <a:t>Relacao com a Proposta</a:t>
+              <a:t>Relação com a Proposta</a:t>
             </a:r>
           </a:p>
         </p:txBody>
@@ -12473,7 +12868,7 @@
               </a:defRPr>
             </a:pPr>
             <a:r>
-              <a:t>A ausencia de patentes no INPI que integrem autenticacao adaptativa com ML, biometria comportamental, blockchain e explicabilidade de IA evidencia o carater inovador da proposta. O sistema se posiciona em uma lacuna de propriedade intelectual no cenario brasileiro, combinando elementos que, individualmente, ja possuem registro, mas que em conjunto representam uma contribuicao original.</a:t>
+              <a:t>A ausência de patentes no INPI que integrem autenticação adaptativa com ML, biometria comportamental, blockchain e explicabilidade de IA evidencia o caráter inovador da proposta. O sistema se posiciona em uma lacuna de propriedade intelectual no cenário brasileiro, combinando elementos que, individualmente, já possuem registro, mas que em conjunto representam uma contribuição original.</a:t>
             </a:r>
           </a:p>
         </p:txBody>
@@ -12519,7 +12914,7 @@
             <a:avLst/>
           </a:prstGeom>
           <a:solidFill>
-            <a:srgbClr val="0D1B2A"/>
+            <a:srgbClr val="1A6B2A"/>
           </a:solidFill>
           <a:ln>
             <a:noFill/>
@@ -12608,13 +13003,13 @@
             <a:pPr algn="l">
               <a:defRPr sz="1400" b="0">
                 <a:solidFill>
-                  <a:srgbClr val="AACCEE"/>
+                  <a:srgbClr val="B0E0B0"/>
                 </a:solidFill>
                 <a:latin typeface="Segoe UI"/>
               </a:defRPr>
             </a:pPr>
             <a:r>
-              <a:t>ScienceDirect, 2023 - Revisao Sistematica</a:t>
+              <a:t>ScienceDirect, 2023 - Revisão Sistemática</a:t>
             </a:r>
           </a:p>
         </p:txBody>
@@ -12634,7 +13029,7 @@
             <a:avLst/>
           </a:prstGeom>
           <a:solidFill>
-            <a:srgbClr val="007ACC"/>
+            <a:srgbClr val="CD191E"/>
           </a:solidFill>
           <a:ln>
             <a:noFill/>
@@ -12732,13 +13127,13 @@
             <a:pPr algn="l">
               <a:defRPr sz="1400" b="1">
                 <a:solidFill>
-                  <a:srgbClr val="007ACC"/>
+                  <a:srgbClr val="2F9E41"/>
                 </a:solidFill>
                 <a:latin typeface="Segoe UI"/>
               </a:defRPr>
             </a:pPr>
             <a:r>
-              <a:t>Descricao do Trabalho</a:t>
+              <a:t>Descrição do Trabalho</a:t>
             </a:r>
           </a:p>
         </p:txBody>
@@ -12774,7 +13169,7 @@
               </a:defRPr>
             </a:pPr>
             <a:r>
-              <a:t>Revisao sistematica que analisa mais de 80 trabalhos sobre sistemas de autenticacao biometrica adaptativos. Mapeia como esses sistemas ajustam dinamicamente seus processos de amostragem e reconhecimento em resposta a mudancas no ambiente operacional. Identifica desafios criticos como ameacas a privacidade, spoofing e acessibilidade.</a:t>
+              <a:t>Revisão sistemática que analisa mais de 80 trabalhos sobre sistemas de autenticação biométrica adaptativos. Mapeia como esses sistemas ajustam dinamicamente seus processos de amostragem e reconhecimento em resposta a mudanças no ambiente operacional. Identifica desafios críticos como ameaças à privacidade, spoofing e acessibilidade.</a:t>
             </a:r>
           </a:p>
         </p:txBody>
@@ -12849,13 +13244,13 @@
             <a:pPr algn="l">
               <a:defRPr sz="1400" b="1">
                 <a:solidFill>
-                  <a:srgbClr val="27AE60"/>
+                  <a:srgbClr val="2F9E41"/>
                 </a:solidFill>
                 <a:latin typeface="Segoe UI"/>
               </a:defRPr>
             </a:pPr>
             <a:r>
-              <a:t>Comparacao com a Proposta</a:t>
+              <a:t>Comparação com a Proposta</a:t>
             </a:r>
           </a:p>
         </p:txBody>
@@ -12891,7 +13286,7 @@
               </a:defRPr>
             </a:pPr>
             <a:r>
-              <a:t>O sistema proposto implementa concretamente uma solucao adaptativa com ensemble de ML (Isolation Forest + Random Forest + Deep Learning), MFA condicional baseado em risco, e deteccao de deriva comportamental. Adiciona blockchain e explicabilidade de IA — elementos nao cobertos na revisao.</a:t>
+              <a:t>O sistema proposto implementa concretamente uma solução adaptativa com ensemble de ML (Isolation Forest + Random Forest + Deep Learning), MFA condicional baseado em risco, e detecção de deriva comportamental. Adiciona blockchain e explicabilidade de IA — elementos não cobertos na revisão.</a:t>
             </a:r>
           </a:p>
         </p:txBody>
@@ -12937,7 +13332,7 @@
             <a:avLst/>
           </a:prstGeom>
           <a:solidFill>
-            <a:srgbClr val="0D1B2A"/>
+            <a:srgbClr val="1A6B2A"/>
           </a:solidFill>
           <a:ln>
             <a:noFill/>
@@ -13026,7 +13421,7 @@
             <a:pPr algn="l">
               <a:defRPr sz="1400" b="0">
                 <a:solidFill>
-                  <a:srgbClr val="AACCEE"/>
+                  <a:srgbClr val="B0E0B0"/>
                 </a:solidFill>
                 <a:latin typeface="Segoe UI"/>
               </a:defRPr>
@@ -13052,7 +13447,7 @@
             <a:avLst/>
           </a:prstGeom>
           <a:solidFill>
-            <a:srgbClr val="007ACC"/>
+            <a:srgbClr val="CD191E"/>
           </a:solidFill>
           <a:ln>
             <a:noFill/>
@@ -13150,13 +13545,13 @@
             <a:pPr algn="l">
               <a:defRPr sz="1400" b="1">
                 <a:solidFill>
-                  <a:srgbClr val="007ACC"/>
+                  <a:srgbClr val="2F9E41"/>
                 </a:solidFill>
                 <a:latin typeface="Segoe UI"/>
               </a:defRPr>
             </a:pPr>
             <a:r>
-              <a:t>Descricao do Trabalho</a:t>
+              <a:t>Descrição do Trabalho</a:t>
             </a:r>
           </a:p>
         </p:txBody>
@@ -13192,7 +13587,7 @@
               </a:defRPr>
             </a:pPr>
             <a:r>
-              <a:t>Framework com ML para ajuste dinamico de parametros de autenticacao baseado em dados contextuais e comportamentais. Resultados: reducao de 27% na FAR e 35% na FRR comparado a metodos estaticos tradicionais. Utiliza biometria multimodal para perfis adaptativos.</a:t>
+              <a:t>Framework com ML para ajuste dinâmico de parâmetros de autenticação baseado em dados contextuais e comportamentais. Resultados: redução de 27% na FAR e 35% na FRR comparado a métodos estáticos tradicionais. Utiliza biometria multimodal para perfis adaptativos.</a:t>
             </a:r>
           </a:p>
         </p:txBody>
@@ -13267,13 +13662,13 @@
             <a:pPr algn="l">
               <a:defRPr sz="1400" b="1">
                 <a:solidFill>
-                  <a:srgbClr val="27AE60"/>
+                  <a:srgbClr val="2F9E41"/>
                 </a:solidFill>
                 <a:latin typeface="Segoe UI"/>
               </a:defRPr>
             </a:pPr>
             <a:r>
-              <a:t>Comparacao com a Proposta</a:t>
+              <a:t>Comparação com a Proposta</a:t>
             </a:r>
           </a:p>
         </p:txBody>
@@ -13309,7 +13704,7 @@
               </a:defRPr>
             </a:pPr>
             <a:r>
-              <a:t>A proposta compartilha o principio de ajuste dinamico, mas implementa ensemble de 3 algoritmos com pesos configuraveis (IF 40%, RF 30%, DL 30%) e regras de decisao escalonadas em 4 niveis (permitir, MFA, MFA+alerta, bloquear). Integra blockchain para registro imutavel de cada decisao.</a:t>
+              <a:t>A proposta compartilha o princípio de ajuste dinâmico, mas implementa ensemble de 3 algoritmos com pesos configuráveis (IF 40%, RF 30%, DL 30%) e regras de decisão escalonadas em 4 níveis (permitir, MFA, MFA+alerta, bloquear). Integra blockchain para registro imutável de cada decisão.</a:t>
             </a:r>
           </a:p>
         </p:txBody>
@@ -13355,7 +13750,7 @@
             <a:avLst/>
           </a:prstGeom>
           <a:solidFill>
-            <a:srgbClr val="0D1B2A"/>
+            <a:srgbClr val="1A6B2A"/>
           </a:solidFill>
           <a:ln>
             <a:noFill/>
@@ -13444,7 +13839,7 @@
             <a:pPr algn="l">
               <a:defRPr sz="1400" b="0">
                 <a:solidFill>
-                  <a:srgbClr val="AACCEE"/>
+                  <a:srgbClr val="B0E0B0"/>
                 </a:solidFill>
                 <a:latin typeface="Segoe UI"/>
               </a:defRPr>
@@ -13470,7 +13865,7 @@
             <a:avLst/>
           </a:prstGeom>
           <a:solidFill>
-            <a:srgbClr val="007ACC"/>
+            <a:srgbClr val="CD191E"/>
           </a:solidFill>
           <a:ln>
             <a:noFill/>
@@ -13568,13 +13963,13 @@
             <a:pPr algn="l">
               <a:defRPr sz="1400" b="1">
                 <a:solidFill>
-                  <a:srgbClr val="007ACC"/>
+                  <a:srgbClr val="2F9E41"/>
                 </a:solidFill>
                 <a:latin typeface="Segoe UI"/>
               </a:defRPr>
             </a:pPr>
             <a:r>
-              <a:t>Descricao do Trabalho</a:t>
+              <a:t>Descrição do Trabalho</a:t>
             </a:r>
           </a:p>
         </p:txBody>
@@ -13610,7 +14005,7 @@
               </a:defRPr>
             </a:pPr>
             <a:r>
-              <a:t>O trabalho da MDPI utiliza pipeline de CNN+LSTM+GRU para autenticacao continua em moveis. O da Springer aplica KNN, RF e LGBM para keystroke dynamics, alcancando EER de 2.67% a 6.61%. Ambos demonstram a eficacia de ensembles e biometria comportamental.</a:t>
+              <a:t>O trabalho da MDPI utiliza pipeline de CNN+LSTM+GRU para autenticação contínua em móveis. O da Springer aplica KNN, RF e LGBM para keystroke dynamics, alcançando EER de 2.67% a 6.61%. Ambos demonstram a eficácia de ensembles e biometria comportamental.</a:t>
             </a:r>
           </a:p>
         </p:txBody>
@@ -13685,13 +14080,13 @@
             <a:pPr algn="l">
               <a:defRPr sz="1400" b="1">
                 <a:solidFill>
-                  <a:srgbClr val="27AE60"/>
+                  <a:srgbClr val="2F9E41"/>
                 </a:solidFill>
                 <a:latin typeface="Segoe UI"/>
               </a:defRPr>
             </a:pPr>
             <a:r>
-              <a:t>Comparacao com a Proposta</a:t>
+              <a:t>Comparação com a Proposta</a:t>
             </a:r>
           </a:p>
         </p:txBody>
@@ -13727,7 +14122,7 @@
               </a:defRPr>
             </a:pPr>
             <a:r>
-              <a:t>O sistema proposto integra dinamica de digitacao como uma das 14 features do ensemble (nao isoladamente), combinando com geolocalizacao, padrao de sessao e contexto. Adiciona explicabilidade SHAP e score persistente em blockchain — aspectos nao abordados nos trabalhos comparados.</a:t>
+              <a:t>O sistema proposto integra dinâmica de digitação como uma das 14 features do ensemble (não isoladamente), combinando com geolocalização, padrão de sessão e contexto. Adiciona explicabilidade SHAP e score persistente em blockchain — aspectos não abordados nos trabalhos comparados.</a:t>
             </a:r>
           </a:p>
         </p:txBody>

--- a/docs/trabalhos-relacionados.pptx
+++ b/docs/trabalhos-relacionados.pptx
@@ -6,19 +6,16 @@
   </p:sldMasterIdLst>
   <p:sldIdLst>
     <p:sldId id="256" r:id="rId7"/>
-    <p:sldId id="257" r:id="rId8"/>
-    <p:sldId id="258" r:id="rId9"/>
-    <p:sldId id="259" r:id="rId10"/>
-    <p:sldId id="260" r:id="rId11"/>
-    <p:sldId id="261" r:id="rId12"/>
-    <p:sldId id="262" r:id="rId13"/>
-    <p:sldId id="263" r:id="rId14"/>
-    <p:sldId id="264" r:id="rId15"/>
-    <p:sldId id="265" r:id="rId16"/>
-    <p:sldId id="266" r:id="rId17"/>
-    <p:sldId id="267" r:id="rId18"/>
-    <p:sldId id="268" r:id="rId19"/>
-    <p:sldId id="269" r:id="rId20"/>
+    <p:sldId id="257" r:id="rId9"/>
+    <p:sldId id="258" r:id="rId28"/>
+    <p:sldId id="259" r:id="rId29"/>
+    <p:sldId id="260" r:id="rId30"/>
+    <p:sldId id="261" r:id="rId31"/>
+    <p:sldId id="262" r:id="rId11"/>
+    <p:sldId id="263" r:id="rId32"/>
+    <p:sldId id="264" r:id="rId18"/>
+    <p:sldId id="265" r:id="rId33"/>
+    <p:sldId id="266" r:id="rId20"/>
   </p:sldIdLst>
   <p:sldSz cx="12191695" cy="6858000" type="screen4x3"/>
   <p:notesSz cx="6858000" cy="9144000"/>
@@ -3334,11 +3331,11 @@
               </a:defRPr>
             </a:pPr>
             <a:r>
-              <a:t>Projetos Brasileiros em Autenticação Digital,</a:t>
+              <a:t>Literatura Acadêmica e Projetos Brasileiros da Indústria</a:t>
             </a:r>
             <a:br/>
             <a:r>
-              <a:t>Biometria e Prevenção a Fraude</a:t>
+              <a:t>em Autenticação Digital, Biometria e Prevenção a Fraude</a:t>
             </a:r>
           </a:p>
         </p:txBody>
@@ -6049,7 +6046,7 @@
               </a:defRPr>
             </a:pPr>
             <a:r>
-              <a:t>Lacunas no Cenário Brasileiro</a:t>
+              <a:t>Lacunas Identificadas</a:t>
             </a:r>
           </a:p>
         </p:txBody>
@@ -6281,7 +6278,7 @@
               </a:defRPr>
             </a:pPr>
             <a:r>
-              <a:t>Nenhum dos 5 projetos analisados implementa autenticação contínua com score recomputado a cada interação — todos operam com decisões one-shot na entrada do sistema.</a:t>
+              <a:t>Trabalhos como o Touchalytics provam a viabilidade da autenticação contínua, mas nem a indústria nem a academia revisada a integram à digitação web com score recomputado a cada interação e resposta em 4 níveis.</a:t>
             </a:r>
           </a:p>
         </p:txBody>
@@ -6587,7 +6584,7 @@
               </a:defRPr>
             </a:pPr>
             <a:r>
-              <a:t>As 5 soluções operam como caixas-pretas. A proposta aplica SHAP especificamente para autenticação, registrando a explicação em blockchain.</a:t>
+              <a:t>A explicabilidade via SHAP aparece na academia para detecção de intrusão (Wang et al., 2020), mas não aplicada à autenticação nem com a explicação registrada em blockchain, como na proposta.</a:t>
             </a:r>
           </a:p>
         </p:txBody>
@@ -6740,7 +6737,7 @@
               </a:defRPr>
             </a:pPr>
             <a:r>
-              <a:t>A combinação ponderada (IF + RF + DL) com resposta escalonada (permitir/MFA/MFA+alerta/bloquear) não foi identificada nos projetos brasileiros analisados.</a:t>
+              <a:t>A combinação ponderada (Isolation Forest + Random Forest + Deep Learning) com resposta escalonada (permitir/MFA/MFA+alerta/bloquear) não foi identificada de forma integrada nos trabalhos acadêmicos ou industriais analisados.</a:t>
             </a:r>
           </a:p>
         </p:txBody>
@@ -7437,6 +7434,2768 @@
 </p:sld>
 </file>
 
+<file path=ppt/slides/slide15.xml><?xml version="1.0" encoding="utf-8"?>
+<p:sld xmlns:a="http://schemas.openxmlformats.org/drawingml/2006/main" xmlns:p="http://schemas.openxmlformats.org/presentationml/2006/main" xmlns:r="http://schemas.openxmlformats.org/officeDocument/2006/relationships">
+  <p:cSld>
+    <p:bg>
+      <p:bgPr>
+        <a:solidFill>
+          <a:srgbClr val="FFFFFF"/>
+        </a:solidFill>
+        <a:effectLst/>
+      </p:bgPr>
+    </p:bg>
+    <p:spTree>
+      <p:nvGrpSpPr>
+        <p:cNvPr id="1" name=""/>
+        <p:cNvGrpSpPr/>
+        <p:nvPr/>
+      </p:nvGrpSpPr>
+      <p:grpSpPr/>
+      <p:sp>
+        <p:nvSpPr>
+          <p:cNvPr id="2" name="Rectangle 1"/>
+          <p:cNvSpPr/>
+          <p:nvPr/>
+        </p:nvSpPr>
+        <p:spPr>
+          <a:xfrm>
+            <a:off x="0" y="0"/>
+            <a:ext cx="12191695" cy="1188720"/>
+          </a:xfrm>
+          <a:prstGeom prst="rect">
+            <a:avLst/>
+          </a:prstGeom>
+          <a:solidFill>
+            <a:srgbClr val="1351B4"/>
+          </a:solidFill>
+          <a:ln>
+            <a:noFill/>
+          </a:ln>
+        </p:spPr>
+        <p:style>
+          <a:lnRef idx="1">
+            <a:schemeClr val="accent1"/>
+          </a:lnRef>
+          <a:fillRef idx="3">
+            <a:schemeClr val="accent1"/>
+          </a:fillRef>
+          <a:effectRef idx="2">
+            <a:schemeClr val="accent1"/>
+          </a:effectRef>
+          <a:fontRef idx="minor">
+            <a:schemeClr val="lt1"/>
+          </a:fontRef>
+        </p:style>
+        <p:txBody>
+          <a:bodyPr rtlCol="0" anchor="ctr"/>
+          <a:lstStyle/>
+          <a:p>
+            <a:pPr algn="ctr"/>
+          </a:p>
+        </p:txBody>
+      </p:sp>
+      <p:sp>
+        <p:nvSpPr>
+          <p:cNvPr id="3" name="TextBox 2"/>
+          <p:cNvSpPr txBox="1"/>
+          <p:nvPr/>
+        </p:nvSpPr>
+        <p:spPr>
+          <a:xfrm>
+            <a:off x="731520" y="228600"/>
+            <a:ext cx="10058400" cy="548640"/>
+          </a:xfrm>
+          <a:prstGeom prst="rect">
+            <a:avLst/>
+          </a:prstGeom>
+          <a:noFill/>
+        </p:spPr>
+        <p:txBody>
+          <a:bodyPr wrap="square">
+            <a:spAutoFit/>
+          </a:bodyPr>
+          <a:lstStyle/>
+          <a:p>
+            <a:pPr algn="l">
+              <a:defRPr sz="2800" b="1">
+                <a:solidFill>
+                  <a:srgbClr val="FFFFFF"/>
+                </a:solidFill>
+                <a:latin typeface="Segoe UI"/>
+              </a:defRPr>
+            </a:pPr>
+            <a:r>
+              <a:t>Quadro Comparativo — Literatura Acadêmica</a:t>
+            </a:r>
+          </a:p>
+        </p:txBody>
+      </p:sp>
+      <p:sp>
+        <p:nvSpPr>
+          <p:cNvPr id="4" name="TextBox 3"/>
+          <p:cNvSpPr txBox="1"/>
+          <p:nvPr/>
+        </p:nvSpPr>
+        <p:spPr>
+          <a:xfrm>
+            <a:off x="731520" y="685800"/>
+            <a:ext cx="10058400" cy="365760"/>
+          </a:xfrm>
+          <a:prstGeom prst="rect">
+            <a:avLst/>
+          </a:prstGeom>
+          <a:noFill/>
+        </p:spPr>
+        <p:txBody>
+          <a:bodyPr wrap="square">
+            <a:spAutoFit/>
+          </a:bodyPr>
+          <a:lstStyle/>
+          <a:p>
+            <a:pPr algn="l">
+              <a:defRPr sz="1400" b="0">
+                <a:solidFill>
+                  <a:srgbClr val="C5D5F0"/>
+                </a:solidFill>
+                <a:latin typeface="Segoe UI"/>
+              </a:defRPr>
+            </a:pPr>
+            <a:r>
+              <a:t>5 Trabalhos Acadêmicos de Referência</a:t>
+            </a:r>
+          </a:p>
+        </p:txBody>
+      </p:sp>
+      <p:sp>
+        <p:nvSpPr>
+          <p:cNvPr id="5" name="Rectangle 4"/>
+          <p:cNvSpPr/>
+          <p:nvPr/>
+        </p:nvSpPr>
+        <p:spPr>
+          <a:xfrm>
+            <a:off x="0" y="1188720"/>
+            <a:ext cx="12191695" cy="54864"/>
+          </a:xfrm>
+          <a:prstGeom prst="rect">
+            <a:avLst/>
+          </a:prstGeom>
+          <a:solidFill>
+            <a:srgbClr val="CD191E"/>
+          </a:solidFill>
+          <a:ln>
+            <a:noFill/>
+          </a:ln>
+        </p:spPr>
+        <p:style>
+          <a:lnRef idx="1">
+            <a:schemeClr val="accent1"/>
+          </a:lnRef>
+          <a:fillRef idx="3">
+            <a:schemeClr val="accent1"/>
+          </a:fillRef>
+          <a:effectRef idx="2">
+            <a:schemeClr val="accent1"/>
+          </a:effectRef>
+          <a:fontRef idx="minor">
+            <a:schemeClr val="lt1"/>
+          </a:fontRef>
+        </p:style>
+        <p:txBody>
+          <a:bodyPr rtlCol="0" anchor="ctr"/>
+          <a:lstStyle/>
+          <a:p>
+            <a:pPr algn="ctr"/>
+          </a:p>
+        </p:txBody>
+      </p:sp>
+      <p:graphicFrame>
+        <p:nvGraphicFramePr>
+          <p:cNvPr id="6" name="Table 5"/>
+          <p:cNvGraphicFramePr>
+            <a:graphicFrameLocks noGrp="1"/>
+          </p:cNvGraphicFramePr>
+          <p:nvPr/>
+        </p:nvGraphicFramePr>
+        <p:xfrm>
+          <a:off x="274320" y="1463040"/>
+          <a:ext cx="11612880" cy="5029200"/>
+        </p:xfrm>
+        <a:graphic>
+          <a:graphicData uri="http://schemas.openxmlformats.org/drawingml/2006/table">
+            <a:tbl>
+              <a:tblPr firstRow="1" bandRow="1">
+                <a:tableStyleId>{5C22544A-7EE6-4342-B048-85BDC9FD1C3A}</a:tableStyleId>
+              </a:tblPr>
+              <a:tblGrid>
+                <a:gridCol w="1737360"/>
+                <a:gridCol w="2377440"/>
+                <a:gridCol w="731520"/>
+                <a:gridCol w="2194560"/>
+                <a:gridCol w="2194560"/>
+                <a:gridCol w="2377440"/>
+              </a:tblGrid>
+              <a:tr h="838200">
+                <a:tc>
+                  <a:txBody>
+                    <a:bodyPr/>
+                    <a:lstStyle/>
+                    <a:p>
+                      <a:pPr>
+                        <a:defRPr sz="1100" b="1">
+                          <a:solidFill>
+                            <a:srgbClr val="FFFFFF"/>
+                          </a:solidFill>
+                          <a:latin typeface="Segoe UI"/>
+                        </a:defRPr>
+                      </a:pPr>
+                      <a:r>
+                        <a:t>Trabalho</a:t>
+                      </a:r>
+                    </a:p>
+                  </a:txBody>
+                  <a:tcPr>
+                    <a:solidFill>
+                      <a:srgbClr val="1351B4"/>
+                    </a:solidFill>
+                  </a:tcPr>
+                </a:tc>
+                <a:tc>
+                  <a:txBody>
+                    <a:bodyPr/>
+                    <a:lstStyle/>
+                    <a:p>
+                      <a:pPr>
+                        <a:defRPr sz="1100" b="1">
+                          <a:solidFill>
+                            <a:srgbClr val="FFFFFF"/>
+                          </a:solidFill>
+                          <a:latin typeface="Segoe UI"/>
+                        </a:defRPr>
+                      </a:pPr>
+                      <a:r>
+                        <a:t>Proposta</a:t>
+                      </a:r>
+                    </a:p>
+                  </a:txBody>
+                  <a:tcPr>
+                    <a:solidFill>
+                      <a:srgbClr val="1351B4"/>
+                    </a:solidFill>
+                  </a:tcPr>
+                </a:tc>
+                <a:tc>
+                  <a:txBody>
+                    <a:bodyPr/>
+                    <a:lstStyle/>
+                    <a:p>
+                      <a:pPr>
+                        <a:defRPr sz="1100" b="1">
+                          <a:solidFill>
+                            <a:srgbClr val="FFFFFF"/>
+                          </a:solidFill>
+                          <a:latin typeface="Segoe UI"/>
+                        </a:defRPr>
+                      </a:pPr>
+                      <a:r>
+                        <a:t>Ano</a:t>
+                      </a:r>
+                    </a:p>
+                  </a:txBody>
+                  <a:tcPr>
+                    <a:solidFill>
+                      <a:srgbClr val="1351B4"/>
+                    </a:solidFill>
+                  </a:tcPr>
+                </a:tc>
+                <a:tc>
+                  <a:txBody>
+                    <a:bodyPr/>
+                    <a:lstStyle/>
+                    <a:p>
+                      <a:pPr>
+                        <a:defRPr sz="1100" b="1">
+                          <a:solidFill>
+                            <a:srgbClr val="FFFFFF"/>
+                          </a:solidFill>
+                          <a:latin typeface="Segoe UI"/>
+                        </a:defRPr>
+                      </a:pPr>
+                      <a:r>
+                        <a:t>Objetivo</a:t>
+                      </a:r>
+                    </a:p>
+                  </a:txBody>
+                  <a:tcPr>
+                    <a:solidFill>
+                      <a:srgbClr val="1351B4"/>
+                    </a:solidFill>
+                  </a:tcPr>
+                </a:tc>
+                <a:tc>
+                  <a:txBody>
+                    <a:bodyPr/>
+                    <a:lstStyle/>
+                    <a:p>
+                      <a:pPr>
+                        <a:defRPr sz="1100" b="1">
+                          <a:solidFill>
+                            <a:srgbClr val="FFFFFF"/>
+                          </a:solidFill>
+                          <a:latin typeface="Segoe UI"/>
+                        </a:defRPr>
+                      </a:pPr>
+                      <a:r>
+                        <a:t>Experimento / Dataset</a:t>
+                      </a:r>
+                    </a:p>
+                  </a:txBody>
+                  <a:tcPr>
+                    <a:solidFill>
+                      <a:srgbClr val="1351B4"/>
+                    </a:solidFill>
+                  </a:tcPr>
+                </a:tc>
+                <a:tc>
+                  <a:txBody>
+                    <a:bodyPr/>
+                    <a:lstStyle/>
+                    <a:p>
+                      <a:pPr>
+                        <a:defRPr sz="1100" b="1">
+                          <a:solidFill>
+                            <a:srgbClr val="FFFFFF"/>
+                          </a:solidFill>
+                          <a:latin typeface="Segoe UI"/>
+                        </a:defRPr>
+                      </a:pPr>
+                      <a:r>
+                        <a:t>Métricas / Resultados</a:t>
+                      </a:r>
+                    </a:p>
+                  </a:txBody>
+                  <a:tcPr>
+                    <a:solidFill>
+                      <a:srgbClr val="1351B4"/>
+                    </a:solidFill>
+                  </a:tcPr>
+                </a:tc>
+              </a:tr>
+              <a:tr h="838200">
+                <a:tc>
+                  <a:txBody>
+                    <a:bodyPr/>
+                    <a:lstStyle/>
+                    <a:p>
+                      <a:pPr>
+                        <a:defRPr sz="1000" b="1">
+                          <a:solidFill>
+                            <a:srgbClr val="4A4A4A"/>
+                          </a:solidFill>
+                          <a:latin typeface="Segoe UI"/>
+                        </a:defRPr>
+                      </a:pPr>
+                      <a:r>
+                        <a:t>Killourhy &amp; Maxion</a:t>
+                      </a:r>
+                    </a:p>
+                  </a:txBody>
+                  <a:tcPr>
+                    <a:solidFill>
+                      <a:srgbClr val="FFFFFF"/>
+                    </a:solidFill>
+                  </a:tcPr>
+                </a:tc>
+                <a:tc>
+                  <a:txBody>
+                    <a:bodyPr/>
+                    <a:lstStyle/>
+                    <a:p>
+                      <a:pPr>
+                        <a:defRPr sz="1000">
+                          <a:solidFill>
+                            <a:srgbClr val="4A4A4A"/>
+                          </a:solidFill>
+                          <a:latin typeface="Segoe UI"/>
+                        </a:defRPr>
+                      </a:pPr>
+                      <a:r>
+                        <a:t>Benchmark de keystroke dynamics</a:t>
+                      </a:r>
+                    </a:p>
+                  </a:txBody>
+                  <a:tcPr>
+                    <a:solidFill>
+                      <a:srgbClr val="FFFFFF"/>
+                    </a:solidFill>
+                  </a:tcPr>
+                </a:tc>
+                <a:tc>
+                  <a:txBody>
+                    <a:bodyPr/>
+                    <a:lstStyle/>
+                    <a:p>
+                      <a:pPr>
+                        <a:defRPr sz="1000">
+                          <a:solidFill>
+                            <a:srgbClr val="4A4A4A"/>
+                          </a:solidFill>
+                          <a:latin typeface="Segoe UI"/>
+                        </a:defRPr>
+                      </a:pPr>
+                      <a:r>
+                        <a:t>2009</a:t>
+                      </a:r>
+                    </a:p>
+                  </a:txBody>
+                  <a:tcPr>
+                    <a:solidFill>
+                      <a:srgbClr val="FFFFFF"/>
+                    </a:solidFill>
+                  </a:tcPr>
+                </a:tc>
+                <a:tc>
+                  <a:txBody>
+                    <a:bodyPr/>
+                    <a:lstStyle/>
+                    <a:p>
+                      <a:pPr>
+                        <a:defRPr sz="1000">
+                          <a:solidFill>
+                            <a:srgbClr val="4A4A4A"/>
+                          </a:solidFill>
+                          <a:latin typeface="Segoe UI"/>
+                        </a:defRPr>
+                      </a:pPr>
+                      <a:r>
+                        <a:t>Comparar detectores de anomalia da digitação</a:t>
+                      </a:r>
+                    </a:p>
+                  </a:txBody>
+                  <a:tcPr>
+                    <a:solidFill>
+                      <a:srgbClr val="FFFFFF"/>
+                    </a:solidFill>
+                  </a:tcPr>
+                </a:tc>
+                <a:tc>
+                  <a:txBody>
+                    <a:bodyPr/>
+                    <a:lstStyle/>
+                    <a:p>
+                      <a:pPr>
+                        <a:defRPr sz="1000">
+                          <a:solidFill>
+                            <a:srgbClr val="4A4A4A"/>
+                          </a:solidFill>
+                          <a:latin typeface="Segoe UI"/>
+                        </a:defRPr>
+                      </a:pPr>
+                      <a:r>
+                        <a:t>51 sujeitos, senha ".tie5Roanl", 400 amostras</a:t>
+                      </a:r>
+                    </a:p>
+                  </a:txBody>
+                  <a:tcPr>
+                    <a:solidFill>
+                      <a:srgbClr val="FFFFFF"/>
+                    </a:solidFill>
+                  </a:tcPr>
+                </a:tc>
+                <a:tc>
+                  <a:txBody>
+                    <a:bodyPr/>
+                    <a:lstStyle/>
+                    <a:p>
+                      <a:pPr>
+                        <a:defRPr sz="1000">
+                          <a:solidFill>
+                            <a:srgbClr val="4A4A4A"/>
+                          </a:solidFill>
+                          <a:latin typeface="Segoe UI"/>
+                        </a:defRPr>
+                      </a:pPr>
+                      <a:r>
+                        <a:t>Melhor EER ≈ 9,6% (Manhattan)</a:t>
+                      </a:r>
+                    </a:p>
+                  </a:txBody>
+                  <a:tcPr>
+                    <a:solidFill>
+                      <a:srgbClr val="FFFFFF"/>
+                    </a:solidFill>
+                  </a:tcPr>
+                </a:tc>
+              </a:tr>
+              <a:tr h="838200">
+                <a:tc>
+                  <a:txBody>
+                    <a:bodyPr/>
+                    <a:lstStyle/>
+                    <a:p>
+                      <a:pPr>
+                        <a:defRPr sz="1000" b="1">
+                          <a:solidFill>
+                            <a:srgbClr val="4A4A4A"/>
+                          </a:solidFill>
+                          <a:latin typeface="Segoe UI"/>
+                        </a:defRPr>
+                      </a:pPr>
+                      <a:r>
+                        <a:t>Frank et al. (Touchalytics)</a:t>
+                      </a:r>
+                    </a:p>
+                  </a:txBody>
+                  <a:tcPr>
+                    <a:solidFill>
+                      <a:srgbClr val="F0F2F5"/>
+                    </a:solidFill>
+                  </a:tcPr>
+                </a:tc>
+                <a:tc>
+                  <a:txBody>
+                    <a:bodyPr/>
+                    <a:lstStyle/>
+                    <a:p>
+                      <a:pPr>
+                        <a:defRPr sz="1000">
+                          <a:solidFill>
+                            <a:srgbClr val="4A4A4A"/>
+                          </a:solidFill>
+                          <a:latin typeface="Segoe UI"/>
+                        </a:defRPr>
+                      </a:pPr>
+                      <a:r>
+                        <a:t>Biometria comportamental de toque</a:t>
+                      </a:r>
+                    </a:p>
+                  </a:txBody>
+                  <a:tcPr>
+                    <a:solidFill>
+                      <a:srgbClr val="F0F2F5"/>
+                    </a:solidFill>
+                  </a:tcPr>
+                </a:tc>
+                <a:tc>
+                  <a:txBody>
+                    <a:bodyPr/>
+                    <a:lstStyle/>
+                    <a:p>
+                      <a:pPr>
+                        <a:defRPr sz="1000">
+                          <a:solidFill>
+                            <a:srgbClr val="4A4A4A"/>
+                          </a:solidFill>
+                          <a:latin typeface="Segoe UI"/>
+                        </a:defRPr>
+                      </a:pPr>
+                      <a:r>
+                        <a:t>2013</a:t>
+                      </a:r>
+                    </a:p>
+                  </a:txBody>
+                  <a:tcPr>
+                    <a:solidFill>
+                      <a:srgbClr val="F0F2F5"/>
+                    </a:solidFill>
+                  </a:tcPr>
+                </a:tc>
+                <a:tc>
+                  <a:txBody>
+                    <a:bodyPr/>
+                    <a:lstStyle/>
+                    <a:p>
+                      <a:pPr>
+                        <a:defRPr sz="1000">
+                          <a:solidFill>
+                            <a:srgbClr val="4A4A4A"/>
+                          </a:solidFill>
+                          <a:latin typeface="Segoe UI"/>
+                        </a:defRPr>
+                      </a:pPr>
+                      <a:r>
+                        <a:t>Autenticar continuamente em smartphones</a:t>
+                      </a:r>
+                    </a:p>
+                  </a:txBody>
+                  <a:tcPr>
+                    <a:solidFill>
+                      <a:srgbClr val="F0F2F5"/>
+                    </a:solidFill>
+                  </a:tcPr>
+                </a:tc>
+                <a:tc>
+                  <a:txBody>
+                    <a:bodyPr/>
+                    <a:lstStyle/>
+                    <a:p>
+                      <a:pPr>
+                        <a:defRPr sz="1000">
+                          <a:solidFill>
+                            <a:srgbClr val="4A4A4A"/>
+                          </a:solidFill>
+                          <a:latin typeface="Segoe UI"/>
+                        </a:defRPr>
+                      </a:pPr>
+                      <a:r>
+                        <a:t>41 usuários, 30 features, kNN/SVM</a:t>
+                      </a:r>
+                    </a:p>
+                  </a:txBody>
+                  <a:tcPr>
+                    <a:solidFill>
+                      <a:srgbClr val="F0F2F5"/>
+                    </a:solidFill>
+                  </a:tcPr>
+                </a:tc>
+                <a:tc>
+                  <a:txBody>
+                    <a:bodyPr/>
+                    <a:lstStyle/>
+                    <a:p>
+                      <a:pPr>
+                        <a:defRPr sz="1000">
+                          <a:solidFill>
+                            <a:srgbClr val="4A4A4A"/>
+                          </a:solidFill>
+                          <a:latin typeface="Segoe UI"/>
+                        </a:defRPr>
+                      </a:pPr>
+                      <a:r>
+                        <a:t>EER 0% intra / 2-3% entre sessões</a:t>
+                      </a:r>
+                    </a:p>
+                  </a:txBody>
+                  <a:tcPr>
+                    <a:solidFill>
+                      <a:srgbClr val="F0F2F5"/>
+                    </a:solidFill>
+                  </a:tcPr>
+                </a:tc>
+              </a:tr>
+              <a:tr h="838200">
+                <a:tc>
+                  <a:txBody>
+                    <a:bodyPr/>
+                    <a:lstStyle/>
+                    <a:p>
+                      <a:pPr>
+                        <a:defRPr sz="1000" b="1">
+                          <a:solidFill>
+                            <a:srgbClr val="4A4A4A"/>
+                          </a:solidFill>
+                          <a:latin typeface="Segoe UI"/>
+                        </a:defRPr>
+                      </a:pPr>
+                      <a:r>
+                        <a:t>Wiefling et al.</a:t>
+                      </a:r>
+                    </a:p>
+                  </a:txBody>
+                  <a:tcPr>
+                    <a:solidFill>
+                      <a:srgbClr val="FFFFFF"/>
+                    </a:solidFill>
+                  </a:tcPr>
+                </a:tc>
+                <a:tc>
+                  <a:txBody>
+                    <a:bodyPr/>
+                    <a:lstStyle/>
+                    <a:p>
+                      <a:pPr>
+                        <a:defRPr sz="1000">
+                          <a:solidFill>
+                            <a:srgbClr val="4A4A4A"/>
+                          </a:solidFill>
+                          <a:latin typeface="Segoe UI"/>
+                        </a:defRPr>
+                      </a:pPr>
+                      <a:r>
+                        <a:t>Estudo empírico de Risk-Based Auth.</a:t>
+                      </a:r>
+                    </a:p>
+                  </a:txBody>
+                  <a:tcPr>
+                    <a:solidFill>
+                      <a:srgbClr val="FFFFFF"/>
+                    </a:solidFill>
+                  </a:tcPr>
+                </a:tc>
+                <a:tc>
+                  <a:txBody>
+                    <a:bodyPr/>
+                    <a:lstStyle/>
+                    <a:p>
+                      <a:pPr>
+                        <a:defRPr sz="1000">
+                          <a:solidFill>
+                            <a:srgbClr val="4A4A4A"/>
+                          </a:solidFill>
+                          <a:latin typeface="Segoe UI"/>
+                        </a:defRPr>
+                      </a:pPr>
+                      <a:r>
+                        <a:t>2019</a:t>
+                      </a:r>
+                    </a:p>
+                  </a:txBody>
+                  <a:tcPr>
+                    <a:solidFill>
+                      <a:srgbClr val="FFFFFF"/>
+                    </a:solidFill>
+                  </a:tcPr>
+                </a:tc>
+                <a:tc>
+                  <a:txBody>
+                    <a:bodyPr/>
+                    <a:lstStyle/>
+                    <a:p>
+                      <a:pPr>
+                        <a:defRPr sz="1000">
+                          <a:solidFill>
+                            <a:srgbClr val="4A4A4A"/>
+                          </a:solidFill>
+                          <a:latin typeface="Segoe UI"/>
+                        </a:defRPr>
+                      </a:pPr>
+                      <a:r>
+                        <a:t>Mapear RBA em serviços reais</a:t>
+                      </a:r>
+                    </a:p>
+                  </a:txBody>
+                  <a:tcPr>
+                    <a:solidFill>
+                      <a:srgbClr val="FFFFFF"/>
+                    </a:solidFill>
+                  </a:tcPr>
+                </a:tc>
+                <a:tc>
+                  <a:txBody>
+                    <a:bodyPr/>
+                    <a:lstStyle/>
+                    <a:p>
+                      <a:pPr>
+                        <a:defRPr sz="1000">
+                          <a:solidFill>
+                            <a:srgbClr val="4A4A4A"/>
+                          </a:solidFill>
+                          <a:latin typeface="Segoe UI"/>
+                        </a:defRPr>
+                      </a:pPr>
+                      <a:r>
+                        <a:t>8 serviços online (Google, GOG…)</a:t>
+                      </a:r>
+                    </a:p>
+                  </a:txBody>
+                  <a:tcPr>
+                    <a:solidFill>
+                      <a:srgbClr val="FFFFFF"/>
+                    </a:solidFill>
+                  </a:tcPr>
+                </a:tc>
+                <a:tc>
+                  <a:txBody>
+                    <a:bodyPr/>
+                    <a:lstStyle/>
+                    <a:p>
+                      <a:pPr>
+                        <a:defRPr sz="1000">
+                          <a:solidFill>
+                            <a:srgbClr val="4A4A4A"/>
+                          </a:solidFill>
+                          <a:latin typeface="Segoe UI"/>
+                        </a:defRPr>
+                      </a:pPr>
+                      <a:r>
+                        <a:t>IP = feature dominante; baixa transparência</a:t>
+                      </a:r>
+                    </a:p>
+                  </a:txBody>
+                  <a:tcPr>
+                    <a:solidFill>
+                      <a:srgbClr val="FFFFFF"/>
+                    </a:solidFill>
+                  </a:tcPr>
+                </a:tc>
+              </a:tr>
+              <a:tr h="838200">
+                <a:tc>
+                  <a:txBody>
+                    <a:bodyPr/>
+                    <a:lstStyle/>
+                    <a:p>
+                      <a:pPr>
+                        <a:defRPr sz="1000" b="1">
+                          <a:solidFill>
+                            <a:srgbClr val="4A4A4A"/>
+                          </a:solidFill>
+                          <a:latin typeface="Segoe UI"/>
+                        </a:defRPr>
+                      </a:pPr>
+                      <a:r>
+                        <a:t>Liu, Ting &amp; Zhou</a:t>
+                      </a:r>
+                    </a:p>
+                  </a:txBody>
+                  <a:tcPr>
+                    <a:solidFill>
+                      <a:srgbClr val="F0F2F5"/>
+                    </a:solidFill>
+                  </a:tcPr>
+                </a:tc>
+                <a:tc>
+                  <a:txBody>
+                    <a:bodyPr/>
+                    <a:lstStyle/>
+                    <a:p>
+                      <a:pPr>
+                        <a:defRPr sz="1000">
+                          <a:solidFill>
+                            <a:srgbClr val="4A4A4A"/>
+                          </a:solidFill>
+                          <a:latin typeface="Segoe UI"/>
+                        </a:defRPr>
+                      </a:pPr>
+                      <a:r>
+                        <a:t>Isolation Forest (anomalias)</a:t>
+                      </a:r>
+                    </a:p>
+                  </a:txBody>
+                  <a:tcPr>
+                    <a:solidFill>
+                      <a:srgbClr val="F0F2F5"/>
+                    </a:solidFill>
+                  </a:tcPr>
+                </a:tc>
+                <a:tc>
+                  <a:txBody>
+                    <a:bodyPr/>
+                    <a:lstStyle/>
+                    <a:p>
+                      <a:pPr>
+                        <a:defRPr sz="1000">
+                          <a:solidFill>
+                            <a:srgbClr val="4A4A4A"/>
+                          </a:solidFill>
+                          <a:latin typeface="Segoe UI"/>
+                        </a:defRPr>
+                      </a:pPr>
+                      <a:r>
+                        <a:t>2008</a:t>
+                      </a:r>
+                    </a:p>
+                  </a:txBody>
+                  <a:tcPr>
+                    <a:solidFill>
+                      <a:srgbClr val="F0F2F5"/>
+                    </a:solidFill>
+                  </a:tcPr>
+                </a:tc>
+                <a:tc>
+                  <a:txBody>
+                    <a:bodyPr/>
+                    <a:lstStyle/>
+                    <a:p>
+                      <a:pPr>
+                        <a:defRPr sz="1000">
+                          <a:solidFill>
+                            <a:srgbClr val="4A4A4A"/>
+                          </a:solidFill>
+                          <a:latin typeface="Segoe UI"/>
+                        </a:defRPr>
+                      </a:pPr>
+                      <a:r>
+                        <a:t>Isolar anomalias com árvores aleatórias</a:t>
+                      </a:r>
+                    </a:p>
+                  </a:txBody>
+                  <a:tcPr>
+                    <a:solidFill>
+                      <a:srgbClr val="F0F2F5"/>
+                    </a:solidFill>
+                  </a:tcPr>
+                </a:tc>
+                <a:tc>
+                  <a:txBody>
+                    <a:bodyPr/>
+                    <a:lstStyle/>
+                    <a:p>
+                      <a:pPr>
+                        <a:defRPr sz="1000">
+                          <a:solidFill>
+                            <a:srgbClr val="4A4A4A"/>
+                          </a:solidFill>
+                          <a:latin typeface="Segoe UI"/>
+                        </a:defRPr>
+                      </a:pPr>
+                      <a:r>
+                        <a:t>Benchmarks de detecção (ICDM)</a:t>
+                      </a:r>
+                    </a:p>
+                  </a:txBody>
+                  <a:tcPr>
+                    <a:solidFill>
+                      <a:srgbClr val="F0F2F5"/>
+                    </a:solidFill>
+                  </a:tcPr>
+                </a:tc>
+                <a:tc>
+                  <a:txBody>
+                    <a:bodyPr/>
+                    <a:lstStyle/>
+                    <a:p>
+                      <a:pPr>
+                        <a:defRPr sz="1000">
+                          <a:solidFill>
+                            <a:srgbClr val="4A4A4A"/>
+                          </a:solidFill>
+                          <a:latin typeface="Segoe UI"/>
+                        </a:defRPr>
+                      </a:pPr>
+                      <a:r>
+                        <a:t>Tempo linear, escalável, baixa memória</a:t>
+                      </a:r>
+                    </a:p>
+                  </a:txBody>
+                  <a:tcPr>
+                    <a:solidFill>
+                      <a:srgbClr val="F0F2F5"/>
+                    </a:solidFill>
+                  </a:tcPr>
+                </a:tc>
+              </a:tr>
+              <a:tr h="838200">
+                <a:tc>
+                  <a:txBody>
+                    <a:bodyPr/>
+                    <a:lstStyle/>
+                    <a:p>
+                      <a:pPr>
+                        <a:defRPr sz="1000" b="1">
+                          <a:solidFill>
+                            <a:srgbClr val="4A4A4A"/>
+                          </a:solidFill>
+                          <a:latin typeface="Segoe UI"/>
+                        </a:defRPr>
+                      </a:pPr>
+                      <a:r>
+                        <a:t>Wang et al.</a:t>
+                      </a:r>
+                    </a:p>
+                  </a:txBody>
+                  <a:tcPr>
+                    <a:solidFill>
+                      <a:srgbClr val="FFFFFF"/>
+                    </a:solidFill>
+                  </a:tcPr>
+                </a:tc>
+                <a:tc>
+                  <a:txBody>
+                    <a:bodyPr/>
+                    <a:lstStyle/>
+                    <a:p>
+                      <a:pPr>
+                        <a:defRPr sz="1000">
+                          <a:solidFill>
+                            <a:srgbClr val="4A4A4A"/>
+                          </a:solidFill>
+                          <a:latin typeface="Segoe UI"/>
+                        </a:defRPr>
+                      </a:pPr>
+                      <a:r>
+                        <a:t>Framework de explicabilidade (SHAP)</a:t>
+                      </a:r>
+                    </a:p>
+                  </a:txBody>
+                  <a:tcPr>
+                    <a:solidFill>
+                      <a:srgbClr val="FFFFFF"/>
+                    </a:solidFill>
+                  </a:tcPr>
+                </a:tc>
+                <a:tc>
+                  <a:txBody>
+                    <a:bodyPr/>
+                    <a:lstStyle/>
+                    <a:p>
+                      <a:pPr>
+                        <a:defRPr sz="1000">
+                          <a:solidFill>
+                            <a:srgbClr val="4A4A4A"/>
+                          </a:solidFill>
+                          <a:latin typeface="Segoe UI"/>
+                        </a:defRPr>
+                      </a:pPr>
+                      <a:r>
+                        <a:t>2020</a:t>
+                      </a:r>
+                    </a:p>
+                  </a:txBody>
+                  <a:tcPr>
+                    <a:solidFill>
+                      <a:srgbClr val="FFFFFF"/>
+                    </a:solidFill>
+                  </a:tcPr>
+                </a:tc>
+                <a:tc>
+                  <a:txBody>
+                    <a:bodyPr/>
+                    <a:lstStyle/>
+                    <a:p>
+                      <a:pPr>
+                        <a:defRPr sz="1000">
+                          <a:solidFill>
+                            <a:srgbClr val="4A4A4A"/>
+                          </a:solidFill>
+                          <a:latin typeface="Segoe UI"/>
+                        </a:defRPr>
+                      </a:pPr>
+                      <a:r>
+                        <a:t>Explicar decisões de modelos de segurança</a:t>
+                      </a:r>
+                    </a:p>
+                  </a:txBody>
+                  <a:tcPr>
+                    <a:solidFill>
+                      <a:srgbClr val="FFFFFF"/>
+                    </a:solidFill>
+                  </a:tcPr>
+                </a:tc>
+                <a:tc>
+                  <a:txBody>
+                    <a:bodyPr/>
+                    <a:lstStyle/>
+                    <a:p>
+                      <a:pPr>
+                        <a:defRPr sz="1000">
+                          <a:solidFill>
+                            <a:srgbClr val="4A4A4A"/>
+                          </a:solidFill>
+                          <a:latin typeface="Segoe UI"/>
+                        </a:defRPr>
+                      </a:pPr>
+                      <a:r>
+                        <a:t>Dataset NSL-KDD</a:t>
+                      </a:r>
+                    </a:p>
+                  </a:txBody>
+                  <a:tcPr>
+                    <a:solidFill>
+                      <a:srgbClr val="FFFFFF"/>
+                    </a:solidFill>
+                  </a:tcPr>
+                </a:tc>
+                <a:tc>
+                  <a:txBody>
+                    <a:bodyPr/>
+                    <a:lstStyle/>
+                    <a:p>
+                      <a:pPr>
+                        <a:defRPr sz="1000">
+                          <a:solidFill>
+                            <a:srgbClr val="4A4A4A"/>
+                          </a:solidFill>
+                          <a:latin typeface="Segoe UI"/>
+                        </a:defRPr>
+                      </a:pPr>
+                      <a:r>
+                        <a:t>Explicações locais + globais (SHAP)</a:t>
+                      </a:r>
+                    </a:p>
+                  </a:txBody>
+                  <a:tcPr>
+                    <a:solidFill>
+                      <a:srgbClr val="FFFFFF"/>
+                    </a:solidFill>
+                  </a:tcPr>
+                </a:tc>
+              </a:tr>
+            </a:tbl>
+          </a:graphicData>
+        </a:graphic>
+      </p:graphicFrame>
+    </p:spTree>
+  </p:cSld>
+  <p:clrMapOvr>
+    <a:masterClrMapping/>
+  </p:clrMapOvr>
+</p:sld>
+</file>
+
+<file path=ppt/slides/slide16.xml><?xml version="1.0" encoding="utf-8"?>
+<p:sld xmlns:a="http://schemas.openxmlformats.org/drawingml/2006/main" xmlns:p="http://schemas.openxmlformats.org/presentationml/2006/main" xmlns:r="http://schemas.openxmlformats.org/officeDocument/2006/relationships">
+  <p:cSld>
+    <p:bg>
+      <p:bgPr>
+        <a:solidFill>
+          <a:srgbClr val="FFFFFF"/>
+        </a:solidFill>
+        <a:effectLst/>
+      </p:bgPr>
+    </p:bg>
+    <p:spTree>
+      <p:nvGrpSpPr>
+        <p:cNvPr id="1" name=""/>
+        <p:cNvGrpSpPr/>
+        <p:nvPr/>
+      </p:nvGrpSpPr>
+      <p:grpSpPr/>
+      <p:sp>
+        <p:nvSpPr>
+          <p:cNvPr id="2" name="Rectangle 1"/>
+          <p:cNvSpPr/>
+          <p:nvPr/>
+        </p:nvSpPr>
+        <p:spPr>
+          <a:xfrm>
+            <a:off x="0" y="0"/>
+            <a:ext cx="12191695" cy="1188720"/>
+          </a:xfrm>
+          <a:prstGeom prst="rect">
+            <a:avLst/>
+          </a:prstGeom>
+          <a:solidFill>
+            <a:srgbClr val="1351B4"/>
+          </a:solidFill>
+          <a:ln>
+            <a:noFill/>
+          </a:ln>
+        </p:spPr>
+        <p:style>
+          <a:lnRef idx="1">
+            <a:schemeClr val="accent1"/>
+          </a:lnRef>
+          <a:fillRef idx="3">
+            <a:schemeClr val="accent1"/>
+          </a:fillRef>
+          <a:effectRef idx="2">
+            <a:schemeClr val="accent1"/>
+          </a:effectRef>
+          <a:fontRef idx="minor">
+            <a:schemeClr val="lt1"/>
+          </a:fontRef>
+        </p:style>
+        <p:txBody>
+          <a:bodyPr rtlCol="0" anchor="ctr"/>
+          <a:lstStyle/>
+          <a:p>
+            <a:pPr algn="ctr"/>
+          </a:p>
+        </p:txBody>
+      </p:sp>
+      <p:sp>
+        <p:nvSpPr>
+          <p:cNvPr id="3" name="TextBox 2"/>
+          <p:cNvSpPr txBox="1"/>
+          <p:nvPr/>
+        </p:nvSpPr>
+        <p:spPr>
+          <a:xfrm>
+            <a:off x="731520" y="228600"/>
+            <a:ext cx="10058400" cy="548640"/>
+          </a:xfrm>
+          <a:prstGeom prst="rect">
+            <a:avLst/>
+          </a:prstGeom>
+          <a:noFill/>
+        </p:spPr>
+        <p:txBody>
+          <a:bodyPr wrap="square">
+            <a:spAutoFit/>
+          </a:bodyPr>
+          <a:lstStyle/>
+          <a:p>
+            <a:pPr algn="l">
+              <a:defRPr sz="2800" b="1">
+                <a:solidFill>
+                  <a:srgbClr val="FFFFFF"/>
+                </a:solidFill>
+                <a:latin typeface="Segoe UI"/>
+              </a:defRPr>
+            </a:pPr>
+            <a:r>
+              <a:t>Killourhy &amp; Maxion — Keystroke Dynamics</a:t>
+            </a:r>
+          </a:p>
+        </p:txBody>
+      </p:sp>
+      <p:sp>
+        <p:nvSpPr>
+          <p:cNvPr id="4" name="TextBox 3"/>
+          <p:cNvSpPr txBox="1"/>
+          <p:nvPr/>
+        </p:nvSpPr>
+        <p:spPr>
+          <a:xfrm>
+            <a:off x="731520" y="685800"/>
+            <a:ext cx="10058400" cy="365760"/>
+          </a:xfrm>
+          <a:prstGeom prst="rect">
+            <a:avLst/>
+          </a:prstGeom>
+          <a:noFill/>
+        </p:spPr>
+        <p:txBody>
+          <a:bodyPr wrap="square">
+            <a:spAutoFit/>
+          </a:bodyPr>
+          <a:lstStyle/>
+          <a:p>
+            <a:pPr algn="l">
+              <a:defRPr sz="1400" b="0">
+                <a:solidFill>
+                  <a:srgbClr val="C5D5F0"/>
+                </a:solidFill>
+                <a:latin typeface="Segoe UI"/>
+              </a:defRPr>
+            </a:pPr>
+            <a:r>
+              <a:t>Literatura Acadêmica · IEEE/IFIP DSN 2009 · Benchmark CMU</a:t>
+            </a:r>
+          </a:p>
+        </p:txBody>
+      </p:sp>
+      <p:sp>
+        <p:nvSpPr>
+          <p:cNvPr id="5" name="Rectangle 4"/>
+          <p:cNvSpPr/>
+          <p:nvPr/>
+        </p:nvSpPr>
+        <p:spPr>
+          <a:xfrm>
+            <a:off x="0" y="1188720"/>
+            <a:ext cx="12191695" cy="54864"/>
+          </a:xfrm>
+          <a:prstGeom prst="rect">
+            <a:avLst/>
+          </a:prstGeom>
+          <a:solidFill>
+            <a:srgbClr val="CD191E"/>
+          </a:solidFill>
+          <a:ln>
+            <a:noFill/>
+          </a:ln>
+        </p:spPr>
+        <p:style>
+          <a:lnRef idx="1">
+            <a:schemeClr val="accent1"/>
+          </a:lnRef>
+          <a:fillRef idx="3">
+            <a:schemeClr val="accent1"/>
+          </a:fillRef>
+          <a:effectRef idx="2">
+            <a:schemeClr val="accent1"/>
+          </a:effectRef>
+          <a:fontRef idx="minor">
+            <a:schemeClr val="lt1"/>
+          </a:fontRef>
+        </p:style>
+        <p:txBody>
+          <a:bodyPr rtlCol="0" anchor="ctr"/>
+          <a:lstStyle/>
+          <a:p>
+            <a:pPr algn="ctr"/>
+          </a:p>
+        </p:txBody>
+      </p:sp>
+      <p:sp>
+        <p:nvSpPr>
+          <p:cNvPr id="6" name="Rounded Rectangle 5"/>
+          <p:cNvSpPr/>
+          <p:nvPr/>
+        </p:nvSpPr>
+        <p:spPr>
+          <a:xfrm>
+            <a:off x="548640" y="1463040"/>
+            <a:ext cx="11064240" cy="2377440"/>
+          </a:xfrm>
+          <a:prstGeom prst="roundRect">
+            <a:avLst>
+              <a:gd name="adj" fmla="val 5000"/>
+            </a:avLst>
+          </a:prstGeom>
+          <a:solidFill>
+            <a:srgbClr val="F0F2F5"/>
+          </a:solidFill>
+          <a:ln>
+            <a:noFill/>
+          </a:ln>
+        </p:spPr>
+        <p:style>
+          <a:lnRef idx="1">
+            <a:schemeClr val="accent1"/>
+          </a:lnRef>
+          <a:fillRef idx="3">
+            <a:schemeClr val="accent1"/>
+          </a:fillRef>
+          <a:effectRef idx="2">
+            <a:schemeClr val="accent1"/>
+          </a:effectRef>
+          <a:fontRef idx="minor">
+            <a:schemeClr val="lt1"/>
+          </a:fontRef>
+        </p:style>
+        <p:txBody>
+          <a:bodyPr rtlCol="0" anchor="ctr"/>
+          <a:lstStyle/>
+          <a:p>
+            <a:pPr algn="ctr"/>
+          </a:p>
+        </p:txBody>
+      </p:sp>
+      <p:sp>
+        <p:nvSpPr>
+          <p:cNvPr id="7" name="TextBox 6"/>
+          <p:cNvSpPr txBox="1"/>
+          <p:nvPr/>
+        </p:nvSpPr>
+        <p:spPr>
+          <a:xfrm>
+            <a:off x="731520" y="1554480"/>
+            <a:ext cx="10698480" cy="320040"/>
+          </a:xfrm>
+          <a:prstGeom prst="rect">
+            <a:avLst/>
+          </a:prstGeom>
+          <a:noFill/>
+        </p:spPr>
+        <p:txBody>
+          <a:bodyPr wrap="square">
+            <a:spAutoFit/>
+          </a:bodyPr>
+          <a:lstStyle/>
+          <a:p>
+            <a:pPr algn="l">
+              <a:defRPr sz="1400" b="1">
+                <a:solidFill>
+                  <a:srgbClr val="1351B4"/>
+                </a:solidFill>
+                <a:latin typeface="Segoe UI"/>
+              </a:defRPr>
+            </a:pPr>
+            <a:r>
+              <a:t>Resumo do Trabalho</a:t>
+            </a:r>
+          </a:p>
+        </p:txBody>
+      </p:sp>
+      <p:sp>
+        <p:nvSpPr>
+          <p:cNvPr id="8" name="TextBox 7"/>
+          <p:cNvSpPr txBox="1"/>
+          <p:nvPr/>
+        </p:nvSpPr>
+        <p:spPr>
+          <a:xfrm>
+            <a:off x="731520" y="1920240"/>
+            <a:ext cx="10698480" cy="1828800"/>
+          </a:xfrm>
+          <a:prstGeom prst="rect">
+            <a:avLst/>
+          </a:prstGeom>
+          <a:noFill/>
+        </p:spPr>
+        <p:txBody>
+          <a:bodyPr wrap="square">
+            <a:spAutoFit/>
+          </a:bodyPr>
+          <a:lstStyle/>
+          <a:p>
+            <a:pPr algn="l">
+              <a:defRPr sz="1400" b="0">
+                <a:solidFill>
+                  <a:srgbClr val="4A4A4A"/>
+                </a:solidFill>
+                <a:latin typeface="Segoe UI"/>
+              </a:defRPr>
+            </a:pPr>
+            <a:r>
+              <a:t>Estabelece um benchmark público para comparar, de forma justa, algoritmos de detecção de anomalia aplicados à dinâmica de digitação. Objetivo: avaliar, sob o mesmo dataset e métrica (EER), qual detector melhor distingue o usuário legítimo. Experimento: 51 sujeitos digitaram a senha ".tie5Roanl" 400 vezes, em 8 sessões, medindo tempos de hold e latências entre teclas. Resultado: 14 detectores comparados; o melhor (Manhattan escalonado) atingiu EER ≈ 9,6%.</a:t>
+            </a:r>
+          </a:p>
+        </p:txBody>
+      </p:sp>
+      <p:sp>
+        <p:nvSpPr>
+          <p:cNvPr id="9" name="Rounded Rectangle 8"/>
+          <p:cNvSpPr/>
+          <p:nvPr/>
+        </p:nvSpPr>
+        <p:spPr>
+          <a:xfrm>
+            <a:off x="548640" y="4023360"/>
+            <a:ext cx="11064240" cy="2468880"/>
+          </a:xfrm>
+          <a:prstGeom prst="roundRect">
+            <a:avLst>
+              <a:gd name="adj" fmla="val 5000"/>
+            </a:avLst>
+          </a:prstGeom>
+          <a:solidFill>
+            <a:srgbClr val="E8EEF8"/>
+          </a:solidFill>
+          <a:ln>
+            <a:noFill/>
+          </a:ln>
+        </p:spPr>
+        <p:style>
+          <a:lnRef idx="1">
+            <a:schemeClr val="accent1"/>
+          </a:lnRef>
+          <a:fillRef idx="3">
+            <a:schemeClr val="accent1"/>
+          </a:fillRef>
+          <a:effectRef idx="2">
+            <a:schemeClr val="accent1"/>
+          </a:effectRef>
+          <a:fontRef idx="minor">
+            <a:schemeClr val="lt1"/>
+          </a:fontRef>
+        </p:style>
+        <p:txBody>
+          <a:bodyPr rtlCol="0" anchor="ctr"/>
+          <a:lstStyle/>
+          <a:p>
+            <a:pPr algn="ctr"/>
+          </a:p>
+        </p:txBody>
+      </p:sp>
+      <p:sp>
+        <p:nvSpPr>
+          <p:cNvPr id="10" name="TextBox 9"/>
+          <p:cNvSpPr txBox="1"/>
+          <p:nvPr/>
+        </p:nvSpPr>
+        <p:spPr>
+          <a:xfrm>
+            <a:off x="731520" y="4114800"/>
+            <a:ext cx="10698480" cy="320040"/>
+          </a:xfrm>
+          <a:prstGeom prst="rect">
+            <a:avLst/>
+          </a:prstGeom>
+          <a:noFill/>
+        </p:spPr>
+        <p:txBody>
+          <a:bodyPr wrap="square">
+            <a:spAutoFit/>
+          </a:bodyPr>
+          <a:lstStyle/>
+          <a:p>
+            <a:pPr algn="l">
+              <a:defRPr sz="1400" b="1">
+                <a:solidFill>
+                  <a:srgbClr val="1351B4"/>
+                </a:solidFill>
+                <a:latin typeface="Segoe UI"/>
+              </a:defRPr>
+            </a:pPr>
+            <a:r>
+              <a:t>Comparação com a Proposta</a:t>
+            </a:r>
+          </a:p>
+        </p:txBody>
+      </p:sp>
+      <p:sp>
+        <p:nvSpPr>
+          <p:cNvPr id="11" name="TextBox 10"/>
+          <p:cNvSpPr txBox="1"/>
+          <p:nvPr/>
+        </p:nvSpPr>
+        <p:spPr>
+          <a:xfrm>
+            <a:off x="731520" y="4480560"/>
+            <a:ext cx="10698480" cy="1828800"/>
+          </a:xfrm>
+          <a:prstGeom prst="rect">
+            <a:avLst/>
+          </a:prstGeom>
+          <a:noFill/>
+        </p:spPr>
+        <p:txBody>
+          <a:bodyPr wrap="square">
+            <a:spAutoFit/>
+          </a:bodyPr>
+          <a:lstStyle/>
+          <a:p>
+            <a:pPr algn="l">
+              <a:defRPr sz="1400" b="0">
+                <a:solidFill>
+                  <a:srgbClr val="4A4A4A"/>
+                </a:solidFill>
+                <a:latin typeface="Segoe UI"/>
+              </a:defRPr>
+            </a:pPr>
+            <a:r>
+              <a:t>A proposta adota a mesma biometria comportamental (dinâmica de digitação) deste benchmark seminal, mas avança em três frentes: (i) integra a digitação a um ENSEMBLE de 3 modelos (IF+RF+DL) e 14 features contextuais, em vez de um único detector de distância; (ii) opera em AUTENTICAÇÃO CONTÍNUA e adaptativa na web, não em um teste offline de senha fixa; (iii) registra cada decisão em BLOCKCHAIN com EXPLICABILIDADE (SHAP) — ausentes no estudo, que é puramente comparativo de algoritmos.</a:t>
+            </a:r>
+          </a:p>
+        </p:txBody>
+      </p:sp>
+    </p:spTree>
+  </p:cSld>
+  <p:clrMapOvr>
+    <a:masterClrMapping/>
+  </p:clrMapOvr>
+</p:sld>
+</file>
+
+<file path=ppt/slides/slide17.xml><?xml version="1.0" encoding="utf-8"?>
+<p:sld xmlns:a="http://schemas.openxmlformats.org/drawingml/2006/main" xmlns:p="http://schemas.openxmlformats.org/presentationml/2006/main" xmlns:r="http://schemas.openxmlformats.org/officeDocument/2006/relationships">
+  <p:cSld>
+    <p:bg>
+      <p:bgPr>
+        <a:solidFill>
+          <a:srgbClr val="FFFFFF"/>
+        </a:solidFill>
+        <a:effectLst/>
+      </p:bgPr>
+    </p:bg>
+    <p:spTree>
+      <p:nvGrpSpPr>
+        <p:cNvPr id="1" name=""/>
+        <p:cNvGrpSpPr/>
+        <p:nvPr/>
+      </p:nvGrpSpPr>
+      <p:grpSpPr/>
+      <p:sp>
+        <p:nvSpPr>
+          <p:cNvPr id="2" name="Rectangle 1"/>
+          <p:cNvSpPr/>
+          <p:nvPr/>
+        </p:nvSpPr>
+        <p:spPr>
+          <a:xfrm>
+            <a:off x="0" y="0"/>
+            <a:ext cx="12191695" cy="1188720"/>
+          </a:xfrm>
+          <a:prstGeom prst="rect">
+            <a:avLst/>
+          </a:prstGeom>
+          <a:solidFill>
+            <a:srgbClr val="1351B4"/>
+          </a:solidFill>
+          <a:ln>
+            <a:noFill/>
+          </a:ln>
+        </p:spPr>
+        <p:style>
+          <a:lnRef idx="1">
+            <a:schemeClr val="accent1"/>
+          </a:lnRef>
+          <a:fillRef idx="3">
+            <a:schemeClr val="accent1"/>
+          </a:fillRef>
+          <a:effectRef idx="2">
+            <a:schemeClr val="accent1"/>
+          </a:effectRef>
+          <a:fontRef idx="minor">
+            <a:schemeClr val="lt1"/>
+          </a:fontRef>
+        </p:style>
+        <p:txBody>
+          <a:bodyPr rtlCol="0" anchor="ctr"/>
+          <a:lstStyle/>
+          <a:p>
+            <a:pPr algn="ctr"/>
+          </a:p>
+        </p:txBody>
+      </p:sp>
+      <p:sp>
+        <p:nvSpPr>
+          <p:cNvPr id="3" name="TextBox 2"/>
+          <p:cNvSpPr txBox="1"/>
+          <p:nvPr/>
+        </p:nvSpPr>
+        <p:spPr>
+          <a:xfrm>
+            <a:off x="731520" y="228600"/>
+            <a:ext cx="10058400" cy="548640"/>
+          </a:xfrm>
+          <a:prstGeom prst="rect">
+            <a:avLst/>
+          </a:prstGeom>
+          <a:noFill/>
+        </p:spPr>
+        <p:txBody>
+          <a:bodyPr wrap="square">
+            <a:spAutoFit/>
+          </a:bodyPr>
+          <a:lstStyle/>
+          <a:p>
+            <a:pPr algn="l">
+              <a:defRPr sz="2800" b="1">
+                <a:solidFill>
+                  <a:srgbClr val="FFFFFF"/>
+                </a:solidFill>
+                <a:latin typeface="Segoe UI"/>
+              </a:defRPr>
+            </a:pPr>
+            <a:r>
+              <a:t>Frank et al. — Touchalytics</a:t>
+            </a:r>
+          </a:p>
+        </p:txBody>
+      </p:sp>
+      <p:sp>
+        <p:nvSpPr>
+          <p:cNvPr id="4" name="TextBox 3"/>
+          <p:cNvSpPr txBox="1"/>
+          <p:nvPr/>
+        </p:nvSpPr>
+        <p:spPr>
+          <a:xfrm>
+            <a:off x="731520" y="685800"/>
+            <a:ext cx="10058400" cy="365760"/>
+          </a:xfrm>
+          <a:prstGeom prst="rect">
+            <a:avLst/>
+          </a:prstGeom>
+          <a:noFill/>
+        </p:spPr>
+        <p:txBody>
+          <a:bodyPr wrap="square">
+            <a:spAutoFit/>
+          </a:bodyPr>
+          <a:lstStyle/>
+          <a:p>
+            <a:pPr algn="l">
+              <a:defRPr sz="1400" b="0">
+                <a:solidFill>
+                  <a:srgbClr val="C5D5F0"/>
+                </a:solidFill>
+                <a:latin typeface="Segoe UI"/>
+              </a:defRPr>
+            </a:pPr>
+            <a:r>
+              <a:t>Literatura Acadêmica · IEEE TIFS 2013 · Autenticação Contínua</a:t>
+            </a:r>
+          </a:p>
+        </p:txBody>
+      </p:sp>
+      <p:sp>
+        <p:nvSpPr>
+          <p:cNvPr id="5" name="Rectangle 4"/>
+          <p:cNvSpPr/>
+          <p:nvPr/>
+        </p:nvSpPr>
+        <p:spPr>
+          <a:xfrm>
+            <a:off x="0" y="1188720"/>
+            <a:ext cx="12191695" cy="54864"/>
+          </a:xfrm>
+          <a:prstGeom prst="rect">
+            <a:avLst/>
+          </a:prstGeom>
+          <a:solidFill>
+            <a:srgbClr val="CD191E"/>
+          </a:solidFill>
+          <a:ln>
+            <a:noFill/>
+          </a:ln>
+        </p:spPr>
+        <p:style>
+          <a:lnRef idx="1">
+            <a:schemeClr val="accent1"/>
+          </a:lnRef>
+          <a:fillRef idx="3">
+            <a:schemeClr val="accent1"/>
+          </a:fillRef>
+          <a:effectRef idx="2">
+            <a:schemeClr val="accent1"/>
+          </a:effectRef>
+          <a:fontRef idx="minor">
+            <a:schemeClr val="lt1"/>
+          </a:fontRef>
+        </p:style>
+        <p:txBody>
+          <a:bodyPr rtlCol="0" anchor="ctr"/>
+          <a:lstStyle/>
+          <a:p>
+            <a:pPr algn="ctr"/>
+          </a:p>
+        </p:txBody>
+      </p:sp>
+      <p:sp>
+        <p:nvSpPr>
+          <p:cNvPr id="6" name="Rounded Rectangle 5"/>
+          <p:cNvSpPr/>
+          <p:nvPr/>
+        </p:nvSpPr>
+        <p:spPr>
+          <a:xfrm>
+            <a:off x="548640" y="1463040"/>
+            <a:ext cx="11064240" cy="2377440"/>
+          </a:xfrm>
+          <a:prstGeom prst="roundRect">
+            <a:avLst>
+              <a:gd name="adj" fmla="val 5000"/>
+            </a:avLst>
+          </a:prstGeom>
+          <a:solidFill>
+            <a:srgbClr val="F0F2F5"/>
+          </a:solidFill>
+          <a:ln>
+            <a:noFill/>
+          </a:ln>
+        </p:spPr>
+        <p:style>
+          <a:lnRef idx="1">
+            <a:schemeClr val="accent1"/>
+          </a:lnRef>
+          <a:fillRef idx="3">
+            <a:schemeClr val="accent1"/>
+          </a:fillRef>
+          <a:effectRef idx="2">
+            <a:schemeClr val="accent1"/>
+          </a:effectRef>
+          <a:fontRef idx="minor">
+            <a:schemeClr val="lt1"/>
+          </a:fontRef>
+        </p:style>
+        <p:txBody>
+          <a:bodyPr rtlCol="0" anchor="ctr"/>
+          <a:lstStyle/>
+          <a:p>
+            <a:pPr algn="ctr"/>
+          </a:p>
+        </p:txBody>
+      </p:sp>
+      <p:sp>
+        <p:nvSpPr>
+          <p:cNvPr id="7" name="TextBox 6"/>
+          <p:cNvSpPr txBox="1"/>
+          <p:nvPr/>
+        </p:nvSpPr>
+        <p:spPr>
+          <a:xfrm>
+            <a:off x="731520" y="1554480"/>
+            <a:ext cx="10698480" cy="320040"/>
+          </a:xfrm>
+          <a:prstGeom prst="rect">
+            <a:avLst/>
+          </a:prstGeom>
+          <a:noFill/>
+        </p:spPr>
+        <p:txBody>
+          <a:bodyPr wrap="square">
+            <a:spAutoFit/>
+          </a:bodyPr>
+          <a:lstStyle/>
+          <a:p>
+            <a:pPr algn="l">
+              <a:defRPr sz="1400" b="1">
+                <a:solidFill>
+                  <a:srgbClr val="1351B4"/>
+                </a:solidFill>
+                <a:latin typeface="Segoe UI"/>
+              </a:defRPr>
+            </a:pPr>
+            <a:r>
+              <a:t>Resumo do Trabalho</a:t>
+            </a:r>
+          </a:p>
+        </p:txBody>
+      </p:sp>
+      <p:sp>
+        <p:nvSpPr>
+          <p:cNvPr id="8" name="TextBox 7"/>
+          <p:cNvSpPr txBox="1"/>
+          <p:nvPr/>
+        </p:nvSpPr>
+        <p:spPr>
+          <a:xfrm>
+            <a:off x="731520" y="1920240"/>
+            <a:ext cx="10698480" cy="1828800"/>
+          </a:xfrm>
+          <a:prstGeom prst="rect">
+            <a:avLst/>
+          </a:prstGeom>
+          <a:noFill/>
+        </p:spPr>
+        <p:txBody>
+          <a:bodyPr wrap="square">
+            <a:spAutoFit/>
+          </a:bodyPr>
+          <a:lstStyle/>
+          <a:p>
+            <a:pPr algn="l">
+              <a:defRPr sz="1400" b="0">
+                <a:solidFill>
+                  <a:srgbClr val="4A4A4A"/>
+                </a:solidFill>
+                <a:latin typeface="Segoe UI"/>
+              </a:defRPr>
+            </a:pPr>
+            <a:r>
+              <a:t>Propõe usar o padrão de interação com a touchscreen (gestos de scroll e swipe) como biometria comportamental para autenticação CONTÍNUA em smartphones. Objetivo: verificar se gestos de navegação identificam o usuário durante o uso normal do aparelho. Experimento: 41 usuários Android, 30 features extraídas por gesto, classificadores kNN e SVM (kernel RBF). Resultado: EER mediano de 0% intra-sessão, 2-3% entre sessões e abaixo de 4% uma semana após o cadastro.</a:t>
+            </a:r>
+          </a:p>
+        </p:txBody>
+      </p:sp>
+      <p:sp>
+        <p:nvSpPr>
+          <p:cNvPr id="9" name="Rounded Rectangle 8"/>
+          <p:cNvSpPr/>
+          <p:nvPr/>
+        </p:nvSpPr>
+        <p:spPr>
+          <a:xfrm>
+            <a:off x="548640" y="4023360"/>
+            <a:ext cx="11064240" cy="2468880"/>
+          </a:xfrm>
+          <a:prstGeom prst="roundRect">
+            <a:avLst>
+              <a:gd name="adj" fmla="val 5000"/>
+            </a:avLst>
+          </a:prstGeom>
+          <a:solidFill>
+            <a:srgbClr val="E8EEF8"/>
+          </a:solidFill>
+          <a:ln>
+            <a:noFill/>
+          </a:ln>
+        </p:spPr>
+        <p:style>
+          <a:lnRef idx="1">
+            <a:schemeClr val="accent1"/>
+          </a:lnRef>
+          <a:fillRef idx="3">
+            <a:schemeClr val="accent1"/>
+          </a:fillRef>
+          <a:effectRef idx="2">
+            <a:schemeClr val="accent1"/>
+          </a:effectRef>
+          <a:fontRef idx="minor">
+            <a:schemeClr val="lt1"/>
+          </a:fontRef>
+        </p:style>
+        <p:txBody>
+          <a:bodyPr rtlCol="0" anchor="ctr"/>
+          <a:lstStyle/>
+          <a:p>
+            <a:pPr algn="ctr"/>
+          </a:p>
+        </p:txBody>
+      </p:sp>
+      <p:sp>
+        <p:nvSpPr>
+          <p:cNvPr id="10" name="TextBox 9"/>
+          <p:cNvSpPr txBox="1"/>
+          <p:nvPr/>
+        </p:nvSpPr>
+        <p:spPr>
+          <a:xfrm>
+            <a:off x="731520" y="4114800"/>
+            <a:ext cx="10698480" cy="320040"/>
+          </a:xfrm>
+          <a:prstGeom prst="rect">
+            <a:avLst/>
+          </a:prstGeom>
+          <a:noFill/>
+        </p:spPr>
+        <p:txBody>
+          <a:bodyPr wrap="square">
+            <a:spAutoFit/>
+          </a:bodyPr>
+          <a:lstStyle/>
+          <a:p>
+            <a:pPr algn="l">
+              <a:defRPr sz="1400" b="1">
+                <a:solidFill>
+                  <a:srgbClr val="1351B4"/>
+                </a:solidFill>
+                <a:latin typeface="Segoe UI"/>
+              </a:defRPr>
+            </a:pPr>
+            <a:r>
+              <a:t>Comparação com a Proposta</a:t>
+            </a:r>
+          </a:p>
+        </p:txBody>
+      </p:sp>
+      <p:sp>
+        <p:nvSpPr>
+          <p:cNvPr id="11" name="TextBox 10"/>
+          <p:cNvSpPr txBox="1"/>
+          <p:nvPr/>
+        </p:nvSpPr>
+        <p:spPr>
+          <a:xfrm>
+            <a:off x="731520" y="4480560"/>
+            <a:ext cx="10698480" cy="1828800"/>
+          </a:xfrm>
+          <a:prstGeom prst="rect">
+            <a:avLst/>
+          </a:prstGeom>
+          <a:noFill/>
+        </p:spPr>
+        <p:txBody>
+          <a:bodyPr wrap="square">
+            <a:spAutoFit/>
+          </a:bodyPr>
+          <a:lstStyle/>
+          <a:p>
+            <a:pPr algn="l">
+              <a:defRPr sz="1400" b="0">
+                <a:solidFill>
+                  <a:srgbClr val="4A4A4A"/>
+                </a:solidFill>
+                <a:latin typeface="Segoe UI"/>
+              </a:defRPr>
+            </a:pPr>
+            <a:r>
+              <a:t>Touchalytics valida o conceito central da proposta — autenticação CONTÍNUA por comportamento — porém no domínio touch/mobile. A proposta transpõe a ideia para aplicações WEB, combinando dinâmica de digitação, geolocalização e contexto de sessão. Diferenciais: (i) decisão em 4 NÍVEIS (permitir/MFA/MFA+alerta/bloquear), não binária; (ii) ENSEMBLE de 3 paradigmas de ML com pesos; (iii) DETECÇÃO DE DERIVA comportamental ao longo do tempo; (iv) trilha auditável em BLOCKCHAIN com explicabilidade SHAP.</a:t>
+            </a:r>
+          </a:p>
+        </p:txBody>
+      </p:sp>
+    </p:spTree>
+  </p:cSld>
+  <p:clrMapOvr>
+    <a:masterClrMapping/>
+  </p:clrMapOvr>
+</p:sld>
+</file>
+
+<file path=ppt/slides/slide18.xml><?xml version="1.0" encoding="utf-8"?>
+<p:sld xmlns:a="http://schemas.openxmlformats.org/drawingml/2006/main" xmlns:p="http://schemas.openxmlformats.org/presentationml/2006/main" xmlns:r="http://schemas.openxmlformats.org/officeDocument/2006/relationships">
+  <p:cSld>
+    <p:bg>
+      <p:bgPr>
+        <a:solidFill>
+          <a:srgbClr val="FFFFFF"/>
+        </a:solidFill>
+        <a:effectLst/>
+      </p:bgPr>
+    </p:bg>
+    <p:spTree>
+      <p:nvGrpSpPr>
+        <p:cNvPr id="1" name=""/>
+        <p:cNvGrpSpPr/>
+        <p:nvPr/>
+      </p:nvGrpSpPr>
+      <p:grpSpPr/>
+      <p:sp>
+        <p:nvSpPr>
+          <p:cNvPr id="2" name="Rectangle 1"/>
+          <p:cNvSpPr/>
+          <p:nvPr/>
+        </p:nvSpPr>
+        <p:spPr>
+          <a:xfrm>
+            <a:off x="0" y="0"/>
+            <a:ext cx="12191695" cy="1188720"/>
+          </a:xfrm>
+          <a:prstGeom prst="rect">
+            <a:avLst/>
+          </a:prstGeom>
+          <a:solidFill>
+            <a:srgbClr val="1351B4"/>
+          </a:solidFill>
+          <a:ln>
+            <a:noFill/>
+          </a:ln>
+        </p:spPr>
+        <p:style>
+          <a:lnRef idx="1">
+            <a:schemeClr val="accent1"/>
+          </a:lnRef>
+          <a:fillRef idx="3">
+            <a:schemeClr val="accent1"/>
+          </a:fillRef>
+          <a:effectRef idx="2">
+            <a:schemeClr val="accent1"/>
+          </a:effectRef>
+          <a:fontRef idx="minor">
+            <a:schemeClr val="lt1"/>
+          </a:fontRef>
+        </p:style>
+        <p:txBody>
+          <a:bodyPr rtlCol="0" anchor="ctr"/>
+          <a:lstStyle/>
+          <a:p>
+            <a:pPr algn="ctr"/>
+          </a:p>
+        </p:txBody>
+      </p:sp>
+      <p:sp>
+        <p:nvSpPr>
+          <p:cNvPr id="3" name="TextBox 2"/>
+          <p:cNvSpPr txBox="1"/>
+          <p:nvPr/>
+        </p:nvSpPr>
+        <p:spPr>
+          <a:xfrm>
+            <a:off x="731520" y="228600"/>
+            <a:ext cx="10058400" cy="548640"/>
+          </a:xfrm>
+          <a:prstGeom prst="rect">
+            <a:avLst/>
+          </a:prstGeom>
+          <a:noFill/>
+        </p:spPr>
+        <p:txBody>
+          <a:bodyPr wrap="square">
+            <a:spAutoFit/>
+          </a:bodyPr>
+          <a:lstStyle/>
+          <a:p>
+            <a:pPr algn="l">
+              <a:defRPr sz="2800" b="1">
+                <a:solidFill>
+                  <a:srgbClr val="FFFFFF"/>
+                </a:solidFill>
+                <a:latin typeface="Segoe UI"/>
+              </a:defRPr>
+            </a:pPr>
+            <a:r>
+              <a:t>Wiefling et al. — Risk-Based Authentication</a:t>
+            </a:r>
+          </a:p>
+        </p:txBody>
+      </p:sp>
+      <p:sp>
+        <p:nvSpPr>
+          <p:cNvPr id="4" name="TextBox 3"/>
+          <p:cNvSpPr txBox="1"/>
+          <p:nvPr/>
+        </p:nvSpPr>
+        <p:spPr>
+          <a:xfrm>
+            <a:off x="731520" y="685800"/>
+            <a:ext cx="10058400" cy="365760"/>
+          </a:xfrm>
+          <a:prstGeom prst="rect">
+            <a:avLst/>
+          </a:prstGeom>
+          <a:noFill/>
+        </p:spPr>
+        <p:txBody>
+          <a:bodyPr wrap="square">
+            <a:spAutoFit/>
+          </a:bodyPr>
+          <a:lstStyle/>
+          <a:p>
+            <a:pPr algn="l">
+              <a:defRPr sz="1400" b="0">
+                <a:solidFill>
+                  <a:srgbClr val="C5D5F0"/>
+                </a:solidFill>
+                <a:latin typeface="Segoe UI"/>
+              </a:defRPr>
+            </a:pPr>
+            <a:r>
+              <a:t>Literatura Acadêmica · IFIP SEC 2019 · Autenticação Adaptativa</a:t>
+            </a:r>
+          </a:p>
+        </p:txBody>
+      </p:sp>
+      <p:sp>
+        <p:nvSpPr>
+          <p:cNvPr id="5" name="Rectangle 4"/>
+          <p:cNvSpPr/>
+          <p:nvPr/>
+        </p:nvSpPr>
+        <p:spPr>
+          <a:xfrm>
+            <a:off x="0" y="1188720"/>
+            <a:ext cx="12191695" cy="54864"/>
+          </a:xfrm>
+          <a:prstGeom prst="rect">
+            <a:avLst/>
+          </a:prstGeom>
+          <a:solidFill>
+            <a:srgbClr val="CD191E"/>
+          </a:solidFill>
+          <a:ln>
+            <a:noFill/>
+          </a:ln>
+        </p:spPr>
+        <p:style>
+          <a:lnRef idx="1">
+            <a:schemeClr val="accent1"/>
+          </a:lnRef>
+          <a:fillRef idx="3">
+            <a:schemeClr val="accent1"/>
+          </a:fillRef>
+          <a:effectRef idx="2">
+            <a:schemeClr val="accent1"/>
+          </a:effectRef>
+          <a:fontRef idx="minor">
+            <a:schemeClr val="lt1"/>
+          </a:fontRef>
+        </p:style>
+        <p:txBody>
+          <a:bodyPr rtlCol="0" anchor="ctr"/>
+          <a:lstStyle/>
+          <a:p>
+            <a:pPr algn="ctr"/>
+          </a:p>
+        </p:txBody>
+      </p:sp>
+      <p:sp>
+        <p:nvSpPr>
+          <p:cNvPr id="6" name="Rounded Rectangle 5"/>
+          <p:cNvSpPr/>
+          <p:nvPr/>
+        </p:nvSpPr>
+        <p:spPr>
+          <a:xfrm>
+            <a:off x="548640" y="1463040"/>
+            <a:ext cx="11064240" cy="2377440"/>
+          </a:xfrm>
+          <a:prstGeom prst="roundRect">
+            <a:avLst>
+              <a:gd name="adj" fmla="val 5000"/>
+            </a:avLst>
+          </a:prstGeom>
+          <a:solidFill>
+            <a:srgbClr val="F0F2F5"/>
+          </a:solidFill>
+          <a:ln>
+            <a:noFill/>
+          </a:ln>
+        </p:spPr>
+        <p:style>
+          <a:lnRef idx="1">
+            <a:schemeClr val="accent1"/>
+          </a:lnRef>
+          <a:fillRef idx="3">
+            <a:schemeClr val="accent1"/>
+          </a:fillRef>
+          <a:effectRef idx="2">
+            <a:schemeClr val="accent1"/>
+          </a:effectRef>
+          <a:fontRef idx="minor">
+            <a:schemeClr val="lt1"/>
+          </a:fontRef>
+        </p:style>
+        <p:txBody>
+          <a:bodyPr rtlCol="0" anchor="ctr"/>
+          <a:lstStyle/>
+          <a:p>
+            <a:pPr algn="ctr"/>
+          </a:p>
+        </p:txBody>
+      </p:sp>
+      <p:sp>
+        <p:nvSpPr>
+          <p:cNvPr id="7" name="TextBox 6"/>
+          <p:cNvSpPr txBox="1"/>
+          <p:nvPr/>
+        </p:nvSpPr>
+        <p:spPr>
+          <a:xfrm>
+            <a:off x="731520" y="1554480"/>
+            <a:ext cx="10698480" cy="320040"/>
+          </a:xfrm>
+          <a:prstGeom prst="rect">
+            <a:avLst/>
+          </a:prstGeom>
+          <a:noFill/>
+        </p:spPr>
+        <p:txBody>
+          <a:bodyPr wrap="square">
+            <a:spAutoFit/>
+          </a:bodyPr>
+          <a:lstStyle/>
+          <a:p>
+            <a:pPr algn="l">
+              <a:defRPr sz="1400" b="1">
+                <a:solidFill>
+                  <a:srgbClr val="1351B4"/>
+                </a:solidFill>
+                <a:latin typeface="Segoe UI"/>
+              </a:defRPr>
+            </a:pPr>
+            <a:r>
+              <a:t>Resumo do Trabalho</a:t>
+            </a:r>
+          </a:p>
+        </p:txBody>
+      </p:sp>
+      <p:sp>
+        <p:nvSpPr>
+          <p:cNvPr id="8" name="TextBox 7"/>
+          <p:cNvSpPr txBox="1"/>
+          <p:nvPr/>
+        </p:nvSpPr>
+        <p:spPr>
+          <a:xfrm>
+            <a:off x="731520" y="1920240"/>
+            <a:ext cx="10698480" cy="1828800"/>
+          </a:xfrm>
+          <a:prstGeom prst="rect">
+            <a:avLst/>
+          </a:prstGeom>
+          <a:noFill/>
+        </p:spPr>
+        <p:txBody>
+          <a:bodyPr wrap="square">
+            <a:spAutoFit/>
+          </a:bodyPr>
+          <a:lstStyle/>
+          <a:p>
+            <a:pPr algn="l">
+              <a:defRPr sz="1400" b="0">
+                <a:solidFill>
+                  <a:srgbClr val="4A4A4A"/>
+                </a:solidFill>
+                <a:latin typeface="Segoe UI"/>
+              </a:defRPr>
+            </a:pPr>
+            <a:r>
+              <a:t>Primeiro estudo empírico que investiga, de forma caixa-preta, como serviços reais implementam Risk-Based Authentication (RBA) — recurso recomendado pelas diretrizes do NIST que monitora features implícitas no login e exige fator adicional sob risco elevado. Experimento: análise de 8 serviços online populares (entre eles Google e GOG.com). Achados: todos usam o endereço IP como feature de maior peso; as implementações são pouco transparentes e muito inconsistentes entre si.</a:t>
+            </a:r>
+          </a:p>
+        </p:txBody>
+      </p:sp>
+      <p:sp>
+        <p:nvSpPr>
+          <p:cNvPr id="9" name="Rounded Rectangle 8"/>
+          <p:cNvSpPr/>
+          <p:nvPr/>
+        </p:nvSpPr>
+        <p:spPr>
+          <a:xfrm>
+            <a:off x="548640" y="4023360"/>
+            <a:ext cx="11064240" cy="2468880"/>
+          </a:xfrm>
+          <a:prstGeom prst="roundRect">
+            <a:avLst>
+              <a:gd name="adj" fmla="val 5000"/>
+            </a:avLst>
+          </a:prstGeom>
+          <a:solidFill>
+            <a:srgbClr val="E8EEF8"/>
+          </a:solidFill>
+          <a:ln>
+            <a:noFill/>
+          </a:ln>
+        </p:spPr>
+        <p:style>
+          <a:lnRef idx="1">
+            <a:schemeClr val="accent1"/>
+          </a:lnRef>
+          <a:fillRef idx="3">
+            <a:schemeClr val="accent1"/>
+          </a:fillRef>
+          <a:effectRef idx="2">
+            <a:schemeClr val="accent1"/>
+          </a:effectRef>
+          <a:fontRef idx="minor">
+            <a:schemeClr val="lt1"/>
+          </a:fontRef>
+        </p:style>
+        <p:txBody>
+          <a:bodyPr rtlCol="0" anchor="ctr"/>
+          <a:lstStyle/>
+          <a:p>
+            <a:pPr algn="ctr"/>
+          </a:p>
+        </p:txBody>
+      </p:sp>
+      <p:sp>
+        <p:nvSpPr>
+          <p:cNvPr id="10" name="TextBox 9"/>
+          <p:cNvSpPr txBox="1"/>
+          <p:nvPr/>
+        </p:nvSpPr>
+        <p:spPr>
+          <a:xfrm>
+            <a:off x="731520" y="4114800"/>
+            <a:ext cx="10698480" cy="320040"/>
+          </a:xfrm>
+          <a:prstGeom prst="rect">
+            <a:avLst/>
+          </a:prstGeom>
+          <a:noFill/>
+        </p:spPr>
+        <p:txBody>
+          <a:bodyPr wrap="square">
+            <a:spAutoFit/>
+          </a:bodyPr>
+          <a:lstStyle/>
+          <a:p>
+            <a:pPr algn="l">
+              <a:defRPr sz="1400" b="1">
+                <a:solidFill>
+                  <a:srgbClr val="1351B4"/>
+                </a:solidFill>
+                <a:latin typeface="Segoe UI"/>
+              </a:defRPr>
+            </a:pPr>
+            <a:r>
+              <a:t>Comparação com a Proposta</a:t>
+            </a:r>
+          </a:p>
+        </p:txBody>
+      </p:sp>
+      <p:sp>
+        <p:nvSpPr>
+          <p:cNvPr id="11" name="TextBox 10"/>
+          <p:cNvSpPr txBox="1"/>
+          <p:nvPr/>
+        </p:nvSpPr>
+        <p:spPr>
+          <a:xfrm>
+            <a:off x="731520" y="4480560"/>
+            <a:ext cx="10698480" cy="1828800"/>
+          </a:xfrm>
+          <a:prstGeom prst="rect">
+            <a:avLst/>
+          </a:prstGeom>
+          <a:noFill/>
+        </p:spPr>
+        <p:txBody>
+          <a:bodyPr wrap="square">
+            <a:spAutoFit/>
+          </a:bodyPr>
+          <a:lstStyle/>
+          <a:p>
+            <a:pPr algn="l">
+              <a:defRPr sz="1400" b="0">
+                <a:solidFill>
+                  <a:srgbClr val="4A4A4A"/>
+                </a:solidFill>
+                <a:latin typeface="Segoe UI"/>
+              </a:defRPr>
+            </a:pPr>
+            <a:r>
+              <a:t>A proposta materializa a filosofia de RBA estudada, porém de forma ABERTA e mais rica. Enquanto os serviços analisados dependem fortemente do IP e mantêm a lógica oculta, a proposta: (i) combina 14 features (digitação, geolocalização, dispositivo, horário) em um SCORE CONTÍNUO de 0,0 a 1,0; (ii) é transparente e reprodutível, com EXPLICABILIDADE por decisão (SHAP); (iii) escalona a resposta em 4 NÍVEIS; (iv) registra o histórico de risco em BLOCKCHAIN imutável — endereçando a falta de transparência apontada pelo estudo.</a:t>
+            </a:r>
+          </a:p>
+        </p:txBody>
+      </p:sp>
+    </p:spTree>
+  </p:cSld>
+  <p:clrMapOvr>
+    <a:masterClrMapping/>
+  </p:clrMapOvr>
+</p:sld>
+</file>
+
+<file path=ppt/slides/slide19.xml><?xml version="1.0" encoding="utf-8"?>
+<p:sld xmlns:a="http://schemas.openxmlformats.org/drawingml/2006/main" xmlns:p="http://schemas.openxmlformats.org/presentationml/2006/main" xmlns:r="http://schemas.openxmlformats.org/officeDocument/2006/relationships">
+  <p:cSld>
+    <p:bg>
+      <p:bgPr>
+        <a:solidFill>
+          <a:srgbClr val="FFFFFF"/>
+        </a:solidFill>
+        <a:effectLst/>
+      </p:bgPr>
+    </p:bg>
+    <p:spTree>
+      <p:nvGrpSpPr>
+        <p:cNvPr id="1" name=""/>
+        <p:cNvGrpSpPr/>
+        <p:nvPr/>
+      </p:nvGrpSpPr>
+      <p:grpSpPr/>
+      <p:sp>
+        <p:nvSpPr>
+          <p:cNvPr id="2" name="Rectangle 1"/>
+          <p:cNvSpPr/>
+          <p:nvPr/>
+        </p:nvSpPr>
+        <p:spPr>
+          <a:xfrm>
+            <a:off x="0" y="0"/>
+            <a:ext cx="12191695" cy="1188720"/>
+          </a:xfrm>
+          <a:prstGeom prst="rect">
+            <a:avLst/>
+          </a:prstGeom>
+          <a:solidFill>
+            <a:srgbClr val="1351B4"/>
+          </a:solidFill>
+          <a:ln>
+            <a:noFill/>
+          </a:ln>
+        </p:spPr>
+        <p:style>
+          <a:lnRef idx="1">
+            <a:schemeClr val="accent1"/>
+          </a:lnRef>
+          <a:fillRef idx="3">
+            <a:schemeClr val="accent1"/>
+          </a:fillRef>
+          <a:effectRef idx="2">
+            <a:schemeClr val="accent1"/>
+          </a:effectRef>
+          <a:fontRef idx="minor">
+            <a:schemeClr val="lt1"/>
+          </a:fontRef>
+        </p:style>
+        <p:txBody>
+          <a:bodyPr rtlCol="0" anchor="ctr"/>
+          <a:lstStyle/>
+          <a:p>
+            <a:pPr algn="ctr"/>
+          </a:p>
+        </p:txBody>
+      </p:sp>
+      <p:sp>
+        <p:nvSpPr>
+          <p:cNvPr id="3" name="TextBox 2"/>
+          <p:cNvSpPr txBox="1"/>
+          <p:nvPr/>
+        </p:nvSpPr>
+        <p:spPr>
+          <a:xfrm>
+            <a:off x="731520" y="228600"/>
+            <a:ext cx="10058400" cy="548640"/>
+          </a:xfrm>
+          <a:prstGeom prst="rect">
+            <a:avLst/>
+          </a:prstGeom>
+          <a:noFill/>
+        </p:spPr>
+        <p:txBody>
+          <a:bodyPr wrap="square">
+            <a:spAutoFit/>
+          </a:bodyPr>
+          <a:lstStyle/>
+          <a:p>
+            <a:pPr algn="l">
+              <a:defRPr sz="2800" b="1">
+                <a:solidFill>
+                  <a:srgbClr val="FFFFFF"/>
+                </a:solidFill>
+                <a:latin typeface="Segoe UI"/>
+              </a:defRPr>
+            </a:pPr>
+            <a:r>
+              <a:t>Liu, Ting &amp; Zhou — Isolation Forest</a:t>
+            </a:r>
+          </a:p>
+        </p:txBody>
+      </p:sp>
+      <p:sp>
+        <p:nvSpPr>
+          <p:cNvPr id="4" name="TextBox 3"/>
+          <p:cNvSpPr txBox="1"/>
+          <p:nvPr/>
+        </p:nvSpPr>
+        <p:spPr>
+          <a:xfrm>
+            <a:off x="731520" y="685800"/>
+            <a:ext cx="10058400" cy="365760"/>
+          </a:xfrm>
+          <a:prstGeom prst="rect">
+            <a:avLst/>
+          </a:prstGeom>
+          <a:noFill/>
+        </p:spPr>
+        <p:txBody>
+          <a:bodyPr wrap="square">
+            <a:spAutoFit/>
+          </a:bodyPr>
+          <a:lstStyle/>
+          <a:p>
+            <a:pPr algn="l">
+              <a:defRPr sz="1400" b="0">
+                <a:solidFill>
+                  <a:srgbClr val="C5D5F0"/>
+                </a:solidFill>
+                <a:latin typeface="Segoe UI"/>
+              </a:defRPr>
+            </a:pPr>
+            <a:r>
+              <a:t>Literatura Acadêmica · IEEE ICDM 2008 · Detecção de Anomalias</a:t>
+            </a:r>
+          </a:p>
+        </p:txBody>
+      </p:sp>
+      <p:sp>
+        <p:nvSpPr>
+          <p:cNvPr id="5" name="Rectangle 4"/>
+          <p:cNvSpPr/>
+          <p:nvPr/>
+        </p:nvSpPr>
+        <p:spPr>
+          <a:xfrm>
+            <a:off x="0" y="1188720"/>
+            <a:ext cx="12191695" cy="54864"/>
+          </a:xfrm>
+          <a:prstGeom prst="rect">
+            <a:avLst/>
+          </a:prstGeom>
+          <a:solidFill>
+            <a:srgbClr val="CD191E"/>
+          </a:solidFill>
+          <a:ln>
+            <a:noFill/>
+          </a:ln>
+        </p:spPr>
+        <p:style>
+          <a:lnRef idx="1">
+            <a:schemeClr val="accent1"/>
+          </a:lnRef>
+          <a:fillRef idx="3">
+            <a:schemeClr val="accent1"/>
+          </a:fillRef>
+          <a:effectRef idx="2">
+            <a:schemeClr val="accent1"/>
+          </a:effectRef>
+          <a:fontRef idx="minor">
+            <a:schemeClr val="lt1"/>
+          </a:fontRef>
+        </p:style>
+        <p:txBody>
+          <a:bodyPr rtlCol="0" anchor="ctr"/>
+          <a:lstStyle/>
+          <a:p>
+            <a:pPr algn="ctr"/>
+          </a:p>
+        </p:txBody>
+      </p:sp>
+      <p:sp>
+        <p:nvSpPr>
+          <p:cNvPr id="6" name="Rounded Rectangle 5"/>
+          <p:cNvSpPr/>
+          <p:nvPr/>
+        </p:nvSpPr>
+        <p:spPr>
+          <a:xfrm>
+            <a:off x="548640" y="1463040"/>
+            <a:ext cx="11064240" cy="2377440"/>
+          </a:xfrm>
+          <a:prstGeom prst="roundRect">
+            <a:avLst>
+              <a:gd name="adj" fmla="val 5000"/>
+            </a:avLst>
+          </a:prstGeom>
+          <a:solidFill>
+            <a:srgbClr val="F0F2F5"/>
+          </a:solidFill>
+          <a:ln>
+            <a:noFill/>
+          </a:ln>
+        </p:spPr>
+        <p:style>
+          <a:lnRef idx="1">
+            <a:schemeClr val="accent1"/>
+          </a:lnRef>
+          <a:fillRef idx="3">
+            <a:schemeClr val="accent1"/>
+          </a:fillRef>
+          <a:effectRef idx="2">
+            <a:schemeClr val="accent1"/>
+          </a:effectRef>
+          <a:fontRef idx="minor">
+            <a:schemeClr val="lt1"/>
+          </a:fontRef>
+        </p:style>
+        <p:txBody>
+          <a:bodyPr rtlCol="0" anchor="ctr"/>
+          <a:lstStyle/>
+          <a:p>
+            <a:pPr algn="ctr"/>
+          </a:p>
+        </p:txBody>
+      </p:sp>
+      <p:sp>
+        <p:nvSpPr>
+          <p:cNvPr id="7" name="TextBox 6"/>
+          <p:cNvSpPr txBox="1"/>
+          <p:nvPr/>
+        </p:nvSpPr>
+        <p:spPr>
+          <a:xfrm>
+            <a:off x="731520" y="1554480"/>
+            <a:ext cx="10698480" cy="320040"/>
+          </a:xfrm>
+          <a:prstGeom prst="rect">
+            <a:avLst/>
+          </a:prstGeom>
+          <a:noFill/>
+        </p:spPr>
+        <p:txBody>
+          <a:bodyPr wrap="square">
+            <a:spAutoFit/>
+          </a:bodyPr>
+          <a:lstStyle/>
+          <a:p>
+            <a:pPr algn="l">
+              <a:defRPr sz="1400" b="1">
+                <a:solidFill>
+                  <a:srgbClr val="1351B4"/>
+                </a:solidFill>
+                <a:latin typeface="Segoe UI"/>
+              </a:defRPr>
+            </a:pPr>
+            <a:r>
+              <a:t>Resumo do Trabalho</a:t>
+            </a:r>
+          </a:p>
+        </p:txBody>
+      </p:sp>
+      <p:sp>
+        <p:nvSpPr>
+          <p:cNvPr id="8" name="TextBox 7"/>
+          <p:cNvSpPr txBox="1"/>
+          <p:nvPr/>
+        </p:nvSpPr>
+        <p:spPr>
+          <a:xfrm>
+            <a:off x="731520" y="1920240"/>
+            <a:ext cx="10698480" cy="1828800"/>
+          </a:xfrm>
+          <a:prstGeom prst="rect">
+            <a:avLst/>
+          </a:prstGeom>
+          <a:noFill/>
+        </p:spPr>
+        <p:txBody>
+          <a:bodyPr wrap="square">
+            <a:spAutoFit/>
+          </a:bodyPr>
+          <a:lstStyle/>
+          <a:p>
+            <a:pPr algn="l">
+              <a:defRPr sz="1400" b="0">
+                <a:solidFill>
+                  <a:srgbClr val="4A4A4A"/>
+                </a:solidFill>
+                <a:latin typeface="Segoe UI"/>
+              </a:defRPr>
+            </a:pPr>
+            <a:r>
+              <a:t>Introduz o Isolation Forest (iForest), método de detecção de anomalias que ISOLA explicitamente os pontos atípicos em vez de modelar o comportamento normal. Constrói árvores de partição aleatória nas quais anomalias, por serem raras e diferentes, são isoladas com caminhos mais curtos. Vantagens: complexidade de tempo LINEAR, baixo uso de memória e bom aproveitamento de sub-amostragem, escalando para grandes volumes de dados e alta dimensionalidade.</a:t>
+            </a:r>
+          </a:p>
+        </p:txBody>
+      </p:sp>
+      <p:sp>
+        <p:nvSpPr>
+          <p:cNvPr id="9" name="Rounded Rectangle 8"/>
+          <p:cNvSpPr/>
+          <p:nvPr/>
+        </p:nvSpPr>
+        <p:spPr>
+          <a:xfrm>
+            <a:off x="548640" y="4023360"/>
+            <a:ext cx="11064240" cy="2468880"/>
+          </a:xfrm>
+          <a:prstGeom prst="roundRect">
+            <a:avLst>
+              <a:gd name="adj" fmla="val 5000"/>
+            </a:avLst>
+          </a:prstGeom>
+          <a:solidFill>
+            <a:srgbClr val="E8EEF8"/>
+          </a:solidFill>
+          <a:ln>
+            <a:noFill/>
+          </a:ln>
+        </p:spPr>
+        <p:style>
+          <a:lnRef idx="1">
+            <a:schemeClr val="accent1"/>
+          </a:lnRef>
+          <a:fillRef idx="3">
+            <a:schemeClr val="accent1"/>
+          </a:fillRef>
+          <a:effectRef idx="2">
+            <a:schemeClr val="accent1"/>
+          </a:effectRef>
+          <a:fontRef idx="minor">
+            <a:schemeClr val="lt1"/>
+          </a:fontRef>
+        </p:style>
+        <p:txBody>
+          <a:bodyPr rtlCol="0" anchor="ctr"/>
+          <a:lstStyle/>
+          <a:p>
+            <a:pPr algn="ctr"/>
+          </a:p>
+        </p:txBody>
+      </p:sp>
+      <p:sp>
+        <p:nvSpPr>
+          <p:cNvPr id="10" name="TextBox 9"/>
+          <p:cNvSpPr txBox="1"/>
+          <p:nvPr/>
+        </p:nvSpPr>
+        <p:spPr>
+          <a:xfrm>
+            <a:off x="731520" y="4114800"/>
+            <a:ext cx="10698480" cy="320040"/>
+          </a:xfrm>
+          <a:prstGeom prst="rect">
+            <a:avLst/>
+          </a:prstGeom>
+          <a:noFill/>
+        </p:spPr>
+        <p:txBody>
+          <a:bodyPr wrap="square">
+            <a:spAutoFit/>
+          </a:bodyPr>
+          <a:lstStyle/>
+          <a:p>
+            <a:pPr algn="l">
+              <a:defRPr sz="1400" b="1">
+                <a:solidFill>
+                  <a:srgbClr val="1351B4"/>
+                </a:solidFill>
+                <a:latin typeface="Segoe UI"/>
+              </a:defRPr>
+            </a:pPr>
+            <a:r>
+              <a:t>Comparação com a Proposta</a:t>
+            </a:r>
+          </a:p>
+        </p:txBody>
+      </p:sp>
+      <p:sp>
+        <p:nvSpPr>
+          <p:cNvPr id="11" name="TextBox 10"/>
+          <p:cNvSpPr txBox="1"/>
+          <p:nvPr/>
+        </p:nvSpPr>
+        <p:spPr>
+          <a:xfrm>
+            <a:off x="731520" y="4480560"/>
+            <a:ext cx="10698480" cy="1828800"/>
+          </a:xfrm>
+          <a:prstGeom prst="rect">
+            <a:avLst/>
+          </a:prstGeom>
+          <a:noFill/>
+        </p:spPr>
+        <p:txBody>
+          <a:bodyPr wrap="square">
+            <a:spAutoFit/>
+          </a:bodyPr>
+          <a:lstStyle/>
+          <a:p>
+            <a:pPr algn="l">
+              <a:defRPr sz="1400" b="0">
+                <a:solidFill>
+                  <a:srgbClr val="4A4A4A"/>
+                </a:solidFill>
+                <a:latin typeface="Segoe UI"/>
+              </a:defRPr>
+            </a:pPr>
+            <a:r>
+              <a:t>O Isolation Forest é exatamente o algoritmo que a proposta adota como componente de MAIOR peso (40%) em seu ensemble. A contribuição da proposta não é o algoritmo em si, mas sua ORQUESTRAÇÃO aplicada: (i) combina o iForest (não supervisionado) com Random Forest (30%) e Deep Learning (30%) num score unificado; (ii) aplica-o a 14 features específicas de autenticação; (iii) torna sua saída AUDITÁVEL via blockchain e EXPLICÁVEL via SHAP — levando um detector clássico de anomalias para um sistema de autenticação adaptativa em produção.</a:t>
+            </a:r>
+          </a:p>
+        </p:txBody>
+      </p:sp>
+    </p:spTree>
+  </p:cSld>
+  <p:clrMapOvr>
+    <a:masterClrMapping/>
+  </p:clrMapOvr>
+</p:sld>
+</file>
+
 <file path=ppt/slides/slide2.xml><?xml version="1.0" encoding="utf-8"?>
 <p:sld xmlns:a="http://schemas.openxmlformats.org/drawingml/2006/main" xmlns:p="http://schemas.openxmlformats.org/presentationml/2006/main" xmlns:r="http://schemas.openxmlformats.org/officeDocument/2006/relationships">
   <p:cSld>
@@ -7806,7 +10565,7 @@
               </a:defRPr>
             </a:pPr>
             <a:r>
-              <a:t>Quadro Comparativo dos 5 Projetos</a:t>
+              <a:t>Quadros Comparativos — Academia e Indústria</a:t>
             </a:r>
           </a:p>
         </p:txBody>
@@ -8040,7 +10799,7 @@
               </a:defRPr>
             </a:pPr>
             <a:r>
-              <a:t>unico|check — Biometria Facial</a:t>
+              <a:t>Biometria e Autenticação Contínua (Killourhy, Touchalytics, unico)</a:t>
             </a:r>
           </a:p>
         </p:txBody>
@@ -8157,7 +10916,7 @@
               </a:defRPr>
             </a:pPr>
             <a:r>
-              <a:t>unico|people — Admissão Digital (ex-Acesso Digital)</a:t>
+              <a:t>Autenticação Adaptativa e KYC (Wiefling/RBA, idwall, CAF)</a:t>
             </a:r>
           </a:p>
         </p:txBody>
@@ -8274,7 +11033,7 @@
               </a:defRPr>
             </a:pPr>
             <a:r>
-              <a:t>idwall — KYC com Machine Learning</a:t>
+              <a:t>Núcleo de IA: Ensemble (Isolation Forest) e XAI/SHAP</a:t>
             </a:r>
           </a:p>
         </p:txBody>
@@ -8391,7 +11150,7 @@
               </a:defRPr>
             </a:pPr>
             <a:r>
-              <a:t>CAF — Combate à Fraude e Orquestração de Identidade</a:t>
+              <a:t>gov.br / Serpro — Identidade Digital Federal</a:t>
             </a:r>
           </a:p>
         </p:txBody>
@@ -8508,7 +11267,7 @@
               </a:defRPr>
             </a:pPr>
             <a:r>
-              <a:t>gov.br / Serpro — Identidade Digital Federal</a:t>
+              <a:t>Síntese Comparativa</a:t>
             </a:r>
           </a:p>
         </p:txBody>
@@ -8625,7 +11384,4616 @@
               </a:defRPr>
             </a:pPr>
             <a:r>
-              <a:t>Síntese Comparativa e Lacunas Identificadas</a:t>
+              <a:t>Lacunas e Contribuições Originais</a:t>
+            </a:r>
+          </a:p>
+        </p:txBody>
+      </p:sp>
+    </p:spTree>
+  </p:cSld>
+  <p:clrMapOvr>
+    <a:masterClrMapping/>
+  </p:clrMapOvr>
+</p:sld>
+</file>
+
+<file path=ppt/slides/slide20.xml><?xml version="1.0" encoding="utf-8"?>
+<p:sld xmlns:a="http://schemas.openxmlformats.org/drawingml/2006/main" xmlns:p="http://schemas.openxmlformats.org/presentationml/2006/main" xmlns:r="http://schemas.openxmlformats.org/officeDocument/2006/relationships">
+  <p:cSld>
+    <p:bg>
+      <p:bgPr>
+        <a:solidFill>
+          <a:srgbClr val="FFFFFF"/>
+        </a:solidFill>
+        <a:effectLst/>
+      </p:bgPr>
+    </p:bg>
+    <p:spTree>
+      <p:nvGrpSpPr>
+        <p:cNvPr id="1" name=""/>
+        <p:cNvGrpSpPr/>
+        <p:nvPr/>
+      </p:nvGrpSpPr>
+      <p:grpSpPr/>
+      <p:sp>
+        <p:nvSpPr>
+          <p:cNvPr id="2" name="Rectangle 1"/>
+          <p:cNvSpPr/>
+          <p:nvPr/>
+        </p:nvSpPr>
+        <p:spPr>
+          <a:xfrm>
+            <a:off x="0" y="0"/>
+            <a:ext cx="12191695" cy="1188720"/>
+          </a:xfrm>
+          <a:prstGeom prst="rect">
+            <a:avLst/>
+          </a:prstGeom>
+          <a:solidFill>
+            <a:srgbClr val="1351B4"/>
+          </a:solidFill>
+          <a:ln>
+            <a:noFill/>
+          </a:ln>
+        </p:spPr>
+        <p:style>
+          <a:lnRef idx="1">
+            <a:schemeClr val="accent1"/>
+          </a:lnRef>
+          <a:fillRef idx="3">
+            <a:schemeClr val="accent1"/>
+          </a:fillRef>
+          <a:effectRef idx="2">
+            <a:schemeClr val="accent1"/>
+          </a:effectRef>
+          <a:fontRef idx="minor">
+            <a:schemeClr val="lt1"/>
+          </a:fontRef>
+        </p:style>
+        <p:txBody>
+          <a:bodyPr rtlCol="0" anchor="ctr"/>
+          <a:lstStyle/>
+          <a:p>
+            <a:pPr algn="ctr"/>
+          </a:p>
+        </p:txBody>
+      </p:sp>
+      <p:sp>
+        <p:nvSpPr>
+          <p:cNvPr id="3" name="TextBox 2"/>
+          <p:cNvSpPr txBox="1"/>
+          <p:nvPr/>
+        </p:nvSpPr>
+        <p:spPr>
+          <a:xfrm>
+            <a:off x="731520" y="228600"/>
+            <a:ext cx="10058400" cy="548640"/>
+          </a:xfrm>
+          <a:prstGeom prst="rect">
+            <a:avLst/>
+          </a:prstGeom>
+          <a:noFill/>
+        </p:spPr>
+        <p:txBody>
+          <a:bodyPr wrap="square">
+            <a:spAutoFit/>
+          </a:bodyPr>
+          <a:lstStyle/>
+          <a:p>
+            <a:pPr algn="l">
+              <a:defRPr sz="2800" b="1">
+                <a:solidFill>
+                  <a:srgbClr val="FFFFFF"/>
+                </a:solidFill>
+                <a:latin typeface="Segoe UI"/>
+              </a:defRPr>
+            </a:pPr>
+            <a:r>
+              <a:t>Wang et al. — XAI para Detecção de Intrusão</a:t>
+            </a:r>
+          </a:p>
+        </p:txBody>
+      </p:sp>
+      <p:sp>
+        <p:nvSpPr>
+          <p:cNvPr id="4" name="TextBox 3"/>
+          <p:cNvSpPr txBox="1"/>
+          <p:nvPr/>
+        </p:nvSpPr>
+        <p:spPr>
+          <a:xfrm>
+            <a:off x="731520" y="685800"/>
+            <a:ext cx="10058400" cy="365760"/>
+          </a:xfrm>
+          <a:prstGeom prst="rect">
+            <a:avLst/>
+          </a:prstGeom>
+          <a:noFill/>
+        </p:spPr>
+        <p:txBody>
+          <a:bodyPr wrap="square">
+            <a:spAutoFit/>
+          </a:bodyPr>
+          <a:lstStyle/>
+          <a:p>
+            <a:pPr algn="l">
+              <a:defRPr sz="1400" b="0">
+                <a:solidFill>
+                  <a:srgbClr val="C5D5F0"/>
+                </a:solidFill>
+                <a:latin typeface="Segoe UI"/>
+              </a:defRPr>
+            </a:pPr>
+            <a:r>
+              <a:t>Literatura Acadêmica · IEEE Access 2020 · Explicabilidade (SHAP)</a:t>
+            </a:r>
+          </a:p>
+        </p:txBody>
+      </p:sp>
+      <p:sp>
+        <p:nvSpPr>
+          <p:cNvPr id="5" name="Rectangle 4"/>
+          <p:cNvSpPr/>
+          <p:nvPr/>
+        </p:nvSpPr>
+        <p:spPr>
+          <a:xfrm>
+            <a:off x="0" y="1188720"/>
+            <a:ext cx="12191695" cy="54864"/>
+          </a:xfrm>
+          <a:prstGeom prst="rect">
+            <a:avLst/>
+          </a:prstGeom>
+          <a:solidFill>
+            <a:srgbClr val="CD191E"/>
+          </a:solidFill>
+          <a:ln>
+            <a:noFill/>
+          </a:ln>
+        </p:spPr>
+        <p:style>
+          <a:lnRef idx="1">
+            <a:schemeClr val="accent1"/>
+          </a:lnRef>
+          <a:fillRef idx="3">
+            <a:schemeClr val="accent1"/>
+          </a:fillRef>
+          <a:effectRef idx="2">
+            <a:schemeClr val="accent1"/>
+          </a:effectRef>
+          <a:fontRef idx="minor">
+            <a:schemeClr val="lt1"/>
+          </a:fontRef>
+        </p:style>
+        <p:txBody>
+          <a:bodyPr rtlCol="0" anchor="ctr"/>
+          <a:lstStyle/>
+          <a:p>
+            <a:pPr algn="ctr"/>
+          </a:p>
+        </p:txBody>
+      </p:sp>
+      <p:sp>
+        <p:nvSpPr>
+          <p:cNvPr id="6" name="Rounded Rectangle 5"/>
+          <p:cNvSpPr/>
+          <p:nvPr/>
+        </p:nvSpPr>
+        <p:spPr>
+          <a:xfrm>
+            <a:off x="548640" y="1463040"/>
+            <a:ext cx="11064240" cy="2377440"/>
+          </a:xfrm>
+          <a:prstGeom prst="roundRect">
+            <a:avLst>
+              <a:gd name="adj" fmla="val 5000"/>
+            </a:avLst>
+          </a:prstGeom>
+          <a:solidFill>
+            <a:srgbClr val="F0F2F5"/>
+          </a:solidFill>
+          <a:ln>
+            <a:noFill/>
+          </a:ln>
+        </p:spPr>
+        <p:style>
+          <a:lnRef idx="1">
+            <a:schemeClr val="accent1"/>
+          </a:lnRef>
+          <a:fillRef idx="3">
+            <a:schemeClr val="accent1"/>
+          </a:fillRef>
+          <a:effectRef idx="2">
+            <a:schemeClr val="accent1"/>
+          </a:effectRef>
+          <a:fontRef idx="minor">
+            <a:schemeClr val="lt1"/>
+          </a:fontRef>
+        </p:style>
+        <p:txBody>
+          <a:bodyPr rtlCol="0" anchor="ctr"/>
+          <a:lstStyle/>
+          <a:p>
+            <a:pPr algn="ctr"/>
+          </a:p>
+        </p:txBody>
+      </p:sp>
+      <p:sp>
+        <p:nvSpPr>
+          <p:cNvPr id="7" name="TextBox 6"/>
+          <p:cNvSpPr txBox="1"/>
+          <p:nvPr/>
+        </p:nvSpPr>
+        <p:spPr>
+          <a:xfrm>
+            <a:off x="731520" y="1554480"/>
+            <a:ext cx="10698480" cy="320040"/>
+          </a:xfrm>
+          <a:prstGeom prst="rect">
+            <a:avLst/>
+          </a:prstGeom>
+          <a:noFill/>
+        </p:spPr>
+        <p:txBody>
+          <a:bodyPr wrap="square">
+            <a:spAutoFit/>
+          </a:bodyPr>
+          <a:lstStyle/>
+          <a:p>
+            <a:pPr algn="l">
+              <a:defRPr sz="1400" b="1">
+                <a:solidFill>
+                  <a:srgbClr val="1351B4"/>
+                </a:solidFill>
+                <a:latin typeface="Segoe UI"/>
+              </a:defRPr>
+            </a:pPr>
+            <a:r>
+              <a:t>Resumo do Trabalho</a:t>
+            </a:r>
+          </a:p>
+        </p:txBody>
+      </p:sp>
+      <p:sp>
+        <p:nvSpPr>
+          <p:cNvPr id="8" name="TextBox 7"/>
+          <p:cNvSpPr txBox="1"/>
+          <p:nvPr/>
+        </p:nvSpPr>
+        <p:spPr>
+          <a:xfrm>
+            <a:off x="731520" y="1920240"/>
+            <a:ext cx="10698480" cy="1828800"/>
+          </a:xfrm>
+          <a:prstGeom prst="rect">
+            <a:avLst/>
+          </a:prstGeom>
+          <a:noFill/>
+        </p:spPr>
+        <p:txBody>
+          <a:bodyPr wrap="square">
+            <a:spAutoFit/>
+          </a:bodyPr>
+          <a:lstStyle/>
+          <a:p>
+            <a:pPr algn="l">
+              <a:defRPr sz="1400" b="0">
+                <a:solidFill>
+                  <a:srgbClr val="4A4A4A"/>
+                </a:solidFill>
+                <a:latin typeface="Segoe UI"/>
+              </a:defRPr>
+            </a:pPr>
+            <a:r>
+              <a:t>Propõe um framework de explicabilidade para sistemas de detecção de intrusão baseado em SHAP (Lundberg &amp; Lee, NeurIPS 2017), combinando explicações LOCAIS (por que uma entrada foi classificada como ataque) e GLOBAIS (features mais relevantes e sua relação com os tipos de ataque). Objetivo: tornar transparentes modelos de segurança que costumam operar como caixa-preta. Experimento: avaliação sobre o dataset NSL-KDD, comparando classificadores one-vs-all e multiclasse.</a:t>
+            </a:r>
+          </a:p>
+        </p:txBody>
+      </p:sp>
+      <p:sp>
+        <p:nvSpPr>
+          <p:cNvPr id="9" name="Rounded Rectangle 8"/>
+          <p:cNvSpPr/>
+          <p:nvPr/>
+        </p:nvSpPr>
+        <p:spPr>
+          <a:xfrm>
+            <a:off x="548640" y="4023360"/>
+            <a:ext cx="11064240" cy="2468880"/>
+          </a:xfrm>
+          <a:prstGeom prst="roundRect">
+            <a:avLst>
+              <a:gd name="adj" fmla="val 5000"/>
+            </a:avLst>
+          </a:prstGeom>
+          <a:solidFill>
+            <a:srgbClr val="E8EEF8"/>
+          </a:solidFill>
+          <a:ln>
+            <a:noFill/>
+          </a:ln>
+        </p:spPr>
+        <p:style>
+          <a:lnRef idx="1">
+            <a:schemeClr val="accent1"/>
+          </a:lnRef>
+          <a:fillRef idx="3">
+            <a:schemeClr val="accent1"/>
+          </a:fillRef>
+          <a:effectRef idx="2">
+            <a:schemeClr val="accent1"/>
+          </a:effectRef>
+          <a:fontRef idx="minor">
+            <a:schemeClr val="lt1"/>
+          </a:fontRef>
+        </p:style>
+        <p:txBody>
+          <a:bodyPr rtlCol="0" anchor="ctr"/>
+          <a:lstStyle/>
+          <a:p>
+            <a:pPr algn="ctr"/>
+          </a:p>
+        </p:txBody>
+      </p:sp>
+      <p:sp>
+        <p:nvSpPr>
+          <p:cNvPr id="10" name="TextBox 9"/>
+          <p:cNvSpPr txBox="1"/>
+          <p:nvPr/>
+        </p:nvSpPr>
+        <p:spPr>
+          <a:xfrm>
+            <a:off x="731520" y="4114800"/>
+            <a:ext cx="10698480" cy="320040"/>
+          </a:xfrm>
+          <a:prstGeom prst="rect">
+            <a:avLst/>
+          </a:prstGeom>
+          <a:noFill/>
+        </p:spPr>
+        <p:txBody>
+          <a:bodyPr wrap="square">
+            <a:spAutoFit/>
+          </a:bodyPr>
+          <a:lstStyle/>
+          <a:p>
+            <a:pPr algn="l">
+              <a:defRPr sz="1400" b="1">
+                <a:solidFill>
+                  <a:srgbClr val="1351B4"/>
+                </a:solidFill>
+                <a:latin typeface="Segoe UI"/>
+              </a:defRPr>
+            </a:pPr>
+            <a:r>
+              <a:t>Comparação com a Proposta</a:t>
+            </a:r>
+          </a:p>
+        </p:txBody>
+      </p:sp>
+      <p:sp>
+        <p:nvSpPr>
+          <p:cNvPr id="11" name="TextBox 10"/>
+          <p:cNvSpPr txBox="1"/>
+          <p:nvPr/>
+        </p:nvSpPr>
+        <p:spPr>
+          <a:xfrm>
+            <a:off x="731520" y="4480560"/>
+            <a:ext cx="10698480" cy="1828800"/>
+          </a:xfrm>
+          <a:prstGeom prst="rect">
+            <a:avLst/>
+          </a:prstGeom>
+          <a:noFill/>
+        </p:spPr>
+        <p:txBody>
+          <a:bodyPr wrap="square">
+            <a:spAutoFit/>
+          </a:bodyPr>
+          <a:lstStyle/>
+          <a:p>
+            <a:pPr algn="l">
+              <a:defRPr sz="1400" b="0">
+                <a:solidFill>
+                  <a:srgbClr val="4A4A4A"/>
+                </a:solidFill>
+                <a:latin typeface="Segoe UI"/>
+              </a:defRPr>
+            </a:pPr>
+            <a:r>
+              <a:t>Este trabalho fundamenta a camada de EXPLICABILIDADE da proposta: o mesmo SHAP é aplicado, porém ao domínio de AUTENTICAÇÃO (não a intrusão de rede) e em tempo real. Diferenciais: (i) explica a decisão de cada LOGIN, mostrando a contribuição das 14 features ao score; (ii) integra a explicação ao ENSEMBLE de 3 modelos e à biometria de digitação; (iii) PERSISTE a explicação em BLOCKCHAIN, criando trilha de auditoria imutável das decisões de IA — indo além da análise offline sobre dataset estático.</a:t>
+            </a:r>
+          </a:p>
+        </p:txBody>
+      </p:sp>
+    </p:spTree>
+  </p:cSld>
+  <p:clrMapOvr>
+    <a:masterClrMapping/>
+  </p:clrMapOvr>
+</p:sld>
+</file>
+
+<file path=ppt/slides/slide21.xml><?xml version="1.0" encoding="utf-8"?>
+<p:sld xmlns:a="http://schemas.openxmlformats.org/drawingml/2006/main" xmlns:p="http://schemas.openxmlformats.org/presentationml/2006/main" xmlns:r="http://schemas.openxmlformats.org/officeDocument/2006/relationships">
+  <p:cSld>
+    <p:bg>
+      <p:bgPr>
+        <a:solidFill>
+          <a:srgbClr val="FFFFFF"/>
+        </a:solidFill>
+        <a:effectLst/>
+      </p:bgPr>
+    </p:bg>
+    <p:spTree>
+      <p:nvGrpSpPr>
+        <p:cNvPr id="1" name=""/>
+        <p:cNvGrpSpPr/>
+        <p:nvPr/>
+      </p:nvGrpSpPr>
+      <p:grpSpPr/>
+      <p:sp>
+        <p:nvSpPr>
+          <p:cNvPr id="2" name="Rectangle 1"/>
+          <p:cNvSpPr/>
+          <p:nvPr/>
+        </p:nvSpPr>
+        <p:spPr>
+          <a:xfrm>
+            <a:off x="0" y="0"/>
+            <a:ext cx="12191695" cy="1188720"/>
+          </a:xfrm>
+          <a:prstGeom prst="rect">
+            <a:avLst/>
+          </a:prstGeom>
+          <a:solidFill>
+            <a:srgbClr val="1351B4"/>
+          </a:solidFill>
+          <a:ln>
+            <a:noFill/>
+          </a:ln>
+        </p:spPr>
+        <p:style>
+          <a:lnRef idx="1">
+            <a:schemeClr val="accent1"/>
+          </a:lnRef>
+          <a:fillRef idx="3">
+            <a:schemeClr val="accent1"/>
+          </a:fillRef>
+          <a:effectRef idx="2">
+            <a:schemeClr val="accent1"/>
+          </a:effectRef>
+          <a:fontRef idx="minor">
+            <a:schemeClr val="lt1"/>
+          </a:fontRef>
+        </p:style>
+        <p:txBody>
+          <a:bodyPr rtlCol="0" anchor="ctr"/>
+          <a:lstStyle/>
+          <a:p>
+            <a:pPr algn="ctr"/>
+          </a:p>
+        </p:txBody>
+      </p:sp>
+      <p:sp>
+        <p:nvSpPr>
+          <p:cNvPr id="3" name="TextBox 2"/>
+          <p:cNvSpPr txBox="1"/>
+          <p:nvPr/>
+        </p:nvSpPr>
+        <p:spPr>
+          <a:xfrm>
+            <a:off x="731520" y="228600"/>
+            <a:ext cx="10058400" cy="548640"/>
+          </a:xfrm>
+          <a:prstGeom prst="rect">
+            <a:avLst/>
+          </a:prstGeom>
+          <a:noFill/>
+        </p:spPr>
+        <p:txBody>
+          <a:bodyPr wrap="square">
+            <a:spAutoFit/>
+          </a:bodyPr>
+          <a:lstStyle/>
+          <a:p>
+            <a:pPr algn="l">
+              <a:defRPr sz="2800" b="1">
+                <a:solidFill>
+                  <a:srgbClr val="FFFFFF"/>
+                </a:solidFill>
+                <a:latin typeface="Segoe UI"/>
+              </a:defRPr>
+            </a:pPr>
+            <a:r>
+              <a:t>Referências — Literatura Acadêmica</a:t>
+            </a:r>
+          </a:p>
+        </p:txBody>
+      </p:sp>
+      <p:sp>
+        <p:nvSpPr>
+          <p:cNvPr id="4" name="Rectangle 3"/>
+          <p:cNvSpPr/>
+          <p:nvPr/>
+        </p:nvSpPr>
+        <p:spPr>
+          <a:xfrm>
+            <a:off x="0" y="1188720"/>
+            <a:ext cx="12191695" cy="54864"/>
+          </a:xfrm>
+          <a:prstGeom prst="rect">
+            <a:avLst/>
+          </a:prstGeom>
+          <a:solidFill>
+            <a:srgbClr val="CD191E"/>
+          </a:solidFill>
+          <a:ln>
+            <a:noFill/>
+          </a:ln>
+        </p:spPr>
+        <p:style>
+          <a:lnRef idx="1">
+            <a:schemeClr val="accent1"/>
+          </a:lnRef>
+          <a:fillRef idx="3">
+            <a:schemeClr val="accent1"/>
+          </a:fillRef>
+          <a:effectRef idx="2">
+            <a:schemeClr val="accent1"/>
+          </a:effectRef>
+          <a:fontRef idx="minor">
+            <a:schemeClr val="lt1"/>
+          </a:fontRef>
+        </p:style>
+        <p:txBody>
+          <a:bodyPr rtlCol="0" anchor="ctr"/>
+          <a:lstStyle/>
+          <a:p>
+            <a:pPr algn="ctr"/>
+          </a:p>
+        </p:txBody>
+      </p:sp>
+      <p:sp>
+        <p:nvSpPr>
+          <p:cNvPr id="5" name="TextBox 4"/>
+          <p:cNvSpPr txBox="1"/>
+          <p:nvPr/>
+        </p:nvSpPr>
+        <p:spPr>
+          <a:xfrm>
+            <a:off x="731520" y="1554480"/>
+            <a:ext cx="10515600" cy="5029200"/>
+          </a:xfrm>
+          <a:prstGeom prst="rect">
+            <a:avLst/>
+          </a:prstGeom>
+          <a:noFill/>
+        </p:spPr>
+        <p:txBody>
+          <a:bodyPr wrap="square">
+            <a:spAutoFit/>
+          </a:bodyPr>
+          <a:lstStyle/>
+          <a:p>
+            <a:pPr>
+              <a:spcAft>
+                <a:spcPts val="800"/>
+              </a:spcAft>
+              <a:defRPr sz="1300">
+                <a:solidFill>
+                  <a:srgbClr val="4A4A4A"/>
+                </a:solidFill>
+                <a:latin typeface="Segoe UI"/>
+              </a:defRPr>
+            </a:pPr>
+            <a:r>
+              <a:t>KILLOURHY, K. S.; MAXION, R. A. Comparing Anomaly-Detection Algorithms for Keystroke Dynamics. In: IEEE/IFIP Int. Conf. on Dependable Systems &amp; Networks (DSN), 2009, p. 125-134.</a:t>
+            </a:r>
+          </a:p>
+          <a:p>
+            <a:pPr>
+              <a:spcAft>
+                <a:spcPts val="800"/>
+              </a:spcAft>
+              <a:defRPr sz="1300">
+                <a:solidFill>
+                  <a:srgbClr val="4A4A4A"/>
+                </a:solidFill>
+                <a:latin typeface="Segoe UI"/>
+              </a:defRPr>
+            </a:pPr>
+            <a:r>
+              <a:t>FRANK, M.; BIEDERT, R.; MA, E.; MARTINOVIC, I.; SONG, D. Touchalytics: On the Applicability of Touchscreen Input as a Behavioral Biometric for Continuous Authentication. IEEE TIFS, v. 8, n. 1, p. 136-148, 2013.</a:t>
+            </a:r>
+          </a:p>
+          <a:p>
+            <a:pPr>
+              <a:spcAft>
+                <a:spcPts val="800"/>
+              </a:spcAft>
+              <a:defRPr sz="1300">
+                <a:solidFill>
+                  <a:srgbClr val="4A4A4A"/>
+                </a:solidFill>
+                <a:latin typeface="Segoe UI"/>
+              </a:defRPr>
+            </a:pPr>
+            <a:r>
+              <a:t>WIEFLING, S.; LO IACONO, L.; DÜRMUTH, M. Is This Really You? An Empirical Study on Risk-Based Authentication Applied in the Wild. In: IFIP SEC, 2019, p. 134-148.</a:t>
+            </a:r>
+          </a:p>
+          <a:p>
+            <a:pPr>
+              <a:spcAft>
+                <a:spcPts val="800"/>
+              </a:spcAft>
+              <a:defRPr sz="1300">
+                <a:solidFill>
+                  <a:srgbClr val="4A4A4A"/>
+                </a:solidFill>
+                <a:latin typeface="Segoe UI"/>
+              </a:defRPr>
+            </a:pPr>
+            <a:r>
+              <a:t>LIU, F. T.; TING, K. M.; ZHOU, Z.-H. Isolation Forest. In: IEEE Int. Conf. on Data Mining (ICDM), 2008, p. 413-422.</a:t>
+            </a:r>
+          </a:p>
+          <a:p>
+            <a:pPr>
+              <a:spcAft>
+                <a:spcPts val="800"/>
+              </a:spcAft>
+              <a:defRPr sz="1300">
+                <a:solidFill>
+                  <a:srgbClr val="4A4A4A"/>
+                </a:solidFill>
+                <a:latin typeface="Segoe UI"/>
+              </a:defRPr>
+            </a:pPr>
+            <a:r>
+              <a:t>WANG, M.; ZHENG, K.; YANG, Y.; WANG, X. An Explainable Machine Learning Framework for Intrusion Detection Systems. IEEE Access, v. 8, p. 73127-73141, 2020.</a:t>
+            </a:r>
+          </a:p>
+          <a:p>
+            <a:pPr>
+              <a:spcAft>
+                <a:spcPts val="800"/>
+              </a:spcAft>
+              <a:defRPr sz="1300">
+                <a:solidFill>
+                  <a:srgbClr val="4A4A4A"/>
+                </a:solidFill>
+                <a:latin typeface="Segoe UI"/>
+              </a:defRPr>
+            </a:pPr>
+            <a:r>
+              <a:t>LUNDBERG, S. M.; LEE, S.-I. A Unified Approach to Interpreting Model Predictions (SHAP). In: NeurIPS, 2017.</a:t>
+            </a:r>
+          </a:p>
+        </p:txBody>
+      </p:sp>
+    </p:spTree>
+  </p:cSld>
+  <p:clrMapOvr>
+    <a:masterClrMapping/>
+  </p:clrMapOvr>
+</p:sld>
+</file>
+
+<file path=ppt/slides/slide22.xml><?xml version="1.0" encoding="utf-8"?>
+<p:sld xmlns:a="http://schemas.openxmlformats.org/drawingml/2006/main" xmlns:p="http://schemas.openxmlformats.org/presentationml/2006/main" xmlns:r="http://schemas.openxmlformats.org/officeDocument/2006/relationships">
+  <p:cSld>
+    <p:bg>
+      <p:bgPr>
+        <a:solidFill>
+          <a:srgbClr val="FFFFFF"/>
+        </a:solidFill>
+        <a:effectLst/>
+      </p:bgPr>
+    </p:bg>
+    <p:spTree>
+      <p:nvGrpSpPr>
+        <p:cNvPr id="1" name=""/>
+        <p:cNvGrpSpPr/>
+        <p:nvPr/>
+      </p:nvGrpSpPr>
+      <p:grpSpPr/>
+      <p:sp>
+        <p:nvSpPr>
+          <p:cNvPr id="2" name="Rectangle 1"/>
+          <p:cNvSpPr/>
+          <p:nvPr/>
+        </p:nvSpPr>
+        <p:spPr>
+          <a:xfrm>
+            <a:off x="0" y="0"/>
+            <a:ext cx="12191695" cy="1188720"/>
+          </a:xfrm>
+          <a:prstGeom prst="rect">
+            <a:avLst/>
+          </a:prstGeom>
+          <a:solidFill>
+            <a:srgbClr val="1A6B2A"/>
+          </a:solidFill>
+          <a:ln>
+            <a:noFill/>
+          </a:ln>
+        </p:spPr>
+        <p:style>
+          <a:lnRef idx="1">
+            <a:schemeClr val="accent1"/>
+          </a:lnRef>
+          <a:fillRef idx="3">
+            <a:schemeClr val="accent1"/>
+          </a:fillRef>
+          <a:effectRef idx="2">
+            <a:schemeClr val="accent1"/>
+          </a:effectRef>
+          <a:fontRef idx="minor">
+            <a:schemeClr val="lt1"/>
+          </a:fontRef>
+        </p:style>
+        <p:txBody>
+          <a:bodyPr rtlCol="0" anchor="ctr"/>
+          <a:lstStyle/>
+          <a:p>
+            <a:pPr algn="ctr"/>
+          </a:p>
+        </p:txBody>
+      </p:sp>
+      <p:sp>
+        <p:nvSpPr>
+          <p:cNvPr id="3" name="TextBox 2"/>
+          <p:cNvSpPr txBox="1"/>
+          <p:nvPr/>
+        </p:nvSpPr>
+        <p:spPr>
+          <a:xfrm>
+            <a:off x="731520" y="228600"/>
+            <a:ext cx="10058400" cy="548640"/>
+          </a:xfrm>
+          <a:prstGeom prst="rect">
+            <a:avLst/>
+          </a:prstGeom>
+          <a:noFill/>
+        </p:spPr>
+        <p:txBody>
+          <a:bodyPr wrap="square">
+            <a:spAutoFit/>
+          </a:bodyPr>
+          <a:lstStyle/>
+          <a:p>
+            <a:pPr algn="l">
+              <a:defRPr sz="2800" b="1">
+                <a:solidFill>
+                  <a:srgbClr val="FFFFFF"/>
+                </a:solidFill>
+                <a:latin typeface="Segoe UI"/>
+              </a:defRPr>
+            </a:pPr>
+            <a:r>
+              <a:t>Biometria Comportamental e Autenticação Contínua</a:t>
+            </a:r>
+          </a:p>
+        </p:txBody>
+      </p:sp>
+      <p:sp>
+        <p:nvSpPr>
+          <p:cNvPr id="4" name="TextBox 3"/>
+          <p:cNvSpPr txBox="1"/>
+          <p:nvPr/>
+        </p:nvSpPr>
+        <p:spPr>
+          <a:xfrm>
+            <a:off x="731520" y="685800"/>
+            <a:ext cx="10058400" cy="365760"/>
+          </a:xfrm>
+          <a:prstGeom prst="rect">
+            <a:avLst/>
+          </a:prstGeom>
+          <a:noFill/>
+        </p:spPr>
+        <p:txBody>
+          <a:bodyPr wrap="square">
+            <a:spAutoFit/>
+          </a:bodyPr>
+          <a:lstStyle/>
+          <a:p>
+            <a:pPr algn="l">
+              <a:defRPr sz="1400" b="0">
+                <a:solidFill>
+                  <a:srgbClr val="B0E0B0"/>
+                </a:solidFill>
+                <a:latin typeface="Segoe UI"/>
+              </a:defRPr>
+            </a:pPr>
+            <a:r>
+              <a:t>Killourhy &amp; Maxion (2009) · Touchalytics (2013) · unico (2007/2020)</a:t>
+            </a:r>
+          </a:p>
+        </p:txBody>
+      </p:sp>
+      <p:sp>
+        <p:nvSpPr>
+          <p:cNvPr id="5" name="Rectangle 4"/>
+          <p:cNvSpPr/>
+          <p:nvPr/>
+        </p:nvSpPr>
+        <p:spPr>
+          <a:xfrm>
+            <a:off x="0" y="1188720"/>
+            <a:ext cx="12191695" cy="54864"/>
+          </a:xfrm>
+          <a:prstGeom prst="rect">
+            <a:avLst/>
+          </a:prstGeom>
+          <a:solidFill>
+            <a:srgbClr val="CD191E"/>
+          </a:solidFill>
+          <a:ln>
+            <a:noFill/>
+          </a:ln>
+        </p:spPr>
+        <p:style>
+          <a:lnRef idx="1">
+            <a:schemeClr val="accent1"/>
+          </a:lnRef>
+          <a:fillRef idx="3">
+            <a:schemeClr val="accent1"/>
+          </a:fillRef>
+          <a:effectRef idx="2">
+            <a:schemeClr val="accent1"/>
+          </a:effectRef>
+          <a:fontRef idx="minor">
+            <a:schemeClr val="lt1"/>
+          </a:fontRef>
+        </p:style>
+        <p:txBody>
+          <a:bodyPr rtlCol="0" anchor="ctr"/>
+          <a:lstStyle/>
+          <a:p>
+            <a:pPr algn="ctr"/>
+          </a:p>
+        </p:txBody>
+      </p:sp>
+      <p:sp>
+        <p:nvSpPr>
+          <p:cNvPr id="6" name="Rounded Rectangle 5"/>
+          <p:cNvSpPr/>
+          <p:nvPr/>
+        </p:nvSpPr>
+        <p:spPr>
+          <a:xfrm>
+            <a:off x="548640" y="1463040"/>
+            <a:ext cx="11064240" cy="2926080"/>
+          </a:xfrm>
+          <a:prstGeom prst="roundRect">
+            <a:avLst>
+              <a:gd name="adj" fmla="val 4000"/>
+            </a:avLst>
+          </a:prstGeom>
+          <a:solidFill>
+            <a:srgbClr val="F0F2F5"/>
+          </a:solidFill>
+          <a:ln>
+            <a:noFill/>
+          </a:ln>
+        </p:spPr>
+        <p:style>
+          <a:lnRef idx="1">
+            <a:schemeClr val="accent1"/>
+          </a:lnRef>
+          <a:fillRef idx="3">
+            <a:schemeClr val="accent1"/>
+          </a:fillRef>
+          <a:effectRef idx="2">
+            <a:schemeClr val="accent1"/>
+          </a:effectRef>
+          <a:fontRef idx="minor">
+            <a:schemeClr val="lt1"/>
+          </a:fontRef>
+        </p:style>
+        <p:txBody>
+          <a:bodyPr rtlCol="0" anchor="ctr"/>
+          <a:lstStyle/>
+          <a:p>
+            <a:pPr algn="ctr"/>
+          </a:p>
+        </p:txBody>
+      </p:sp>
+      <p:sp>
+        <p:nvSpPr>
+          <p:cNvPr id="7" name="TextBox 6"/>
+          <p:cNvSpPr txBox="1"/>
+          <p:nvPr/>
+        </p:nvSpPr>
+        <p:spPr>
+          <a:xfrm>
+            <a:off x="731520" y="1554480"/>
+            <a:ext cx="10698480" cy="2743200"/>
+          </a:xfrm>
+          <a:prstGeom prst="rect">
+            <a:avLst/>
+          </a:prstGeom>
+          <a:noFill/>
+        </p:spPr>
+        <p:txBody>
+          <a:bodyPr wrap="square"/>
+          <a:lstStyle/>
+          <a:p>
+            <a:pPr algn="l">
+              <a:spcAft>
+                <a:spcPts val="600"/>
+              </a:spcAft>
+            </a:pPr>
+            <a:r>
+              <a:rPr lang="pt-BR" sz="1200" b="1">
+                <a:solidFill>
+                  <a:srgbClr val="1A6B2A"/>
+                </a:solidFill>
+                <a:latin typeface="Segoe UI"/>
+              </a:rPr>
+              <a:t>Killourhy &amp; Maxion (acadêmico, DSN 2009): </a:t>
+            </a:r>
+            <a:r>
+              <a:rPr lang="pt-BR" sz="1200" b="0">
+                <a:solidFill>
+                  <a:srgbClr val="4A4A4A"/>
+                </a:solidFill>
+                <a:latin typeface="Segoe UI"/>
+              </a:rPr>
+              <a:t>criaram o benchmark de referência em dinâmica de digitação — 51 voluntários digitaram a senha ".tie5Roanl" 400 vezes e 14 algoritmos foram comparados, com o melhor atingindo EER de ~9,6%. Provaram que a forma de digitar identifica a pessoa, mas em teste offline de senha fixa.</a:t>
+            </a:r>
+          </a:p>
+          <a:p>
+            <a:pPr algn="l">
+              <a:spcAft>
+                <a:spcPts val="600"/>
+              </a:spcAft>
+            </a:pPr>
+            <a:r>
+              <a:rPr lang="pt-BR" sz="1200" b="1">
+                <a:solidFill>
+                  <a:srgbClr val="1A6B2A"/>
+                </a:solidFill>
+                <a:latin typeface="Segoe UI"/>
+              </a:rPr>
+              <a:t>Frank et al. (Touchalytics, IEEE TIFS 2013): </a:t>
+            </a:r>
+            <a:r>
+              <a:rPr lang="pt-BR" sz="1200" b="0">
+                <a:solidFill>
+                  <a:srgbClr val="4A4A4A"/>
+                </a:solidFill>
+                <a:latin typeface="Segoe UI"/>
+              </a:rPr>
+              <a:t>levaram a ideia para a autenticação CONTÍNUA — 41 usuários e 30 características de gestos em smartphone, com EER de 0% a 3%. Confirmaram que é possível autenticar o usuário durante o uso, sem pedir senha.</a:t>
+            </a:r>
+          </a:p>
+          <a:p>
+            <a:pPr algn="l">
+              <a:spcAft>
+                <a:spcPts val="600"/>
+              </a:spcAft>
+            </a:pPr>
+            <a:r>
+              <a:rPr lang="pt-BR" sz="1200" b="1">
+                <a:solidFill>
+                  <a:srgbClr val="1A6B2A"/>
+                </a:solidFill>
+                <a:latin typeface="Segoe UI"/>
+              </a:rPr>
+              <a:t>unico|check e unico|people (indústria): </a:t>
+            </a:r>
+            <a:r>
+              <a:rPr lang="pt-BR" sz="1200" b="0">
+                <a:solidFill>
+                  <a:srgbClr val="4A4A4A"/>
+                </a:solidFill>
+                <a:latin typeface="Segoe UI"/>
+              </a:rPr>
+              <a:t>aplicam biometria FACIAL para validar identidade em bancos e no RH, com resposta em menos de 3 segundos — porém é uma verificação única (one-shot), feita só na entrada.</a:t>
+            </a:r>
+          </a:p>
+        </p:txBody>
+      </p:sp>
+      <p:sp>
+        <p:nvSpPr>
+          <p:cNvPr id="8" name="Rounded Rectangle 7"/>
+          <p:cNvSpPr/>
+          <p:nvPr/>
+        </p:nvSpPr>
+        <p:spPr>
+          <a:xfrm>
+            <a:off x="548640" y="4526280"/>
+            <a:ext cx="11064240" cy="2011680"/>
+          </a:xfrm>
+          <a:prstGeom prst="roundRect">
+            <a:avLst>
+              <a:gd name="adj" fmla="val 5000"/>
+            </a:avLst>
+          </a:prstGeom>
+          <a:solidFill>
+            <a:srgbClr val="E8F5E9"/>
+          </a:solidFill>
+          <a:ln>
+            <a:noFill/>
+          </a:ln>
+        </p:spPr>
+        <p:style>
+          <a:lnRef idx="1">
+            <a:schemeClr val="accent1"/>
+          </a:lnRef>
+          <a:fillRef idx="3">
+            <a:schemeClr val="accent1"/>
+          </a:fillRef>
+          <a:effectRef idx="2">
+            <a:schemeClr val="accent1"/>
+          </a:effectRef>
+          <a:fontRef idx="minor">
+            <a:schemeClr val="lt1"/>
+          </a:fontRef>
+        </p:style>
+        <p:txBody>
+          <a:bodyPr rtlCol="0" anchor="ctr"/>
+          <a:lstStyle/>
+          <a:p>
+            <a:pPr algn="ctr"/>
+          </a:p>
+        </p:txBody>
+      </p:sp>
+      <p:sp>
+        <p:nvSpPr>
+          <p:cNvPr id="9" name="TextBox 8"/>
+          <p:cNvSpPr txBox="1"/>
+          <p:nvPr/>
+        </p:nvSpPr>
+        <p:spPr>
+          <a:xfrm>
+            <a:off x="731520" y="4617720"/>
+            <a:ext cx="10698480" cy="320040"/>
+          </a:xfrm>
+          <a:prstGeom prst="rect">
+            <a:avLst/>
+          </a:prstGeom>
+          <a:noFill/>
+        </p:spPr>
+        <p:txBody>
+          <a:bodyPr wrap="square">
+            <a:spAutoFit/>
+          </a:bodyPr>
+          <a:lstStyle/>
+          <a:p>
+            <a:pPr algn="l">
+              <a:defRPr sz="1300" b="1">
+                <a:solidFill>
+                  <a:srgbClr val="1A6B2A"/>
+                </a:solidFill>
+                <a:latin typeface="Segoe UI"/>
+              </a:defRPr>
+            </a:pPr>
+            <a:r>
+              <a:t>Relação com a sua proposta</a:t>
+            </a:r>
+          </a:p>
+        </p:txBody>
+      </p:sp>
+      <p:sp>
+        <p:nvSpPr>
+          <p:cNvPr id="10" name="TextBox 9"/>
+          <p:cNvSpPr txBox="1"/>
+          <p:nvPr/>
+        </p:nvSpPr>
+        <p:spPr>
+          <a:xfrm>
+            <a:off x="731520" y="4983480"/>
+            <a:ext cx="10698480" cy="1463040"/>
+          </a:xfrm>
+          <a:prstGeom prst="rect">
+            <a:avLst/>
+          </a:prstGeom>
+          <a:noFill/>
+        </p:spPr>
+        <p:txBody>
+          <a:bodyPr wrap="square"/>
+          <a:lstStyle/>
+          <a:p>
+            <a:pPr algn="l">
+              <a:defRPr sz="1300" b="0">
+                <a:solidFill>
+                  <a:srgbClr val="4A4A4A"/>
+                </a:solidFill>
+                <a:latin typeface="Segoe UI"/>
+              </a:defRPr>
+            </a:pPr>
+            <a:r>
+              <a:t>A proposta une as duas vertentes: usa biometria COMPORTAMENTAL de digitação (como Killourhy &amp; Maxion) de forma CONTÍNUA (como Touchalytics), mas em aplicações web, integrada a 14 sinais de contexto e a um ensemble de 3 modelos — algo que a biometria facial one-shot da indústria não oferece.</a:t>
+            </a:r>
+          </a:p>
+        </p:txBody>
+      </p:sp>
+    </p:spTree>
+  </p:cSld>
+  <p:clrMapOvr>
+    <a:masterClrMapping/>
+  </p:clrMapOvr>
+</p:sld>
+</file>
+
+<file path=ppt/slides/slide23.xml><?xml version="1.0" encoding="utf-8"?>
+<p:sld xmlns:a="http://schemas.openxmlformats.org/drawingml/2006/main" xmlns:p="http://schemas.openxmlformats.org/presentationml/2006/main" xmlns:r="http://schemas.openxmlformats.org/officeDocument/2006/relationships">
+  <p:cSld>
+    <p:bg>
+      <p:bgPr>
+        <a:solidFill>
+          <a:srgbClr val="FFFFFF"/>
+        </a:solidFill>
+        <a:effectLst/>
+      </p:bgPr>
+    </p:bg>
+    <p:spTree>
+      <p:nvGrpSpPr>
+        <p:cNvPr id="1" name=""/>
+        <p:cNvGrpSpPr/>
+        <p:nvPr/>
+      </p:nvGrpSpPr>
+      <p:grpSpPr/>
+      <p:sp>
+        <p:nvSpPr>
+          <p:cNvPr id="2" name="Rectangle 1"/>
+          <p:cNvSpPr/>
+          <p:nvPr/>
+        </p:nvSpPr>
+        <p:spPr>
+          <a:xfrm>
+            <a:off x="0" y="0"/>
+            <a:ext cx="12191695" cy="1188720"/>
+          </a:xfrm>
+          <a:prstGeom prst="rect">
+            <a:avLst/>
+          </a:prstGeom>
+          <a:solidFill>
+            <a:srgbClr val="1A6B2A"/>
+          </a:solidFill>
+          <a:ln>
+            <a:noFill/>
+          </a:ln>
+        </p:spPr>
+        <p:style>
+          <a:lnRef idx="1">
+            <a:schemeClr val="accent1"/>
+          </a:lnRef>
+          <a:fillRef idx="3">
+            <a:schemeClr val="accent1"/>
+          </a:fillRef>
+          <a:effectRef idx="2">
+            <a:schemeClr val="accent1"/>
+          </a:effectRef>
+          <a:fontRef idx="minor">
+            <a:schemeClr val="lt1"/>
+          </a:fontRef>
+        </p:style>
+        <p:txBody>
+          <a:bodyPr rtlCol="0" anchor="ctr"/>
+          <a:lstStyle/>
+          <a:p>
+            <a:pPr algn="ctr"/>
+          </a:p>
+        </p:txBody>
+      </p:sp>
+      <p:sp>
+        <p:nvSpPr>
+          <p:cNvPr id="3" name="TextBox 2"/>
+          <p:cNvSpPr txBox="1"/>
+          <p:nvPr/>
+        </p:nvSpPr>
+        <p:spPr>
+          <a:xfrm>
+            <a:off x="731520" y="228600"/>
+            <a:ext cx="10058400" cy="548640"/>
+          </a:xfrm>
+          <a:prstGeom prst="rect">
+            <a:avLst/>
+          </a:prstGeom>
+          <a:noFill/>
+        </p:spPr>
+        <p:txBody>
+          <a:bodyPr wrap="square">
+            <a:spAutoFit/>
+          </a:bodyPr>
+          <a:lstStyle/>
+          <a:p>
+            <a:pPr algn="l">
+              <a:defRPr sz="2800" b="1">
+                <a:solidFill>
+                  <a:srgbClr val="FFFFFF"/>
+                </a:solidFill>
+                <a:latin typeface="Segoe UI"/>
+              </a:defRPr>
+            </a:pPr>
+            <a:r>
+              <a:t>Autenticação Adaptativa e Identidade Digital</a:t>
+            </a:r>
+          </a:p>
+        </p:txBody>
+      </p:sp>
+      <p:sp>
+        <p:nvSpPr>
+          <p:cNvPr id="4" name="TextBox 3"/>
+          <p:cNvSpPr txBox="1"/>
+          <p:nvPr/>
+        </p:nvSpPr>
+        <p:spPr>
+          <a:xfrm>
+            <a:off x="731520" y="685800"/>
+            <a:ext cx="10058400" cy="365760"/>
+          </a:xfrm>
+          <a:prstGeom prst="rect">
+            <a:avLst/>
+          </a:prstGeom>
+          <a:noFill/>
+        </p:spPr>
+        <p:txBody>
+          <a:bodyPr wrap="square">
+            <a:spAutoFit/>
+          </a:bodyPr>
+          <a:lstStyle/>
+          <a:p>
+            <a:pPr algn="l">
+              <a:defRPr sz="1400" b="0">
+                <a:solidFill>
+                  <a:srgbClr val="B0E0B0"/>
+                </a:solidFill>
+                <a:latin typeface="Segoe UI"/>
+              </a:defRPr>
+            </a:pPr>
+            <a:r>
+              <a:t>Wiefling et al. — Risk-Based Authentication (2019) · gov.br / Serpro (2019/2021)</a:t>
+            </a:r>
+          </a:p>
+        </p:txBody>
+      </p:sp>
+      <p:sp>
+        <p:nvSpPr>
+          <p:cNvPr id="5" name="Rectangle 4"/>
+          <p:cNvSpPr/>
+          <p:nvPr/>
+        </p:nvSpPr>
+        <p:spPr>
+          <a:xfrm>
+            <a:off x="0" y="1188720"/>
+            <a:ext cx="12191695" cy="54864"/>
+          </a:xfrm>
+          <a:prstGeom prst="rect">
+            <a:avLst/>
+          </a:prstGeom>
+          <a:solidFill>
+            <a:srgbClr val="CD191E"/>
+          </a:solidFill>
+          <a:ln>
+            <a:noFill/>
+          </a:ln>
+        </p:spPr>
+        <p:style>
+          <a:lnRef idx="1">
+            <a:schemeClr val="accent1"/>
+          </a:lnRef>
+          <a:fillRef idx="3">
+            <a:schemeClr val="accent1"/>
+          </a:fillRef>
+          <a:effectRef idx="2">
+            <a:schemeClr val="accent1"/>
+          </a:effectRef>
+          <a:fontRef idx="minor">
+            <a:schemeClr val="lt1"/>
+          </a:fontRef>
+        </p:style>
+        <p:txBody>
+          <a:bodyPr rtlCol="0" anchor="ctr"/>
+          <a:lstStyle/>
+          <a:p>
+            <a:pPr algn="ctr"/>
+          </a:p>
+        </p:txBody>
+      </p:sp>
+      <p:sp>
+        <p:nvSpPr>
+          <p:cNvPr id="6" name="Rounded Rectangle 5"/>
+          <p:cNvSpPr/>
+          <p:nvPr/>
+        </p:nvSpPr>
+        <p:spPr>
+          <a:xfrm>
+            <a:off x="548640" y="1463040"/>
+            <a:ext cx="11064240" cy="2926080"/>
+          </a:xfrm>
+          <a:prstGeom prst="roundRect">
+            <a:avLst>
+              <a:gd name="adj" fmla="val 4000"/>
+            </a:avLst>
+          </a:prstGeom>
+          <a:solidFill>
+            <a:srgbClr val="F0F2F5"/>
+          </a:solidFill>
+          <a:ln>
+            <a:noFill/>
+          </a:ln>
+        </p:spPr>
+        <p:style>
+          <a:lnRef idx="1">
+            <a:schemeClr val="accent1"/>
+          </a:lnRef>
+          <a:fillRef idx="3">
+            <a:schemeClr val="accent1"/>
+          </a:fillRef>
+          <a:effectRef idx="2">
+            <a:schemeClr val="accent1"/>
+          </a:effectRef>
+          <a:fontRef idx="minor">
+            <a:schemeClr val="lt1"/>
+          </a:fontRef>
+        </p:style>
+        <p:txBody>
+          <a:bodyPr rtlCol="0" anchor="ctr"/>
+          <a:lstStyle/>
+          <a:p>
+            <a:pPr algn="ctr"/>
+          </a:p>
+        </p:txBody>
+      </p:sp>
+      <p:sp>
+        <p:nvSpPr>
+          <p:cNvPr id="7" name="TextBox 6"/>
+          <p:cNvSpPr txBox="1"/>
+          <p:nvPr/>
+        </p:nvSpPr>
+        <p:spPr>
+          <a:xfrm>
+            <a:off x="731520" y="1554480"/>
+            <a:ext cx="10698480" cy="2743200"/>
+          </a:xfrm>
+          <a:prstGeom prst="rect">
+            <a:avLst/>
+          </a:prstGeom>
+          <a:noFill/>
+        </p:spPr>
+        <p:txBody>
+          <a:bodyPr wrap="square"/>
+          <a:lstStyle/>
+          <a:p>
+            <a:pPr algn="l">
+              <a:spcAft>
+                <a:spcPts val="600"/>
+              </a:spcAft>
+            </a:pPr>
+            <a:r>
+              <a:rPr lang="pt-BR" sz="1200" b="1">
+                <a:solidFill>
+                  <a:srgbClr val="1A6B2A"/>
+                </a:solidFill>
+                <a:latin typeface="Segoe UI"/>
+              </a:rPr>
+              <a:t>Wiefling, Lo Iacono &amp; Dürmuth (acadêmico, IFIP SEC 2019): </a:t>
+            </a:r>
+            <a:r>
+              <a:rPr lang="pt-BR" sz="1200" b="0">
+                <a:solidFill>
+                  <a:srgbClr val="4A4A4A"/>
+                </a:solidFill>
+                <a:latin typeface="Segoe UI"/>
+              </a:rPr>
+              <a:t>fizeram o primeiro estudo empírico de Risk-Based Authentication (RBA), recomendada pelo NIST, analisando 8 serviços reais (Google, GOG.com). Descobriram que todos se apoiam fortemente no endereço IP e mantêm a lógica oculta e inconsistente entre si.</a:t>
+            </a:r>
+          </a:p>
+          <a:p>
+            <a:pPr algn="l">
+              <a:spcAft>
+                <a:spcPts val="600"/>
+              </a:spcAft>
+            </a:pPr>
+            <a:r>
+              <a:rPr lang="pt-BR" sz="1200" b="1">
+                <a:solidFill>
+                  <a:srgbClr val="1A6B2A"/>
+                </a:solidFill>
+                <a:latin typeface="Segoe UI"/>
+              </a:rPr>
+              <a:t>gov.br / Serpro (indústria/governo): </a:t>
+            </a:r>
+            <a:r>
+              <a:rPr lang="pt-BR" sz="1200" b="0">
+                <a:solidFill>
+                  <a:srgbClr val="4A4A4A"/>
+                </a:solidFill>
+                <a:latin typeface="Segoe UI"/>
+              </a:rPr>
+              <a:t>é a maior identidade digital pública do país (115M+ usuários), com login único, 2FA e 3 níveis FIXOS de confiabilidade (bronze, prata, ouro). Os níveis, porém, são definidos pelo serviço-alvo — não pelo comportamento do usuário.</a:t>
+            </a:r>
+          </a:p>
+        </p:txBody>
+      </p:sp>
+      <p:sp>
+        <p:nvSpPr>
+          <p:cNvPr id="8" name="Rounded Rectangle 7"/>
+          <p:cNvSpPr/>
+          <p:nvPr/>
+        </p:nvSpPr>
+        <p:spPr>
+          <a:xfrm>
+            <a:off x="548640" y="4526280"/>
+            <a:ext cx="11064240" cy="2011680"/>
+          </a:xfrm>
+          <a:prstGeom prst="roundRect">
+            <a:avLst>
+              <a:gd name="adj" fmla="val 5000"/>
+            </a:avLst>
+          </a:prstGeom>
+          <a:solidFill>
+            <a:srgbClr val="E8F5E9"/>
+          </a:solidFill>
+          <a:ln>
+            <a:noFill/>
+          </a:ln>
+        </p:spPr>
+        <p:style>
+          <a:lnRef idx="1">
+            <a:schemeClr val="accent1"/>
+          </a:lnRef>
+          <a:fillRef idx="3">
+            <a:schemeClr val="accent1"/>
+          </a:fillRef>
+          <a:effectRef idx="2">
+            <a:schemeClr val="accent1"/>
+          </a:effectRef>
+          <a:fontRef idx="minor">
+            <a:schemeClr val="lt1"/>
+          </a:fontRef>
+        </p:style>
+        <p:txBody>
+          <a:bodyPr rtlCol="0" anchor="ctr"/>
+          <a:lstStyle/>
+          <a:p>
+            <a:pPr algn="ctr"/>
+          </a:p>
+        </p:txBody>
+      </p:sp>
+      <p:sp>
+        <p:nvSpPr>
+          <p:cNvPr id="9" name="TextBox 8"/>
+          <p:cNvSpPr txBox="1"/>
+          <p:nvPr/>
+        </p:nvSpPr>
+        <p:spPr>
+          <a:xfrm>
+            <a:off x="731520" y="4617720"/>
+            <a:ext cx="10698480" cy="320040"/>
+          </a:xfrm>
+          <a:prstGeom prst="rect">
+            <a:avLst/>
+          </a:prstGeom>
+          <a:noFill/>
+        </p:spPr>
+        <p:txBody>
+          <a:bodyPr wrap="square">
+            <a:spAutoFit/>
+          </a:bodyPr>
+          <a:lstStyle/>
+          <a:p>
+            <a:pPr algn="l">
+              <a:defRPr sz="1300" b="1">
+                <a:solidFill>
+                  <a:srgbClr val="1A6B2A"/>
+                </a:solidFill>
+                <a:latin typeface="Segoe UI"/>
+              </a:defRPr>
+            </a:pPr>
+            <a:r>
+              <a:t>Relação com a sua proposta</a:t>
+            </a:r>
+          </a:p>
+        </p:txBody>
+      </p:sp>
+      <p:sp>
+        <p:nvSpPr>
+          <p:cNvPr id="10" name="TextBox 9"/>
+          <p:cNvSpPr txBox="1"/>
+          <p:nvPr/>
+        </p:nvSpPr>
+        <p:spPr>
+          <a:xfrm>
+            <a:off x="731520" y="4983480"/>
+            <a:ext cx="10698480" cy="1463040"/>
+          </a:xfrm>
+          <a:prstGeom prst="rect">
+            <a:avLst/>
+          </a:prstGeom>
+          <a:noFill/>
+        </p:spPr>
+        <p:txBody>
+          <a:bodyPr wrap="square"/>
+          <a:lstStyle/>
+          <a:p>
+            <a:pPr algn="l">
+              <a:defRPr sz="1300" b="0">
+                <a:solidFill>
+                  <a:srgbClr val="4A4A4A"/>
+                </a:solidFill>
+                <a:latin typeface="Segoe UI"/>
+              </a:defRPr>
+            </a:pPr>
+            <a:r>
+              <a:t>A proposta materializa o RBA de forma ABERTA e explicável: em vez de depender só do IP ou de níveis fixos, recalcula um SCORE CONTÍNUO (0,0 a 1,0) a cada acesso, combinando 14 sinais, e escalona a resposta em 4 níveis (permitir / MFA / MFA+alerta / bloquear), com cada decisão auditável em blockchain.</a:t>
+            </a:r>
+          </a:p>
+        </p:txBody>
+      </p:sp>
+    </p:spTree>
+  </p:cSld>
+  <p:clrMapOvr>
+    <a:masterClrMapping/>
+  </p:clrMapOvr>
+</p:sld>
+</file>
+
+<file path=ppt/slides/slide24.xml><?xml version="1.0" encoding="utf-8"?>
+<p:sld xmlns:a="http://schemas.openxmlformats.org/drawingml/2006/main" xmlns:p="http://schemas.openxmlformats.org/presentationml/2006/main" xmlns:r="http://schemas.openxmlformats.org/officeDocument/2006/relationships">
+  <p:cSld>
+    <p:bg>
+      <p:bgPr>
+        <a:solidFill>
+          <a:srgbClr val="FFFFFF"/>
+        </a:solidFill>
+        <a:effectLst/>
+      </p:bgPr>
+    </p:bg>
+    <p:spTree>
+      <p:nvGrpSpPr>
+        <p:cNvPr id="1" name=""/>
+        <p:cNvGrpSpPr/>
+        <p:nvPr/>
+      </p:nvGrpSpPr>
+      <p:grpSpPr/>
+      <p:sp>
+        <p:nvSpPr>
+          <p:cNvPr id="2" name="Rectangle 1"/>
+          <p:cNvSpPr/>
+          <p:nvPr/>
+        </p:nvSpPr>
+        <p:spPr>
+          <a:xfrm>
+            <a:off x="0" y="0"/>
+            <a:ext cx="12191695" cy="1188720"/>
+          </a:xfrm>
+          <a:prstGeom prst="rect">
+            <a:avLst/>
+          </a:prstGeom>
+          <a:solidFill>
+            <a:srgbClr val="1A6B2A"/>
+          </a:solidFill>
+          <a:ln>
+            <a:noFill/>
+          </a:ln>
+        </p:spPr>
+        <p:style>
+          <a:lnRef idx="1">
+            <a:schemeClr val="accent1"/>
+          </a:lnRef>
+          <a:fillRef idx="3">
+            <a:schemeClr val="accent1"/>
+          </a:fillRef>
+          <a:effectRef idx="2">
+            <a:schemeClr val="accent1"/>
+          </a:effectRef>
+          <a:fontRef idx="minor">
+            <a:schemeClr val="lt1"/>
+          </a:fontRef>
+        </p:style>
+        <p:txBody>
+          <a:bodyPr rtlCol="0" anchor="ctr"/>
+          <a:lstStyle/>
+          <a:p>
+            <a:pPr algn="ctr"/>
+          </a:p>
+        </p:txBody>
+      </p:sp>
+      <p:sp>
+        <p:nvSpPr>
+          <p:cNvPr id="3" name="TextBox 2"/>
+          <p:cNvSpPr txBox="1"/>
+          <p:nvPr/>
+        </p:nvSpPr>
+        <p:spPr>
+          <a:xfrm>
+            <a:off x="731520" y="228600"/>
+            <a:ext cx="10058400" cy="548640"/>
+          </a:xfrm>
+          <a:prstGeom prst="rect">
+            <a:avLst/>
+          </a:prstGeom>
+          <a:noFill/>
+        </p:spPr>
+        <p:txBody>
+          <a:bodyPr wrap="square">
+            <a:spAutoFit/>
+          </a:bodyPr>
+          <a:lstStyle/>
+          <a:p>
+            <a:pPr algn="l">
+              <a:defRPr sz="2800" b="1">
+                <a:solidFill>
+                  <a:srgbClr val="FFFFFF"/>
+                </a:solidFill>
+                <a:latin typeface="Segoe UI"/>
+              </a:defRPr>
+            </a:pPr>
+            <a:r>
+              <a:t>KYC, Antifraude e Orquestração de Identidade</a:t>
+            </a:r>
+          </a:p>
+        </p:txBody>
+      </p:sp>
+      <p:sp>
+        <p:nvSpPr>
+          <p:cNvPr id="4" name="TextBox 3"/>
+          <p:cNvSpPr txBox="1"/>
+          <p:nvPr/>
+        </p:nvSpPr>
+        <p:spPr>
+          <a:xfrm>
+            <a:off x="731520" y="685800"/>
+            <a:ext cx="10058400" cy="365760"/>
+          </a:xfrm>
+          <a:prstGeom prst="rect">
+            <a:avLst/>
+          </a:prstGeom>
+          <a:noFill/>
+        </p:spPr>
+        <p:txBody>
+          <a:bodyPr wrap="square">
+            <a:spAutoFit/>
+          </a:bodyPr>
+          <a:lstStyle/>
+          <a:p>
+            <a:pPr algn="l">
+              <a:defRPr sz="1400" b="0">
+                <a:solidFill>
+                  <a:srgbClr val="B0E0B0"/>
+                </a:solidFill>
+                <a:latin typeface="Segoe UI"/>
+              </a:defRPr>
+            </a:pPr>
+            <a:r>
+              <a:t>idwall (2016) · CAF — Combate à Fraude (2019)</a:t>
+            </a:r>
+          </a:p>
+        </p:txBody>
+      </p:sp>
+      <p:sp>
+        <p:nvSpPr>
+          <p:cNvPr id="5" name="Rectangle 4"/>
+          <p:cNvSpPr/>
+          <p:nvPr/>
+        </p:nvSpPr>
+        <p:spPr>
+          <a:xfrm>
+            <a:off x="0" y="1188720"/>
+            <a:ext cx="12191695" cy="54864"/>
+          </a:xfrm>
+          <a:prstGeom prst="rect">
+            <a:avLst/>
+          </a:prstGeom>
+          <a:solidFill>
+            <a:srgbClr val="CD191E"/>
+          </a:solidFill>
+          <a:ln>
+            <a:noFill/>
+          </a:ln>
+        </p:spPr>
+        <p:style>
+          <a:lnRef idx="1">
+            <a:schemeClr val="accent1"/>
+          </a:lnRef>
+          <a:fillRef idx="3">
+            <a:schemeClr val="accent1"/>
+          </a:fillRef>
+          <a:effectRef idx="2">
+            <a:schemeClr val="accent1"/>
+          </a:effectRef>
+          <a:fontRef idx="minor">
+            <a:schemeClr val="lt1"/>
+          </a:fontRef>
+        </p:style>
+        <p:txBody>
+          <a:bodyPr rtlCol="0" anchor="ctr"/>
+          <a:lstStyle/>
+          <a:p>
+            <a:pPr algn="ctr"/>
+          </a:p>
+        </p:txBody>
+      </p:sp>
+      <p:sp>
+        <p:nvSpPr>
+          <p:cNvPr id="6" name="Rounded Rectangle 5"/>
+          <p:cNvSpPr/>
+          <p:nvPr/>
+        </p:nvSpPr>
+        <p:spPr>
+          <a:xfrm>
+            <a:off x="548640" y="1463040"/>
+            <a:ext cx="11064240" cy="2926080"/>
+          </a:xfrm>
+          <a:prstGeom prst="roundRect">
+            <a:avLst>
+              <a:gd name="adj" fmla="val 4000"/>
+            </a:avLst>
+          </a:prstGeom>
+          <a:solidFill>
+            <a:srgbClr val="F0F2F5"/>
+          </a:solidFill>
+          <a:ln>
+            <a:noFill/>
+          </a:ln>
+        </p:spPr>
+        <p:style>
+          <a:lnRef idx="1">
+            <a:schemeClr val="accent1"/>
+          </a:lnRef>
+          <a:fillRef idx="3">
+            <a:schemeClr val="accent1"/>
+          </a:fillRef>
+          <a:effectRef idx="2">
+            <a:schemeClr val="accent1"/>
+          </a:effectRef>
+          <a:fontRef idx="minor">
+            <a:schemeClr val="lt1"/>
+          </a:fontRef>
+        </p:style>
+        <p:txBody>
+          <a:bodyPr rtlCol="0" anchor="ctr"/>
+          <a:lstStyle/>
+          <a:p>
+            <a:pPr algn="ctr"/>
+          </a:p>
+        </p:txBody>
+      </p:sp>
+      <p:sp>
+        <p:nvSpPr>
+          <p:cNvPr id="7" name="TextBox 6"/>
+          <p:cNvSpPr txBox="1"/>
+          <p:nvPr/>
+        </p:nvSpPr>
+        <p:spPr>
+          <a:xfrm>
+            <a:off x="731520" y="1554480"/>
+            <a:ext cx="10698480" cy="2743200"/>
+          </a:xfrm>
+          <a:prstGeom prst="rect">
+            <a:avLst/>
+          </a:prstGeom>
+          <a:noFill/>
+        </p:spPr>
+        <p:txBody>
+          <a:bodyPr wrap="square"/>
+          <a:lstStyle/>
+          <a:p>
+            <a:pPr algn="l">
+              <a:spcAft>
+                <a:spcPts val="600"/>
+              </a:spcAft>
+            </a:pPr>
+            <a:r>
+              <a:rPr lang="pt-BR" sz="1200" b="1">
+                <a:solidFill>
+                  <a:srgbClr val="1A6B2A"/>
+                </a:solidFill>
+                <a:latin typeface="Segoe UI"/>
+              </a:rPr>
+              <a:t>idwall (indústria): </a:t>
+            </a:r>
+            <a:r>
+              <a:rPr lang="pt-BR" sz="1200" b="0">
+                <a:solidFill>
+                  <a:srgbClr val="4A4A4A"/>
+                </a:solidFill>
+                <a:latin typeface="Segoe UI"/>
+              </a:rPr>
+              <a:t>oferece uma plataforma all-in-one de identidade com forte uso de ML — automatiza o KYC com OCR, validação documental e biométrica, e mantém um laboratório de antifraude. Atua principalmente na ENTRADA (onboarding) do usuário.</a:t>
+            </a:r>
+          </a:p>
+          <a:p>
+            <a:pPr algn="l">
+              <a:spcAft>
+                <a:spcPts val="600"/>
+              </a:spcAft>
+            </a:pPr>
+            <a:r>
+              <a:rPr lang="pt-BR" sz="1200" b="1">
+                <a:solidFill>
+                  <a:srgbClr val="1A6B2A"/>
+                </a:solidFill>
+                <a:latin typeface="Segoe UI"/>
+              </a:rPr>
+              <a:t>CAF — Combate à Fraude (indústria): </a:t>
+            </a:r>
+            <a:r>
+              <a:rPr lang="pt-BR" sz="1200" b="0">
+                <a:solidFill>
+                  <a:srgbClr val="4A4A4A"/>
+                </a:solidFill>
+                <a:latin typeface="Segoe UI"/>
+              </a:rPr>
+              <a:t>é especialista em ORQUESTRAÇÃO de identidade: combina documentoscopia, biometria facial e IA, com atuação no Brasil e no exterior. Foca em fraude transacional e validação documental.</a:t>
+            </a:r>
+          </a:p>
+        </p:txBody>
+      </p:sp>
+      <p:sp>
+        <p:nvSpPr>
+          <p:cNvPr id="8" name="Rounded Rectangle 7"/>
+          <p:cNvSpPr/>
+          <p:nvPr/>
+        </p:nvSpPr>
+        <p:spPr>
+          <a:xfrm>
+            <a:off x="548640" y="4526280"/>
+            <a:ext cx="11064240" cy="2011680"/>
+          </a:xfrm>
+          <a:prstGeom prst="roundRect">
+            <a:avLst>
+              <a:gd name="adj" fmla="val 5000"/>
+            </a:avLst>
+          </a:prstGeom>
+          <a:solidFill>
+            <a:srgbClr val="E8F5E9"/>
+          </a:solidFill>
+          <a:ln>
+            <a:noFill/>
+          </a:ln>
+        </p:spPr>
+        <p:style>
+          <a:lnRef idx="1">
+            <a:schemeClr val="accent1"/>
+          </a:lnRef>
+          <a:fillRef idx="3">
+            <a:schemeClr val="accent1"/>
+          </a:fillRef>
+          <a:effectRef idx="2">
+            <a:schemeClr val="accent1"/>
+          </a:effectRef>
+          <a:fontRef idx="minor">
+            <a:schemeClr val="lt1"/>
+          </a:fontRef>
+        </p:style>
+        <p:txBody>
+          <a:bodyPr rtlCol="0" anchor="ctr"/>
+          <a:lstStyle/>
+          <a:p>
+            <a:pPr algn="ctr"/>
+          </a:p>
+        </p:txBody>
+      </p:sp>
+      <p:sp>
+        <p:nvSpPr>
+          <p:cNvPr id="9" name="TextBox 8"/>
+          <p:cNvSpPr txBox="1"/>
+          <p:nvPr/>
+        </p:nvSpPr>
+        <p:spPr>
+          <a:xfrm>
+            <a:off x="731520" y="4617720"/>
+            <a:ext cx="10698480" cy="320040"/>
+          </a:xfrm>
+          <a:prstGeom prst="rect">
+            <a:avLst/>
+          </a:prstGeom>
+          <a:noFill/>
+        </p:spPr>
+        <p:txBody>
+          <a:bodyPr wrap="square">
+            <a:spAutoFit/>
+          </a:bodyPr>
+          <a:lstStyle/>
+          <a:p>
+            <a:pPr algn="l">
+              <a:defRPr sz="1300" b="1">
+                <a:solidFill>
+                  <a:srgbClr val="1A6B2A"/>
+                </a:solidFill>
+                <a:latin typeface="Segoe UI"/>
+              </a:defRPr>
+            </a:pPr>
+            <a:r>
+              <a:t>Relação com a sua proposta</a:t>
+            </a:r>
+          </a:p>
+        </p:txBody>
+      </p:sp>
+      <p:sp>
+        <p:nvSpPr>
+          <p:cNvPr id="10" name="TextBox 9"/>
+          <p:cNvSpPr txBox="1"/>
+          <p:nvPr/>
+        </p:nvSpPr>
+        <p:spPr>
+          <a:xfrm>
+            <a:off x="731520" y="4983480"/>
+            <a:ext cx="10698480" cy="1463040"/>
+          </a:xfrm>
+          <a:prstGeom prst="rect">
+            <a:avLst/>
+          </a:prstGeom>
+          <a:noFill/>
+        </p:spPr>
+        <p:txBody>
+          <a:bodyPr wrap="square"/>
+          <a:lstStyle/>
+          <a:p>
+            <a:pPr algn="l">
+              <a:defRPr sz="1300" b="0">
+                <a:solidFill>
+                  <a:srgbClr val="4A4A4A"/>
+                </a:solidFill>
+                <a:latin typeface="Segoe UI"/>
+              </a:defRPr>
+            </a:pPr>
+            <a:r>
+              <a:t>Ambas são fortes na verificação de entrada, mas tratam o usuário como caixa-preta e param após o onboarding. A proposta atua DURANTE o uso (autenticação contínua), com ensemble EXPLICÁVEL via SHAP, detecção de DERIVA comportamental e trilha imutável em blockchain — além de ser aberta e reprodutível.</a:t>
+            </a:r>
+          </a:p>
+        </p:txBody>
+      </p:sp>
+    </p:spTree>
+  </p:cSld>
+  <p:clrMapOvr>
+    <a:masterClrMapping/>
+  </p:clrMapOvr>
+</p:sld>
+</file>
+
+<file path=ppt/slides/slide25.xml><?xml version="1.0" encoding="utf-8"?>
+<p:sld xmlns:a="http://schemas.openxmlformats.org/drawingml/2006/main" xmlns:p="http://schemas.openxmlformats.org/presentationml/2006/main" xmlns:r="http://schemas.openxmlformats.org/officeDocument/2006/relationships">
+  <p:cSld>
+    <p:bg>
+      <p:bgPr>
+        <a:solidFill>
+          <a:srgbClr val="FFFFFF"/>
+        </a:solidFill>
+        <a:effectLst/>
+      </p:bgPr>
+    </p:bg>
+    <p:spTree>
+      <p:nvGrpSpPr>
+        <p:cNvPr id="1" name=""/>
+        <p:cNvGrpSpPr/>
+        <p:nvPr/>
+      </p:nvGrpSpPr>
+      <p:grpSpPr/>
+      <p:sp>
+        <p:nvSpPr>
+          <p:cNvPr id="2" name="Rectangle 1"/>
+          <p:cNvSpPr/>
+          <p:nvPr/>
+        </p:nvSpPr>
+        <p:spPr>
+          <a:xfrm>
+            <a:off x="0" y="0"/>
+            <a:ext cx="12191695" cy="1188720"/>
+          </a:xfrm>
+          <a:prstGeom prst="rect">
+            <a:avLst/>
+          </a:prstGeom>
+          <a:solidFill>
+            <a:srgbClr val="1A6B2A"/>
+          </a:solidFill>
+          <a:ln>
+            <a:noFill/>
+          </a:ln>
+        </p:spPr>
+        <p:style>
+          <a:lnRef idx="1">
+            <a:schemeClr val="accent1"/>
+          </a:lnRef>
+          <a:fillRef idx="3">
+            <a:schemeClr val="accent1"/>
+          </a:fillRef>
+          <a:effectRef idx="2">
+            <a:schemeClr val="accent1"/>
+          </a:effectRef>
+          <a:fontRef idx="minor">
+            <a:schemeClr val="lt1"/>
+          </a:fontRef>
+        </p:style>
+        <p:txBody>
+          <a:bodyPr rtlCol="0" anchor="ctr"/>
+          <a:lstStyle/>
+          <a:p>
+            <a:pPr algn="ctr"/>
+          </a:p>
+        </p:txBody>
+      </p:sp>
+      <p:sp>
+        <p:nvSpPr>
+          <p:cNvPr id="3" name="TextBox 2"/>
+          <p:cNvSpPr txBox="1"/>
+          <p:nvPr/>
+        </p:nvSpPr>
+        <p:spPr>
+          <a:xfrm>
+            <a:off x="731520" y="228600"/>
+            <a:ext cx="10058400" cy="548640"/>
+          </a:xfrm>
+          <a:prstGeom prst="rect">
+            <a:avLst/>
+          </a:prstGeom>
+          <a:noFill/>
+        </p:spPr>
+        <p:txBody>
+          <a:bodyPr wrap="square">
+            <a:spAutoFit/>
+          </a:bodyPr>
+          <a:lstStyle/>
+          <a:p>
+            <a:pPr algn="l">
+              <a:defRPr sz="2800" b="1">
+                <a:solidFill>
+                  <a:srgbClr val="FFFFFF"/>
+                </a:solidFill>
+                <a:latin typeface="Segoe UI"/>
+              </a:defRPr>
+            </a:pPr>
+            <a:r>
+              <a:t>Núcleo de IA: Ensemble e Explicabilidade</a:t>
+            </a:r>
+          </a:p>
+        </p:txBody>
+      </p:sp>
+      <p:sp>
+        <p:nvSpPr>
+          <p:cNvPr id="4" name="TextBox 3"/>
+          <p:cNvSpPr txBox="1"/>
+          <p:nvPr/>
+        </p:nvSpPr>
+        <p:spPr>
+          <a:xfrm>
+            <a:off x="731520" y="685800"/>
+            <a:ext cx="10058400" cy="365760"/>
+          </a:xfrm>
+          <a:prstGeom prst="rect">
+            <a:avLst/>
+          </a:prstGeom>
+          <a:noFill/>
+        </p:spPr>
+        <p:txBody>
+          <a:bodyPr wrap="square">
+            <a:spAutoFit/>
+          </a:bodyPr>
+          <a:lstStyle/>
+          <a:p>
+            <a:pPr algn="l">
+              <a:defRPr sz="1400" b="0">
+                <a:solidFill>
+                  <a:srgbClr val="B0E0B0"/>
+                </a:solidFill>
+                <a:latin typeface="Segoe UI"/>
+              </a:defRPr>
+            </a:pPr>
+            <a:r>
+              <a:t>Isolation Forest (2008) · XAI com SHAP (2017 / 2020)</a:t>
+            </a:r>
+          </a:p>
+        </p:txBody>
+      </p:sp>
+      <p:sp>
+        <p:nvSpPr>
+          <p:cNvPr id="5" name="Rectangle 4"/>
+          <p:cNvSpPr/>
+          <p:nvPr/>
+        </p:nvSpPr>
+        <p:spPr>
+          <a:xfrm>
+            <a:off x="0" y="1188720"/>
+            <a:ext cx="12191695" cy="54864"/>
+          </a:xfrm>
+          <a:prstGeom prst="rect">
+            <a:avLst/>
+          </a:prstGeom>
+          <a:solidFill>
+            <a:srgbClr val="CD191E"/>
+          </a:solidFill>
+          <a:ln>
+            <a:noFill/>
+          </a:ln>
+        </p:spPr>
+        <p:style>
+          <a:lnRef idx="1">
+            <a:schemeClr val="accent1"/>
+          </a:lnRef>
+          <a:fillRef idx="3">
+            <a:schemeClr val="accent1"/>
+          </a:fillRef>
+          <a:effectRef idx="2">
+            <a:schemeClr val="accent1"/>
+          </a:effectRef>
+          <a:fontRef idx="minor">
+            <a:schemeClr val="lt1"/>
+          </a:fontRef>
+        </p:style>
+        <p:txBody>
+          <a:bodyPr rtlCol="0" anchor="ctr"/>
+          <a:lstStyle/>
+          <a:p>
+            <a:pPr algn="ctr"/>
+          </a:p>
+        </p:txBody>
+      </p:sp>
+      <p:sp>
+        <p:nvSpPr>
+          <p:cNvPr id="6" name="Rounded Rectangle 5"/>
+          <p:cNvSpPr/>
+          <p:nvPr/>
+        </p:nvSpPr>
+        <p:spPr>
+          <a:xfrm>
+            <a:off x="548640" y="1463040"/>
+            <a:ext cx="11064240" cy="2926080"/>
+          </a:xfrm>
+          <a:prstGeom prst="roundRect">
+            <a:avLst>
+              <a:gd name="adj" fmla="val 4000"/>
+            </a:avLst>
+          </a:prstGeom>
+          <a:solidFill>
+            <a:srgbClr val="F0F2F5"/>
+          </a:solidFill>
+          <a:ln>
+            <a:noFill/>
+          </a:ln>
+        </p:spPr>
+        <p:style>
+          <a:lnRef idx="1">
+            <a:schemeClr val="accent1"/>
+          </a:lnRef>
+          <a:fillRef idx="3">
+            <a:schemeClr val="accent1"/>
+          </a:fillRef>
+          <a:effectRef idx="2">
+            <a:schemeClr val="accent1"/>
+          </a:effectRef>
+          <a:fontRef idx="minor">
+            <a:schemeClr val="lt1"/>
+          </a:fontRef>
+        </p:style>
+        <p:txBody>
+          <a:bodyPr rtlCol="0" anchor="ctr"/>
+          <a:lstStyle/>
+          <a:p>
+            <a:pPr algn="ctr"/>
+          </a:p>
+        </p:txBody>
+      </p:sp>
+      <p:sp>
+        <p:nvSpPr>
+          <p:cNvPr id="7" name="TextBox 6"/>
+          <p:cNvSpPr txBox="1"/>
+          <p:nvPr/>
+        </p:nvSpPr>
+        <p:spPr>
+          <a:xfrm>
+            <a:off x="731520" y="1554480"/>
+            <a:ext cx="10698480" cy="2743200"/>
+          </a:xfrm>
+          <a:prstGeom prst="rect">
+            <a:avLst/>
+          </a:prstGeom>
+          <a:noFill/>
+        </p:spPr>
+        <p:txBody>
+          <a:bodyPr wrap="square"/>
+          <a:lstStyle/>
+          <a:p>
+            <a:pPr algn="l">
+              <a:spcAft>
+                <a:spcPts val="600"/>
+              </a:spcAft>
+            </a:pPr>
+            <a:r>
+              <a:rPr lang="pt-BR" sz="1200" b="1">
+                <a:solidFill>
+                  <a:srgbClr val="1A6B2A"/>
+                </a:solidFill>
+                <a:latin typeface="Segoe UI"/>
+              </a:rPr>
+              <a:t>Liu, Ting &amp; Zhou (acadêmico, ICDM 2008): </a:t>
+            </a:r>
+            <a:r>
+              <a:rPr lang="pt-BR" sz="1200" b="0">
+                <a:solidFill>
+                  <a:srgbClr val="4A4A4A"/>
+                </a:solidFill>
+                <a:latin typeface="Segoe UI"/>
+              </a:rPr>
+              <a:t>propuseram o Isolation Forest, que detecta anomalias ISOLANDO os pontos atípicos (caminhos curtos em árvores aleatórias), com custo linear e baixo uso de memória. É justamente o algoritmo de MAIOR peso (40%) no ensemble da proposta.</a:t>
+            </a:r>
+          </a:p>
+          <a:p>
+            <a:pPr algn="l">
+              <a:spcAft>
+                <a:spcPts val="600"/>
+              </a:spcAft>
+            </a:pPr>
+            <a:r>
+              <a:rPr lang="pt-BR" sz="1200" b="1">
+                <a:solidFill>
+                  <a:srgbClr val="1A6B2A"/>
+                </a:solidFill>
+                <a:latin typeface="Segoe UI"/>
+              </a:rPr>
+              <a:t>Wang et al. (IEEE Access 2020) / SHAP (Lundberg &amp; Lee, 2017): </a:t>
+            </a:r>
+            <a:r>
+              <a:rPr lang="pt-BR" sz="1200" b="0">
+                <a:solidFill>
+                  <a:srgbClr val="4A4A4A"/>
+                </a:solidFill>
+                <a:latin typeface="Segoe UI"/>
+              </a:rPr>
+              <a:t>aplicaram o SHAP para EXPLICAR um detector de intrusão sobre o dataset NSL-KDD, gerando explicações locais e globais de modelos que antes eram caixa-preta.</a:t>
+            </a:r>
+          </a:p>
+        </p:txBody>
+      </p:sp>
+      <p:sp>
+        <p:nvSpPr>
+          <p:cNvPr id="8" name="Rounded Rectangle 7"/>
+          <p:cNvSpPr/>
+          <p:nvPr/>
+        </p:nvSpPr>
+        <p:spPr>
+          <a:xfrm>
+            <a:off x="548640" y="4526280"/>
+            <a:ext cx="11064240" cy="2011680"/>
+          </a:xfrm>
+          <a:prstGeom prst="roundRect">
+            <a:avLst>
+              <a:gd name="adj" fmla="val 5000"/>
+            </a:avLst>
+          </a:prstGeom>
+          <a:solidFill>
+            <a:srgbClr val="E8F5E9"/>
+          </a:solidFill>
+          <a:ln>
+            <a:noFill/>
+          </a:ln>
+        </p:spPr>
+        <p:style>
+          <a:lnRef idx="1">
+            <a:schemeClr val="accent1"/>
+          </a:lnRef>
+          <a:fillRef idx="3">
+            <a:schemeClr val="accent1"/>
+          </a:fillRef>
+          <a:effectRef idx="2">
+            <a:schemeClr val="accent1"/>
+          </a:effectRef>
+          <a:fontRef idx="minor">
+            <a:schemeClr val="lt1"/>
+          </a:fontRef>
+        </p:style>
+        <p:txBody>
+          <a:bodyPr rtlCol="0" anchor="ctr"/>
+          <a:lstStyle/>
+          <a:p>
+            <a:pPr algn="ctr"/>
+          </a:p>
+        </p:txBody>
+      </p:sp>
+      <p:sp>
+        <p:nvSpPr>
+          <p:cNvPr id="9" name="TextBox 8"/>
+          <p:cNvSpPr txBox="1"/>
+          <p:nvPr/>
+        </p:nvSpPr>
+        <p:spPr>
+          <a:xfrm>
+            <a:off x="731520" y="4617720"/>
+            <a:ext cx="10698480" cy="320040"/>
+          </a:xfrm>
+          <a:prstGeom prst="rect">
+            <a:avLst/>
+          </a:prstGeom>
+          <a:noFill/>
+        </p:spPr>
+        <p:txBody>
+          <a:bodyPr wrap="square">
+            <a:spAutoFit/>
+          </a:bodyPr>
+          <a:lstStyle/>
+          <a:p>
+            <a:pPr algn="l">
+              <a:defRPr sz="1300" b="1">
+                <a:solidFill>
+                  <a:srgbClr val="1A6B2A"/>
+                </a:solidFill>
+                <a:latin typeface="Segoe UI"/>
+              </a:defRPr>
+            </a:pPr>
+            <a:r>
+              <a:t>Relação com a sua proposta</a:t>
+            </a:r>
+          </a:p>
+        </p:txBody>
+      </p:sp>
+      <p:sp>
+        <p:nvSpPr>
+          <p:cNvPr id="10" name="TextBox 9"/>
+          <p:cNvSpPr txBox="1"/>
+          <p:nvPr/>
+        </p:nvSpPr>
+        <p:spPr>
+          <a:xfrm>
+            <a:off x="731520" y="4983480"/>
+            <a:ext cx="10698480" cy="1463040"/>
+          </a:xfrm>
+          <a:prstGeom prst="rect">
+            <a:avLst/>
+          </a:prstGeom>
+          <a:noFill/>
+        </p:spPr>
+        <p:txBody>
+          <a:bodyPr wrap="square"/>
+          <a:lstStyle/>
+          <a:p>
+            <a:pPr algn="l">
+              <a:defRPr sz="1300" b="0">
+                <a:solidFill>
+                  <a:srgbClr val="4A4A4A"/>
+                </a:solidFill>
+                <a:latin typeface="Segoe UI"/>
+              </a:defRPr>
+            </a:pPr>
+            <a:r>
+              <a:t>A proposta orquestra o Isolation Forest com Random Forest e Deep Learning num score único e aplica o SHAP à AUTENTICAÇÃO (não a intrusão de rede): explica cada login e PERSISTE a explicação em blockchain — transformando técnicas acadêmicas isoladas em um sistema integrado e auditável.</a:t>
+            </a:r>
+          </a:p>
+        </p:txBody>
+      </p:sp>
+    </p:spTree>
+  </p:cSld>
+  <p:clrMapOvr>
+    <a:masterClrMapping/>
+  </p:clrMapOvr>
+</p:sld>
+</file>
+
+<file path=ppt/slides/slide26.xml><?xml version="1.0" encoding="utf-8"?>
+<p:sld xmlns:a="http://schemas.openxmlformats.org/drawingml/2006/main" xmlns:p="http://schemas.openxmlformats.org/presentationml/2006/main" xmlns:r="http://schemas.openxmlformats.org/officeDocument/2006/relationships">
+  <p:cSld>
+    <p:bg>
+      <p:bgPr>
+        <a:solidFill>
+          <a:srgbClr val="FFFFFF"/>
+        </a:solidFill>
+        <a:effectLst/>
+      </p:bgPr>
+    </p:bg>
+    <p:spTree>
+      <p:nvGrpSpPr>
+        <p:cNvPr id="1" name=""/>
+        <p:cNvGrpSpPr/>
+        <p:nvPr/>
+      </p:nvGrpSpPr>
+      <p:grpSpPr/>
+      <p:sp>
+        <p:nvSpPr>
+          <p:cNvPr id="2" name="Rectangle 1"/>
+          <p:cNvSpPr/>
+          <p:nvPr/>
+        </p:nvSpPr>
+        <p:spPr>
+          <a:xfrm>
+            <a:off x="0" y="0"/>
+            <a:ext cx="12191695" cy="1188720"/>
+          </a:xfrm>
+          <a:prstGeom prst="rect">
+            <a:avLst/>
+          </a:prstGeom>
+          <a:solidFill>
+            <a:srgbClr val="1A6B2A"/>
+          </a:solidFill>
+          <a:ln>
+            <a:noFill/>
+          </a:ln>
+        </p:spPr>
+        <p:style>
+          <a:lnRef idx="1">
+            <a:schemeClr val="accent1"/>
+          </a:lnRef>
+          <a:fillRef idx="3">
+            <a:schemeClr val="accent1"/>
+          </a:fillRef>
+          <a:effectRef idx="2">
+            <a:schemeClr val="accent1"/>
+          </a:effectRef>
+          <a:fontRef idx="minor">
+            <a:schemeClr val="lt1"/>
+          </a:fontRef>
+        </p:style>
+        <p:txBody>
+          <a:bodyPr rtlCol="0" anchor="ctr"/>
+          <a:lstStyle/>
+          <a:p>
+            <a:pPr algn="ctr"/>
+          </a:p>
+        </p:txBody>
+      </p:sp>
+      <p:sp>
+        <p:nvSpPr>
+          <p:cNvPr id="3" name="TextBox 2"/>
+          <p:cNvSpPr txBox="1"/>
+          <p:nvPr/>
+        </p:nvSpPr>
+        <p:spPr>
+          <a:xfrm>
+            <a:off x="731520" y="228600"/>
+            <a:ext cx="10058400" cy="548640"/>
+          </a:xfrm>
+          <a:prstGeom prst="rect">
+            <a:avLst/>
+          </a:prstGeom>
+          <a:noFill/>
+        </p:spPr>
+        <p:txBody>
+          <a:bodyPr wrap="square">
+            <a:spAutoFit/>
+          </a:bodyPr>
+          <a:lstStyle/>
+          <a:p>
+            <a:pPr algn="l">
+              <a:defRPr sz="2800" b="1">
+                <a:solidFill>
+                  <a:srgbClr val="FFFFFF"/>
+                </a:solidFill>
+                <a:latin typeface="Segoe UI"/>
+              </a:defRPr>
+            </a:pPr>
+            <a:r>
+              <a:t>Quadro Comparativo — Academia e Indústria</a:t>
+            </a:r>
+          </a:p>
+        </p:txBody>
+      </p:sp>
+      <p:sp>
+        <p:nvSpPr>
+          <p:cNvPr id="4" name="TextBox 3"/>
+          <p:cNvSpPr txBox="1"/>
+          <p:nvPr/>
+        </p:nvSpPr>
+        <p:spPr>
+          <a:xfrm>
+            <a:off x="731520" y="685800"/>
+            <a:ext cx="10058400" cy="365760"/>
+          </a:xfrm>
+          <a:prstGeom prst="rect">
+            <a:avLst/>
+          </a:prstGeom>
+          <a:noFill/>
+        </p:spPr>
+        <p:txBody>
+          <a:bodyPr wrap="square">
+            <a:spAutoFit/>
+          </a:bodyPr>
+          <a:lstStyle/>
+          <a:p>
+            <a:pPr algn="l">
+              <a:defRPr sz="1400" b="0">
+                <a:solidFill>
+                  <a:srgbClr val="B0E0B0"/>
+                </a:solidFill>
+                <a:latin typeface="Segoe UI"/>
+              </a:defRPr>
+            </a:pPr>
+            <a:r>
+              <a:t>10 trabalhos · proposta, ano, experimento e métricas</a:t>
+            </a:r>
+          </a:p>
+        </p:txBody>
+      </p:sp>
+      <p:sp>
+        <p:nvSpPr>
+          <p:cNvPr id="5" name="Rectangle 4"/>
+          <p:cNvSpPr/>
+          <p:nvPr/>
+        </p:nvSpPr>
+        <p:spPr>
+          <a:xfrm>
+            <a:off x="0" y="1188720"/>
+            <a:ext cx="12191695" cy="54864"/>
+          </a:xfrm>
+          <a:prstGeom prst="rect">
+            <a:avLst/>
+          </a:prstGeom>
+          <a:solidFill>
+            <a:srgbClr val="CD191E"/>
+          </a:solidFill>
+          <a:ln>
+            <a:noFill/>
+          </a:ln>
+        </p:spPr>
+        <p:style>
+          <a:lnRef idx="1">
+            <a:schemeClr val="accent1"/>
+          </a:lnRef>
+          <a:fillRef idx="3">
+            <a:schemeClr val="accent1"/>
+          </a:fillRef>
+          <a:effectRef idx="2">
+            <a:schemeClr val="accent1"/>
+          </a:effectRef>
+          <a:fontRef idx="minor">
+            <a:schemeClr val="lt1"/>
+          </a:fontRef>
+        </p:style>
+        <p:txBody>
+          <a:bodyPr rtlCol="0" anchor="ctr"/>
+          <a:lstStyle/>
+          <a:p>
+            <a:pPr algn="ctr"/>
+          </a:p>
+        </p:txBody>
+      </p:sp>
+      <p:graphicFrame>
+        <p:nvGraphicFramePr>
+          <p:cNvPr id="6" name="Table 5"/>
+          <p:cNvGraphicFramePr>
+            <a:graphicFrameLocks noGrp="1"/>
+          </p:cNvGraphicFramePr>
+          <p:nvPr/>
+        </p:nvGraphicFramePr>
+        <p:xfrm>
+          <a:off x="274320" y="1370520"/>
+          <a:ext cx="11612880" cy="5121600"/>
+        </p:xfrm>
+        <a:graphic>
+          <a:graphicData uri="http://schemas.openxmlformats.org/drawingml/2006/table">
+            <a:tbl>
+              <a:tblPr firstRow="1" bandRow="1">
+                <a:tableStyleId>{5C22544A-7EE6-4342-B048-85BDC9FD1C3A}</a:tableStyleId>
+              </a:tblPr>
+              <a:tblGrid>
+                <a:gridCol w="2011680"/>
+                <a:gridCol w="1280160"/>
+                <a:gridCol w="731520"/>
+                <a:gridCol w="2560320"/>
+                <a:gridCol w="2377440"/>
+                <a:gridCol w="2651760"/>
+              </a:tblGrid>
+              <a:tr h="396000">
+                <a:tc>
+                  <a:txBody>
+                    <a:bodyPr/>
+                    <a:lstStyle/>
+                    <a:p>
+                      <a:pPr>
+                        <a:defRPr sz="1000" b="1">
+                          <a:solidFill>
+                            <a:srgbClr val="FFFFFF"/>
+                          </a:solidFill>
+                          <a:latin typeface="Segoe UI"/>
+                        </a:defRPr>
+                      </a:pPr>
+                      <a:r>
+                        <a:t>Trabalho</a:t>
+                      </a:r>
+                    </a:p>
+                  </a:txBody>
+                  <a:tcPr>
+                    <a:solidFill>
+                      <a:srgbClr val="1A6B2A"/>
+                    </a:solidFill>
+                  </a:tcPr>
+                </a:tc>
+                <a:tc>
+                  <a:txBody>
+                    <a:bodyPr/>
+                    <a:lstStyle/>
+                    <a:p>
+                      <a:pPr>
+                        <a:defRPr sz="1000" b="1">
+                          <a:solidFill>
+                            <a:srgbClr val="FFFFFF"/>
+                          </a:solidFill>
+                          <a:latin typeface="Segoe UI"/>
+                        </a:defRPr>
+                      </a:pPr>
+                      <a:r>
+                        <a:t>Tipo</a:t>
+                      </a:r>
+                    </a:p>
+                  </a:txBody>
+                  <a:tcPr>
+                    <a:solidFill>
+                      <a:srgbClr val="1A6B2A"/>
+                    </a:solidFill>
+                  </a:tcPr>
+                </a:tc>
+                <a:tc>
+                  <a:txBody>
+                    <a:bodyPr/>
+                    <a:lstStyle/>
+                    <a:p>
+                      <a:pPr>
+                        <a:defRPr sz="1000" b="1">
+                          <a:solidFill>
+                            <a:srgbClr val="FFFFFF"/>
+                          </a:solidFill>
+                          <a:latin typeface="Segoe UI"/>
+                        </a:defRPr>
+                      </a:pPr>
+                      <a:r>
+                        <a:t>Ano</a:t>
+                      </a:r>
+                    </a:p>
+                  </a:txBody>
+                  <a:tcPr>
+                    <a:solidFill>
+                      <a:srgbClr val="1A6B2A"/>
+                    </a:solidFill>
+                  </a:tcPr>
+                </a:tc>
+                <a:tc>
+                  <a:txBody>
+                    <a:bodyPr/>
+                    <a:lstStyle/>
+                    <a:p>
+                      <a:pPr>
+                        <a:defRPr sz="1000" b="1">
+                          <a:solidFill>
+                            <a:srgbClr val="FFFFFF"/>
+                          </a:solidFill>
+                          <a:latin typeface="Segoe UI"/>
+                        </a:defRPr>
+                      </a:pPr>
+                      <a:r>
+                        <a:t>Proposta / Foco</a:t>
+                      </a:r>
+                    </a:p>
+                  </a:txBody>
+                  <a:tcPr>
+                    <a:solidFill>
+                      <a:srgbClr val="1A6B2A"/>
+                    </a:solidFill>
+                  </a:tcPr>
+                </a:tc>
+                <a:tc>
+                  <a:txBody>
+                    <a:bodyPr/>
+                    <a:lstStyle/>
+                    <a:p>
+                      <a:pPr>
+                        <a:defRPr sz="1000" b="1">
+                          <a:solidFill>
+                            <a:srgbClr val="FFFFFF"/>
+                          </a:solidFill>
+                          <a:latin typeface="Segoe UI"/>
+                        </a:defRPr>
+                      </a:pPr>
+                      <a:r>
+                        <a:t>Experimento</a:t>
+                      </a:r>
+                    </a:p>
+                  </a:txBody>
+                  <a:tcPr>
+                    <a:solidFill>
+                      <a:srgbClr val="1A6B2A"/>
+                    </a:solidFill>
+                  </a:tcPr>
+                </a:tc>
+                <a:tc>
+                  <a:txBody>
+                    <a:bodyPr/>
+                    <a:lstStyle/>
+                    <a:p>
+                      <a:pPr>
+                        <a:defRPr sz="1000" b="1">
+                          <a:solidFill>
+                            <a:srgbClr val="FFFFFF"/>
+                          </a:solidFill>
+                          <a:latin typeface="Segoe UI"/>
+                        </a:defRPr>
+                      </a:pPr>
+                      <a:r>
+                        <a:t>Métrica / Resultado</a:t>
+                      </a:r>
+                    </a:p>
+                  </a:txBody>
+                  <a:tcPr>
+                    <a:solidFill>
+                      <a:srgbClr val="1A6B2A"/>
+                    </a:solidFill>
+                  </a:tcPr>
+                </a:tc>
+              </a:tr>
+              <a:tr h="396000">
+                <a:tc>
+                  <a:txBody>
+                    <a:bodyPr/>
+                    <a:lstStyle/>
+                    <a:p>
+                      <a:pPr>
+                        <a:defRPr sz="950" b="1">
+                          <a:solidFill>
+                            <a:srgbClr val="4A4A4A"/>
+                          </a:solidFill>
+                          <a:latin typeface="Segoe UI"/>
+                        </a:defRPr>
+                      </a:pPr>
+                      <a:r>
+                        <a:t>Killourhy &amp; Maxion</a:t>
+                      </a:r>
+                    </a:p>
+                  </a:txBody>
+                  <a:tcPr>
+                    <a:solidFill>
+                      <a:srgbClr val="FFFFFF"/>
+                    </a:solidFill>
+                  </a:tcPr>
+                </a:tc>
+                <a:tc>
+                  <a:txBody>
+                    <a:bodyPr/>
+                    <a:lstStyle/>
+                    <a:p>
+                      <a:pPr>
+                        <a:defRPr sz="950">
+                          <a:solidFill>
+                            <a:srgbClr val="4A4A4A"/>
+                          </a:solidFill>
+                          <a:latin typeface="Segoe UI"/>
+                        </a:defRPr>
+                      </a:pPr>
+                      <a:r>
+                        <a:t>Acadêmico</a:t>
+                      </a:r>
+                    </a:p>
+                  </a:txBody>
+                  <a:tcPr>
+                    <a:solidFill>
+                      <a:srgbClr val="FFFFFF"/>
+                    </a:solidFill>
+                  </a:tcPr>
+                </a:tc>
+                <a:tc>
+                  <a:txBody>
+                    <a:bodyPr/>
+                    <a:lstStyle/>
+                    <a:p>
+                      <a:pPr>
+                        <a:defRPr sz="950">
+                          <a:solidFill>
+                            <a:srgbClr val="4A4A4A"/>
+                          </a:solidFill>
+                          <a:latin typeface="Segoe UI"/>
+                        </a:defRPr>
+                      </a:pPr>
+                      <a:r>
+                        <a:t>2009</a:t>
+                      </a:r>
+                    </a:p>
+                  </a:txBody>
+                  <a:tcPr>
+                    <a:solidFill>
+                      <a:srgbClr val="FFFFFF"/>
+                    </a:solidFill>
+                  </a:tcPr>
+                </a:tc>
+                <a:tc>
+                  <a:txBody>
+                    <a:bodyPr/>
+                    <a:lstStyle/>
+                    <a:p>
+                      <a:pPr>
+                        <a:defRPr sz="950">
+                          <a:solidFill>
+                            <a:srgbClr val="4A4A4A"/>
+                          </a:solidFill>
+                          <a:latin typeface="Segoe UI"/>
+                        </a:defRPr>
+                      </a:pPr>
+                      <a:r>
+                        <a:t>Benchmark de keystroke</a:t>
+                      </a:r>
+                    </a:p>
+                  </a:txBody>
+                  <a:tcPr>
+                    <a:solidFill>
+                      <a:srgbClr val="FFFFFF"/>
+                    </a:solidFill>
+                  </a:tcPr>
+                </a:tc>
+                <a:tc>
+                  <a:txBody>
+                    <a:bodyPr/>
+                    <a:lstStyle/>
+                    <a:p>
+                      <a:pPr>
+                        <a:defRPr sz="950">
+                          <a:solidFill>
+                            <a:srgbClr val="4A4A4A"/>
+                          </a:solidFill>
+                          <a:latin typeface="Segoe UI"/>
+                        </a:defRPr>
+                      </a:pPr>
+                      <a:r>
+                        <a:t>51 usuários, senha fixa</a:t>
+                      </a:r>
+                    </a:p>
+                  </a:txBody>
+                  <a:tcPr>
+                    <a:solidFill>
+                      <a:srgbClr val="FFFFFF"/>
+                    </a:solidFill>
+                  </a:tcPr>
+                </a:tc>
+                <a:tc>
+                  <a:txBody>
+                    <a:bodyPr/>
+                    <a:lstStyle/>
+                    <a:p>
+                      <a:pPr>
+                        <a:defRPr sz="950">
+                          <a:solidFill>
+                            <a:srgbClr val="4A4A4A"/>
+                          </a:solidFill>
+                          <a:latin typeface="Segoe UI"/>
+                        </a:defRPr>
+                      </a:pPr>
+                      <a:r>
+                        <a:t>EER ~9,6%</a:t>
+                      </a:r>
+                    </a:p>
+                  </a:txBody>
+                  <a:tcPr>
+                    <a:solidFill>
+                      <a:srgbClr val="FFFFFF"/>
+                    </a:solidFill>
+                  </a:tcPr>
+                </a:tc>
+              </a:tr>
+              <a:tr h="396000">
+                <a:tc>
+                  <a:txBody>
+                    <a:bodyPr/>
+                    <a:lstStyle/>
+                    <a:p>
+                      <a:pPr>
+                        <a:defRPr sz="950" b="1">
+                          <a:solidFill>
+                            <a:srgbClr val="4A4A4A"/>
+                          </a:solidFill>
+                          <a:latin typeface="Segoe UI"/>
+                        </a:defRPr>
+                      </a:pPr>
+                      <a:r>
+                        <a:t>Frank (Touchalytics)</a:t>
+                      </a:r>
+                    </a:p>
+                  </a:txBody>
+                  <a:tcPr>
+                    <a:solidFill>
+                      <a:srgbClr val="F0F2F5"/>
+                    </a:solidFill>
+                  </a:tcPr>
+                </a:tc>
+                <a:tc>
+                  <a:txBody>
+                    <a:bodyPr/>
+                    <a:lstStyle/>
+                    <a:p>
+                      <a:pPr>
+                        <a:defRPr sz="950">
+                          <a:solidFill>
+                            <a:srgbClr val="4A4A4A"/>
+                          </a:solidFill>
+                          <a:latin typeface="Segoe UI"/>
+                        </a:defRPr>
+                      </a:pPr>
+                      <a:r>
+                        <a:t>Acadêmico</a:t>
+                      </a:r>
+                    </a:p>
+                  </a:txBody>
+                  <a:tcPr>
+                    <a:solidFill>
+                      <a:srgbClr val="F0F2F5"/>
+                    </a:solidFill>
+                  </a:tcPr>
+                </a:tc>
+                <a:tc>
+                  <a:txBody>
+                    <a:bodyPr/>
+                    <a:lstStyle/>
+                    <a:p>
+                      <a:pPr>
+                        <a:defRPr sz="950">
+                          <a:solidFill>
+                            <a:srgbClr val="4A4A4A"/>
+                          </a:solidFill>
+                          <a:latin typeface="Segoe UI"/>
+                        </a:defRPr>
+                      </a:pPr>
+                      <a:r>
+                        <a:t>2013</a:t>
+                      </a:r>
+                    </a:p>
+                  </a:txBody>
+                  <a:tcPr>
+                    <a:solidFill>
+                      <a:srgbClr val="F0F2F5"/>
+                    </a:solidFill>
+                  </a:tcPr>
+                </a:tc>
+                <a:tc>
+                  <a:txBody>
+                    <a:bodyPr/>
+                    <a:lstStyle/>
+                    <a:p>
+                      <a:pPr>
+                        <a:defRPr sz="950">
+                          <a:solidFill>
+                            <a:srgbClr val="4A4A4A"/>
+                          </a:solidFill>
+                          <a:latin typeface="Segoe UI"/>
+                        </a:defRPr>
+                      </a:pPr>
+                      <a:r>
+                        <a:t>Auth. contínua (toque)</a:t>
+                      </a:r>
+                    </a:p>
+                  </a:txBody>
+                  <a:tcPr>
+                    <a:solidFill>
+                      <a:srgbClr val="F0F2F5"/>
+                    </a:solidFill>
+                  </a:tcPr>
+                </a:tc>
+                <a:tc>
+                  <a:txBody>
+                    <a:bodyPr/>
+                    <a:lstStyle/>
+                    <a:p>
+                      <a:pPr>
+                        <a:defRPr sz="950">
+                          <a:solidFill>
+                            <a:srgbClr val="4A4A4A"/>
+                          </a:solidFill>
+                          <a:latin typeface="Segoe UI"/>
+                        </a:defRPr>
+                      </a:pPr>
+                      <a:r>
+                        <a:t>41 usuários, 30 features</a:t>
+                      </a:r>
+                    </a:p>
+                  </a:txBody>
+                  <a:tcPr>
+                    <a:solidFill>
+                      <a:srgbClr val="F0F2F5"/>
+                    </a:solidFill>
+                  </a:tcPr>
+                </a:tc>
+                <a:tc>
+                  <a:txBody>
+                    <a:bodyPr/>
+                    <a:lstStyle/>
+                    <a:p>
+                      <a:pPr>
+                        <a:defRPr sz="950">
+                          <a:solidFill>
+                            <a:srgbClr val="4A4A4A"/>
+                          </a:solidFill>
+                          <a:latin typeface="Segoe UI"/>
+                        </a:defRPr>
+                      </a:pPr>
+                      <a:r>
+                        <a:t>EER 0–3%</a:t>
+                      </a:r>
+                    </a:p>
+                  </a:txBody>
+                  <a:tcPr>
+                    <a:solidFill>
+                      <a:srgbClr val="F0F2F5"/>
+                    </a:solidFill>
+                  </a:tcPr>
+                </a:tc>
+              </a:tr>
+              <a:tr h="396000">
+                <a:tc>
+                  <a:txBody>
+                    <a:bodyPr/>
+                    <a:lstStyle/>
+                    <a:p>
+                      <a:pPr>
+                        <a:defRPr sz="950" b="1">
+                          <a:solidFill>
+                            <a:srgbClr val="4A4A4A"/>
+                          </a:solidFill>
+                          <a:latin typeface="Segoe UI"/>
+                        </a:defRPr>
+                      </a:pPr>
+                      <a:r>
+                        <a:t>Wiefling (RBA)</a:t>
+                      </a:r>
+                    </a:p>
+                  </a:txBody>
+                  <a:tcPr>
+                    <a:solidFill>
+                      <a:srgbClr val="FFFFFF"/>
+                    </a:solidFill>
+                  </a:tcPr>
+                </a:tc>
+                <a:tc>
+                  <a:txBody>
+                    <a:bodyPr/>
+                    <a:lstStyle/>
+                    <a:p>
+                      <a:pPr>
+                        <a:defRPr sz="950">
+                          <a:solidFill>
+                            <a:srgbClr val="4A4A4A"/>
+                          </a:solidFill>
+                          <a:latin typeface="Segoe UI"/>
+                        </a:defRPr>
+                      </a:pPr>
+                      <a:r>
+                        <a:t>Acadêmico</a:t>
+                      </a:r>
+                    </a:p>
+                  </a:txBody>
+                  <a:tcPr>
+                    <a:solidFill>
+                      <a:srgbClr val="FFFFFF"/>
+                    </a:solidFill>
+                  </a:tcPr>
+                </a:tc>
+                <a:tc>
+                  <a:txBody>
+                    <a:bodyPr/>
+                    <a:lstStyle/>
+                    <a:p>
+                      <a:pPr>
+                        <a:defRPr sz="950">
+                          <a:solidFill>
+                            <a:srgbClr val="4A4A4A"/>
+                          </a:solidFill>
+                          <a:latin typeface="Segoe UI"/>
+                        </a:defRPr>
+                      </a:pPr>
+                      <a:r>
+                        <a:t>2019</a:t>
+                      </a:r>
+                    </a:p>
+                  </a:txBody>
+                  <a:tcPr>
+                    <a:solidFill>
+                      <a:srgbClr val="FFFFFF"/>
+                    </a:solidFill>
+                  </a:tcPr>
+                </a:tc>
+                <a:tc>
+                  <a:txBody>
+                    <a:bodyPr/>
+                    <a:lstStyle/>
+                    <a:p>
+                      <a:pPr>
+                        <a:defRPr sz="950">
+                          <a:solidFill>
+                            <a:srgbClr val="4A4A4A"/>
+                          </a:solidFill>
+                          <a:latin typeface="Segoe UI"/>
+                        </a:defRPr>
+                      </a:pPr>
+                      <a:r>
+                        <a:t>Risk-based authentication</a:t>
+                      </a:r>
+                    </a:p>
+                  </a:txBody>
+                  <a:tcPr>
+                    <a:solidFill>
+                      <a:srgbClr val="FFFFFF"/>
+                    </a:solidFill>
+                  </a:tcPr>
+                </a:tc>
+                <a:tc>
+                  <a:txBody>
+                    <a:bodyPr/>
+                    <a:lstStyle/>
+                    <a:p>
+                      <a:pPr>
+                        <a:defRPr sz="950">
+                          <a:solidFill>
+                            <a:srgbClr val="4A4A4A"/>
+                          </a:solidFill>
+                          <a:latin typeface="Segoe UI"/>
+                        </a:defRPr>
+                      </a:pPr>
+                      <a:r>
+                        <a:t>8 serviços reais</a:t>
+                      </a:r>
+                    </a:p>
+                  </a:txBody>
+                  <a:tcPr>
+                    <a:solidFill>
+                      <a:srgbClr val="FFFFFF"/>
+                    </a:solidFill>
+                  </a:tcPr>
+                </a:tc>
+                <a:tc>
+                  <a:txBody>
+                    <a:bodyPr/>
+                    <a:lstStyle/>
+                    <a:p>
+                      <a:pPr>
+                        <a:defRPr sz="950">
+                          <a:solidFill>
+                            <a:srgbClr val="4A4A4A"/>
+                          </a:solidFill>
+                          <a:latin typeface="Segoe UI"/>
+                        </a:defRPr>
+                      </a:pPr>
+                      <a:r>
+                        <a:t>IP domina; pouca transparência</a:t>
+                      </a:r>
+                    </a:p>
+                  </a:txBody>
+                  <a:tcPr>
+                    <a:solidFill>
+                      <a:srgbClr val="FFFFFF"/>
+                    </a:solidFill>
+                  </a:tcPr>
+                </a:tc>
+              </a:tr>
+              <a:tr h="396000">
+                <a:tc>
+                  <a:txBody>
+                    <a:bodyPr/>
+                    <a:lstStyle/>
+                    <a:p>
+                      <a:pPr>
+                        <a:defRPr sz="950" b="1">
+                          <a:solidFill>
+                            <a:srgbClr val="4A4A4A"/>
+                          </a:solidFill>
+                          <a:latin typeface="Segoe UI"/>
+                        </a:defRPr>
+                      </a:pPr>
+                      <a:r>
+                        <a:t>Liu (Isolation Forest)</a:t>
+                      </a:r>
+                    </a:p>
+                  </a:txBody>
+                  <a:tcPr>
+                    <a:solidFill>
+                      <a:srgbClr val="F0F2F5"/>
+                    </a:solidFill>
+                  </a:tcPr>
+                </a:tc>
+                <a:tc>
+                  <a:txBody>
+                    <a:bodyPr/>
+                    <a:lstStyle/>
+                    <a:p>
+                      <a:pPr>
+                        <a:defRPr sz="950">
+                          <a:solidFill>
+                            <a:srgbClr val="4A4A4A"/>
+                          </a:solidFill>
+                          <a:latin typeface="Segoe UI"/>
+                        </a:defRPr>
+                      </a:pPr>
+                      <a:r>
+                        <a:t>Acadêmico</a:t>
+                      </a:r>
+                    </a:p>
+                  </a:txBody>
+                  <a:tcPr>
+                    <a:solidFill>
+                      <a:srgbClr val="F0F2F5"/>
+                    </a:solidFill>
+                  </a:tcPr>
+                </a:tc>
+                <a:tc>
+                  <a:txBody>
+                    <a:bodyPr/>
+                    <a:lstStyle/>
+                    <a:p>
+                      <a:pPr>
+                        <a:defRPr sz="950">
+                          <a:solidFill>
+                            <a:srgbClr val="4A4A4A"/>
+                          </a:solidFill>
+                          <a:latin typeface="Segoe UI"/>
+                        </a:defRPr>
+                      </a:pPr>
+                      <a:r>
+                        <a:t>2008</a:t>
+                      </a:r>
+                    </a:p>
+                  </a:txBody>
+                  <a:tcPr>
+                    <a:solidFill>
+                      <a:srgbClr val="F0F2F5"/>
+                    </a:solidFill>
+                  </a:tcPr>
+                </a:tc>
+                <a:tc>
+                  <a:txBody>
+                    <a:bodyPr/>
+                    <a:lstStyle/>
+                    <a:p>
+                      <a:pPr>
+                        <a:defRPr sz="950">
+                          <a:solidFill>
+                            <a:srgbClr val="4A4A4A"/>
+                          </a:solidFill>
+                          <a:latin typeface="Segoe UI"/>
+                        </a:defRPr>
+                      </a:pPr>
+                      <a:r>
+                        <a:t>Detecção de anomalias</a:t>
+                      </a:r>
+                    </a:p>
+                  </a:txBody>
+                  <a:tcPr>
+                    <a:solidFill>
+                      <a:srgbClr val="F0F2F5"/>
+                    </a:solidFill>
+                  </a:tcPr>
+                </a:tc>
+                <a:tc>
+                  <a:txBody>
+                    <a:bodyPr/>
+                    <a:lstStyle/>
+                    <a:p>
+                      <a:pPr>
+                        <a:defRPr sz="950">
+                          <a:solidFill>
+                            <a:srgbClr val="4A4A4A"/>
+                          </a:solidFill>
+                          <a:latin typeface="Segoe UI"/>
+                        </a:defRPr>
+                      </a:pPr>
+                      <a:r>
+                        <a:t>Benchmarks (ICDM)</a:t>
+                      </a:r>
+                    </a:p>
+                  </a:txBody>
+                  <a:tcPr>
+                    <a:solidFill>
+                      <a:srgbClr val="F0F2F5"/>
+                    </a:solidFill>
+                  </a:tcPr>
+                </a:tc>
+                <a:tc>
+                  <a:txBody>
+                    <a:bodyPr/>
+                    <a:lstStyle/>
+                    <a:p>
+                      <a:pPr>
+                        <a:defRPr sz="950">
+                          <a:solidFill>
+                            <a:srgbClr val="4A4A4A"/>
+                          </a:solidFill>
+                          <a:latin typeface="Segoe UI"/>
+                        </a:defRPr>
+                      </a:pPr>
+                      <a:r>
+                        <a:t>Custo linear, escalável</a:t>
+                      </a:r>
+                    </a:p>
+                  </a:txBody>
+                  <a:tcPr>
+                    <a:solidFill>
+                      <a:srgbClr val="F0F2F5"/>
+                    </a:solidFill>
+                  </a:tcPr>
+                </a:tc>
+              </a:tr>
+              <a:tr h="396000">
+                <a:tc>
+                  <a:txBody>
+                    <a:bodyPr/>
+                    <a:lstStyle/>
+                    <a:p>
+                      <a:pPr>
+                        <a:defRPr sz="950" b="1">
+                          <a:solidFill>
+                            <a:srgbClr val="4A4A4A"/>
+                          </a:solidFill>
+                          <a:latin typeface="Segoe UI"/>
+                        </a:defRPr>
+                      </a:pPr>
+                      <a:r>
+                        <a:t>Wang (XAI / SHAP)</a:t>
+                      </a:r>
+                    </a:p>
+                  </a:txBody>
+                  <a:tcPr>
+                    <a:solidFill>
+                      <a:srgbClr val="FFFFFF"/>
+                    </a:solidFill>
+                  </a:tcPr>
+                </a:tc>
+                <a:tc>
+                  <a:txBody>
+                    <a:bodyPr/>
+                    <a:lstStyle/>
+                    <a:p>
+                      <a:pPr>
+                        <a:defRPr sz="950">
+                          <a:solidFill>
+                            <a:srgbClr val="4A4A4A"/>
+                          </a:solidFill>
+                          <a:latin typeface="Segoe UI"/>
+                        </a:defRPr>
+                      </a:pPr>
+                      <a:r>
+                        <a:t>Acadêmico</a:t>
+                      </a:r>
+                    </a:p>
+                  </a:txBody>
+                  <a:tcPr>
+                    <a:solidFill>
+                      <a:srgbClr val="FFFFFF"/>
+                    </a:solidFill>
+                  </a:tcPr>
+                </a:tc>
+                <a:tc>
+                  <a:txBody>
+                    <a:bodyPr/>
+                    <a:lstStyle/>
+                    <a:p>
+                      <a:pPr>
+                        <a:defRPr sz="950">
+                          <a:solidFill>
+                            <a:srgbClr val="4A4A4A"/>
+                          </a:solidFill>
+                          <a:latin typeface="Segoe UI"/>
+                        </a:defRPr>
+                      </a:pPr>
+                      <a:r>
+                        <a:t>2020</a:t>
+                      </a:r>
+                    </a:p>
+                  </a:txBody>
+                  <a:tcPr>
+                    <a:solidFill>
+                      <a:srgbClr val="FFFFFF"/>
+                    </a:solidFill>
+                  </a:tcPr>
+                </a:tc>
+                <a:tc>
+                  <a:txBody>
+                    <a:bodyPr/>
+                    <a:lstStyle/>
+                    <a:p>
+                      <a:pPr>
+                        <a:defRPr sz="950">
+                          <a:solidFill>
+                            <a:srgbClr val="4A4A4A"/>
+                          </a:solidFill>
+                          <a:latin typeface="Segoe UI"/>
+                        </a:defRPr>
+                      </a:pPr>
+                      <a:r>
+                        <a:t>Explicabilidade (IDS)</a:t>
+                      </a:r>
+                    </a:p>
+                  </a:txBody>
+                  <a:tcPr>
+                    <a:solidFill>
+                      <a:srgbClr val="FFFFFF"/>
+                    </a:solidFill>
+                  </a:tcPr>
+                </a:tc>
+                <a:tc>
+                  <a:txBody>
+                    <a:bodyPr/>
+                    <a:lstStyle/>
+                    <a:p>
+                      <a:pPr>
+                        <a:defRPr sz="950">
+                          <a:solidFill>
+                            <a:srgbClr val="4A4A4A"/>
+                          </a:solidFill>
+                          <a:latin typeface="Segoe UI"/>
+                        </a:defRPr>
+                      </a:pPr>
+                      <a:r>
+                        <a:t>Dataset NSL-KDD</a:t>
+                      </a:r>
+                    </a:p>
+                  </a:txBody>
+                  <a:tcPr>
+                    <a:solidFill>
+                      <a:srgbClr val="FFFFFF"/>
+                    </a:solidFill>
+                  </a:tcPr>
+                </a:tc>
+                <a:tc>
+                  <a:txBody>
+                    <a:bodyPr/>
+                    <a:lstStyle/>
+                    <a:p>
+                      <a:pPr>
+                        <a:defRPr sz="950">
+                          <a:solidFill>
+                            <a:srgbClr val="4A4A4A"/>
+                          </a:solidFill>
+                          <a:latin typeface="Segoe UI"/>
+                        </a:defRPr>
+                      </a:pPr>
+                      <a:r>
+                        <a:t>Explicação local + global</a:t>
+                      </a:r>
+                    </a:p>
+                  </a:txBody>
+                  <a:tcPr>
+                    <a:solidFill>
+                      <a:srgbClr val="FFFFFF"/>
+                    </a:solidFill>
+                  </a:tcPr>
+                </a:tc>
+              </a:tr>
+              <a:tr h="396000">
+                <a:tc>
+                  <a:txBody>
+                    <a:bodyPr/>
+                    <a:lstStyle/>
+                    <a:p>
+                      <a:pPr>
+                        <a:defRPr sz="950" b="1">
+                          <a:solidFill>
+                            <a:srgbClr val="4A4A4A"/>
+                          </a:solidFill>
+                          <a:latin typeface="Segoe UI"/>
+                        </a:defRPr>
+                      </a:pPr>
+                      <a:r>
+                        <a:t>unico|check</a:t>
+                      </a:r>
+                    </a:p>
+                  </a:txBody>
+                  <a:tcPr>
+                    <a:solidFill>
+                      <a:srgbClr val="F0F2F5"/>
+                    </a:solidFill>
+                  </a:tcPr>
+                </a:tc>
+                <a:tc>
+                  <a:txBody>
+                    <a:bodyPr/>
+                    <a:lstStyle/>
+                    <a:p>
+                      <a:pPr>
+                        <a:defRPr sz="950">
+                          <a:solidFill>
+                            <a:srgbClr val="4A4A4A"/>
+                          </a:solidFill>
+                          <a:latin typeface="Segoe UI"/>
+                        </a:defRPr>
+                      </a:pPr>
+                      <a:r>
+                        <a:t>Indústria</a:t>
+                      </a:r>
+                    </a:p>
+                  </a:txBody>
+                  <a:tcPr>
+                    <a:solidFill>
+                      <a:srgbClr val="F0F2F5"/>
+                    </a:solidFill>
+                  </a:tcPr>
+                </a:tc>
+                <a:tc>
+                  <a:txBody>
+                    <a:bodyPr/>
+                    <a:lstStyle/>
+                    <a:p>
+                      <a:pPr>
+                        <a:defRPr sz="950">
+                          <a:solidFill>
+                            <a:srgbClr val="4A4A4A"/>
+                          </a:solidFill>
+                          <a:latin typeface="Segoe UI"/>
+                        </a:defRPr>
+                      </a:pPr>
+                      <a:r>
+                        <a:t>2007/20</a:t>
+                      </a:r>
+                    </a:p>
+                  </a:txBody>
+                  <a:tcPr>
+                    <a:solidFill>
+                      <a:srgbClr val="F0F2F5"/>
+                    </a:solidFill>
+                  </a:tcPr>
+                </a:tc>
+                <a:tc>
+                  <a:txBody>
+                    <a:bodyPr/>
+                    <a:lstStyle/>
+                    <a:p>
+                      <a:pPr>
+                        <a:defRPr sz="950">
+                          <a:solidFill>
+                            <a:srgbClr val="4A4A4A"/>
+                          </a:solidFill>
+                          <a:latin typeface="Segoe UI"/>
+                        </a:defRPr>
+                      </a:pPr>
+                      <a:r>
+                        <a:t>Biometria facial</a:t>
+                      </a:r>
+                    </a:p>
+                  </a:txBody>
+                  <a:tcPr>
+                    <a:solidFill>
+                      <a:srgbClr val="F0F2F5"/>
+                    </a:solidFill>
+                  </a:tcPr>
+                </a:tc>
+                <a:tc>
+                  <a:txBody>
+                    <a:bodyPr/>
+                    <a:lstStyle/>
+                    <a:p>
+                      <a:pPr>
+                        <a:defRPr sz="950">
+                          <a:solidFill>
+                            <a:srgbClr val="4A4A4A"/>
+                          </a:solidFill>
+                          <a:latin typeface="Segoe UI"/>
+                        </a:defRPr>
+                      </a:pPr>
+                      <a:r>
+                        <a:t>800+ empresas, 4/5 bancos</a:t>
+                      </a:r>
+                    </a:p>
+                  </a:txBody>
+                  <a:tcPr>
+                    <a:solidFill>
+                      <a:srgbClr val="F0F2F5"/>
+                    </a:solidFill>
+                  </a:tcPr>
+                </a:tc>
+                <a:tc>
+                  <a:txBody>
+                    <a:bodyPr/>
+                    <a:lstStyle/>
+                    <a:p>
+                      <a:pPr>
+                        <a:defRPr sz="950">
+                          <a:solidFill>
+                            <a:srgbClr val="4A4A4A"/>
+                          </a:solidFill>
+                          <a:latin typeface="Segoe UI"/>
+                        </a:defRPr>
+                      </a:pPr>
+                      <a:r>
+                        <a:t>&lt;3s, 23+ países</a:t>
+                      </a:r>
+                    </a:p>
+                  </a:txBody>
+                  <a:tcPr>
+                    <a:solidFill>
+                      <a:srgbClr val="F0F2F5"/>
+                    </a:solidFill>
+                  </a:tcPr>
+                </a:tc>
+              </a:tr>
+              <a:tr h="396000">
+                <a:tc>
+                  <a:txBody>
+                    <a:bodyPr/>
+                    <a:lstStyle/>
+                    <a:p>
+                      <a:pPr>
+                        <a:defRPr sz="950" b="1">
+                          <a:solidFill>
+                            <a:srgbClr val="4A4A4A"/>
+                          </a:solidFill>
+                          <a:latin typeface="Segoe UI"/>
+                        </a:defRPr>
+                      </a:pPr>
+                      <a:r>
+                        <a:t>unico|people</a:t>
+                      </a:r>
+                    </a:p>
+                  </a:txBody>
+                  <a:tcPr>
+                    <a:solidFill>
+                      <a:srgbClr val="FFFFFF"/>
+                    </a:solidFill>
+                  </a:tcPr>
+                </a:tc>
+                <a:tc>
+                  <a:txBody>
+                    <a:bodyPr/>
+                    <a:lstStyle/>
+                    <a:p>
+                      <a:pPr>
+                        <a:defRPr sz="950">
+                          <a:solidFill>
+                            <a:srgbClr val="4A4A4A"/>
+                          </a:solidFill>
+                          <a:latin typeface="Segoe UI"/>
+                        </a:defRPr>
+                      </a:pPr>
+                      <a:r>
+                        <a:t>Indústria</a:t>
+                      </a:r>
+                    </a:p>
+                  </a:txBody>
+                  <a:tcPr>
+                    <a:solidFill>
+                      <a:srgbClr val="FFFFFF"/>
+                    </a:solidFill>
+                  </a:tcPr>
+                </a:tc>
+                <a:tc>
+                  <a:txBody>
+                    <a:bodyPr/>
+                    <a:lstStyle/>
+                    <a:p>
+                      <a:pPr>
+                        <a:defRPr sz="950">
+                          <a:solidFill>
+                            <a:srgbClr val="4A4A4A"/>
+                          </a:solidFill>
+                          <a:latin typeface="Segoe UI"/>
+                        </a:defRPr>
+                      </a:pPr>
+                      <a:r>
+                        <a:t>2007/20</a:t>
+                      </a:r>
+                    </a:p>
+                  </a:txBody>
+                  <a:tcPr>
+                    <a:solidFill>
+                      <a:srgbClr val="FFFFFF"/>
+                    </a:solidFill>
+                  </a:tcPr>
+                </a:tc>
+                <a:tc>
+                  <a:txBody>
+                    <a:bodyPr/>
+                    <a:lstStyle/>
+                    <a:p>
+                      <a:pPr>
+                        <a:defRPr sz="950">
+                          <a:solidFill>
+                            <a:srgbClr val="4A4A4A"/>
+                          </a:solidFill>
+                          <a:latin typeface="Segoe UI"/>
+                        </a:defRPr>
+                      </a:pPr>
+                      <a:r>
+                        <a:t>Admissão digital (RH)</a:t>
+                      </a:r>
+                    </a:p>
+                  </a:txBody>
+                  <a:tcPr>
+                    <a:solidFill>
+                      <a:srgbClr val="FFFFFF"/>
+                    </a:solidFill>
+                  </a:tcPr>
+                </a:tc>
+                <a:tc>
+                  <a:txBody>
+                    <a:bodyPr/>
+                    <a:lstStyle/>
+                    <a:p>
+                      <a:pPr>
+                        <a:defRPr sz="950">
+                          <a:solidFill>
+                            <a:srgbClr val="4A4A4A"/>
+                          </a:solidFill>
+                          <a:latin typeface="Segoe UI"/>
+                        </a:defRPr>
+                      </a:pPr>
+                      <a:r>
+                        <a:t>400+ empresas</a:t>
+                      </a:r>
+                    </a:p>
+                  </a:txBody>
+                  <a:tcPr>
+                    <a:solidFill>
+                      <a:srgbClr val="FFFFFF"/>
+                    </a:solidFill>
+                  </a:tcPr>
+                </a:tc>
+                <a:tc>
+                  <a:txBody>
+                    <a:bodyPr/>
+                    <a:lstStyle/>
+                    <a:p>
+                      <a:pPr>
+                        <a:defRPr sz="950">
+                          <a:solidFill>
+                            <a:srgbClr val="4A4A4A"/>
+                          </a:solidFill>
+                          <a:latin typeface="Segoe UI"/>
+                        </a:defRPr>
+                      </a:pPr>
+                      <a:r>
+                        <a:t>~20 min/admissão</a:t>
+                      </a:r>
+                    </a:p>
+                  </a:txBody>
+                  <a:tcPr>
+                    <a:solidFill>
+                      <a:srgbClr val="FFFFFF"/>
+                    </a:solidFill>
+                  </a:tcPr>
+                </a:tc>
+              </a:tr>
+              <a:tr h="396000">
+                <a:tc>
+                  <a:txBody>
+                    <a:bodyPr/>
+                    <a:lstStyle/>
+                    <a:p>
+                      <a:pPr>
+                        <a:defRPr sz="950" b="1">
+                          <a:solidFill>
+                            <a:srgbClr val="4A4A4A"/>
+                          </a:solidFill>
+                          <a:latin typeface="Segoe UI"/>
+                        </a:defRPr>
+                      </a:pPr>
+                      <a:r>
+                        <a:t>idwall</a:t>
+                      </a:r>
+                    </a:p>
+                  </a:txBody>
+                  <a:tcPr>
+                    <a:solidFill>
+                      <a:srgbClr val="F0F2F5"/>
+                    </a:solidFill>
+                  </a:tcPr>
+                </a:tc>
+                <a:tc>
+                  <a:txBody>
+                    <a:bodyPr/>
+                    <a:lstStyle/>
+                    <a:p>
+                      <a:pPr>
+                        <a:defRPr sz="950">
+                          <a:solidFill>
+                            <a:srgbClr val="4A4A4A"/>
+                          </a:solidFill>
+                          <a:latin typeface="Segoe UI"/>
+                        </a:defRPr>
+                      </a:pPr>
+                      <a:r>
+                        <a:t>Indústria</a:t>
+                      </a:r>
+                    </a:p>
+                  </a:txBody>
+                  <a:tcPr>
+                    <a:solidFill>
+                      <a:srgbClr val="F0F2F5"/>
+                    </a:solidFill>
+                  </a:tcPr>
+                </a:tc>
+                <a:tc>
+                  <a:txBody>
+                    <a:bodyPr/>
+                    <a:lstStyle/>
+                    <a:p>
+                      <a:pPr>
+                        <a:defRPr sz="950">
+                          <a:solidFill>
+                            <a:srgbClr val="4A4A4A"/>
+                          </a:solidFill>
+                          <a:latin typeface="Segoe UI"/>
+                        </a:defRPr>
+                      </a:pPr>
+                      <a:r>
+                        <a:t>2016</a:t>
+                      </a:r>
+                    </a:p>
+                  </a:txBody>
+                  <a:tcPr>
+                    <a:solidFill>
+                      <a:srgbClr val="F0F2F5"/>
+                    </a:solidFill>
+                  </a:tcPr>
+                </a:tc>
+                <a:tc>
+                  <a:txBody>
+                    <a:bodyPr/>
+                    <a:lstStyle/>
+                    <a:p>
+                      <a:pPr>
+                        <a:defRPr sz="950">
+                          <a:solidFill>
+                            <a:srgbClr val="4A4A4A"/>
+                          </a:solidFill>
+                          <a:latin typeface="Segoe UI"/>
+                        </a:defRPr>
+                      </a:pPr>
+                      <a:r>
+                        <a:t>KYC com ML</a:t>
+                      </a:r>
+                    </a:p>
+                  </a:txBody>
+                  <a:tcPr>
+                    <a:solidFill>
+                      <a:srgbClr val="F0F2F5"/>
+                    </a:solidFill>
+                  </a:tcPr>
+                </a:tc>
+                <a:tc>
+                  <a:txBody>
+                    <a:bodyPr/>
+                    <a:lstStyle/>
+                    <a:p>
+                      <a:pPr>
+                        <a:defRPr sz="950">
+                          <a:solidFill>
+                            <a:srgbClr val="4A4A4A"/>
+                          </a:solidFill>
+                          <a:latin typeface="Segoe UI"/>
+                        </a:defRPr>
+                      </a:pPr>
+                      <a:r>
+                        <a:t>Fintechs e bancos</a:t>
+                      </a:r>
+                    </a:p>
+                  </a:txBody>
+                  <a:tcPr>
+                    <a:solidFill>
+                      <a:srgbClr val="F0F2F5"/>
+                    </a:solidFill>
+                  </a:tcPr>
+                </a:tc>
+                <a:tc>
+                  <a:txBody>
+                    <a:bodyPr/>
+                    <a:lstStyle/>
+                    <a:p>
+                      <a:pPr>
+                        <a:defRPr sz="950">
+                          <a:solidFill>
+                            <a:srgbClr val="4A4A4A"/>
+                          </a:solidFill>
+                          <a:latin typeface="Segoe UI"/>
+                        </a:defRPr>
+                      </a:pPr>
+                      <a:r>
+                        <a:t>OCR via ML, lab antifraude</a:t>
+                      </a:r>
+                    </a:p>
+                  </a:txBody>
+                  <a:tcPr>
+                    <a:solidFill>
+                      <a:srgbClr val="F0F2F5"/>
+                    </a:solidFill>
+                  </a:tcPr>
+                </a:tc>
+              </a:tr>
+              <a:tr h="396000">
+                <a:tc>
+                  <a:txBody>
+                    <a:bodyPr/>
+                    <a:lstStyle/>
+                    <a:p>
+                      <a:pPr>
+                        <a:defRPr sz="950" b="1">
+                          <a:solidFill>
+                            <a:srgbClr val="4A4A4A"/>
+                          </a:solidFill>
+                          <a:latin typeface="Segoe UI"/>
+                        </a:defRPr>
+                      </a:pPr>
+                      <a:r>
+                        <a:t>CAF</a:t>
+                      </a:r>
+                    </a:p>
+                  </a:txBody>
+                  <a:tcPr>
+                    <a:solidFill>
+                      <a:srgbClr val="FFFFFF"/>
+                    </a:solidFill>
+                  </a:tcPr>
+                </a:tc>
+                <a:tc>
+                  <a:txBody>
+                    <a:bodyPr/>
+                    <a:lstStyle/>
+                    <a:p>
+                      <a:pPr>
+                        <a:defRPr sz="950">
+                          <a:solidFill>
+                            <a:srgbClr val="4A4A4A"/>
+                          </a:solidFill>
+                          <a:latin typeface="Segoe UI"/>
+                        </a:defRPr>
+                      </a:pPr>
+                      <a:r>
+                        <a:t>Indústria</a:t>
+                      </a:r>
+                    </a:p>
+                  </a:txBody>
+                  <a:tcPr>
+                    <a:solidFill>
+                      <a:srgbClr val="FFFFFF"/>
+                    </a:solidFill>
+                  </a:tcPr>
+                </a:tc>
+                <a:tc>
+                  <a:txBody>
+                    <a:bodyPr/>
+                    <a:lstStyle/>
+                    <a:p>
+                      <a:pPr>
+                        <a:defRPr sz="950">
+                          <a:solidFill>
+                            <a:srgbClr val="4A4A4A"/>
+                          </a:solidFill>
+                          <a:latin typeface="Segoe UI"/>
+                        </a:defRPr>
+                      </a:pPr>
+                      <a:r>
+                        <a:t>2019</a:t>
+                      </a:r>
+                    </a:p>
+                  </a:txBody>
+                  <a:tcPr>
+                    <a:solidFill>
+                      <a:srgbClr val="FFFFFF"/>
+                    </a:solidFill>
+                  </a:tcPr>
+                </a:tc>
+                <a:tc>
+                  <a:txBody>
+                    <a:bodyPr/>
+                    <a:lstStyle/>
+                    <a:p>
+                      <a:pPr>
+                        <a:defRPr sz="950">
+                          <a:solidFill>
+                            <a:srgbClr val="4A4A4A"/>
+                          </a:solidFill>
+                          <a:latin typeface="Segoe UI"/>
+                        </a:defRPr>
+                      </a:pPr>
+                      <a:r>
+                        <a:t>Orquestração de identidade</a:t>
+                      </a:r>
+                    </a:p>
+                  </a:txBody>
+                  <a:tcPr>
+                    <a:solidFill>
+                      <a:srgbClr val="FFFFFF"/>
+                    </a:solidFill>
+                  </a:tcPr>
+                </a:tc>
+                <a:tc>
+                  <a:txBody>
+                    <a:bodyPr/>
+                    <a:lstStyle/>
+                    <a:p>
+                      <a:pPr>
+                        <a:defRPr sz="950">
+                          <a:solidFill>
+                            <a:srgbClr val="4A4A4A"/>
+                          </a:solidFill>
+                          <a:latin typeface="Segoe UI"/>
+                        </a:defRPr>
+                      </a:pPr>
+                      <a:r>
+                        <a:t>SP, RJ e exterior</a:t>
+                      </a:r>
+                    </a:p>
+                  </a:txBody>
+                  <a:tcPr>
+                    <a:solidFill>
+                      <a:srgbClr val="FFFFFF"/>
+                    </a:solidFill>
+                  </a:tcPr>
+                </a:tc>
+                <a:tc>
+                  <a:txBody>
+                    <a:bodyPr/>
+                    <a:lstStyle/>
+                    <a:p>
+                      <a:pPr>
+                        <a:defRPr sz="950">
+                          <a:solidFill>
+                            <a:srgbClr val="4A4A4A"/>
+                          </a:solidFill>
+                          <a:latin typeface="Segoe UI"/>
+                        </a:defRPr>
+                      </a:pPr>
+                      <a:r>
+                        <a:t>Doc. + biometria + IA</a:t>
+                      </a:r>
+                    </a:p>
+                  </a:txBody>
+                  <a:tcPr>
+                    <a:solidFill>
+                      <a:srgbClr val="FFFFFF"/>
+                    </a:solidFill>
+                  </a:tcPr>
+                </a:tc>
+              </a:tr>
+              <a:tr h="396000">
+                <a:tc>
+                  <a:txBody>
+                    <a:bodyPr/>
+                    <a:lstStyle/>
+                    <a:p>
+                      <a:pPr>
+                        <a:defRPr sz="950" b="1">
+                          <a:solidFill>
+                            <a:srgbClr val="4A4A4A"/>
+                          </a:solidFill>
+                          <a:latin typeface="Segoe UI"/>
+                        </a:defRPr>
+                      </a:pPr>
+                      <a:r>
+                        <a:t>gov.br / Serpro</a:t>
+                      </a:r>
+                    </a:p>
+                  </a:txBody>
+                  <a:tcPr>
+                    <a:solidFill>
+                      <a:srgbClr val="F0F2F5"/>
+                    </a:solidFill>
+                  </a:tcPr>
+                </a:tc>
+                <a:tc>
+                  <a:txBody>
+                    <a:bodyPr/>
+                    <a:lstStyle/>
+                    <a:p>
+                      <a:pPr>
+                        <a:defRPr sz="950">
+                          <a:solidFill>
+                            <a:srgbClr val="4A4A4A"/>
+                          </a:solidFill>
+                          <a:latin typeface="Segoe UI"/>
+                        </a:defRPr>
+                      </a:pPr>
+                      <a:r>
+                        <a:t>Indústria</a:t>
+                      </a:r>
+                    </a:p>
+                  </a:txBody>
+                  <a:tcPr>
+                    <a:solidFill>
+                      <a:srgbClr val="F0F2F5"/>
+                    </a:solidFill>
+                  </a:tcPr>
+                </a:tc>
+                <a:tc>
+                  <a:txBody>
+                    <a:bodyPr/>
+                    <a:lstStyle/>
+                    <a:p>
+                      <a:pPr>
+                        <a:defRPr sz="950">
+                          <a:solidFill>
+                            <a:srgbClr val="4A4A4A"/>
+                          </a:solidFill>
+                          <a:latin typeface="Segoe UI"/>
+                        </a:defRPr>
+                      </a:pPr>
+                      <a:r>
+                        <a:t>2019/21</a:t>
+                      </a:r>
+                    </a:p>
+                  </a:txBody>
+                  <a:tcPr>
+                    <a:solidFill>
+                      <a:srgbClr val="F0F2F5"/>
+                    </a:solidFill>
+                  </a:tcPr>
+                </a:tc>
+                <a:tc>
+                  <a:txBody>
+                    <a:bodyPr/>
+                    <a:lstStyle/>
+                    <a:p>
+                      <a:pPr>
+                        <a:defRPr sz="950">
+                          <a:solidFill>
+                            <a:srgbClr val="4A4A4A"/>
+                          </a:solidFill>
+                          <a:latin typeface="Segoe UI"/>
+                        </a:defRPr>
+                      </a:pPr>
+                      <a:r>
+                        <a:t>Identidade federal</a:t>
+                      </a:r>
+                    </a:p>
+                  </a:txBody>
+                  <a:tcPr>
+                    <a:solidFill>
+                      <a:srgbClr val="F0F2F5"/>
+                    </a:solidFill>
+                  </a:tcPr>
+                </a:tc>
+                <a:tc>
+                  <a:txBody>
+                    <a:bodyPr/>
+                    <a:lstStyle/>
+                    <a:p>
+                      <a:pPr>
+                        <a:defRPr sz="950">
+                          <a:solidFill>
+                            <a:srgbClr val="4A4A4A"/>
+                          </a:solidFill>
+                          <a:latin typeface="Segoe UI"/>
+                        </a:defRPr>
+                      </a:pPr>
+                      <a:r>
+                        <a:t>115M+ usuários</a:t>
+                      </a:r>
+                    </a:p>
+                  </a:txBody>
+                  <a:tcPr>
+                    <a:solidFill>
+                      <a:srgbClr val="F0F2F5"/>
+                    </a:solidFill>
+                  </a:tcPr>
+                </a:tc>
+                <a:tc>
+                  <a:txBody>
+                    <a:bodyPr/>
+                    <a:lstStyle/>
+                    <a:p>
+                      <a:pPr>
+                        <a:defRPr sz="950">
+                          <a:solidFill>
+                            <a:srgbClr val="4A4A4A"/>
+                          </a:solidFill>
+                          <a:latin typeface="Segoe UI"/>
+                        </a:defRPr>
+                      </a:pPr>
+                      <a:r>
+                        <a:t>3 níveis fixos, 2FA</a:t>
+                      </a:r>
+                    </a:p>
+                  </a:txBody>
+                  <a:tcPr>
+                    <a:solidFill>
+                      <a:srgbClr val="F0F2F5"/>
+                    </a:solidFill>
+                  </a:tcPr>
+                </a:tc>
+              </a:tr>
+            </a:tbl>
+          </a:graphicData>
+        </a:graphic>
+      </p:graphicFrame>
+    </p:spTree>
+  </p:cSld>
+  <p:clrMapOvr>
+    <a:masterClrMapping/>
+  </p:clrMapOvr>
+</p:sld>
+</file>
+
+<file path=ppt/slides/slide27.xml><?xml version="1.0" encoding="utf-8"?>
+<p:sld xmlns:a="http://schemas.openxmlformats.org/drawingml/2006/main" xmlns:p="http://schemas.openxmlformats.org/presentationml/2006/main" xmlns:r="http://schemas.openxmlformats.org/officeDocument/2006/relationships">
+  <p:cSld>
+    <p:bg>
+      <p:bgPr>
+        <a:solidFill>
+          <a:srgbClr val="FFFFFF"/>
+        </a:solidFill>
+        <a:effectLst/>
+      </p:bgPr>
+    </p:bg>
+    <p:spTree>
+      <p:nvGrpSpPr>
+        <p:cNvPr id="1" name=""/>
+        <p:cNvGrpSpPr/>
+        <p:nvPr/>
+      </p:nvGrpSpPr>
+      <p:grpSpPr/>
+      <p:sp>
+        <p:nvSpPr>
+          <p:cNvPr id="2" name="Rectangle 1"/>
+          <p:cNvSpPr/>
+          <p:nvPr/>
+        </p:nvSpPr>
+        <p:spPr>
+          <a:xfrm>
+            <a:off x="0" y="0"/>
+            <a:ext cx="12191695" cy="1188720"/>
+          </a:xfrm>
+          <a:prstGeom prst="rect">
+            <a:avLst/>
+          </a:prstGeom>
+          <a:solidFill>
+            <a:srgbClr val="1A6B2A"/>
+          </a:solidFill>
+          <a:ln>
+            <a:noFill/>
+          </a:ln>
+        </p:spPr>
+        <p:style>
+          <a:lnRef idx="1">
+            <a:schemeClr val="accent1"/>
+          </a:lnRef>
+          <a:fillRef idx="3">
+            <a:schemeClr val="accent1"/>
+          </a:fillRef>
+          <a:effectRef idx="2">
+            <a:schemeClr val="accent1"/>
+          </a:effectRef>
+          <a:fontRef idx="minor">
+            <a:schemeClr val="lt1"/>
+          </a:fontRef>
+        </p:style>
+        <p:txBody>
+          <a:bodyPr rtlCol="0" anchor="ctr"/>
+          <a:lstStyle/>
+          <a:p>
+            <a:pPr algn="ctr"/>
+          </a:p>
+        </p:txBody>
+      </p:sp>
+      <p:sp>
+        <p:nvSpPr>
+          <p:cNvPr id="3" name="TextBox 2"/>
+          <p:cNvSpPr txBox="1"/>
+          <p:nvPr/>
+        </p:nvSpPr>
+        <p:spPr>
+          <a:xfrm>
+            <a:off x="731520" y="228600"/>
+            <a:ext cx="10058400" cy="548640"/>
+          </a:xfrm>
+          <a:prstGeom prst="rect">
+            <a:avLst/>
+          </a:prstGeom>
+          <a:noFill/>
+        </p:spPr>
+        <p:txBody>
+          <a:bodyPr wrap="square">
+            <a:spAutoFit/>
+          </a:bodyPr>
+          <a:lstStyle/>
+          <a:p>
+            <a:pPr algn="l">
+              <a:defRPr sz="2800" b="1">
+                <a:solidFill>
+                  <a:srgbClr val="FFFFFF"/>
+                </a:solidFill>
+                <a:latin typeface="Segoe UI"/>
+              </a:defRPr>
+            </a:pPr>
+            <a:r>
+              <a:t>Referências</a:t>
+            </a:r>
+          </a:p>
+        </p:txBody>
+      </p:sp>
+      <p:sp>
+        <p:nvSpPr>
+          <p:cNvPr id="4" name="TextBox 3"/>
+          <p:cNvSpPr txBox="1"/>
+          <p:nvPr/>
+        </p:nvSpPr>
+        <p:spPr>
+          <a:xfrm>
+            <a:off x="731520" y="685800"/>
+            <a:ext cx="10058400" cy="365760"/>
+          </a:xfrm>
+          <a:prstGeom prst="rect">
+            <a:avLst/>
+          </a:prstGeom>
+          <a:noFill/>
+        </p:spPr>
+        <p:txBody>
+          <a:bodyPr wrap="square">
+            <a:spAutoFit/>
+          </a:bodyPr>
+          <a:lstStyle/>
+          <a:p>
+            <a:pPr algn="l">
+              <a:defRPr sz="1400" b="0">
+                <a:solidFill>
+                  <a:srgbClr val="B0E0B0"/>
+                </a:solidFill>
+                <a:latin typeface="Segoe UI"/>
+              </a:defRPr>
+            </a:pPr>
+            <a:r>
+              <a:t>Bibliografia consolidada</a:t>
+            </a:r>
+          </a:p>
+        </p:txBody>
+      </p:sp>
+      <p:sp>
+        <p:nvSpPr>
+          <p:cNvPr id="5" name="Rectangle 4"/>
+          <p:cNvSpPr/>
+          <p:nvPr/>
+        </p:nvSpPr>
+        <p:spPr>
+          <a:xfrm>
+            <a:off x="0" y="1188720"/>
+            <a:ext cx="12191695" cy="54864"/>
+          </a:xfrm>
+          <a:prstGeom prst="rect">
+            <a:avLst/>
+          </a:prstGeom>
+          <a:solidFill>
+            <a:srgbClr val="CD191E"/>
+          </a:solidFill>
+          <a:ln>
+            <a:noFill/>
+          </a:ln>
+        </p:spPr>
+        <p:style>
+          <a:lnRef idx="1">
+            <a:schemeClr val="accent1"/>
+          </a:lnRef>
+          <a:fillRef idx="3">
+            <a:schemeClr val="accent1"/>
+          </a:fillRef>
+          <a:effectRef idx="2">
+            <a:schemeClr val="accent1"/>
+          </a:effectRef>
+          <a:fontRef idx="minor">
+            <a:schemeClr val="lt1"/>
+          </a:fontRef>
+        </p:style>
+        <p:txBody>
+          <a:bodyPr rtlCol="0" anchor="ctr"/>
+          <a:lstStyle/>
+          <a:p>
+            <a:pPr algn="ctr"/>
+          </a:p>
+        </p:txBody>
+      </p:sp>
+      <p:sp>
+        <p:nvSpPr>
+          <p:cNvPr id="6" name="TextBox 5"/>
+          <p:cNvSpPr txBox="1"/>
+          <p:nvPr/>
+        </p:nvSpPr>
+        <p:spPr>
+          <a:xfrm>
+            <a:off x="731520" y="1463040"/>
+            <a:ext cx="10728960" cy="5029200"/>
+          </a:xfrm>
+          <a:prstGeom prst="rect">
+            <a:avLst/>
+          </a:prstGeom>
+          <a:noFill/>
+        </p:spPr>
+        <p:txBody>
+          <a:bodyPr wrap="square"/>
+          <a:lstStyle/>
+          <a:p>
+            <a:pPr>
+              <a:spcBef>
+                <a:spcPts val="400"/>
+              </a:spcBef>
+              <a:spcAft>
+                <a:spcPts val="400"/>
+              </a:spcAft>
+            </a:pPr>
+            <a:r>
+              <a:rPr lang="pt-BR" sz="1400" b="1">
+                <a:solidFill>
+                  <a:srgbClr val="1A6B2A"/>
+                </a:solidFill>
+                <a:latin typeface="Segoe UI"/>
+              </a:rPr>
+              <a:t>Literatura Acadêmica</a:t>
+            </a:r>
+          </a:p>
+          <a:p>
+            <a:pPr>
+              <a:spcAft>
+                <a:spcPts val="300"/>
+              </a:spcAft>
+            </a:pPr>
+            <a:r>
+              <a:rPr lang="pt-BR" sz="1150" b="0">
+                <a:solidFill>
+                  <a:srgbClr val="4A4A4A"/>
+                </a:solidFill>
+                <a:latin typeface="Segoe UI"/>
+              </a:rPr>
+              <a:t>KILLOURHY, K. S.; MAXION, R. A. Comparing Anomaly-Detection Algorithms for Keystroke Dynamics. IEEE/IFIP DSN, 2009.</a:t>
+            </a:r>
+          </a:p>
+          <a:p>
+            <a:pPr>
+              <a:spcAft>
+                <a:spcPts val="300"/>
+              </a:spcAft>
+            </a:pPr>
+            <a:r>
+              <a:rPr lang="pt-BR" sz="1150" b="0">
+                <a:solidFill>
+                  <a:srgbClr val="4A4A4A"/>
+                </a:solidFill>
+                <a:latin typeface="Segoe UI"/>
+              </a:rPr>
+              <a:t>FRANK, M. et al. Touchalytics: Touchscreen Input as a Behavioral Biometric for Continuous Authentication. IEEE TIFS, v. 8, n. 1, 2013.</a:t>
+            </a:r>
+          </a:p>
+          <a:p>
+            <a:pPr>
+              <a:spcAft>
+                <a:spcPts val="300"/>
+              </a:spcAft>
+            </a:pPr>
+            <a:r>
+              <a:rPr lang="pt-BR" sz="1150" b="0">
+                <a:solidFill>
+                  <a:srgbClr val="4A4A4A"/>
+                </a:solidFill>
+                <a:latin typeface="Segoe UI"/>
+              </a:rPr>
+              <a:t>WIEFLING, S.; LO IACONO, L.; DÜRMUTH, M. Is This Really You? An Empirical Study on Risk-Based Authentication Applied in the Wild. IFIP SEC, 2019.</a:t>
+            </a:r>
+          </a:p>
+          <a:p>
+            <a:pPr>
+              <a:spcAft>
+                <a:spcPts val="300"/>
+              </a:spcAft>
+            </a:pPr>
+            <a:r>
+              <a:rPr lang="pt-BR" sz="1150" b="0">
+                <a:solidFill>
+                  <a:srgbClr val="4A4A4A"/>
+                </a:solidFill>
+                <a:latin typeface="Segoe UI"/>
+              </a:rPr>
+              <a:t>LIU, F. T.; TING, K. M.; ZHOU, Z.-H. Isolation Forest. IEEE ICDM, 2008.</a:t>
+            </a:r>
+          </a:p>
+          <a:p>
+            <a:pPr>
+              <a:spcAft>
+                <a:spcPts val="300"/>
+              </a:spcAft>
+            </a:pPr>
+            <a:r>
+              <a:rPr lang="pt-BR" sz="1150" b="0">
+                <a:solidFill>
+                  <a:srgbClr val="4A4A4A"/>
+                </a:solidFill>
+                <a:latin typeface="Segoe UI"/>
+              </a:rPr>
+              <a:t>WANG, M. et al. An Explainable Machine Learning Framework for Intrusion Detection Systems. IEEE Access, v. 8, 2020.</a:t>
+            </a:r>
+          </a:p>
+          <a:p>
+            <a:pPr>
+              <a:spcAft>
+                <a:spcPts val="300"/>
+              </a:spcAft>
+            </a:pPr>
+            <a:r>
+              <a:rPr lang="pt-BR" sz="1150" b="0">
+                <a:solidFill>
+                  <a:srgbClr val="4A4A4A"/>
+                </a:solidFill>
+                <a:latin typeface="Segoe UI"/>
+              </a:rPr>
+              <a:t>LUNDBERG, S. M.; LEE, S.-I. A Unified Approach to Interpreting Model Predictions (SHAP). NeurIPS, 2017.</a:t>
+            </a:r>
+          </a:p>
+          <a:p>
+            <a:pPr>
+              <a:spcBef>
+                <a:spcPts val="400"/>
+              </a:spcBef>
+              <a:spcAft>
+                <a:spcPts val="400"/>
+              </a:spcAft>
+            </a:pPr>
+            <a:r>
+              <a:rPr lang="pt-BR" sz="1400" b="1">
+                <a:solidFill>
+                  <a:srgbClr val="1A6B2A"/>
+                </a:solidFill>
+                <a:latin typeface="Segoe UI"/>
+              </a:rPr>
+              <a:t>Indústria e Órgãos Públicos</a:t>
+            </a:r>
+          </a:p>
+          <a:p>
+            <a:pPr>
+              <a:spcAft>
+                <a:spcPts val="300"/>
+              </a:spcAft>
+            </a:pPr>
+            <a:r>
+              <a:rPr lang="pt-BR" sz="1150" b="0">
+                <a:solidFill>
+                  <a:srgbClr val="4A4A4A"/>
+                </a:solidFill>
+                <a:latin typeface="Segoe UI"/>
+              </a:rPr>
+              <a:t>unico IDTech — unico|check e unico|people (unico.io); CryptoID, "Acesso Digital agora é unico" (2020).</a:t>
+            </a:r>
+          </a:p>
+          <a:p>
+            <a:pPr>
+              <a:spcAft>
+                <a:spcPts val="300"/>
+              </a:spcAft>
+            </a:pPr>
+            <a:r>
+              <a:rPr lang="pt-BR" sz="1150" b="0">
+                <a:solidFill>
+                  <a:srgbClr val="4A4A4A"/>
+                </a:solidFill>
+                <a:latin typeface="Segoe UI"/>
+              </a:rPr>
+              <a:t>idwall — idwall.co (plataforma all-in-one) e blog.idwall.co.</a:t>
+            </a:r>
+          </a:p>
+          <a:p>
+            <a:pPr>
+              <a:spcAft>
+                <a:spcPts val="300"/>
+              </a:spcAft>
+            </a:pPr>
+            <a:r>
+              <a:rPr lang="pt-BR" sz="1150" b="0">
+                <a:solidFill>
+                  <a:srgbClr val="4A4A4A"/>
+                </a:solidFill>
+                <a:latin typeface="Segoe UI"/>
+              </a:rPr>
+              <a:t>CAF — Combate à Fraude — caf.io/pt e Finsiders Brasil.</a:t>
+            </a:r>
+          </a:p>
+          <a:p>
+            <a:pPr>
+              <a:spcAft>
+                <a:spcPts val="300"/>
+              </a:spcAft>
+            </a:pPr>
+            <a:r>
+              <a:rPr lang="pt-BR" sz="1150" b="0">
+                <a:solidFill>
+                  <a:srgbClr val="4A4A4A"/>
+                </a:solidFill>
+                <a:latin typeface="Segoe UI"/>
+              </a:rPr>
+              <a:t>Serpro / gov.br — serpro.gov.br (Datavalid, verificação em duas etapas, 2025).</a:t>
+            </a:r>
+          </a:p>
+          <a:p>
+            <a:pPr>
+              <a:spcAft>
+                <a:spcPts val="300"/>
+              </a:spcAft>
+            </a:pPr>
+            <a:r>
+              <a:rPr lang="pt-BR" sz="1150" b="0">
+                <a:solidFill>
+                  <a:srgbClr val="4A4A4A"/>
+                </a:solidFill>
+                <a:latin typeface="Segoe UI"/>
+              </a:rPr>
+              <a:t>INPI — Consulta Pública sobre Diretrizes de IA (2025).</a:t>
             </a:r>
           </a:p>
         </p:txBody>
@@ -8809,7 +16177,7 @@
               </a:defRPr>
             </a:pPr>
             <a:r>
-              <a:t>Esta revisão concentra-se em projetos brasileiros da indústria que abordam, parcial ou integralmente, os pilares da proposta: autenticação digital, biometria, machine learning e gestão de identidade. Cinco projetos foram selecionados como referência do estado da arte nacional.</a:t>
+              <a:t>Esta revisão abrange a literatura acadêmica internacional e projetos brasileiros da indústria que abordam, parcial ou integralmente, os pilares da proposta: autenticação digital, biometria comportamental, machine learning, explicabilidade e gestão de identidade. Foram selecionados 5 trabalhos acadêmicos de referência e 5 projetos da indústria, apresentados de forma intercalada por tema.</a:t>
             </a:r>
           </a:p>
         </p:txBody>
@@ -9418,7 +16786,7 @@
               </a:defRPr>
             </a:pPr>
             <a:r>
-              <a:t>Quadro Comparativo Geral</a:t>
+              <a:t>Quadro Comparativo — Indústria</a:t>
             </a:r>
           </a:p>
         </p:txBody>
@@ -9454,7 +16822,7 @@
               </a:defRPr>
             </a:pPr>
             <a:r>
-              <a:t>5 Projetos Brasileiros</a:t>
+              <a:t>5 Projetos da Indústria Brasileira</a:t>
             </a:r>
           </a:p>
         </p:txBody>

--- a/docs/trabalhos-relacionados.pptx
+++ b/docs/trabalhos-relacionados.pptx
@@ -1377,7 +1377,7 @@
           <a:effectLst/>
           <a:extLst>
             <a:ext uri="{91240B29-F687-4f45-9708-019B960494DF}">
-              <a14:hiddenLine xmlns="" xmlns:a14="http://schemas.microsoft.com/office/drawing/2010/main" w="9525" cap="flat">
+              <a14:hiddenLine xmlns:a14="http://schemas.microsoft.com/office/drawing/2010/main" xmlns="" w="9525" cap="flat">
                 <a:solidFill>
                   <a:srgbClr val="3465A4"/>
                 </a:solidFill>
@@ -1387,7 +1387,7 @@
               </a14:hiddenLine>
             </a:ext>
             <a:ext uri="{AF507438-7753-43e0-B8FC-AC1667EBCBE1}">
-              <a14:hiddenEffects xmlns="" xmlns:a14="http://schemas.microsoft.com/office/drawing/2010/main">
+              <a14:hiddenEffects xmlns:a14="http://schemas.microsoft.com/office/drawing/2010/main" xmlns="">
                 <a:effectLst>
                   <a:outerShdw blurRad="63500" dist="38099" dir="2700000" algn="ctr" rotWithShape="0">
                     <a:srgbClr val="000000">
@@ -1442,14 +1442,14 @@
           <a:effectLst/>
           <a:extLst>
             <a:ext uri="{909E8E84-426E-40dd-AFC4-6F175D3DCCD1}">
-              <a14:hiddenFill xmlns="" xmlns:a14="http://schemas.microsoft.com/office/drawing/2010/main">
+              <a14:hiddenFill xmlns:a14="http://schemas.microsoft.com/office/drawing/2010/main" xmlns="">
                 <a:solidFill>
                   <a:srgbClr val="FFFFFF"/>
                 </a:solidFill>
               </a14:hiddenFill>
             </a:ext>
             <a:ext uri="{91240B29-F687-4f45-9708-019B960494DF}">
-              <a14:hiddenLine xmlns="" xmlns:a14="http://schemas.microsoft.com/office/drawing/2010/main" w="9525" cap="flat">
+              <a14:hiddenLine xmlns:a14="http://schemas.microsoft.com/office/drawing/2010/main" xmlns="" w="9525" cap="flat">
                 <a:solidFill>
                   <a:srgbClr val="3465A4"/>
                 </a:solidFill>
@@ -1459,7 +1459,7 @@
               </a14:hiddenLine>
             </a:ext>
             <a:ext uri="{AF507438-7753-43e0-B8FC-AC1667EBCBE1}">
-              <a14:hiddenEffects xmlns="" xmlns:a14="http://schemas.microsoft.com/office/drawing/2010/main">
+              <a14:hiddenEffects xmlns:a14="http://schemas.microsoft.com/office/drawing/2010/main" xmlns="">
                 <a:effectLst>
                   <a:outerShdw blurRad="63500" dist="38099" dir="2700000" algn="ctr" rotWithShape="0">
                     <a:srgbClr val="000000">
@@ -1837,14 +1837,14 @@
           <a:effectLst/>
           <a:extLst>
             <a:ext uri="{909E8E84-426E-40dd-AFC4-6F175D3DCCD1}">
-              <a14:hiddenFill xmlns="" xmlns:a14="http://schemas.microsoft.com/office/drawing/2010/main">
+              <a14:hiddenFill xmlns:a14="http://schemas.microsoft.com/office/drawing/2010/main" xmlns="">
                 <a:solidFill>
                   <a:srgbClr val="FFFFFF"/>
                 </a:solidFill>
               </a14:hiddenFill>
             </a:ext>
             <a:ext uri="{91240B29-F687-4f45-9708-019B960494DF}">
-              <a14:hiddenLine xmlns="" xmlns:a14="http://schemas.microsoft.com/office/drawing/2010/main" w="9525" cap="flat">
+              <a14:hiddenLine xmlns:a14="http://schemas.microsoft.com/office/drawing/2010/main" xmlns="" w="9525" cap="flat">
                 <a:solidFill>
                   <a:srgbClr val="3465A4"/>
                 </a:solidFill>
@@ -1854,7 +1854,7 @@
               </a14:hiddenLine>
             </a:ext>
             <a:ext uri="{AF507438-7753-43e0-B8FC-AC1667EBCBE1}">
-              <a14:hiddenEffects xmlns="" xmlns:a14="http://schemas.microsoft.com/office/drawing/2010/main">
+              <a14:hiddenEffects xmlns:a14="http://schemas.microsoft.com/office/drawing/2010/main" xmlns="">
                 <a:effectLst>
                   <a:outerShdw blurRad="63500" dist="38099" dir="2700000" algn="ctr" rotWithShape="0">
                     <a:schemeClr val="bg2">
@@ -1865,7 +1865,7 @@
               </a14:hiddenEffects>
             </a:ext>
             <a:ext uri="{FAA26D3D-D897-4be2-8F04-BA451C77F1D7}">
-              <ma14:placeholderFlag xmlns="" xmlns:ma14="http://schemas.microsoft.com/office/mac/drawingml/2011/main" val="1"/>
+              <ma14:placeholderFlag xmlns:ma14="http://schemas.microsoft.com/office/mac/drawingml/2011/main" xmlns="" val="1"/>
             </a:ext>
           </a:extLst>
         </p:spPr>
@@ -2158,7 +2158,7 @@
           <a:effectLst/>
           <a:extLst>
             <a:ext uri="{909E8E84-426E-40dd-AFC4-6F175D3DCCD1}">
-              <a14:hiddenFill xmlns="" xmlns:a14="http://schemas.microsoft.com/office/drawing/2010/main">
+              <a14:hiddenFill xmlns:a14="http://schemas.microsoft.com/office/drawing/2010/main" xmlns="">
                 <a:blipFill dpi="0" rotWithShape="0">
                   <a:blip xmlns:r="http://schemas.openxmlformats.org/officeDocument/2006/relationships"/>
                   <a:srcRect/>
@@ -2169,7 +2169,7 @@
               </a14:hiddenFill>
             </a:ext>
             <a:ext uri="{91240B29-F687-4f45-9708-019B960494DF}">
-              <a14:hiddenLine xmlns="" xmlns:a14="http://schemas.microsoft.com/office/drawing/2010/main" w="9525" cap="flat">
+              <a14:hiddenLine xmlns:a14="http://schemas.microsoft.com/office/drawing/2010/main" xmlns="" w="9525" cap="flat">
                 <a:solidFill>
                   <a:srgbClr val="3465A4"/>
                 </a:solidFill>
@@ -2179,7 +2179,7 @@
               </a14:hiddenLine>
             </a:ext>
             <a:ext uri="{AF507438-7753-43e0-B8FC-AC1667EBCBE1}">
-              <a14:hiddenEffects xmlns="" xmlns:a14="http://schemas.microsoft.com/office/drawing/2010/main">
+              <a14:hiddenEffects xmlns:a14="http://schemas.microsoft.com/office/drawing/2010/main" xmlns="">
                 <a:effectLst>
                   <a:outerShdw blurRad="63500" dist="38099" dir="2700000" algn="ctr" rotWithShape="0">
                     <a:srgbClr val="000000">
@@ -2307,14 +2307,14 @@
         <p:spPr>
           <a:extLst>
             <a:ext uri="{909E8E84-426E-40dd-AFC4-6F175D3DCCD1}">
-              <a14:hiddenFill xmlns="" xmlns:a14="http://schemas.microsoft.com/office/drawing/2010/main">
+              <a14:hiddenFill xmlns:a14="http://schemas.microsoft.com/office/drawing/2010/main" xmlns="">
                 <a:solidFill>
                   <a:srgbClr val="FFFFFF"/>
                 </a:solidFill>
               </a14:hiddenFill>
             </a:ext>
             <a:ext uri="{91240B29-F687-4f45-9708-019B960494DF}">
-              <a14:hiddenLine xmlns="" xmlns:a14="http://schemas.microsoft.com/office/drawing/2010/main" w="9525" cap="flat">
+              <a14:hiddenLine xmlns:a14="http://schemas.microsoft.com/office/drawing/2010/main" xmlns="" w="9525" cap="flat">
                 <a:solidFill>
                   <a:srgbClr val="3465A4"/>
                 </a:solidFill>
@@ -2324,7 +2324,7 @@
               </a14:hiddenLine>
             </a:ext>
             <a:ext uri="{AF507438-7753-43e0-B8FC-AC1667EBCBE1}">
-              <a14:hiddenEffects xmlns="" xmlns:a14="http://schemas.microsoft.com/office/drawing/2010/main">
+              <a14:hiddenEffects xmlns:a14="http://schemas.microsoft.com/office/drawing/2010/main" xmlns="">
                 <a:effectLst>
                   <a:outerShdw blurRad="63500" dist="38099" dir="2700000" algn="ctr" rotWithShape="0">
                     <a:schemeClr val="bg2">
@@ -2335,7 +2335,7 @@
               </a14:hiddenEffects>
             </a:ext>
             <a:ext uri="{FAA26D3D-D897-4be2-8F04-BA451C77F1D7}">
-              <ma14:placeholderFlag xmlns="" xmlns:ma14="http://schemas.microsoft.com/office/mac/drawingml/2011/main" val="1"/>
+              <ma14:placeholderFlag xmlns:ma14="http://schemas.microsoft.com/office/mac/drawingml/2011/main" xmlns="" val="1"/>
             </a:ext>
           </a:extLst>
         </p:spPr>
@@ -9709,7 +9709,7 @@
           <a:effectLst/>
           <a:extLst>
             <a:ext uri="{91240B29-F687-4f45-9708-019B960494DF}">
-              <a14:hiddenLine xmlns="" xmlns:a14="http://schemas.microsoft.com/office/drawing/2010/main" w="9525" cap="flat">
+              <a14:hiddenLine xmlns:a14="http://schemas.microsoft.com/office/drawing/2010/main" xmlns="" w="9525" cap="flat">
                 <a:solidFill>
                   <a:srgbClr val="3465A4"/>
                 </a:solidFill>
@@ -9719,7 +9719,7 @@
               </a14:hiddenLine>
             </a:ext>
             <a:ext uri="{AF507438-7753-43e0-B8FC-AC1667EBCBE1}">
-              <a14:hiddenEffects xmlns="" xmlns:a14="http://schemas.microsoft.com/office/drawing/2010/main">
+              <a14:hiddenEffects xmlns:a14="http://schemas.microsoft.com/office/drawing/2010/main" xmlns="">
                 <a:effectLst>
                   <a:outerShdw blurRad="63500" dist="38099" dir="2700000" algn="ctr" rotWithShape="0">
                     <a:srgbClr val="000000">
@@ -9776,14 +9776,14 @@
           <a:effectLst/>
           <a:extLst>
             <a:ext uri="{909E8E84-426E-40dd-AFC4-6F175D3DCCD1}">
-              <a14:hiddenFill xmlns="" xmlns:a14="http://schemas.microsoft.com/office/drawing/2010/main">
+              <a14:hiddenFill xmlns:a14="http://schemas.microsoft.com/office/drawing/2010/main" xmlns="">
                 <a:solidFill>
                   <a:srgbClr val="FFFFFF"/>
                 </a:solidFill>
               </a14:hiddenFill>
             </a:ext>
             <a:ext uri="{91240B29-F687-4f45-9708-019B960494DF}">
-              <a14:hiddenLine xmlns="" xmlns:a14="http://schemas.microsoft.com/office/drawing/2010/main" w="9525" cap="flat">
+              <a14:hiddenLine xmlns:a14="http://schemas.microsoft.com/office/drawing/2010/main" xmlns="" w="9525" cap="flat">
                 <a:solidFill>
                   <a:srgbClr val="3465A4"/>
                 </a:solidFill>
@@ -9793,7 +9793,7 @@
               </a14:hiddenLine>
             </a:ext>
             <a:ext uri="{AF507438-7753-43e0-B8FC-AC1667EBCBE1}">
-              <a14:hiddenEffects xmlns="" xmlns:a14="http://schemas.microsoft.com/office/drawing/2010/main">
+              <a14:hiddenEffects xmlns:a14="http://schemas.microsoft.com/office/drawing/2010/main" xmlns="">
                 <a:effectLst>
                   <a:outerShdw blurRad="63500" dist="38099" dir="2700000" algn="ctr" rotWithShape="0">
                     <a:schemeClr val="bg2">
@@ -9804,7 +9804,7 @@
               </a14:hiddenEffects>
             </a:ext>
             <a:ext uri="{FAA26D3D-D897-4be2-8F04-BA451C77F1D7}">
-              <ma14:placeholderFlag xmlns="" xmlns:ma14="http://schemas.microsoft.com/office/mac/drawingml/2011/main" val="1"/>
+              <ma14:placeholderFlag xmlns:ma14="http://schemas.microsoft.com/office/mac/drawingml/2011/main" xmlns="" val="1"/>
             </a:ext>
           </a:extLst>
         </p:spPr>
@@ -9855,14 +9855,14 @@
           <a:effectLst/>
           <a:extLst>
             <a:ext uri="{909E8E84-426E-40dd-AFC4-6F175D3DCCD1}">
-              <a14:hiddenFill xmlns="" xmlns:a14="http://schemas.microsoft.com/office/drawing/2010/main">
+              <a14:hiddenFill xmlns:a14="http://schemas.microsoft.com/office/drawing/2010/main" xmlns="">
                 <a:solidFill>
                   <a:srgbClr val="FFFFFF"/>
                 </a:solidFill>
               </a14:hiddenFill>
             </a:ext>
             <a:ext uri="{91240B29-F687-4f45-9708-019B960494DF}">
-              <a14:hiddenLine xmlns="" xmlns:a14="http://schemas.microsoft.com/office/drawing/2010/main" w="9525" cap="flat">
+              <a14:hiddenLine xmlns:a14="http://schemas.microsoft.com/office/drawing/2010/main" xmlns="" w="9525" cap="flat">
                 <a:solidFill>
                   <a:srgbClr val="3465A4"/>
                 </a:solidFill>
@@ -9872,7 +9872,7 @@
               </a14:hiddenLine>
             </a:ext>
             <a:ext uri="{AF507438-7753-43e0-B8FC-AC1667EBCBE1}">
-              <a14:hiddenEffects xmlns="" xmlns:a14="http://schemas.microsoft.com/office/drawing/2010/main">
+              <a14:hiddenEffects xmlns:a14="http://schemas.microsoft.com/office/drawing/2010/main" xmlns="">
                 <a:effectLst>
                   <a:outerShdw blurRad="63500" dist="38099" dir="2700000" algn="ctr" rotWithShape="0">
                     <a:schemeClr val="bg2">
@@ -9883,7 +9883,7 @@
               </a14:hiddenEffects>
             </a:ext>
             <a:ext uri="{FAA26D3D-D897-4be2-8F04-BA451C77F1D7}">
-              <ma14:placeholderFlag xmlns="" xmlns:ma14="http://schemas.microsoft.com/office/mac/drawingml/2011/main" val="1"/>
+              <ma14:placeholderFlag xmlns:ma14="http://schemas.microsoft.com/office/mac/drawingml/2011/main" xmlns="" val="1"/>
             </a:ext>
           </a:extLst>
         </p:spPr>
@@ -9963,14 +9963,14 @@
           <a:effectLst/>
           <a:extLst>
             <a:ext uri="{909E8E84-426E-40dd-AFC4-6F175D3DCCD1}">
-              <a14:hiddenFill xmlns="" xmlns:a14="http://schemas.microsoft.com/office/drawing/2010/main">
+              <a14:hiddenFill xmlns:a14="http://schemas.microsoft.com/office/drawing/2010/main" xmlns="">
                 <a:solidFill>
                   <a:srgbClr val="FFFFFF"/>
                 </a:solidFill>
               </a14:hiddenFill>
             </a:ext>
             <a:ext uri="{91240B29-F687-4f45-9708-019B960494DF}">
-              <a14:hiddenLine xmlns="" xmlns:a14="http://schemas.microsoft.com/office/drawing/2010/main" w="9525" cap="flat">
+              <a14:hiddenLine xmlns:a14="http://schemas.microsoft.com/office/drawing/2010/main" xmlns="" w="9525" cap="flat">
                 <a:solidFill>
                   <a:srgbClr val="3465A4"/>
                 </a:solidFill>
@@ -9980,7 +9980,7 @@
               </a14:hiddenLine>
             </a:ext>
             <a:ext uri="{AF507438-7753-43e0-B8FC-AC1667EBCBE1}">
-              <a14:hiddenEffects xmlns="" xmlns:a14="http://schemas.microsoft.com/office/drawing/2010/main">
+              <a14:hiddenEffects xmlns:a14="http://schemas.microsoft.com/office/drawing/2010/main" xmlns="">
                 <a:effectLst>
                   <a:outerShdw blurRad="63500" dist="38099" dir="2700000" algn="ctr" rotWithShape="0">
                     <a:schemeClr val="bg2">
@@ -9991,7 +9991,7 @@
               </a14:hiddenEffects>
             </a:ext>
             <a:ext uri="{FAA26D3D-D897-4be2-8F04-BA451C77F1D7}">
-              <ma14:placeholderFlag xmlns="" xmlns:ma14="http://schemas.microsoft.com/office/mac/drawingml/2011/main" val="1"/>
+              <ma14:placeholderFlag xmlns:ma14="http://schemas.microsoft.com/office/mac/drawingml/2011/main" xmlns="" val="1"/>
             </a:ext>
           </a:extLst>
         </p:spPr>
@@ -10057,14 +10057,14 @@
           <a:effectLst/>
           <a:extLst>
             <a:ext uri="{909E8E84-426E-40dd-AFC4-6F175D3DCCD1}">
-              <a14:hiddenFill xmlns="" xmlns:a14="http://schemas.microsoft.com/office/drawing/2010/main">
+              <a14:hiddenFill xmlns:a14="http://schemas.microsoft.com/office/drawing/2010/main" xmlns="">
                 <a:solidFill>
                   <a:srgbClr val="FFFFFF"/>
                 </a:solidFill>
               </a14:hiddenFill>
             </a:ext>
             <a:ext uri="{91240B29-F687-4f45-9708-019B960494DF}">
-              <a14:hiddenLine xmlns="" xmlns:a14="http://schemas.microsoft.com/office/drawing/2010/main" w="9525" cap="flat">
+              <a14:hiddenLine xmlns:a14="http://schemas.microsoft.com/office/drawing/2010/main" xmlns="" w="9525" cap="flat">
                 <a:solidFill>
                   <a:srgbClr val="3465A4"/>
                 </a:solidFill>
@@ -10074,7 +10074,7 @@
               </a14:hiddenLine>
             </a:ext>
             <a:ext uri="{AF507438-7753-43e0-B8FC-AC1667EBCBE1}">
-              <a14:hiddenEffects xmlns="" xmlns:a14="http://schemas.microsoft.com/office/drawing/2010/main">
+              <a14:hiddenEffects xmlns:a14="http://schemas.microsoft.com/office/drawing/2010/main" xmlns="">
                 <a:effectLst>
                   <a:outerShdw blurRad="63500" dist="38099" dir="2700000" algn="ctr" rotWithShape="0">
                     <a:srgbClr val="000000">
@@ -10452,14 +10452,14 @@
           <a:effectLst/>
           <a:extLst>
             <a:ext uri="{909E8E84-426E-40dd-AFC4-6F175D3DCCD1}">
-              <a14:hiddenFill xmlns="" xmlns:a14="http://schemas.microsoft.com/office/drawing/2010/main">
+              <a14:hiddenFill xmlns:a14="http://schemas.microsoft.com/office/drawing/2010/main" xmlns="">
                 <a:solidFill>
                   <a:srgbClr val="FFFFFF"/>
                 </a:solidFill>
               </a14:hiddenFill>
             </a:ext>
             <a:ext uri="{91240B29-F687-4f45-9708-019B960494DF}">
-              <a14:hiddenLine xmlns="" xmlns:a14="http://schemas.microsoft.com/office/drawing/2010/main" w="9525" cap="flat">
+              <a14:hiddenLine xmlns:a14="http://schemas.microsoft.com/office/drawing/2010/main" xmlns="" w="9525" cap="flat">
                 <a:solidFill>
                   <a:srgbClr val="3465A4"/>
                 </a:solidFill>
@@ -10469,7 +10469,7 @@
               </a14:hiddenLine>
             </a:ext>
             <a:ext uri="{AF507438-7753-43e0-B8FC-AC1667EBCBE1}">
-              <a14:hiddenEffects xmlns="" xmlns:a14="http://schemas.microsoft.com/office/drawing/2010/main">
+              <a14:hiddenEffects xmlns:a14="http://schemas.microsoft.com/office/drawing/2010/main" xmlns="">
                 <a:effectLst>
                   <a:outerShdw blurRad="63500" dist="38099" dir="2700000" algn="ctr" rotWithShape="0">
                     <a:schemeClr val="bg2">
@@ -10480,7 +10480,7 @@
               </a14:hiddenEffects>
             </a:ext>
             <a:ext uri="{FAA26D3D-D897-4be2-8F04-BA451C77F1D7}">
-              <ma14:placeholderFlag xmlns="" xmlns:ma14="http://schemas.microsoft.com/office/mac/drawingml/2011/main" val="1"/>
+              <ma14:placeholderFlag xmlns:ma14="http://schemas.microsoft.com/office/mac/drawingml/2011/main" xmlns="" val="1"/>
             </a:ext>
           </a:extLst>
         </p:spPr>
@@ -11411,14 +11411,14 @@
           <a:effectLst/>
           <a:extLst>
             <a:ext uri="{909E8E84-426E-40dd-AFC4-6F175D3DCCD1}">
-              <a14:hiddenFill xmlns="" xmlns:a14="http://schemas.microsoft.com/office/drawing/2010/main">
+              <a14:hiddenFill xmlns:a14="http://schemas.microsoft.com/office/drawing/2010/main" xmlns="">
                 <a:solidFill>
                   <a:srgbClr val="FFFFFF"/>
                 </a:solidFill>
               </a14:hiddenFill>
             </a:ext>
             <a:ext uri="{91240B29-F687-4f45-9708-019B960494DF}">
-              <a14:hiddenLine xmlns="" xmlns:a14="http://schemas.microsoft.com/office/drawing/2010/main" w="9525" cap="flat">
+              <a14:hiddenLine xmlns:a14="http://schemas.microsoft.com/office/drawing/2010/main" xmlns="" w="9525" cap="flat">
                 <a:solidFill>
                   <a:srgbClr val="3465A4"/>
                 </a:solidFill>
@@ -11428,7 +11428,7 @@
               </a14:hiddenLine>
             </a:ext>
             <a:ext uri="{AF507438-7753-43e0-B8FC-AC1667EBCBE1}">
-              <a14:hiddenEffects xmlns="" xmlns:a14="http://schemas.microsoft.com/office/drawing/2010/main">
+              <a14:hiddenEffects xmlns:a14="http://schemas.microsoft.com/office/drawing/2010/main" xmlns="">
                 <a:effectLst>
                   <a:outerShdw blurRad="63500" dist="38099" dir="2700000" algn="ctr" rotWithShape="0">
                     <a:schemeClr val="bg2">
@@ -11439,7 +11439,7 @@
               </a14:hiddenEffects>
             </a:ext>
             <a:ext uri="{FAA26D3D-D897-4be2-8F04-BA451C77F1D7}">
-              <ma14:placeholderFlag xmlns="" xmlns:ma14="http://schemas.microsoft.com/office/mac/drawingml/2011/main" val="1"/>
+              <ma14:placeholderFlag xmlns:ma14="http://schemas.microsoft.com/office/mac/drawingml/2011/main" xmlns="" val="1"/>
             </a:ext>
           </a:extLst>
         </p:spPr>
@@ -11490,14 +11490,14 @@
           <a:effectLst/>
           <a:extLst>
             <a:ext uri="{909E8E84-426E-40dd-AFC4-6F175D3DCCD1}">
-              <a14:hiddenFill xmlns="" xmlns:a14="http://schemas.microsoft.com/office/drawing/2010/main">
+              <a14:hiddenFill xmlns:a14="http://schemas.microsoft.com/office/drawing/2010/main" xmlns="">
                 <a:solidFill>
                   <a:srgbClr val="FFFFFF"/>
                 </a:solidFill>
               </a14:hiddenFill>
             </a:ext>
             <a:ext uri="{91240B29-F687-4f45-9708-019B960494DF}">
-              <a14:hiddenLine xmlns="" xmlns:a14="http://schemas.microsoft.com/office/drawing/2010/main" w="9525" cap="flat">
+              <a14:hiddenLine xmlns:a14="http://schemas.microsoft.com/office/drawing/2010/main" xmlns="" w="9525" cap="flat">
                 <a:solidFill>
                   <a:srgbClr val="3465A4"/>
                 </a:solidFill>
@@ -11507,7 +11507,7 @@
               </a14:hiddenLine>
             </a:ext>
             <a:ext uri="{AF507438-7753-43e0-B8FC-AC1667EBCBE1}">
-              <a14:hiddenEffects xmlns="" xmlns:a14="http://schemas.microsoft.com/office/drawing/2010/main">
+              <a14:hiddenEffects xmlns:a14="http://schemas.microsoft.com/office/drawing/2010/main" xmlns="">
                 <a:effectLst>
                   <a:outerShdw blurRad="63500" dist="38099" dir="2700000" algn="ctr" rotWithShape="0">
                     <a:schemeClr val="bg2">
@@ -11518,7 +11518,7 @@
               </a14:hiddenEffects>
             </a:ext>
             <a:ext uri="{FAA26D3D-D897-4be2-8F04-BA451C77F1D7}">
-              <ma14:placeholderFlag xmlns="" xmlns:ma14="http://schemas.microsoft.com/office/mac/drawingml/2011/main" val="1"/>
+              <ma14:placeholderFlag xmlns:ma14="http://schemas.microsoft.com/office/mac/drawingml/2011/main" xmlns="" val="1"/>
             </a:ext>
           </a:extLst>
         </p:spPr>
@@ -11611,14 +11611,14 @@
           <a:effectLst/>
           <a:extLst>
             <a:ext uri="{909E8E84-426E-40dd-AFC4-6F175D3DCCD1}">
-              <a14:hiddenFill xmlns="" xmlns:a14="http://schemas.microsoft.com/office/drawing/2010/main">
+              <a14:hiddenFill xmlns:a14="http://schemas.microsoft.com/office/drawing/2010/main" xmlns="">
                 <a:solidFill>
                   <a:srgbClr val="FFFFFF"/>
                 </a:solidFill>
               </a14:hiddenFill>
             </a:ext>
             <a:ext uri="{91240B29-F687-4f45-9708-019B960494DF}">
-              <a14:hiddenLine xmlns="" xmlns:a14="http://schemas.microsoft.com/office/drawing/2010/main" w="9525" cap="flat">
+              <a14:hiddenLine xmlns:a14="http://schemas.microsoft.com/office/drawing/2010/main" xmlns="" w="9525" cap="flat">
                 <a:solidFill>
                   <a:srgbClr val="3465A4"/>
                 </a:solidFill>
@@ -11628,7 +11628,7 @@
               </a14:hiddenLine>
             </a:ext>
             <a:ext uri="{AF507438-7753-43e0-B8FC-AC1667EBCBE1}">
-              <a14:hiddenEffects xmlns="" xmlns:a14="http://schemas.microsoft.com/office/drawing/2010/main">
+              <a14:hiddenEffects xmlns:a14="http://schemas.microsoft.com/office/drawing/2010/main" xmlns="">
                 <a:effectLst>
                   <a:outerShdw blurRad="63500" dist="38099" dir="2700000" algn="ctr" rotWithShape="0">
                     <a:schemeClr val="bg2">
@@ -11639,7 +11639,7 @@
               </a14:hiddenEffects>
             </a:ext>
             <a:ext uri="{FAA26D3D-D897-4be2-8F04-BA451C77F1D7}">
-              <ma14:placeholderFlag xmlns="" xmlns:ma14="http://schemas.microsoft.com/office/mac/drawingml/2011/main" val="1"/>
+              <ma14:placeholderFlag xmlns:ma14="http://schemas.microsoft.com/office/mac/drawingml/2011/main" xmlns="" val="1"/>
             </a:ext>
           </a:extLst>
         </p:spPr>
@@ -11710,14 +11710,14 @@
           <a:effectLst/>
           <a:extLst>
             <a:ext uri="{909E8E84-426E-40dd-AFC4-6F175D3DCCD1}">
-              <a14:hiddenFill xmlns="" xmlns:a14="http://schemas.microsoft.com/office/drawing/2010/main">
+              <a14:hiddenFill xmlns:a14="http://schemas.microsoft.com/office/drawing/2010/main" xmlns="">
                 <a:solidFill>
                   <a:srgbClr val="FFFFFF"/>
                 </a:solidFill>
               </a14:hiddenFill>
             </a:ext>
             <a:ext uri="{91240B29-F687-4f45-9708-019B960494DF}">
-              <a14:hiddenLine xmlns="" xmlns:a14="http://schemas.microsoft.com/office/drawing/2010/main" w="9525" cap="flat">
+              <a14:hiddenLine xmlns:a14="http://schemas.microsoft.com/office/drawing/2010/main" xmlns="" w="9525" cap="flat">
                 <a:solidFill>
                   <a:srgbClr val="3465A4"/>
                 </a:solidFill>
@@ -11727,7 +11727,7 @@
               </a14:hiddenLine>
             </a:ext>
             <a:ext uri="{AF507438-7753-43e0-B8FC-AC1667EBCBE1}">
-              <a14:hiddenEffects xmlns="" xmlns:a14="http://schemas.microsoft.com/office/drawing/2010/main">
+              <a14:hiddenEffects xmlns:a14="http://schemas.microsoft.com/office/drawing/2010/main" xmlns="">
                 <a:effectLst>
                   <a:outerShdw blurRad="63500" dist="38099" dir="2700000" algn="ctr" rotWithShape="0">
                     <a:schemeClr val="bg2">
@@ -11738,7 +11738,7 @@
               </a14:hiddenEffects>
             </a:ext>
             <a:ext uri="{FAA26D3D-D897-4be2-8F04-BA451C77F1D7}">
-              <ma14:placeholderFlag xmlns="" xmlns:ma14="http://schemas.microsoft.com/office/mac/drawingml/2011/main" val="1"/>
+              <ma14:placeholderFlag xmlns:ma14="http://schemas.microsoft.com/office/mac/drawingml/2011/main" xmlns="" val="1"/>
             </a:ext>
           </a:extLst>
         </p:spPr>
@@ -11813,14 +11813,14 @@
           <a:effectLst/>
           <a:extLst>
             <a:ext uri="{909E8E84-426E-40dd-AFC4-6F175D3DCCD1}">
-              <a14:hiddenFill xmlns="" xmlns:a14="http://schemas.microsoft.com/office/drawing/2010/main">
+              <a14:hiddenFill xmlns:a14="http://schemas.microsoft.com/office/drawing/2010/main" xmlns="">
                 <a:solidFill>
                   <a:srgbClr val="FFFFFF"/>
                 </a:solidFill>
               </a14:hiddenFill>
             </a:ext>
             <a:ext uri="{91240B29-F687-4f45-9708-019B960494DF}">
-              <a14:hiddenLine xmlns="" xmlns:a14="http://schemas.microsoft.com/office/drawing/2010/main" w="9525" cap="flat">
+              <a14:hiddenLine xmlns:a14="http://schemas.microsoft.com/office/drawing/2010/main" xmlns="" w="9525" cap="flat">
                 <a:solidFill>
                   <a:srgbClr val="3465A4"/>
                 </a:solidFill>
@@ -11830,7 +11830,7 @@
               </a14:hiddenLine>
             </a:ext>
             <a:ext uri="{AF507438-7753-43e0-B8FC-AC1667EBCBE1}">
-              <a14:hiddenEffects xmlns="" xmlns:a14="http://schemas.microsoft.com/office/drawing/2010/main">
+              <a14:hiddenEffects xmlns:a14="http://schemas.microsoft.com/office/drawing/2010/main" xmlns="">
                 <a:effectLst>
                   <a:outerShdw blurRad="63500" dist="38099" dir="2700000" algn="ctr" rotWithShape="0">
                     <a:schemeClr val="bg2">
@@ -11841,7 +11841,7 @@
               </a14:hiddenEffects>
             </a:ext>
             <a:ext uri="{FAA26D3D-D897-4be2-8F04-BA451C77F1D7}">
-              <ma14:placeholderFlag xmlns="" xmlns:ma14="http://schemas.microsoft.com/office/mac/drawingml/2011/main" val="1"/>
+              <ma14:placeholderFlag xmlns:ma14="http://schemas.microsoft.com/office/mac/drawingml/2011/main" xmlns="" val="1"/>
             </a:ext>
           </a:extLst>
         </p:spPr>
@@ -12490,14 +12490,14 @@
           <a:effectLst/>
           <a:extLst>
             <a:ext uri="{909E8E84-426E-40dd-AFC4-6F175D3DCCD1}">
-              <a14:hiddenFill xmlns="" xmlns:a14="http://schemas.microsoft.com/office/drawing/2010/main">
+              <a14:hiddenFill xmlns:a14="http://schemas.microsoft.com/office/drawing/2010/main" xmlns="">
                 <a:solidFill>
                   <a:srgbClr val="FFFFFF"/>
                 </a:solidFill>
               </a14:hiddenFill>
             </a:ext>
             <a:ext uri="{91240B29-F687-4f45-9708-019B960494DF}">
-              <a14:hiddenLine xmlns="" xmlns:a14="http://schemas.microsoft.com/office/drawing/2010/main" w="9525" cap="flat">
+              <a14:hiddenLine xmlns:a14="http://schemas.microsoft.com/office/drawing/2010/main" xmlns="" w="9525" cap="flat">
                 <a:solidFill>
                   <a:srgbClr val="3465A4"/>
                 </a:solidFill>
@@ -12507,7 +12507,7 @@
               </a14:hiddenLine>
             </a:ext>
             <a:ext uri="{AF507438-7753-43e0-B8FC-AC1667EBCBE1}">
-              <a14:hiddenEffects xmlns="" xmlns:a14="http://schemas.microsoft.com/office/drawing/2010/main">
+              <a14:hiddenEffects xmlns:a14="http://schemas.microsoft.com/office/drawing/2010/main" xmlns="">
                 <a:effectLst>
                   <a:outerShdw blurRad="63500" dist="38099" dir="2700000" algn="ctr" rotWithShape="0">
                     <a:schemeClr val="bg2">
@@ -12518,7 +12518,7 @@
               </a14:hiddenEffects>
             </a:ext>
             <a:ext uri="{FAA26D3D-D897-4be2-8F04-BA451C77F1D7}">
-              <ma14:placeholderFlag xmlns="" xmlns:ma14="http://schemas.microsoft.com/office/mac/drawingml/2011/main" val="1"/>
+              <ma14:placeholderFlag xmlns:ma14="http://schemas.microsoft.com/office/mac/drawingml/2011/main" xmlns="" val="1"/>
             </a:ext>
           </a:extLst>
         </p:spPr>
@@ -12569,14 +12569,14 @@
           <a:effectLst/>
           <a:extLst>
             <a:ext uri="{909E8E84-426E-40dd-AFC4-6F175D3DCCD1}">
-              <a14:hiddenFill xmlns="" xmlns:a14="http://schemas.microsoft.com/office/drawing/2010/main">
+              <a14:hiddenFill xmlns:a14="http://schemas.microsoft.com/office/drawing/2010/main" xmlns="">
                 <a:solidFill>
                   <a:srgbClr val="FFFFFF"/>
                 </a:solidFill>
               </a14:hiddenFill>
             </a:ext>
             <a:ext uri="{91240B29-F687-4f45-9708-019B960494DF}">
-              <a14:hiddenLine xmlns="" xmlns:a14="http://schemas.microsoft.com/office/drawing/2010/main" w="9525" cap="flat">
+              <a14:hiddenLine xmlns:a14="http://schemas.microsoft.com/office/drawing/2010/main" xmlns="" w="9525" cap="flat">
                 <a:solidFill>
                   <a:srgbClr val="3465A4"/>
                 </a:solidFill>
@@ -12586,7 +12586,7 @@
               </a14:hiddenLine>
             </a:ext>
             <a:ext uri="{AF507438-7753-43e0-B8FC-AC1667EBCBE1}">
-              <a14:hiddenEffects xmlns="" xmlns:a14="http://schemas.microsoft.com/office/drawing/2010/main">
+              <a14:hiddenEffects xmlns:a14="http://schemas.microsoft.com/office/drawing/2010/main" xmlns="">
                 <a:effectLst>
                   <a:outerShdw blurRad="63500" dist="38099" dir="2700000" algn="ctr" rotWithShape="0">
                     <a:schemeClr val="bg2">
@@ -12597,7 +12597,7 @@
               </a14:hiddenEffects>
             </a:ext>
             <a:ext uri="{FAA26D3D-D897-4be2-8F04-BA451C77F1D7}">
-              <ma14:placeholderFlag xmlns="" xmlns:ma14="http://schemas.microsoft.com/office/mac/drawingml/2011/main" val="1"/>
+              <ma14:placeholderFlag xmlns:ma14="http://schemas.microsoft.com/office/mac/drawingml/2011/main" xmlns="" val="1"/>
             </a:ext>
           </a:extLst>
         </p:spPr>
@@ -13259,14 +13259,14 @@
           <a:effectLst/>
           <a:extLst>
             <a:ext uri="{909E8E84-426E-40dd-AFC4-6F175D3DCCD1}">
-              <a14:hiddenFill xmlns="" xmlns:a14="http://schemas.microsoft.com/office/drawing/2010/main">
+              <a14:hiddenFill xmlns:a14="http://schemas.microsoft.com/office/drawing/2010/main" xmlns="">
                 <a:solidFill>
                   <a:srgbClr val="FFFFFF"/>
                 </a:solidFill>
               </a14:hiddenFill>
             </a:ext>
             <a:ext uri="{91240B29-F687-4f45-9708-019B960494DF}">
-              <a14:hiddenLine xmlns="" xmlns:a14="http://schemas.microsoft.com/office/drawing/2010/main" w="9525" cap="flat">
+              <a14:hiddenLine xmlns:a14="http://schemas.microsoft.com/office/drawing/2010/main" xmlns="" w="9525" cap="flat">
                 <a:solidFill>
                   <a:srgbClr val="3465A4"/>
                 </a:solidFill>
@@ -13276,7 +13276,7 @@
               </a14:hiddenLine>
             </a:ext>
             <a:ext uri="{AF507438-7753-43e0-B8FC-AC1667EBCBE1}">
-              <a14:hiddenEffects xmlns="" xmlns:a14="http://schemas.microsoft.com/office/drawing/2010/main">
+              <a14:hiddenEffects xmlns:a14="http://schemas.microsoft.com/office/drawing/2010/main" xmlns="">
                 <a:effectLst>
                   <a:outerShdw blurRad="63500" dist="38099" dir="2700000" algn="ctr" rotWithShape="0">
                     <a:srgbClr val="000000">
@@ -13633,14 +13633,14 @@
           <a:effectLst/>
           <a:extLst>
             <a:ext uri="{909E8E84-426E-40dd-AFC4-6F175D3DCCD1}">
-              <a14:hiddenFill xmlns="" xmlns:a14="http://schemas.microsoft.com/office/drawing/2010/main">
+              <a14:hiddenFill xmlns:a14="http://schemas.microsoft.com/office/drawing/2010/main" xmlns="">
                 <a:solidFill>
                   <a:srgbClr val="FFFFFF"/>
                 </a:solidFill>
               </a14:hiddenFill>
             </a:ext>
             <a:ext uri="{91240B29-F687-4f45-9708-019B960494DF}">
-              <a14:hiddenLine xmlns="" xmlns:a14="http://schemas.microsoft.com/office/drawing/2010/main" w="9525" cap="flat">
+              <a14:hiddenLine xmlns:a14="http://schemas.microsoft.com/office/drawing/2010/main" xmlns="" w="9525" cap="flat">
                 <a:solidFill>
                   <a:srgbClr val="3465A4"/>
                 </a:solidFill>
@@ -13650,7 +13650,7 @@
               </a14:hiddenLine>
             </a:ext>
             <a:ext uri="{AF507438-7753-43e0-B8FC-AC1667EBCBE1}">
-              <a14:hiddenEffects xmlns="" xmlns:a14="http://schemas.microsoft.com/office/drawing/2010/main">
+              <a14:hiddenEffects xmlns:a14="http://schemas.microsoft.com/office/drawing/2010/main" xmlns="">
                 <a:effectLst>
                   <a:outerShdw blurRad="63500" dist="38099" dir="2700000" algn="ctr" rotWithShape="0">
                     <a:srgbClr val="000000">
@@ -14255,7 +14255,7 @@
                         <a:buNone/>
                       </a:pPr>
                       <a:r>
-                        <a:rPr lang="pt-BR" sz="850" b="1">
+                        <a:rPr lang="pt-BR" sz="850" b="1" dirty="0">
                           <a:solidFill>
                             <a:srgbClr val="FFFFFF"/>
                           </a:solidFill>
@@ -15950,7 +15950,7 @@
                         <a:buNone/>
                       </a:pPr>
                       <a:r>
-                        <a:rPr lang="pt-BR" sz="780" b="0">
+                        <a:rPr lang="pt-BR" sz="780" b="0" dirty="0">
                           <a:solidFill>
                             <a:srgbClr val="333333"/>
                           </a:solidFill>
@@ -16057,7 +16057,13 @@
           <p:cNvGraphicFramePr>
             <a:graphicFrameLocks noGrp="1"/>
           </p:cNvGraphicFramePr>
-          <p:nvPr/>
+          <p:nvPr>
+            <p:extLst>
+              <p:ext uri="{D42A27DB-BD31-4B8C-83A1-F6EECF244321}">
+                <p14:modId xmlns:p14="http://schemas.microsoft.com/office/powerpoint/2010/main" val="3397713173"/>
+              </p:ext>
+            </p:extLst>
+          </p:nvPr>
         </p:nvGraphicFramePr>
         <p:xfrm>
           <a:off x="179388" y="1430000"/>
@@ -16198,10 +16204,13 @@
                         <a:buNone/>
                       </a:pPr>
                       <a:r>
-                        <a:rPr lang="pt-BR" sz="750" b="1">
+                        <a:rPr lang="pt-BR" sz="750" b="1" dirty="0">
                           <a:solidFill>
                             <a:srgbClr val="FFFFFF"/>
                           </a:solidFill>
+                          <a:highlight>
+                            <a:srgbClr val="FFFF00"/>
+                          </a:highlight>
                           <a:latin typeface="Titillium Web"/>
                         </a:rPr>
                         <a:t>RBA</a:t>
@@ -17504,7 +17513,7 @@
                         <a:buNone/>
                       </a:pPr>
                       <a:r>
-                        <a:rPr lang="pt-BR" sz="1300" b="1">
+                        <a:rPr lang="pt-BR" sz="1300" b="1" dirty="0">
                           <a:solidFill>
                             <a:srgbClr val="E0892E"/>
                           </a:solidFill>
@@ -18112,24 +18121,12 @@
               </a:spcAft>
               <a:buNone/>
             </a:pPr>
-            <a:r>
-              <a:rPr lang="pt-BR" sz="1000" b="1" dirty="0">
-                <a:solidFill>
-                  <a:srgbClr val="00CC99"/>
-                </a:solidFill>
-                <a:latin typeface="Titillium Web"/>
-              </a:rPr>
-              <a:t>•  </a:t>
-            </a:r>
-            <a:r>
-              <a:rPr lang="pt-BR" sz="980" b="0" dirty="0">
-                <a:solidFill>
-                  <a:srgbClr val="333333"/>
-                </a:solidFill>
-                <a:latin typeface="Titillium Web"/>
-              </a:rPr>
-              <a:t>STRAGAPEDE, G. et al. TypeFormer: Transformers for Mobile Keystroke Biometrics. Neural Computing and Applications, v. 36, 2024.</a:t>
-            </a:r>
+            <a:endParaRPr lang="pt-BR" sz="980" b="0" dirty="0">
+              <a:solidFill>
+                <a:srgbClr val="333333"/>
+              </a:solidFill>
+              <a:latin typeface="Titillium Web"/>
+            </a:endParaRPr>
           </a:p>
           <a:p>
             <a:pPr algn="l">
@@ -18154,7 +18151,7 @@
                 </a:solidFill>
                 <a:latin typeface="Titillium Web"/>
               </a:rPr>
-              <a:t>WIEFLING, S. et al. Pump Up Password Security! ... Risk-Based Authentication. ACM TOPS, v. 26, 2023.</a:t>
+              <a:t>STRAGAPEDE, G. et al. TypeFormer: Transformers for Mobile Keystroke Biometrics. Neural Computing and Applications, v. 36, 2024.</a:t>
             </a:r>
           </a:p>
           <a:p>
@@ -18164,24 +18161,12 @@
               </a:spcAft>
               <a:buNone/>
             </a:pPr>
-            <a:r>
-              <a:rPr lang="pt-BR" sz="1000" b="1" dirty="0">
-                <a:solidFill>
-                  <a:srgbClr val="00CC99"/>
-                </a:solidFill>
-                <a:latin typeface="Titillium Web"/>
-              </a:rPr>
-              <a:t>•  </a:t>
-            </a:r>
-            <a:r>
-              <a:rPr lang="pt-BR" sz="980" b="0" dirty="0">
-                <a:solidFill>
-                  <a:srgbClr val="333333"/>
-                </a:solidFill>
-                <a:latin typeface="Titillium Web"/>
-              </a:rPr>
-              <a:t>WIEFLING, S.; DÜRMUTH, M.; LO IACONO, L. What's in Score for Website Users ... RBA Characteristics. FC, 2021.</a:t>
-            </a:r>
+            <a:endParaRPr lang="pt-BR" sz="980" b="0" dirty="0">
+              <a:solidFill>
+                <a:srgbClr val="333333"/>
+              </a:solidFill>
+              <a:latin typeface="Titillium Web"/>
+            </a:endParaRPr>
           </a:p>
           <a:p>
             <a:pPr algn="l">
@@ -18206,7 +18191,7 @@
                 </a:solidFill>
                 <a:latin typeface="Titillium Web"/>
               </a:rPr>
-              <a:t>ISMAIL, M. G. et al. Outlier Detection for Keystroke Biometric User Authentication. PeerJ CS, 2024.</a:t>
+              <a:t>WIEFLING, S. et al. Pump Up Password Security! ... Risk-Based Authentication. ACM TOPS, v. 26, 2023.</a:t>
             </a:r>
           </a:p>
           <a:p>
@@ -18216,24 +18201,12 @@
               </a:spcAft>
               <a:buNone/>
             </a:pPr>
-            <a:r>
-              <a:rPr lang="pt-BR" sz="1000" b="1" dirty="0">
-                <a:solidFill>
-                  <a:srgbClr val="00CC99"/>
-                </a:solidFill>
-                <a:latin typeface="Titillium Web"/>
-              </a:rPr>
-              <a:t>•  </a:t>
-            </a:r>
-            <a:r>
-              <a:rPr lang="pt-BR" sz="980" b="0" dirty="0">
-                <a:solidFill>
-                  <a:srgbClr val="333333"/>
-                </a:solidFill>
-                <a:latin typeface="Titillium Web"/>
-              </a:rPr>
-              <a:t>CAPUANO, N. et al. Explainable AI in CyberSecurity: A Survey. IEEE Access, v. 10, 2022.</a:t>
-            </a:r>
+            <a:endParaRPr lang="pt-BR" sz="980" b="0" dirty="0">
+              <a:solidFill>
+                <a:srgbClr val="333333"/>
+              </a:solidFill>
+              <a:latin typeface="Titillium Web"/>
+            </a:endParaRPr>
           </a:p>
           <a:p>
             <a:pPr algn="l">
@@ -18258,7 +18231,7 @@
                 </a:solidFill>
                 <a:latin typeface="Titillium Web"/>
               </a:rPr>
-              <a:t>STYLIOS, I. et al. Behavioral Biometrics &amp; Continuous Authentication: A Survey. Information Fusion, v. 66, 2021.</a:t>
+              <a:t>WIEFLING, S.; DÜRMUTH, M.; LO IACONO, L. What's in Score for Website Users ... RBA Characteristics. FC, 2021.</a:t>
             </a:r>
           </a:p>
           <a:p>
@@ -18268,24 +18241,12 @@
               </a:spcAft>
               <a:buNone/>
             </a:pPr>
-            <a:r>
-              <a:rPr lang="pt-BR" sz="1000" b="1" dirty="0">
-                <a:solidFill>
-                  <a:srgbClr val="00CC99"/>
-                </a:solidFill>
-                <a:latin typeface="Titillium Web"/>
-              </a:rPr>
-              <a:t>•  </a:t>
-            </a:r>
-            <a:r>
-              <a:rPr lang="pt-BR" sz="980" b="0" dirty="0">
-                <a:solidFill>
-                  <a:srgbClr val="333333"/>
-                </a:solidFill>
-                <a:latin typeface="Titillium Web"/>
-              </a:rPr>
-              <a:t>ABUHAMAD, M. et al. Sensor-Based Continuous Authentication: A Survey. IEEE IoT Journal, v. 8, 2021.</a:t>
-            </a:r>
+            <a:endParaRPr lang="pt-BR" sz="980" b="0" dirty="0">
+              <a:solidFill>
+                <a:srgbClr val="333333"/>
+              </a:solidFill>
+              <a:latin typeface="Titillium Web"/>
+            </a:endParaRPr>
           </a:p>
           <a:p>
             <a:pPr algn="l">
@@ -18310,7 +18271,7 @@
                 </a:solidFill>
                 <a:latin typeface="Titillium Web"/>
               </a:rPr>
-              <a:t>ROSE, S. et al. Zero Trust Architecture. NIST SP 800-207, 2020.</a:t>
+              <a:t>ISMAIL, M. G. et al. Outlier Detection for Keystroke Biometric User Authentication. PeerJ CS, 2024.</a:t>
             </a:r>
           </a:p>
           <a:p>
@@ -18320,15 +18281,12 @@
               </a:spcAft>
               <a:buNone/>
             </a:pPr>
-            <a:r>
-              <a:rPr lang="pt-BR" sz="1200" b="1" dirty="0">
-                <a:solidFill>
-                  <a:srgbClr val="2D2DB9"/>
-                </a:solidFill>
-                <a:latin typeface="Titillium Web"/>
-              </a:rPr>
-              <a:t>Bases seminais e indústria</a:t>
-            </a:r>
+            <a:endParaRPr lang="pt-BR" sz="980" b="0" dirty="0">
+              <a:solidFill>
+                <a:srgbClr val="333333"/>
+              </a:solidFill>
+              <a:latin typeface="Titillium Web"/>
+            </a:endParaRPr>
           </a:p>
           <a:p>
             <a:pPr algn="l">
@@ -18353,8 +18311,199 @@
                 </a:solidFill>
                 <a:latin typeface="Titillium Web"/>
               </a:rPr>
+              <a:t>CAPUANO, N. et al. Explainable AI in CyberSecurity: A Survey. IEEE Access, v. 10, 2022.</a:t>
+            </a:r>
+          </a:p>
+          <a:p>
+            <a:pPr algn="l">
+              <a:spcAft>
+                <a:spcPts val="200"/>
+              </a:spcAft>
+              <a:buNone/>
+            </a:pPr>
+            <a:endParaRPr lang="pt-BR" sz="980" b="0" dirty="0">
+              <a:solidFill>
+                <a:srgbClr val="333333"/>
+              </a:solidFill>
+              <a:latin typeface="Titillium Web"/>
+            </a:endParaRPr>
+          </a:p>
+          <a:p>
+            <a:pPr algn="l">
+              <a:spcAft>
+                <a:spcPts val="200"/>
+              </a:spcAft>
+              <a:buNone/>
+            </a:pPr>
+            <a:r>
+              <a:rPr lang="pt-BR" sz="1000" b="1" dirty="0">
+                <a:solidFill>
+                  <a:srgbClr val="00CC99"/>
+                </a:solidFill>
+                <a:latin typeface="Titillium Web"/>
+              </a:rPr>
+              <a:t>•  </a:t>
+            </a:r>
+            <a:r>
+              <a:rPr lang="pt-BR" sz="980" b="0" dirty="0">
+                <a:solidFill>
+                  <a:srgbClr val="333333"/>
+                </a:solidFill>
+                <a:latin typeface="Titillium Web"/>
+              </a:rPr>
+              <a:t>STYLIOS, I. et al. Behavioral Biometrics &amp; Continuous Authentication: A Survey. Information Fusion, v. 66, 2021.</a:t>
+            </a:r>
+          </a:p>
+          <a:p>
+            <a:pPr algn="l">
+              <a:spcAft>
+                <a:spcPts val="200"/>
+              </a:spcAft>
+              <a:buNone/>
+            </a:pPr>
+            <a:endParaRPr lang="pt-BR" sz="980" b="0" dirty="0">
+              <a:solidFill>
+                <a:srgbClr val="333333"/>
+              </a:solidFill>
+              <a:latin typeface="Titillium Web"/>
+            </a:endParaRPr>
+          </a:p>
+          <a:p>
+            <a:pPr algn="l">
+              <a:spcAft>
+                <a:spcPts val="200"/>
+              </a:spcAft>
+              <a:buNone/>
+            </a:pPr>
+            <a:r>
+              <a:rPr lang="pt-BR" sz="1000" b="1" dirty="0">
+                <a:solidFill>
+                  <a:srgbClr val="00CC99"/>
+                </a:solidFill>
+                <a:latin typeface="Titillium Web"/>
+              </a:rPr>
+              <a:t>•  </a:t>
+            </a:r>
+            <a:r>
+              <a:rPr lang="pt-BR" sz="980" b="0" dirty="0">
+                <a:solidFill>
+                  <a:srgbClr val="333333"/>
+                </a:solidFill>
+                <a:latin typeface="Titillium Web"/>
+              </a:rPr>
+              <a:t>ABUHAMAD, M. et al. Sensor-Based Continuous Authentication: A Survey. IEEE IoT Journal, v. 8, 2021.</a:t>
+            </a:r>
+          </a:p>
+          <a:p>
+            <a:pPr algn="l">
+              <a:spcAft>
+                <a:spcPts val="200"/>
+              </a:spcAft>
+              <a:buNone/>
+            </a:pPr>
+            <a:endParaRPr lang="pt-BR" sz="980" b="0" dirty="0">
+              <a:solidFill>
+                <a:srgbClr val="333333"/>
+              </a:solidFill>
+              <a:latin typeface="Titillium Web"/>
+            </a:endParaRPr>
+          </a:p>
+          <a:p>
+            <a:pPr algn="l">
+              <a:spcAft>
+                <a:spcPts val="200"/>
+              </a:spcAft>
+              <a:buNone/>
+            </a:pPr>
+            <a:r>
+              <a:rPr lang="pt-BR" sz="1000" b="1" dirty="0">
+                <a:solidFill>
+                  <a:srgbClr val="00CC99"/>
+                </a:solidFill>
+                <a:latin typeface="Titillium Web"/>
+              </a:rPr>
+              <a:t>•  </a:t>
+            </a:r>
+            <a:r>
+              <a:rPr lang="pt-BR" sz="980" b="0" dirty="0">
+                <a:solidFill>
+                  <a:srgbClr val="333333"/>
+                </a:solidFill>
+                <a:latin typeface="Titillium Web"/>
+              </a:rPr>
+              <a:t>ROSE, S. et al. Zero Trust Architecture. NIST SP 800-207, 2020.</a:t>
+            </a:r>
+          </a:p>
+          <a:p>
+            <a:pPr algn="l">
+              <a:spcAft>
+                <a:spcPts val="200"/>
+              </a:spcAft>
+              <a:buNone/>
+            </a:pPr>
+            <a:endParaRPr lang="pt-BR" sz="1200" b="1" dirty="0">
+              <a:solidFill>
+                <a:srgbClr val="2D2DB9"/>
+              </a:solidFill>
+              <a:latin typeface="Titillium Web"/>
+            </a:endParaRPr>
+          </a:p>
+          <a:p>
+            <a:pPr algn="l">
+              <a:spcAft>
+                <a:spcPts val="200"/>
+              </a:spcAft>
+              <a:buNone/>
+            </a:pPr>
+            <a:r>
+              <a:rPr lang="pt-BR" sz="1200" b="1" dirty="0">
+                <a:solidFill>
+                  <a:srgbClr val="2D2DB9"/>
+                </a:solidFill>
+                <a:latin typeface="Titillium Web"/>
+              </a:rPr>
+              <a:t>Bases seminais e indústria</a:t>
+            </a:r>
+          </a:p>
+          <a:p>
+            <a:pPr algn="l">
+              <a:spcAft>
+                <a:spcPts val="200"/>
+              </a:spcAft>
+              <a:buNone/>
+            </a:pPr>
+            <a:r>
+              <a:rPr lang="pt-BR" sz="1000" b="1" dirty="0">
+                <a:solidFill>
+                  <a:srgbClr val="00CC99"/>
+                </a:solidFill>
+                <a:latin typeface="Titillium Web"/>
+              </a:rPr>
+              <a:t>•  </a:t>
+            </a:r>
+            <a:r>
+              <a:rPr lang="pt-BR" sz="980" b="0" dirty="0">
+                <a:solidFill>
+                  <a:srgbClr val="333333"/>
+                </a:solidFill>
+                <a:latin typeface="Titillium Web"/>
+              </a:rPr>
               <a:t>KILLOURHY &amp; MAXION (DSN, 2009); FRANK et al. — Touchalytics (IEEE TIFS, 2013); LIU, TING &amp; ZHOU — Isolation Forest (ICDM, 2008); LUNDBERG &amp; LEE — SHAP (NeurIPS, 2017).</a:t>
             </a:r>
+          </a:p>
+          <a:p>
+            <a:pPr algn="l">
+              <a:spcAft>
+                <a:spcPts val="200"/>
+              </a:spcAft>
+              <a:buNone/>
+            </a:pPr>
+            <a:endParaRPr lang="pt-BR" sz="980" b="0" dirty="0">
+              <a:solidFill>
+                <a:srgbClr val="333333"/>
+              </a:solidFill>
+              <a:latin typeface="Titillium Web"/>
+            </a:endParaRPr>
           </a:p>
           <a:p>
             <a:pPr algn="l">
@@ -18438,14 +18587,14 @@
           <a:effectLst/>
           <a:extLst>
             <a:ext uri="{909E8E84-426E-40dd-AFC4-6F175D3DCCD1}">
-              <a14:hiddenFill xmlns="" xmlns:a14="http://schemas.microsoft.com/office/drawing/2010/main">
+              <a14:hiddenFill xmlns:a14="http://schemas.microsoft.com/office/drawing/2010/main" xmlns="">
                 <a:solidFill>
                   <a:srgbClr val="FFFFFF"/>
                 </a:solidFill>
               </a14:hiddenFill>
             </a:ext>
             <a:ext uri="{91240B29-F687-4f45-9708-019B960494DF}">
-              <a14:hiddenLine xmlns="" xmlns:a14="http://schemas.microsoft.com/office/drawing/2010/main" w="9525" cap="flat">
+              <a14:hiddenLine xmlns:a14="http://schemas.microsoft.com/office/drawing/2010/main" xmlns="" w="9525" cap="flat">
                 <a:solidFill>
                   <a:srgbClr val="3465A4"/>
                 </a:solidFill>
@@ -18455,7 +18604,7 @@
               </a14:hiddenLine>
             </a:ext>
             <a:ext uri="{AF507438-7753-43e0-B8FC-AC1667EBCBE1}">
-              <a14:hiddenEffects xmlns="" xmlns:a14="http://schemas.microsoft.com/office/drawing/2010/main">
+              <a14:hiddenEffects xmlns:a14="http://schemas.microsoft.com/office/drawing/2010/main" xmlns="">
                 <a:effectLst>
                   <a:outerShdw blurRad="63500" dist="38099" dir="2700000" algn="ctr" rotWithShape="0">
                     <a:srgbClr val="000000">
@@ -18812,14 +18961,14 @@
           <a:effectLst/>
           <a:extLst>
             <a:ext uri="{909E8E84-426E-40dd-AFC4-6F175D3DCCD1}">
-              <a14:hiddenFill xmlns="" xmlns:a14="http://schemas.microsoft.com/office/drawing/2010/main">
+              <a14:hiddenFill xmlns:a14="http://schemas.microsoft.com/office/drawing/2010/main" xmlns="">
                 <a:solidFill>
                   <a:srgbClr val="FFFFFF"/>
                 </a:solidFill>
               </a14:hiddenFill>
             </a:ext>
             <a:ext uri="{91240B29-F687-4f45-9708-019B960494DF}">
-              <a14:hiddenLine xmlns="" xmlns:a14="http://schemas.microsoft.com/office/drawing/2010/main" w="9525" cap="flat">
+              <a14:hiddenLine xmlns:a14="http://schemas.microsoft.com/office/drawing/2010/main" xmlns="" w="9525" cap="flat">
                 <a:solidFill>
                   <a:srgbClr val="3465A4"/>
                 </a:solidFill>
@@ -18829,7 +18978,7 @@
               </a14:hiddenLine>
             </a:ext>
             <a:ext uri="{AF507438-7753-43e0-B8FC-AC1667EBCBE1}">
-              <a14:hiddenEffects xmlns="" xmlns:a14="http://schemas.microsoft.com/office/drawing/2010/main">
+              <a14:hiddenEffects xmlns:a14="http://schemas.microsoft.com/office/drawing/2010/main" xmlns="">
                 <a:effectLst>
                   <a:outerShdw blurRad="63500" dist="38099" dir="2700000" algn="ctr" rotWithShape="0">
                     <a:srgbClr val="000000">
@@ -23734,7 +23883,7 @@
         <a:effectLst/>
         <a:extLst>
           <a:ext uri="{AF507438-7753-43e0-B8FC-AC1667EBCBE1}">
-            <a14:hiddenEffects xmlns="" xmlns:a14="http://schemas.microsoft.com/office/drawing/2010/main">
+            <a14:hiddenEffects xmlns:a14="http://schemas.microsoft.com/office/drawing/2010/main" xmlns="">
               <a:effectLst>
                 <a:outerShdw blurRad="63500" dist="38099" dir="2700000" algn="ctr" rotWithShape="0">
                   <a:schemeClr val="bg2">
@@ -23810,7 +23959,7 @@
         <a:effectLst/>
         <a:extLst>
           <a:ext uri="{AF507438-7753-43e0-B8FC-AC1667EBCBE1}">
-            <a14:hiddenEffects xmlns="" xmlns:a14="http://schemas.microsoft.com/office/drawing/2010/main">
+            <a14:hiddenEffects xmlns:a14="http://schemas.microsoft.com/office/drawing/2010/main" xmlns="">
               <a:effectLst>
                 <a:outerShdw blurRad="63500" dist="38099" dir="2700000" algn="ctr" rotWithShape="0">
                   <a:schemeClr val="bg2">
@@ -24396,7 +24545,7 @@
         <a:effectLst/>
         <a:extLst>
           <a:ext uri="{AF507438-7753-43e0-B8FC-AC1667EBCBE1}">
-            <a14:hiddenEffects xmlns="" xmlns:a14="http://schemas.microsoft.com/office/drawing/2010/main">
+            <a14:hiddenEffects xmlns:a14="http://schemas.microsoft.com/office/drawing/2010/main" xmlns="">
               <a:effectLst>
                 <a:outerShdw blurRad="63500" dist="38099" dir="2700000" algn="ctr" rotWithShape="0">
                   <a:schemeClr val="bg2">
@@ -24472,7 +24621,7 @@
         <a:effectLst/>
         <a:extLst>
           <a:ext uri="{AF507438-7753-43e0-B8FC-AC1667EBCBE1}">
-            <a14:hiddenEffects xmlns="" xmlns:a14="http://schemas.microsoft.com/office/drawing/2010/main">
+            <a14:hiddenEffects xmlns:a14="http://schemas.microsoft.com/office/drawing/2010/main" xmlns="">
               <a:effectLst>
                 <a:outerShdw blurRad="63500" dist="38099" dir="2700000" algn="ctr" rotWithShape="0">
                   <a:schemeClr val="bg2">
@@ -25058,7 +25207,7 @@
         <a:effectLst/>
         <a:extLst>
           <a:ext uri="{AF507438-7753-43e0-B8FC-AC1667EBCBE1}">
-            <a14:hiddenEffects xmlns="" xmlns:a14="http://schemas.microsoft.com/office/drawing/2010/main">
+            <a14:hiddenEffects xmlns:a14="http://schemas.microsoft.com/office/drawing/2010/main" xmlns="">
               <a:effectLst>
                 <a:outerShdw blurRad="63500" dist="38099" dir="2700000" algn="ctr" rotWithShape="0">
                   <a:schemeClr val="bg2">
@@ -25134,7 +25283,7 @@
         <a:effectLst/>
         <a:extLst>
           <a:ext uri="{AF507438-7753-43e0-B8FC-AC1667EBCBE1}">
-            <a14:hiddenEffects xmlns="" xmlns:a14="http://schemas.microsoft.com/office/drawing/2010/main">
+            <a14:hiddenEffects xmlns:a14="http://schemas.microsoft.com/office/drawing/2010/main" xmlns="">
               <a:effectLst>
                 <a:outerShdw blurRad="63500" dist="38099" dir="2700000" algn="ctr" rotWithShape="0">
                   <a:schemeClr val="bg2">

--- a/docs/trabalhos-relacionados.pptx
+++ b/docs/trabalhos-relacionados.pptx
@@ -7,26 +7,28 @@
     <p:sldMasterId id="2147484104" r:id="rId3"/>
   </p:sldMasterIdLst>
   <p:notesMasterIdLst>
-    <p:notesMasterId r:id="rId18"/>
+    <p:notesMasterId r:id="rId20"/>
   </p:notesMasterIdLst>
   <p:handoutMasterIdLst>
-    <p:handoutMasterId r:id="rId19"/>
+    <p:handoutMasterId r:id="rId21"/>
   </p:handoutMasterIdLst>
   <p:sldIdLst>
     <p:sldId id="256" r:id="rId4"/>
     <p:sldId id="257" r:id="rId5"/>
-    <p:sldId id="258" r:id="rId6"/>
-    <p:sldId id="259" r:id="rId7"/>
-    <p:sldId id="260" r:id="rId8"/>
-    <p:sldId id="261" r:id="rId9"/>
-    <p:sldId id="262" r:id="rId10"/>
-    <p:sldId id="263" r:id="rId11"/>
-    <p:sldId id="264" r:id="rId12"/>
-    <p:sldId id="265" r:id="rId13"/>
-    <p:sldId id="266" r:id="rId14"/>
-    <p:sldId id="267" r:id="rId15"/>
-    <p:sldId id="268" r:id="rId16"/>
-    <p:sldId id="269" r:id="rId17"/>
+    <p:sldId id="271" r:id="rId6"/>
+    <p:sldId id="258" r:id="rId7"/>
+    <p:sldId id="259" r:id="rId8"/>
+    <p:sldId id="260" r:id="rId9"/>
+    <p:sldId id="261" r:id="rId10"/>
+    <p:sldId id="262" r:id="rId11"/>
+    <p:sldId id="263" r:id="rId12"/>
+    <p:sldId id="270" r:id="rId13"/>
+    <p:sldId id="264" r:id="rId14"/>
+    <p:sldId id="265" r:id="rId15"/>
+    <p:sldId id="266" r:id="rId16"/>
+    <p:sldId id="267" r:id="rId17"/>
+    <p:sldId id="268" r:id="rId18"/>
+    <p:sldId id="269" r:id="rId19"/>
   </p:sldIdLst>
   <p:sldSz cx="9144000" cy="6858000" type="screen4x3"/>
   <p:notesSz cx="6858000" cy="9144000"/>
@@ -1377,7 +1379,7 @@
           <a:effectLst/>
           <a:extLst>
             <a:ext uri="{91240B29-F687-4f45-9708-019B960494DF}">
-              <a14:hiddenLine xmlns:a14="http://schemas.microsoft.com/office/drawing/2010/main" xmlns="" w="9525" cap="flat">
+              <a14:hiddenLine xmlns="" xmlns:a14="http://schemas.microsoft.com/office/drawing/2010/main" w="9525" cap="flat">
                 <a:solidFill>
                   <a:srgbClr val="3465A4"/>
                 </a:solidFill>
@@ -1387,7 +1389,7 @@
               </a14:hiddenLine>
             </a:ext>
             <a:ext uri="{AF507438-7753-43e0-B8FC-AC1667EBCBE1}">
-              <a14:hiddenEffects xmlns:a14="http://schemas.microsoft.com/office/drawing/2010/main" xmlns="">
+              <a14:hiddenEffects xmlns="" xmlns:a14="http://schemas.microsoft.com/office/drawing/2010/main">
                 <a:effectLst>
                   <a:outerShdw blurRad="63500" dist="38099" dir="2700000" algn="ctr" rotWithShape="0">
                     <a:srgbClr val="000000">
@@ -1442,14 +1444,14 @@
           <a:effectLst/>
           <a:extLst>
             <a:ext uri="{909E8E84-426E-40dd-AFC4-6F175D3DCCD1}">
-              <a14:hiddenFill xmlns:a14="http://schemas.microsoft.com/office/drawing/2010/main" xmlns="">
+              <a14:hiddenFill xmlns="" xmlns:a14="http://schemas.microsoft.com/office/drawing/2010/main">
                 <a:solidFill>
                   <a:srgbClr val="FFFFFF"/>
                 </a:solidFill>
               </a14:hiddenFill>
             </a:ext>
             <a:ext uri="{91240B29-F687-4f45-9708-019B960494DF}">
-              <a14:hiddenLine xmlns:a14="http://schemas.microsoft.com/office/drawing/2010/main" xmlns="" w="9525" cap="flat">
+              <a14:hiddenLine xmlns="" xmlns:a14="http://schemas.microsoft.com/office/drawing/2010/main" w="9525" cap="flat">
                 <a:solidFill>
                   <a:srgbClr val="3465A4"/>
                 </a:solidFill>
@@ -1459,7 +1461,7 @@
               </a14:hiddenLine>
             </a:ext>
             <a:ext uri="{AF507438-7753-43e0-B8FC-AC1667EBCBE1}">
-              <a14:hiddenEffects xmlns:a14="http://schemas.microsoft.com/office/drawing/2010/main" xmlns="">
+              <a14:hiddenEffects xmlns="" xmlns:a14="http://schemas.microsoft.com/office/drawing/2010/main">
                 <a:effectLst>
                   <a:outerShdw blurRad="63500" dist="38099" dir="2700000" algn="ctr" rotWithShape="0">
                     <a:srgbClr val="000000">
@@ -1837,14 +1839,14 @@
           <a:effectLst/>
           <a:extLst>
             <a:ext uri="{909E8E84-426E-40dd-AFC4-6F175D3DCCD1}">
-              <a14:hiddenFill xmlns:a14="http://schemas.microsoft.com/office/drawing/2010/main" xmlns="">
+              <a14:hiddenFill xmlns="" xmlns:a14="http://schemas.microsoft.com/office/drawing/2010/main">
                 <a:solidFill>
                   <a:srgbClr val="FFFFFF"/>
                 </a:solidFill>
               </a14:hiddenFill>
             </a:ext>
             <a:ext uri="{91240B29-F687-4f45-9708-019B960494DF}">
-              <a14:hiddenLine xmlns:a14="http://schemas.microsoft.com/office/drawing/2010/main" xmlns="" w="9525" cap="flat">
+              <a14:hiddenLine xmlns="" xmlns:a14="http://schemas.microsoft.com/office/drawing/2010/main" w="9525" cap="flat">
                 <a:solidFill>
                   <a:srgbClr val="3465A4"/>
                 </a:solidFill>
@@ -1854,7 +1856,7 @@
               </a14:hiddenLine>
             </a:ext>
             <a:ext uri="{AF507438-7753-43e0-B8FC-AC1667EBCBE1}">
-              <a14:hiddenEffects xmlns:a14="http://schemas.microsoft.com/office/drawing/2010/main" xmlns="">
+              <a14:hiddenEffects xmlns="" xmlns:a14="http://schemas.microsoft.com/office/drawing/2010/main">
                 <a:effectLst>
                   <a:outerShdw blurRad="63500" dist="38099" dir="2700000" algn="ctr" rotWithShape="0">
                     <a:schemeClr val="bg2">
@@ -1865,7 +1867,7 @@
               </a14:hiddenEffects>
             </a:ext>
             <a:ext uri="{FAA26D3D-D897-4be2-8F04-BA451C77F1D7}">
-              <ma14:placeholderFlag xmlns:ma14="http://schemas.microsoft.com/office/mac/drawingml/2011/main" xmlns="" val="1"/>
+              <ma14:placeholderFlag xmlns="" xmlns:ma14="http://schemas.microsoft.com/office/mac/drawingml/2011/main" val="1"/>
             </a:ext>
           </a:extLst>
         </p:spPr>
@@ -2158,7 +2160,7 @@
           <a:effectLst/>
           <a:extLst>
             <a:ext uri="{909E8E84-426E-40dd-AFC4-6F175D3DCCD1}">
-              <a14:hiddenFill xmlns:a14="http://schemas.microsoft.com/office/drawing/2010/main" xmlns="">
+              <a14:hiddenFill xmlns="" xmlns:a14="http://schemas.microsoft.com/office/drawing/2010/main">
                 <a:blipFill dpi="0" rotWithShape="0">
                   <a:blip xmlns:r="http://schemas.openxmlformats.org/officeDocument/2006/relationships"/>
                   <a:srcRect/>
@@ -2169,7 +2171,7 @@
               </a14:hiddenFill>
             </a:ext>
             <a:ext uri="{91240B29-F687-4f45-9708-019B960494DF}">
-              <a14:hiddenLine xmlns:a14="http://schemas.microsoft.com/office/drawing/2010/main" xmlns="" w="9525" cap="flat">
+              <a14:hiddenLine xmlns="" xmlns:a14="http://schemas.microsoft.com/office/drawing/2010/main" w="9525" cap="flat">
                 <a:solidFill>
                   <a:srgbClr val="3465A4"/>
                 </a:solidFill>
@@ -2179,7 +2181,7 @@
               </a14:hiddenLine>
             </a:ext>
             <a:ext uri="{AF507438-7753-43e0-B8FC-AC1667EBCBE1}">
-              <a14:hiddenEffects xmlns:a14="http://schemas.microsoft.com/office/drawing/2010/main" xmlns="">
+              <a14:hiddenEffects xmlns="" xmlns:a14="http://schemas.microsoft.com/office/drawing/2010/main">
                 <a:effectLst>
                   <a:outerShdw blurRad="63500" dist="38099" dir="2700000" algn="ctr" rotWithShape="0">
                     <a:srgbClr val="000000">
@@ -2307,14 +2309,14 @@
         <p:spPr>
           <a:extLst>
             <a:ext uri="{909E8E84-426E-40dd-AFC4-6F175D3DCCD1}">
-              <a14:hiddenFill xmlns:a14="http://schemas.microsoft.com/office/drawing/2010/main" xmlns="">
+              <a14:hiddenFill xmlns="" xmlns:a14="http://schemas.microsoft.com/office/drawing/2010/main">
                 <a:solidFill>
                   <a:srgbClr val="FFFFFF"/>
                 </a:solidFill>
               </a14:hiddenFill>
             </a:ext>
             <a:ext uri="{91240B29-F687-4f45-9708-019B960494DF}">
-              <a14:hiddenLine xmlns:a14="http://schemas.microsoft.com/office/drawing/2010/main" xmlns="" w="9525" cap="flat">
+              <a14:hiddenLine xmlns="" xmlns:a14="http://schemas.microsoft.com/office/drawing/2010/main" w="9525" cap="flat">
                 <a:solidFill>
                   <a:srgbClr val="3465A4"/>
                 </a:solidFill>
@@ -2324,7 +2326,7 @@
               </a14:hiddenLine>
             </a:ext>
             <a:ext uri="{AF507438-7753-43e0-B8FC-AC1667EBCBE1}">
-              <a14:hiddenEffects xmlns:a14="http://schemas.microsoft.com/office/drawing/2010/main" xmlns="">
+              <a14:hiddenEffects xmlns="" xmlns:a14="http://schemas.microsoft.com/office/drawing/2010/main">
                 <a:effectLst>
                   <a:outerShdw blurRad="63500" dist="38099" dir="2700000" algn="ctr" rotWithShape="0">
                     <a:schemeClr val="bg2">
@@ -2335,7 +2337,7 @@
               </a14:hiddenEffects>
             </a:ext>
             <a:ext uri="{FAA26D3D-D897-4be2-8F04-BA451C77F1D7}">
-              <ma14:placeholderFlag xmlns:ma14="http://schemas.microsoft.com/office/mac/drawingml/2011/main" xmlns="" val="1"/>
+              <ma14:placeholderFlag xmlns="" xmlns:ma14="http://schemas.microsoft.com/office/mac/drawingml/2011/main" val="1"/>
             </a:ext>
           </a:extLst>
         </p:spPr>
@@ -9709,7 +9711,7 @@
           <a:effectLst/>
           <a:extLst>
             <a:ext uri="{91240B29-F687-4f45-9708-019B960494DF}">
-              <a14:hiddenLine xmlns:a14="http://schemas.microsoft.com/office/drawing/2010/main" xmlns="" w="9525" cap="flat">
+              <a14:hiddenLine xmlns="" xmlns:a14="http://schemas.microsoft.com/office/drawing/2010/main" w="9525" cap="flat">
                 <a:solidFill>
                   <a:srgbClr val="3465A4"/>
                 </a:solidFill>
@@ -9719,7 +9721,7 @@
               </a14:hiddenLine>
             </a:ext>
             <a:ext uri="{AF507438-7753-43e0-B8FC-AC1667EBCBE1}">
-              <a14:hiddenEffects xmlns:a14="http://schemas.microsoft.com/office/drawing/2010/main" xmlns="">
+              <a14:hiddenEffects xmlns="" xmlns:a14="http://schemas.microsoft.com/office/drawing/2010/main">
                 <a:effectLst>
                   <a:outerShdw blurRad="63500" dist="38099" dir="2700000" algn="ctr" rotWithShape="0">
                     <a:srgbClr val="000000">
@@ -9776,14 +9778,14 @@
           <a:effectLst/>
           <a:extLst>
             <a:ext uri="{909E8E84-426E-40dd-AFC4-6F175D3DCCD1}">
-              <a14:hiddenFill xmlns:a14="http://schemas.microsoft.com/office/drawing/2010/main" xmlns="">
+              <a14:hiddenFill xmlns="" xmlns:a14="http://schemas.microsoft.com/office/drawing/2010/main">
                 <a:solidFill>
                   <a:srgbClr val="FFFFFF"/>
                 </a:solidFill>
               </a14:hiddenFill>
             </a:ext>
             <a:ext uri="{91240B29-F687-4f45-9708-019B960494DF}">
-              <a14:hiddenLine xmlns:a14="http://schemas.microsoft.com/office/drawing/2010/main" xmlns="" w="9525" cap="flat">
+              <a14:hiddenLine xmlns="" xmlns:a14="http://schemas.microsoft.com/office/drawing/2010/main" w="9525" cap="flat">
                 <a:solidFill>
                   <a:srgbClr val="3465A4"/>
                 </a:solidFill>
@@ -9793,7 +9795,7 @@
               </a14:hiddenLine>
             </a:ext>
             <a:ext uri="{AF507438-7753-43e0-B8FC-AC1667EBCBE1}">
-              <a14:hiddenEffects xmlns:a14="http://schemas.microsoft.com/office/drawing/2010/main" xmlns="">
+              <a14:hiddenEffects xmlns="" xmlns:a14="http://schemas.microsoft.com/office/drawing/2010/main">
                 <a:effectLst>
                   <a:outerShdw blurRad="63500" dist="38099" dir="2700000" algn="ctr" rotWithShape="0">
                     <a:schemeClr val="bg2">
@@ -9804,7 +9806,7 @@
               </a14:hiddenEffects>
             </a:ext>
             <a:ext uri="{FAA26D3D-D897-4be2-8F04-BA451C77F1D7}">
-              <ma14:placeholderFlag xmlns:ma14="http://schemas.microsoft.com/office/mac/drawingml/2011/main" xmlns="" val="1"/>
+              <ma14:placeholderFlag xmlns="" xmlns:ma14="http://schemas.microsoft.com/office/mac/drawingml/2011/main" val="1"/>
             </a:ext>
           </a:extLst>
         </p:spPr>
@@ -9855,14 +9857,14 @@
           <a:effectLst/>
           <a:extLst>
             <a:ext uri="{909E8E84-426E-40dd-AFC4-6F175D3DCCD1}">
-              <a14:hiddenFill xmlns:a14="http://schemas.microsoft.com/office/drawing/2010/main" xmlns="">
+              <a14:hiddenFill xmlns="" xmlns:a14="http://schemas.microsoft.com/office/drawing/2010/main">
                 <a:solidFill>
                   <a:srgbClr val="FFFFFF"/>
                 </a:solidFill>
               </a14:hiddenFill>
             </a:ext>
             <a:ext uri="{91240B29-F687-4f45-9708-019B960494DF}">
-              <a14:hiddenLine xmlns:a14="http://schemas.microsoft.com/office/drawing/2010/main" xmlns="" w="9525" cap="flat">
+              <a14:hiddenLine xmlns="" xmlns:a14="http://schemas.microsoft.com/office/drawing/2010/main" w="9525" cap="flat">
                 <a:solidFill>
                   <a:srgbClr val="3465A4"/>
                 </a:solidFill>
@@ -9872,7 +9874,7 @@
               </a14:hiddenLine>
             </a:ext>
             <a:ext uri="{AF507438-7753-43e0-B8FC-AC1667EBCBE1}">
-              <a14:hiddenEffects xmlns:a14="http://schemas.microsoft.com/office/drawing/2010/main" xmlns="">
+              <a14:hiddenEffects xmlns="" xmlns:a14="http://schemas.microsoft.com/office/drawing/2010/main">
                 <a:effectLst>
                   <a:outerShdw blurRad="63500" dist="38099" dir="2700000" algn="ctr" rotWithShape="0">
                     <a:schemeClr val="bg2">
@@ -9883,7 +9885,7 @@
               </a14:hiddenEffects>
             </a:ext>
             <a:ext uri="{FAA26D3D-D897-4be2-8F04-BA451C77F1D7}">
-              <ma14:placeholderFlag xmlns:ma14="http://schemas.microsoft.com/office/mac/drawingml/2011/main" xmlns="" val="1"/>
+              <ma14:placeholderFlag xmlns="" xmlns:ma14="http://schemas.microsoft.com/office/mac/drawingml/2011/main" val="1"/>
             </a:ext>
           </a:extLst>
         </p:spPr>
@@ -9963,14 +9965,14 @@
           <a:effectLst/>
           <a:extLst>
             <a:ext uri="{909E8E84-426E-40dd-AFC4-6F175D3DCCD1}">
-              <a14:hiddenFill xmlns:a14="http://schemas.microsoft.com/office/drawing/2010/main" xmlns="">
+              <a14:hiddenFill xmlns="" xmlns:a14="http://schemas.microsoft.com/office/drawing/2010/main">
                 <a:solidFill>
                   <a:srgbClr val="FFFFFF"/>
                 </a:solidFill>
               </a14:hiddenFill>
             </a:ext>
             <a:ext uri="{91240B29-F687-4f45-9708-019B960494DF}">
-              <a14:hiddenLine xmlns:a14="http://schemas.microsoft.com/office/drawing/2010/main" xmlns="" w="9525" cap="flat">
+              <a14:hiddenLine xmlns="" xmlns:a14="http://schemas.microsoft.com/office/drawing/2010/main" w="9525" cap="flat">
                 <a:solidFill>
                   <a:srgbClr val="3465A4"/>
                 </a:solidFill>
@@ -9980,7 +9982,7 @@
               </a14:hiddenLine>
             </a:ext>
             <a:ext uri="{AF507438-7753-43e0-B8FC-AC1667EBCBE1}">
-              <a14:hiddenEffects xmlns:a14="http://schemas.microsoft.com/office/drawing/2010/main" xmlns="">
+              <a14:hiddenEffects xmlns="" xmlns:a14="http://schemas.microsoft.com/office/drawing/2010/main">
                 <a:effectLst>
                   <a:outerShdw blurRad="63500" dist="38099" dir="2700000" algn="ctr" rotWithShape="0">
                     <a:schemeClr val="bg2">
@@ -9991,7 +9993,7 @@
               </a14:hiddenEffects>
             </a:ext>
             <a:ext uri="{FAA26D3D-D897-4be2-8F04-BA451C77F1D7}">
-              <ma14:placeholderFlag xmlns:ma14="http://schemas.microsoft.com/office/mac/drawingml/2011/main" xmlns="" val="1"/>
+              <ma14:placeholderFlag xmlns="" xmlns:ma14="http://schemas.microsoft.com/office/mac/drawingml/2011/main" val="1"/>
             </a:ext>
           </a:extLst>
         </p:spPr>
@@ -10057,14 +10059,14 @@
           <a:effectLst/>
           <a:extLst>
             <a:ext uri="{909E8E84-426E-40dd-AFC4-6F175D3DCCD1}">
-              <a14:hiddenFill xmlns:a14="http://schemas.microsoft.com/office/drawing/2010/main" xmlns="">
+              <a14:hiddenFill xmlns="" xmlns:a14="http://schemas.microsoft.com/office/drawing/2010/main">
                 <a:solidFill>
                   <a:srgbClr val="FFFFFF"/>
                 </a:solidFill>
               </a14:hiddenFill>
             </a:ext>
             <a:ext uri="{91240B29-F687-4f45-9708-019B960494DF}">
-              <a14:hiddenLine xmlns:a14="http://schemas.microsoft.com/office/drawing/2010/main" xmlns="" w="9525" cap="flat">
+              <a14:hiddenLine xmlns="" xmlns:a14="http://schemas.microsoft.com/office/drawing/2010/main" w="9525" cap="flat">
                 <a:solidFill>
                   <a:srgbClr val="3465A4"/>
                 </a:solidFill>
@@ -10074,7 +10076,7 @@
               </a14:hiddenLine>
             </a:ext>
             <a:ext uri="{AF507438-7753-43e0-B8FC-AC1667EBCBE1}">
-              <a14:hiddenEffects xmlns:a14="http://schemas.microsoft.com/office/drawing/2010/main" xmlns="">
+              <a14:hiddenEffects xmlns="" xmlns:a14="http://schemas.microsoft.com/office/drawing/2010/main">
                 <a:effectLst>
                   <a:outerShdw blurRad="63500" dist="38099" dir="2700000" algn="ctr" rotWithShape="0">
                     <a:srgbClr val="000000">
@@ -10452,14 +10454,14 @@
           <a:effectLst/>
           <a:extLst>
             <a:ext uri="{909E8E84-426E-40dd-AFC4-6F175D3DCCD1}">
-              <a14:hiddenFill xmlns:a14="http://schemas.microsoft.com/office/drawing/2010/main" xmlns="">
+              <a14:hiddenFill xmlns="" xmlns:a14="http://schemas.microsoft.com/office/drawing/2010/main">
                 <a:solidFill>
                   <a:srgbClr val="FFFFFF"/>
                 </a:solidFill>
               </a14:hiddenFill>
             </a:ext>
             <a:ext uri="{91240B29-F687-4f45-9708-019B960494DF}">
-              <a14:hiddenLine xmlns:a14="http://schemas.microsoft.com/office/drawing/2010/main" xmlns="" w="9525" cap="flat">
+              <a14:hiddenLine xmlns="" xmlns:a14="http://schemas.microsoft.com/office/drawing/2010/main" w="9525" cap="flat">
                 <a:solidFill>
                   <a:srgbClr val="3465A4"/>
                 </a:solidFill>
@@ -10469,7 +10471,7 @@
               </a14:hiddenLine>
             </a:ext>
             <a:ext uri="{AF507438-7753-43e0-B8FC-AC1667EBCBE1}">
-              <a14:hiddenEffects xmlns:a14="http://schemas.microsoft.com/office/drawing/2010/main" xmlns="">
+              <a14:hiddenEffects xmlns="" xmlns:a14="http://schemas.microsoft.com/office/drawing/2010/main">
                 <a:effectLst>
                   <a:outerShdw blurRad="63500" dist="38099" dir="2700000" algn="ctr" rotWithShape="0">
                     <a:schemeClr val="bg2">
@@ -10480,7 +10482,7 @@
               </a14:hiddenEffects>
             </a:ext>
             <a:ext uri="{FAA26D3D-D897-4be2-8F04-BA451C77F1D7}">
-              <ma14:placeholderFlag xmlns:ma14="http://schemas.microsoft.com/office/mac/drawingml/2011/main" xmlns="" val="1"/>
+              <ma14:placeholderFlag xmlns="" xmlns:ma14="http://schemas.microsoft.com/office/mac/drawingml/2011/main" val="1"/>
             </a:ext>
           </a:extLst>
         </p:spPr>
@@ -11411,14 +11413,14 @@
           <a:effectLst/>
           <a:extLst>
             <a:ext uri="{909E8E84-426E-40dd-AFC4-6F175D3DCCD1}">
-              <a14:hiddenFill xmlns:a14="http://schemas.microsoft.com/office/drawing/2010/main" xmlns="">
+              <a14:hiddenFill xmlns="" xmlns:a14="http://schemas.microsoft.com/office/drawing/2010/main">
                 <a:solidFill>
                   <a:srgbClr val="FFFFFF"/>
                 </a:solidFill>
               </a14:hiddenFill>
             </a:ext>
             <a:ext uri="{91240B29-F687-4f45-9708-019B960494DF}">
-              <a14:hiddenLine xmlns:a14="http://schemas.microsoft.com/office/drawing/2010/main" xmlns="" w="9525" cap="flat">
+              <a14:hiddenLine xmlns="" xmlns:a14="http://schemas.microsoft.com/office/drawing/2010/main" w="9525" cap="flat">
                 <a:solidFill>
                   <a:srgbClr val="3465A4"/>
                 </a:solidFill>
@@ -11428,7 +11430,7 @@
               </a14:hiddenLine>
             </a:ext>
             <a:ext uri="{AF507438-7753-43e0-B8FC-AC1667EBCBE1}">
-              <a14:hiddenEffects xmlns:a14="http://schemas.microsoft.com/office/drawing/2010/main" xmlns="">
+              <a14:hiddenEffects xmlns="" xmlns:a14="http://schemas.microsoft.com/office/drawing/2010/main">
                 <a:effectLst>
                   <a:outerShdw blurRad="63500" dist="38099" dir="2700000" algn="ctr" rotWithShape="0">
                     <a:schemeClr val="bg2">
@@ -11439,7 +11441,7 @@
               </a14:hiddenEffects>
             </a:ext>
             <a:ext uri="{FAA26D3D-D897-4be2-8F04-BA451C77F1D7}">
-              <ma14:placeholderFlag xmlns:ma14="http://schemas.microsoft.com/office/mac/drawingml/2011/main" xmlns="" val="1"/>
+              <ma14:placeholderFlag xmlns="" xmlns:ma14="http://schemas.microsoft.com/office/mac/drawingml/2011/main" val="1"/>
             </a:ext>
           </a:extLst>
         </p:spPr>
@@ -11490,14 +11492,14 @@
           <a:effectLst/>
           <a:extLst>
             <a:ext uri="{909E8E84-426E-40dd-AFC4-6F175D3DCCD1}">
-              <a14:hiddenFill xmlns:a14="http://schemas.microsoft.com/office/drawing/2010/main" xmlns="">
+              <a14:hiddenFill xmlns="" xmlns:a14="http://schemas.microsoft.com/office/drawing/2010/main">
                 <a:solidFill>
                   <a:srgbClr val="FFFFFF"/>
                 </a:solidFill>
               </a14:hiddenFill>
             </a:ext>
             <a:ext uri="{91240B29-F687-4f45-9708-019B960494DF}">
-              <a14:hiddenLine xmlns:a14="http://schemas.microsoft.com/office/drawing/2010/main" xmlns="" w="9525" cap="flat">
+              <a14:hiddenLine xmlns="" xmlns:a14="http://schemas.microsoft.com/office/drawing/2010/main" w="9525" cap="flat">
                 <a:solidFill>
                   <a:srgbClr val="3465A4"/>
                 </a:solidFill>
@@ -11507,7 +11509,7 @@
               </a14:hiddenLine>
             </a:ext>
             <a:ext uri="{AF507438-7753-43e0-B8FC-AC1667EBCBE1}">
-              <a14:hiddenEffects xmlns:a14="http://schemas.microsoft.com/office/drawing/2010/main" xmlns="">
+              <a14:hiddenEffects xmlns="" xmlns:a14="http://schemas.microsoft.com/office/drawing/2010/main">
                 <a:effectLst>
                   <a:outerShdw blurRad="63500" dist="38099" dir="2700000" algn="ctr" rotWithShape="0">
                     <a:schemeClr val="bg2">
@@ -11518,7 +11520,7 @@
               </a14:hiddenEffects>
             </a:ext>
             <a:ext uri="{FAA26D3D-D897-4be2-8F04-BA451C77F1D7}">
-              <ma14:placeholderFlag xmlns:ma14="http://schemas.microsoft.com/office/mac/drawingml/2011/main" xmlns="" val="1"/>
+              <ma14:placeholderFlag xmlns="" xmlns:ma14="http://schemas.microsoft.com/office/mac/drawingml/2011/main" val="1"/>
             </a:ext>
           </a:extLst>
         </p:spPr>
@@ -11611,14 +11613,14 @@
           <a:effectLst/>
           <a:extLst>
             <a:ext uri="{909E8E84-426E-40dd-AFC4-6F175D3DCCD1}">
-              <a14:hiddenFill xmlns:a14="http://schemas.microsoft.com/office/drawing/2010/main" xmlns="">
+              <a14:hiddenFill xmlns="" xmlns:a14="http://schemas.microsoft.com/office/drawing/2010/main">
                 <a:solidFill>
                   <a:srgbClr val="FFFFFF"/>
                 </a:solidFill>
               </a14:hiddenFill>
             </a:ext>
             <a:ext uri="{91240B29-F687-4f45-9708-019B960494DF}">
-              <a14:hiddenLine xmlns:a14="http://schemas.microsoft.com/office/drawing/2010/main" xmlns="" w="9525" cap="flat">
+              <a14:hiddenLine xmlns="" xmlns:a14="http://schemas.microsoft.com/office/drawing/2010/main" w="9525" cap="flat">
                 <a:solidFill>
                   <a:srgbClr val="3465A4"/>
                 </a:solidFill>
@@ -11628,7 +11630,7 @@
               </a14:hiddenLine>
             </a:ext>
             <a:ext uri="{AF507438-7753-43e0-B8FC-AC1667EBCBE1}">
-              <a14:hiddenEffects xmlns:a14="http://schemas.microsoft.com/office/drawing/2010/main" xmlns="">
+              <a14:hiddenEffects xmlns="" xmlns:a14="http://schemas.microsoft.com/office/drawing/2010/main">
                 <a:effectLst>
                   <a:outerShdw blurRad="63500" dist="38099" dir="2700000" algn="ctr" rotWithShape="0">
                     <a:schemeClr val="bg2">
@@ -11639,7 +11641,7 @@
               </a14:hiddenEffects>
             </a:ext>
             <a:ext uri="{FAA26D3D-D897-4be2-8F04-BA451C77F1D7}">
-              <ma14:placeholderFlag xmlns:ma14="http://schemas.microsoft.com/office/mac/drawingml/2011/main" xmlns="" val="1"/>
+              <ma14:placeholderFlag xmlns="" xmlns:ma14="http://schemas.microsoft.com/office/mac/drawingml/2011/main" val="1"/>
             </a:ext>
           </a:extLst>
         </p:spPr>
@@ -11710,14 +11712,14 @@
           <a:effectLst/>
           <a:extLst>
             <a:ext uri="{909E8E84-426E-40dd-AFC4-6F175D3DCCD1}">
-              <a14:hiddenFill xmlns:a14="http://schemas.microsoft.com/office/drawing/2010/main" xmlns="">
+              <a14:hiddenFill xmlns="" xmlns:a14="http://schemas.microsoft.com/office/drawing/2010/main">
                 <a:solidFill>
                   <a:srgbClr val="FFFFFF"/>
                 </a:solidFill>
               </a14:hiddenFill>
             </a:ext>
             <a:ext uri="{91240B29-F687-4f45-9708-019B960494DF}">
-              <a14:hiddenLine xmlns:a14="http://schemas.microsoft.com/office/drawing/2010/main" xmlns="" w="9525" cap="flat">
+              <a14:hiddenLine xmlns="" xmlns:a14="http://schemas.microsoft.com/office/drawing/2010/main" w="9525" cap="flat">
                 <a:solidFill>
                   <a:srgbClr val="3465A4"/>
                 </a:solidFill>
@@ -11727,7 +11729,7 @@
               </a14:hiddenLine>
             </a:ext>
             <a:ext uri="{AF507438-7753-43e0-B8FC-AC1667EBCBE1}">
-              <a14:hiddenEffects xmlns:a14="http://schemas.microsoft.com/office/drawing/2010/main" xmlns="">
+              <a14:hiddenEffects xmlns="" xmlns:a14="http://schemas.microsoft.com/office/drawing/2010/main">
                 <a:effectLst>
                   <a:outerShdw blurRad="63500" dist="38099" dir="2700000" algn="ctr" rotWithShape="0">
                     <a:schemeClr val="bg2">
@@ -11738,7 +11740,7 @@
               </a14:hiddenEffects>
             </a:ext>
             <a:ext uri="{FAA26D3D-D897-4be2-8F04-BA451C77F1D7}">
-              <ma14:placeholderFlag xmlns:ma14="http://schemas.microsoft.com/office/mac/drawingml/2011/main" xmlns="" val="1"/>
+              <ma14:placeholderFlag xmlns="" xmlns:ma14="http://schemas.microsoft.com/office/mac/drawingml/2011/main" val="1"/>
             </a:ext>
           </a:extLst>
         </p:spPr>
@@ -11813,14 +11815,14 @@
           <a:effectLst/>
           <a:extLst>
             <a:ext uri="{909E8E84-426E-40dd-AFC4-6F175D3DCCD1}">
-              <a14:hiddenFill xmlns:a14="http://schemas.microsoft.com/office/drawing/2010/main" xmlns="">
+              <a14:hiddenFill xmlns="" xmlns:a14="http://schemas.microsoft.com/office/drawing/2010/main">
                 <a:solidFill>
                   <a:srgbClr val="FFFFFF"/>
                 </a:solidFill>
               </a14:hiddenFill>
             </a:ext>
             <a:ext uri="{91240B29-F687-4f45-9708-019B960494DF}">
-              <a14:hiddenLine xmlns:a14="http://schemas.microsoft.com/office/drawing/2010/main" xmlns="" w="9525" cap="flat">
+              <a14:hiddenLine xmlns="" xmlns:a14="http://schemas.microsoft.com/office/drawing/2010/main" w="9525" cap="flat">
                 <a:solidFill>
                   <a:srgbClr val="3465A4"/>
                 </a:solidFill>
@@ -11830,7 +11832,7 @@
               </a14:hiddenLine>
             </a:ext>
             <a:ext uri="{AF507438-7753-43e0-B8FC-AC1667EBCBE1}">
-              <a14:hiddenEffects xmlns:a14="http://schemas.microsoft.com/office/drawing/2010/main" xmlns="">
+              <a14:hiddenEffects xmlns="" xmlns:a14="http://schemas.microsoft.com/office/drawing/2010/main">
                 <a:effectLst>
                   <a:outerShdw blurRad="63500" dist="38099" dir="2700000" algn="ctr" rotWithShape="0">
                     <a:schemeClr val="bg2">
@@ -11841,7 +11843,7 @@
               </a14:hiddenEffects>
             </a:ext>
             <a:ext uri="{FAA26D3D-D897-4be2-8F04-BA451C77F1D7}">
-              <ma14:placeholderFlag xmlns:ma14="http://schemas.microsoft.com/office/mac/drawingml/2011/main" xmlns="" val="1"/>
+              <ma14:placeholderFlag xmlns="" xmlns:ma14="http://schemas.microsoft.com/office/mac/drawingml/2011/main" val="1"/>
             </a:ext>
           </a:extLst>
         </p:spPr>
@@ -12490,14 +12492,14 @@
           <a:effectLst/>
           <a:extLst>
             <a:ext uri="{909E8E84-426E-40dd-AFC4-6F175D3DCCD1}">
-              <a14:hiddenFill xmlns:a14="http://schemas.microsoft.com/office/drawing/2010/main" xmlns="">
+              <a14:hiddenFill xmlns="" xmlns:a14="http://schemas.microsoft.com/office/drawing/2010/main">
                 <a:solidFill>
                   <a:srgbClr val="FFFFFF"/>
                 </a:solidFill>
               </a14:hiddenFill>
             </a:ext>
             <a:ext uri="{91240B29-F687-4f45-9708-019B960494DF}">
-              <a14:hiddenLine xmlns:a14="http://schemas.microsoft.com/office/drawing/2010/main" xmlns="" w="9525" cap="flat">
+              <a14:hiddenLine xmlns="" xmlns:a14="http://schemas.microsoft.com/office/drawing/2010/main" w="9525" cap="flat">
                 <a:solidFill>
                   <a:srgbClr val="3465A4"/>
                 </a:solidFill>
@@ -12507,7 +12509,7 @@
               </a14:hiddenLine>
             </a:ext>
             <a:ext uri="{AF507438-7753-43e0-B8FC-AC1667EBCBE1}">
-              <a14:hiddenEffects xmlns:a14="http://schemas.microsoft.com/office/drawing/2010/main" xmlns="">
+              <a14:hiddenEffects xmlns="" xmlns:a14="http://schemas.microsoft.com/office/drawing/2010/main">
                 <a:effectLst>
                   <a:outerShdw blurRad="63500" dist="38099" dir="2700000" algn="ctr" rotWithShape="0">
                     <a:schemeClr val="bg2">
@@ -12518,7 +12520,7 @@
               </a14:hiddenEffects>
             </a:ext>
             <a:ext uri="{FAA26D3D-D897-4be2-8F04-BA451C77F1D7}">
-              <ma14:placeholderFlag xmlns:ma14="http://schemas.microsoft.com/office/mac/drawingml/2011/main" xmlns="" val="1"/>
+              <ma14:placeholderFlag xmlns="" xmlns:ma14="http://schemas.microsoft.com/office/mac/drawingml/2011/main" val="1"/>
             </a:ext>
           </a:extLst>
         </p:spPr>
@@ -12569,14 +12571,14 @@
           <a:effectLst/>
           <a:extLst>
             <a:ext uri="{909E8E84-426E-40dd-AFC4-6F175D3DCCD1}">
-              <a14:hiddenFill xmlns:a14="http://schemas.microsoft.com/office/drawing/2010/main" xmlns="">
+              <a14:hiddenFill xmlns="" xmlns:a14="http://schemas.microsoft.com/office/drawing/2010/main">
                 <a:solidFill>
                   <a:srgbClr val="FFFFFF"/>
                 </a:solidFill>
               </a14:hiddenFill>
             </a:ext>
             <a:ext uri="{91240B29-F687-4f45-9708-019B960494DF}">
-              <a14:hiddenLine xmlns:a14="http://schemas.microsoft.com/office/drawing/2010/main" xmlns="" w="9525" cap="flat">
+              <a14:hiddenLine xmlns="" xmlns:a14="http://schemas.microsoft.com/office/drawing/2010/main" w="9525" cap="flat">
                 <a:solidFill>
                   <a:srgbClr val="3465A4"/>
                 </a:solidFill>
@@ -12586,7 +12588,7 @@
               </a14:hiddenLine>
             </a:ext>
             <a:ext uri="{AF507438-7753-43e0-B8FC-AC1667EBCBE1}">
-              <a14:hiddenEffects xmlns:a14="http://schemas.microsoft.com/office/drawing/2010/main" xmlns="">
+              <a14:hiddenEffects xmlns="" xmlns:a14="http://schemas.microsoft.com/office/drawing/2010/main">
                 <a:effectLst>
                   <a:outerShdw blurRad="63500" dist="38099" dir="2700000" algn="ctr" rotWithShape="0">
                     <a:schemeClr val="bg2">
@@ -12597,7 +12599,7 @@
               </a14:hiddenEffects>
             </a:ext>
             <a:ext uri="{FAA26D3D-D897-4be2-8F04-BA451C77F1D7}">
-              <ma14:placeholderFlag xmlns:ma14="http://schemas.microsoft.com/office/mac/drawingml/2011/main" xmlns="" val="1"/>
+              <ma14:placeholderFlag xmlns="" xmlns:ma14="http://schemas.microsoft.com/office/mac/drawingml/2011/main" val="1"/>
             </a:ext>
           </a:extLst>
         </p:spPr>
@@ -13259,14 +13261,14 @@
           <a:effectLst/>
           <a:extLst>
             <a:ext uri="{909E8E84-426E-40dd-AFC4-6F175D3DCCD1}">
-              <a14:hiddenFill xmlns:a14="http://schemas.microsoft.com/office/drawing/2010/main" xmlns="">
+              <a14:hiddenFill xmlns="" xmlns:a14="http://schemas.microsoft.com/office/drawing/2010/main">
                 <a:solidFill>
                   <a:srgbClr val="FFFFFF"/>
                 </a:solidFill>
               </a14:hiddenFill>
             </a:ext>
             <a:ext uri="{91240B29-F687-4f45-9708-019B960494DF}">
-              <a14:hiddenLine xmlns:a14="http://schemas.microsoft.com/office/drawing/2010/main" xmlns="" w="9525" cap="flat">
+              <a14:hiddenLine xmlns="" xmlns:a14="http://schemas.microsoft.com/office/drawing/2010/main" w="9525" cap="flat">
                 <a:solidFill>
                   <a:srgbClr val="3465A4"/>
                 </a:solidFill>
@@ -13276,7 +13278,7 @@
               </a14:hiddenLine>
             </a:ext>
             <a:ext uri="{AF507438-7753-43e0-B8FC-AC1667EBCBE1}">
-              <a14:hiddenEffects xmlns:a14="http://schemas.microsoft.com/office/drawing/2010/main" xmlns="">
+              <a14:hiddenEffects xmlns="" xmlns:a14="http://schemas.microsoft.com/office/drawing/2010/main">
                 <a:effectLst>
                   <a:outerShdw blurRad="63500" dist="38099" dir="2700000" algn="ctr" rotWithShape="0">
                     <a:srgbClr val="000000">
@@ -13633,14 +13635,14 @@
           <a:effectLst/>
           <a:extLst>
             <a:ext uri="{909E8E84-426E-40dd-AFC4-6F175D3DCCD1}">
-              <a14:hiddenFill xmlns:a14="http://schemas.microsoft.com/office/drawing/2010/main" xmlns="">
+              <a14:hiddenFill xmlns="" xmlns:a14="http://schemas.microsoft.com/office/drawing/2010/main">
                 <a:solidFill>
                   <a:srgbClr val="FFFFFF"/>
                 </a:solidFill>
               </a14:hiddenFill>
             </a:ext>
             <a:ext uri="{91240B29-F687-4f45-9708-019B960494DF}">
-              <a14:hiddenLine xmlns:a14="http://schemas.microsoft.com/office/drawing/2010/main" xmlns="" w="9525" cap="flat">
+              <a14:hiddenLine xmlns="" xmlns:a14="http://schemas.microsoft.com/office/drawing/2010/main" w="9525" cap="flat">
                 <a:solidFill>
                   <a:srgbClr val="3465A4"/>
                 </a:solidFill>
@@ -13650,7 +13652,7 @@
               </a14:hiddenLine>
             </a:ext>
             <a:ext uri="{AF507438-7753-43e0-B8FC-AC1667EBCBE1}">
-              <a14:hiddenEffects xmlns:a14="http://schemas.microsoft.com/office/drawing/2010/main" xmlns="">
+              <a14:hiddenEffects xmlns="" xmlns:a14="http://schemas.microsoft.com/office/drawing/2010/main">
                 <a:effectLst>
                   <a:outerShdw blurRad="63500" dist="38099" dir="2700000" algn="ctr" rotWithShape="0">
                     <a:srgbClr val="000000">
@@ -13663,7 +13665,7 @@
           </a:extLst>
         </p:spPr>
         <p:txBody>
-          <a:bodyPr lIns="0" tIns="0" rIns="0" bIns="0" anchor="ctr"/>
+          <a:bodyPr lIns="0" tIns="0" rIns="0" bIns="0" anchor="t"/>
           <a:lstStyle>
             <a:lvl1pPr>
               <a:tabLst>
@@ -14155,7 +14157,7 @@
             </a:pPr>
             <a:r>
               <a:rPr lang="pt-BR" dirty="0"/>
-              <a:t>Quadro Comparativo — 2020-2025 e Indústria</a:t>
+              <a:t>Blockchain para Auditoria e Não Repúdio</a:t>
             </a:r>
           </a:p>
         </p:txBody>
@@ -14178,6 +14180,909 @@
             <a:fld id="{FB1DAA50-D663-4C2B-8494-40744BE0AC0A}" type="slidenum">
               <a:rPr lang="pt-BR"/>
               <a:t>9</a:t>
+            </a:fld>
+            <a:endParaRPr lang="pt-BR"/>
+          </a:p>
+        </p:txBody>
+      </p:sp>
+      <p:sp>
+        <p:nvSpPr>
+          <p:cNvPr id="10" name="box1"/>
+          <p:cNvSpPr/>
+          <p:nvPr/>
+        </p:nvSpPr>
+        <p:spPr>
+          <a:xfrm>
+            <a:off x="179388" y="1424940"/>
+            <a:ext cx="8856662" cy="2980000"/>
+          </a:xfrm>
+          <a:prstGeom prst="roundRect">
+            <a:avLst>
+              <a:gd name="adj" fmla="val 3500"/>
+            </a:avLst>
+          </a:prstGeom>
+          <a:solidFill>
+            <a:srgbClr val="F2F4F6"/>
+          </a:solidFill>
+          <a:ln>
+            <a:noFill/>
+          </a:ln>
+        </p:spPr>
+        <p:txBody>
+          <a:bodyPr/>
+          <a:lstStyle/>
+          <a:p>
+            <a:pPr>
+              <a:buNone/>
+            </a:pPr>
+            <a:endParaRPr lang="pt-BR"/>
+          </a:p>
+        </p:txBody>
+      </p:sp>
+      <p:sp>
+        <p:nvSpPr>
+          <p:cNvPr id="11" name="tb1"/>
+          <p:cNvSpPr txBox="1"/>
+          <p:nvPr/>
+        </p:nvSpPr>
+        <p:spPr>
+          <a:xfrm>
+            <a:off x="380000" y="1490000"/>
+            <a:ext cx="8450000" cy="2860000"/>
+          </a:xfrm>
+          <a:prstGeom prst="rect">
+            <a:avLst/>
+          </a:prstGeom>
+          <a:noFill/>
+        </p:spPr>
+        <p:txBody>
+          <a:bodyPr wrap="square" anchor="t">
+            <a:normAutofit/>
+          </a:bodyPr>
+          <a:lstStyle/>
+          <a:p>
+            <a:pPr algn="l">
+              <a:spcAft>
+                <a:spcPts val="500"/>
+              </a:spcAft>
+              <a:buNone/>
+            </a:pPr>
+            <a:r>
+              <a:rPr sz="1000" b="1">
+                <a:solidFill>
+                  <a:srgbClr val="00CC99"/>
+                </a:solidFill>
+              </a:rPr>
+              <a:t>Blockchain permissionada para trilhas de auditoria (2018–2024)</a:t>
+            </a:r>
+          </a:p>
+          <a:p>
+            <a:pPr algn="just"/>
+            <a:r>
+              <a:rPr sz="1100" b="1">
+                <a:solidFill>
+                  <a:srgbClr val="2D2DB9"/>
+                </a:solidFill>
+              </a:rPr>
+              <a:t>NIST IR 8202 (2018): </a:t>
+            </a:r>
+            <a:r>
+              <a:rPr sz="1100" b="0">
+                <a:solidFill>
+                  <a:srgbClr val="333333"/>
+                </a:solidFill>
+              </a:rPr>
+              <a:t>caracteriza ledgers permissionados como adequados a ambientes corporativos, com controle de identidade dos nós e menor custo de consenso.</a:t>
+            </a:r>
+          </a:p>
+          <a:p>
+            <a:pPr algn="l"/>
+            <a:endParaRPr sz="1100" b="0">
+              <a:solidFill>
+                <a:srgbClr val="333333"/>
+              </a:solidFill>
+            </a:endParaRPr>
+          </a:p>
+          <a:p>
+            <a:pPr algn="just"/>
+            <a:r>
+              <a:rPr sz="1100" b="1">
+                <a:solidFill>
+                  <a:srgbClr val="2D2DB9"/>
+                </a:solidFill>
+              </a:rPr>
+              <a:t>Hyperledger Fabric (Androulaki et al., 2018): </a:t>
+            </a:r>
+            <a:r>
+              <a:rPr sz="1100" b="0">
+                <a:solidFill>
+                  <a:srgbClr val="333333"/>
+                </a:solidFill>
+              </a:rPr>
+              <a:t>arquitetura modular para redes permissionadas, com smart contracts (chaincode) e consenso plugável — referência para registro auditável de eventos.</a:t>
+            </a:r>
+          </a:p>
+          <a:p>
+            <a:pPr algn="l"/>
+            <a:endParaRPr sz="1100" b="0">
+              <a:solidFill>
+                <a:srgbClr val="333333"/>
+              </a:solidFill>
+            </a:endParaRPr>
+          </a:p>
+          <a:p>
+            <a:pPr algn="just"/>
+            <a:r>
+              <a:rPr sz="1100" b="1">
+                <a:solidFill>
+                  <a:srgbClr val="2D2DB9"/>
+                </a:solidFill>
+              </a:rPr>
+              <a:t>Logs imutáveis de segurança: </a:t>
+            </a:r>
+            <a:r>
+              <a:rPr sz="1100" b="0">
+                <a:solidFill>
+                  <a:srgbClr val="333333"/>
+                </a:solidFill>
+              </a:rPr>
+              <a:t>a literatura emprega blockchain para não repúdio e integridade de evidências, porém em geral de forma desacoplada do mecanismo que toma a decisão.</a:t>
+            </a:r>
+          </a:p>
+        </p:txBody>
+      </p:sp>
+      <p:sp>
+        <p:nvSpPr>
+          <p:cNvPr id="12" name="relbox"/>
+          <p:cNvSpPr/>
+          <p:nvPr/>
+        </p:nvSpPr>
+        <p:spPr>
+          <a:xfrm>
+            <a:off x="179388" y="4500000"/>
+            <a:ext cx="8856662" cy="1900000"/>
+          </a:xfrm>
+          <a:prstGeom prst="roundRect">
+            <a:avLst>
+              <a:gd name="adj" fmla="val 3500"/>
+            </a:avLst>
+          </a:prstGeom>
+          <a:solidFill>
+            <a:srgbClr val="E6F7F1"/>
+          </a:solidFill>
+          <a:ln w="19050">
+            <a:solidFill>
+              <a:srgbClr val="00CC99"/>
+            </a:solidFill>
+          </a:ln>
+        </p:spPr>
+        <p:txBody>
+          <a:bodyPr/>
+          <a:lstStyle/>
+          <a:p>
+            <a:pPr>
+              <a:buNone/>
+            </a:pPr>
+            <a:endParaRPr lang="pt-BR"/>
+          </a:p>
+        </p:txBody>
+      </p:sp>
+      <p:sp>
+        <p:nvSpPr>
+          <p:cNvPr id="13" name="rlbl"/>
+          <p:cNvSpPr txBox="1"/>
+          <p:nvPr/>
+        </p:nvSpPr>
+        <p:spPr>
+          <a:xfrm>
+            <a:off x="400000" y="4565000"/>
+            <a:ext cx="8420000" cy="300000"/>
+          </a:xfrm>
+          <a:prstGeom prst="rect">
+            <a:avLst/>
+          </a:prstGeom>
+          <a:noFill/>
+        </p:spPr>
+        <p:txBody>
+          <a:bodyPr wrap="square">
+            <a:normAutofit/>
+          </a:bodyPr>
+          <a:lstStyle/>
+          <a:p>
+            <a:pPr algn="l">
+              <a:spcAft>
+                <a:spcPts val="0"/>
+              </a:spcAft>
+              <a:buNone/>
+            </a:pPr>
+            <a:r>
+              <a:rPr lang="pt-BR" sz="1200" b="1" dirty="0">
+                <a:solidFill>
+                  <a:srgbClr val="2D2DB9"/>
+                </a:solidFill>
+                <a:latin typeface="Titillium Web"/>
+              </a:rPr>
+              <a:t>Relação com a sua proposta</a:t>
+            </a:r>
+          </a:p>
+        </p:txBody>
+      </p:sp>
+      <p:sp>
+        <p:nvSpPr>
+          <p:cNvPr id="14" name="rtxt"/>
+          <p:cNvSpPr txBox="1"/>
+          <p:nvPr/>
+        </p:nvSpPr>
+        <p:spPr>
+          <a:xfrm>
+            <a:off x="400000" y="4900000"/>
+            <a:ext cx="8420000" cy="1450000"/>
+          </a:xfrm>
+          <a:prstGeom prst="rect">
+            <a:avLst/>
+          </a:prstGeom>
+          <a:noFill/>
+        </p:spPr>
+        <p:txBody>
+          <a:bodyPr wrap="square" anchor="t">
+            <a:normAutofit/>
+          </a:bodyPr>
+          <a:lstStyle/>
+          <a:p>
+            <a:pPr algn="just">
+              <a:spcAft>
+                <a:spcPts val="0"/>
+              </a:spcAft>
+              <a:buNone/>
+            </a:pPr>
+            <a:r>
+              <a:rPr sz="1150" b="0">
+                <a:solidFill>
+                  <a:srgbClr val="333333"/>
+                </a:solidFill>
+              </a:rPr>
+              <a:t>A proposta acopla a auditoria imutável à própria decisão de autenticação: cada veredito (score de risco, decisão e hash dos critérios) é registrado em Hyperledger Fabric, garantindo não repúdio e verificação independente por terceiros — diferencial frente aos trabalhos que tratam log e decisão de forma separada.</a:t>
+            </a:r>
+          </a:p>
+        </p:txBody>
+      </p:sp>
+    </p:spTree>
+  </p:cSld>
+  <p:clrMapOvr>
+    <a:masterClrMapping/>
+  </p:clrMapOvr>
+</p:sld>
+</file>
+
+<file path=ppt/slides/slide11.xml><?xml version="1.0" encoding="utf-8"?>
+<p:sld xmlns:a="http://schemas.openxmlformats.org/drawingml/2006/main" xmlns:r="http://schemas.openxmlformats.org/officeDocument/2006/relationships" xmlns:p="http://schemas.openxmlformats.org/presentationml/2006/main">
+  <p:cSld>
+    <p:spTree>
+      <p:nvGrpSpPr>
+        <p:cNvPr id="1" name=""/>
+        <p:cNvGrpSpPr/>
+        <p:nvPr/>
+      </p:nvGrpSpPr>
+      <p:grpSpPr>
+        <a:xfrm>
+          <a:off x="0" y="0"/>
+          <a:ext cx="0" cy="0"/>
+          <a:chOff x="0" y="0"/>
+          <a:chExt cx="0" cy="0"/>
+        </a:xfrm>
+      </p:grpSpPr>
+      <p:sp>
+        <p:nvSpPr>
+          <p:cNvPr id="2" name="Title 1"/>
+          <p:cNvSpPr>
+            <a:spLocks noGrp="1"/>
+          </p:cNvSpPr>
+          <p:nvPr>
+            <p:ph type="title"/>
+          </p:nvPr>
+        </p:nvSpPr>
+        <p:spPr/>
+        <p:txBody>
+          <a:bodyPr>
+            <a:normAutofit fontScale="90000"/>
+          </a:bodyPr>
+          <a:lstStyle/>
+          <a:p>
+            <a:pPr>
+              <a:buNone/>
+            </a:pPr>
+            <a:r>
+              <a:rPr lang="pt-BR" dirty="0"/>
+              <a:t>Pesquisa no INPI</a:t>
+            </a:r>
+          </a:p>
+        </p:txBody>
+      </p:sp>
+      <p:sp>
+        <p:nvSpPr>
+          <p:cNvPr id="3" name="Slide Number Placeholder 3"/>
+          <p:cNvSpPr>
+            <a:spLocks noGrp="1"/>
+          </p:cNvSpPr>
+          <p:nvPr>
+            <p:ph type="sldNum" sz="quarter" idx="10"/>
+          </p:nvPr>
+        </p:nvSpPr>
+        <p:spPr/>
+        <p:txBody>
+          <a:bodyPr/>
+          <a:lstStyle/>
+          <a:p>
+            <a:fld id="{FB1DAA50-D663-4C2B-8494-40744BE0AC0A}" type="slidenum">
+              <a:rPr lang="pt-BR"/>
+              <a:t>10</a:t>
+            </a:fld>
+            <a:endParaRPr lang="pt-BR"/>
+          </a:p>
+        </p:txBody>
+      </p:sp>
+      <p:sp>
+        <p:nvSpPr>
+          <p:cNvPr id="10" name="L"/>
+          <p:cNvSpPr/>
+          <p:nvPr/>
+        </p:nvSpPr>
+        <p:spPr>
+          <a:xfrm>
+            <a:off x="179388" y="1430000"/>
+            <a:ext cx="4250000" cy="2520000"/>
+          </a:xfrm>
+          <a:prstGeom prst="roundRect">
+            <a:avLst>
+              <a:gd name="adj" fmla="val 3500"/>
+            </a:avLst>
+          </a:prstGeom>
+          <a:solidFill>
+            <a:srgbClr val="F2F4F6"/>
+          </a:solidFill>
+          <a:ln>
+            <a:noFill/>
+          </a:ln>
+        </p:spPr>
+        <p:txBody>
+          <a:bodyPr/>
+          <a:lstStyle/>
+          <a:p>
+            <a:pPr>
+              <a:buNone/>
+            </a:pPr>
+            <a:endParaRPr lang="pt-BR"/>
+          </a:p>
+        </p:txBody>
+      </p:sp>
+      <p:sp>
+        <p:nvSpPr>
+          <p:cNvPr id="11" name="Lt"/>
+          <p:cNvSpPr txBox="1"/>
+          <p:nvPr/>
+        </p:nvSpPr>
+        <p:spPr>
+          <a:xfrm>
+            <a:off x="349388" y="1500000"/>
+            <a:ext cx="3910000" cy="330000"/>
+          </a:xfrm>
+          <a:prstGeom prst="rect">
+            <a:avLst/>
+          </a:prstGeom>
+          <a:noFill/>
+        </p:spPr>
+        <p:txBody>
+          <a:bodyPr wrap="square">
+            <a:normAutofit/>
+          </a:bodyPr>
+          <a:lstStyle/>
+          <a:p>
+            <a:pPr algn="l">
+              <a:spcAft>
+                <a:spcPts val="0"/>
+              </a:spcAft>
+              <a:buNone/>
+            </a:pPr>
+            <a:r>
+              <a:rPr lang="pt-BR" sz="1200" b="1" dirty="0">
+                <a:solidFill>
+                  <a:srgbClr val="2D2DB9"/>
+                </a:solidFill>
+                <a:latin typeface="Titillium Web"/>
+              </a:rPr>
+              <a:t>Resultados da Busca</a:t>
+            </a:r>
+          </a:p>
+        </p:txBody>
+      </p:sp>
+      <p:sp>
+        <p:nvSpPr>
+          <p:cNvPr id="12" name="Lb"/>
+          <p:cNvSpPr txBox="1"/>
+          <p:nvPr/>
+        </p:nvSpPr>
+        <p:spPr>
+          <a:xfrm>
+            <a:off x="349388" y="1880000"/>
+            <a:ext cx="3910000" cy="2000000"/>
+          </a:xfrm>
+          <a:prstGeom prst="rect">
+            <a:avLst/>
+          </a:prstGeom>
+          <a:noFill/>
+        </p:spPr>
+        <p:txBody>
+          <a:bodyPr wrap="square" anchor="t">
+            <a:normAutofit/>
+          </a:bodyPr>
+          <a:lstStyle/>
+          <a:p>
+            <a:pPr algn="l">
+              <a:spcAft>
+                <a:spcPts val="300"/>
+              </a:spcAft>
+              <a:buNone/>
+            </a:pPr>
+            <a:r>
+              <a:rPr lang="pt-BR" sz="1000" b="1" dirty="0">
+                <a:solidFill>
+                  <a:srgbClr val="00CC99"/>
+                </a:solidFill>
+                <a:latin typeface="Titillium Web"/>
+              </a:rPr>
+              <a:t>•  </a:t>
+            </a:r>
+            <a:r>
+              <a:rPr lang="pt-BR" sz="1000" b="0" dirty="0">
+                <a:solidFill>
+                  <a:srgbClr val="333333"/>
+                </a:solidFill>
+                <a:latin typeface="Titillium Web"/>
+              </a:rPr>
+              <a:t>~47 pedidos de patentes ligados a blockchain</a:t>
+            </a:r>
+          </a:p>
+          <a:p>
+            <a:pPr algn="l">
+              <a:spcAft>
+                <a:spcPts val="300"/>
+              </a:spcAft>
+              <a:buNone/>
+            </a:pPr>
+            <a:r>
+              <a:rPr lang="pt-BR" sz="1000" b="1" dirty="0">
+                <a:solidFill>
+                  <a:srgbClr val="00CC99"/>
+                </a:solidFill>
+                <a:latin typeface="Titillium Web"/>
+              </a:rPr>
+              <a:t>•  </a:t>
+            </a:r>
+            <a:r>
+              <a:rPr lang="pt-BR" sz="1000" b="0" dirty="0">
+                <a:solidFill>
+                  <a:srgbClr val="333333"/>
+                </a:solidFill>
+                <a:latin typeface="Titillium Web"/>
+              </a:rPr>
+              <a:t>Nenhum combina todos os elementos da proposta</a:t>
+            </a:r>
+          </a:p>
+          <a:p>
+            <a:pPr algn="l">
+              <a:spcAft>
+                <a:spcPts val="300"/>
+              </a:spcAft>
+              <a:buNone/>
+            </a:pPr>
+            <a:r>
+              <a:rPr lang="pt-BR" sz="1000" b="1" dirty="0">
+                <a:solidFill>
+                  <a:srgbClr val="00CC99"/>
+                </a:solidFill>
+                <a:latin typeface="Titillium Web"/>
+              </a:rPr>
+              <a:t>•  </a:t>
+            </a:r>
+            <a:r>
+              <a:rPr lang="pt-BR" sz="1000" b="0" dirty="0">
+                <a:solidFill>
+                  <a:srgbClr val="333333"/>
+                </a:solidFill>
+                <a:latin typeface="Titillium Web"/>
+              </a:rPr>
+              <a:t>Sem biometria comportamental + ML + blockchain</a:t>
+            </a:r>
+          </a:p>
+          <a:p>
+            <a:pPr algn="l">
+              <a:spcAft>
+                <a:spcPts val="300"/>
+              </a:spcAft>
+              <a:buNone/>
+            </a:pPr>
+            <a:r>
+              <a:rPr lang="pt-BR" sz="1000" b="1" dirty="0">
+                <a:solidFill>
+                  <a:srgbClr val="00CC99"/>
+                </a:solidFill>
+                <a:latin typeface="Titillium Web"/>
+              </a:rPr>
+              <a:t>•  </a:t>
+            </a:r>
+            <a:r>
+              <a:rPr lang="pt-BR" sz="1000" b="0" dirty="0">
+                <a:solidFill>
+                  <a:srgbClr val="333333"/>
+                </a:solidFill>
+                <a:latin typeface="Titillium Web"/>
+              </a:rPr>
+              <a:t>Patentes da unico em biometria facial</a:t>
+            </a:r>
+          </a:p>
+        </p:txBody>
+      </p:sp>
+      <p:sp>
+        <p:nvSpPr>
+          <p:cNvPr id="13" name="R"/>
+          <p:cNvSpPr/>
+          <p:nvPr/>
+        </p:nvSpPr>
+        <p:spPr>
+          <a:xfrm>
+            <a:off x="4786050" y="1430000"/>
+            <a:ext cx="4250000" cy="2520000"/>
+          </a:xfrm>
+          <a:prstGeom prst="roundRect">
+            <a:avLst>
+              <a:gd name="adj" fmla="val 3500"/>
+            </a:avLst>
+          </a:prstGeom>
+          <a:solidFill>
+            <a:srgbClr val="F2F4F6"/>
+          </a:solidFill>
+          <a:ln>
+            <a:noFill/>
+          </a:ln>
+        </p:spPr>
+        <p:txBody>
+          <a:bodyPr/>
+          <a:lstStyle/>
+          <a:p>
+            <a:pPr>
+              <a:buNone/>
+            </a:pPr>
+            <a:endParaRPr lang="pt-BR"/>
+          </a:p>
+        </p:txBody>
+      </p:sp>
+      <p:sp>
+        <p:nvSpPr>
+          <p:cNvPr id="14" name="Rt"/>
+          <p:cNvSpPr txBox="1"/>
+          <p:nvPr/>
+        </p:nvSpPr>
+        <p:spPr>
+          <a:xfrm>
+            <a:off x="4956050" y="1500000"/>
+            <a:ext cx="3910000" cy="330000"/>
+          </a:xfrm>
+          <a:prstGeom prst="rect">
+            <a:avLst/>
+          </a:prstGeom>
+          <a:noFill/>
+        </p:spPr>
+        <p:txBody>
+          <a:bodyPr wrap="square">
+            <a:normAutofit/>
+          </a:bodyPr>
+          <a:lstStyle/>
+          <a:p>
+            <a:pPr algn="l">
+              <a:spcAft>
+                <a:spcPts val="0"/>
+              </a:spcAft>
+              <a:buNone/>
+            </a:pPr>
+            <a:r>
+              <a:rPr lang="pt-BR" sz="1200" b="1" dirty="0">
+                <a:solidFill>
+                  <a:srgbClr val="2D2DB9"/>
+                </a:solidFill>
+                <a:latin typeface="Titillium Web"/>
+              </a:rPr>
+              <a:t>Diretrizes de IA no INPI (2025)</a:t>
+            </a:r>
+          </a:p>
+        </p:txBody>
+      </p:sp>
+      <p:sp>
+        <p:nvSpPr>
+          <p:cNvPr id="15" name="Rb"/>
+          <p:cNvSpPr txBox="1"/>
+          <p:nvPr/>
+        </p:nvSpPr>
+        <p:spPr>
+          <a:xfrm>
+            <a:off x="4956050" y="1880000"/>
+            <a:ext cx="3910000" cy="2000000"/>
+          </a:xfrm>
+          <a:prstGeom prst="rect">
+            <a:avLst/>
+          </a:prstGeom>
+          <a:noFill/>
+        </p:spPr>
+        <p:txBody>
+          <a:bodyPr wrap="square" anchor="t">
+            <a:normAutofit/>
+          </a:bodyPr>
+          <a:lstStyle/>
+          <a:p>
+            <a:pPr algn="l">
+              <a:spcAft>
+                <a:spcPts val="300"/>
+              </a:spcAft>
+              <a:buNone/>
+            </a:pPr>
+            <a:r>
+              <a:rPr lang="pt-BR" sz="1000" b="1" dirty="0">
+                <a:solidFill>
+                  <a:srgbClr val="00CC99"/>
+                </a:solidFill>
+                <a:latin typeface="Titillium Web"/>
+              </a:rPr>
+              <a:t>•  </a:t>
+            </a:r>
+            <a:r>
+              <a:rPr lang="pt-BR" sz="1000" b="0" dirty="0">
+                <a:solidFill>
+                  <a:srgbClr val="333333"/>
+                </a:solidFill>
+                <a:latin typeface="Titillium Web"/>
+              </a:rPr>
+              <a:t>Consulta pública sobre patentes de IA</a:t>
+            </a:r>
+          </a:p>
+          <a:p>
+            <a:pPr algn="l">
+              <a:spcAft>
+                <a:spcPts val="300"/>
+              </a:spcAft>
+              <a:buNone/>
+            </a:pPr>
+            <a:r>
+              <a:rPr lang="pt-BR" sz="1000" b="1" dirty="0">
+                <a:solidFill>
+                  <a:srgbClr val="00CC99"/>
+                </a:solidFill>
+                <a:latin typeface="Titillium Web"/>
+              </a:rPr>
+              <a:t>•  </a:t>
+            </a:r>
+            <a:r>
+              <a:rPr lang="pt-BR" sz="1000" b="0" dirty="0">
+                <a:solidFill>
+                  <a:srgbClr val="333333"/>
+                </a:solidFill>
+                <a:latin typeface="Titillium Web"/>
+              </a:rPr>
+              <a:t>Modelos e invenções baseadas/assistidas por IA</a:t>
+            </a:r>
+          </a:p>
+          <a:p>
+            <a:pPr algn="l">
+              <a:spcAft>
+                <a:spcPts val="300"/>
+              </a:spcAft>
+              <a:buNone/>
+            </a:pPr>
+            <a:r>
+              <a:rPr lang="pt-BR" sz="1000" b="1" dirty="0">
+                <a:solidFill>
+                  <a:srgbClr val="00CC99"/>
+                </a:solidFill>
+                <a:latin typeface="Titillium Web"/>
+              </a:rPr>
+              <a:t>•  </a:t>
+            </a:r>
+            <a:r>
+              <a:rPr lang="pt-BR" sz="1000" b="0" dirty="0">
+                <a:solidFill>
+                  <a:srgbClr val="333333"/>
+                </a:solidFill>
+                <a:latin typeface="Titillium Web"/>
+              </a:rPr>
+              <a:t>Amadurecimento regulatório para proteção futura</a:t>
+            </a:r>
+          </a:p>
+        </p:txBody>
+      </p:sp>
+      <p:sp>
+        <p:nvSpPr>
+          <p:cNvPr id="16" name="rel"/>
+          <p:cNvSpPr/>
+          <p:nvPr/>
+        </p:nvSpPr>
+        <p:spPr>
+          <a:xfrm>
+            <a:off x="179388" y="4120000"/>
+            <a:ext cx="8856662" cy="2270000"/>
+          </a:xfrm>
+          <a:prstGeom prst="roundRect">
+            <a:avLst>
+              <a:gd name="adj" fmla="val 3500"/>
+            </a:avLst>
+          </a:prstGeom>
+          <a:solidFill>
+            <a:srgbClr val="E6F7F1"/>
+          </a:solidFill>
+          <a:ln w="19050">
+            <a:solidFill>
+              <a:srgbClr val="00CC99"/>
+            </a:solidFill>
+          </a:ln>
+        </p:spPr>
+        <p:txBody>
+          <a:bodyPr/>
+          <a:lstStyle/>
+          <a:p>
+            <a:pPr>
+              <a:buNone/>
+            </a:pPr>
+            <a:endParaRPr lang="pt-BR"/>
+          </a:p>
+        </p:txBody>
+      </p:sp>
+      <p:sp>
+        <p:nvSpPr>
+          <p:cNvPr id="17" name="rl"/>
+          <p:cNvSpPr txBox="1"/>
+          <p:nvPr/>
+        </p:nvSpPr>
+        <p:spPr>
+          <a:xfrm>
+            <a:off x="400000" y="4190000"/>
+            <a:ext cx="8420000" cy="330000"/>
+          </a:xfrm>
+          <a:prstGeom prst="rect">
+            <a:avLst/>
+          </a:prstGeom>
+          <a:noFill/>
+        </p:spPr>
+        <p:txBody>
+          <a:bodyPr wrap="square">
+            <a:normAutofit/>
+          </a:bodyPr>
+          <a:lstStyle/>
+          <a:p>
+            <a:pPr algn="l">
+              <a:spcAft>
+                <a:spcPts val="0"/>
+              </a:spcAft>
+              <a:buNone/>
+            </a:pPr>
+            <a:r>
+              <a:rPr lang="pt-BR" sz="1200" b="1" dirty="0">
+                <a:solidFill>
+                  <a:srgbClr val="2D2DB9"/>
+                </a:solidFill>
+                <a:latin typeface="Titillium Web"/>
+              </a:rPr>
+              <a:t>Relação com a Proposta</a:t>
+            </a:r>
+          </a:p>
+        </p:txBody>
+      </p:sp>
+      <p:sp>
+        <p:nvSpPr>
+          <p:cNvPr id="18" name="rt"/>
+          <p:cNvSpPr txBox="1"/>
+          <p:nvPr/>
+        </p:nvSpPr>
+        <p:spPr>
+          <a:xfrm>
+            <a:off x="400000" y="4560000"/>
+            <a:ext cx="8420000" cy="1750000"/>
+          </a:xfrm>
+          <a:prstGeom prst="rect">
+            <a:avLst/>
+          </a:prstGeom>
+          <a:noFill/>
+        </p:spPr>
+        <p:txBody>
+          <a:bodyPr wrap="square" anchor="t">
+            <a:normAutofit/>
+          </a:bodyPr>
+          <a:lstStyle/>
+          <a:p>
+            <a:pPr algn="just">
+              <a:spcAft>
+                <a:spcPts val="0"/>
+              </a:spcAft>
+              <a:buNone/>
+            </a:pPr>
+            <a:r>
+              <a:rPr lang="pt-BR" sz="1200" b="0" dirty="0">
+                <a:solidFill>
+                  <a:srgbClr val="333333"/>
+                </a:solidFill>
+                <a:latin typeface="Titillium Web"/>
+              </a:rPr>
+              <a:t>A ausência de patentes que integrem autenticação adaptativa com ML comportamental, blockchain e explicabilidade de IA evidencia o caráter inovador da proposta: elementos que, isolados, já têm registro, mas que em conjunto representam uma contribuição original.</a:t>
+            </a:r>
+          </a:p>
+        </p:txBody>
+      </p:sp>
+    </p:spTree>
+  </p:cSld>
+  <p:clrMapOvr>
+    <a:masterClrMapping/>
+  </p:clrMapOvr>
+</p:sld>
+</file>
+
+<file path=ppt/slides/slide12.xml><?xml version="1.0" encoding="utf-8"?>
+<p:sld xmlns:a="http://schemas.openxmlformats.org/drawingml/2006/main" xmlns:r="http://schemas.openxmlformats.org/officeDocument/2006/relationships" xmlns:p="http://schemas.openxmlformats.org/presentationml/2006/main">
+  <p:cSld>
+    <p:spTree>
+      <p:nvGrpSpPr>
+        <p:cNvPr id="1" name=""/>
+        <p:cNvGrpSpPr/>
+        <p:nvPr/>
+      </p:nvGrpSpPr>
+      <p:grpSpPr>
+        <a:xfrm>
+          <a:off x="0" y="0"/>
+          <a:ext cx="0" cy="0"/>
+          <a:chOff x="0" y="0"/>
+          <a:chExt cx="0" cy="0"/>
+        </a:xfrm>
+      </p:grpSpPr>
+      <p:sp>
+        <p:nvSpPr>
+          <p:cNvPr id="2" name="Title 1"/>
+          <p:cNvSpPr>
+            <a:spLocks noGrp="1"/>
+          </p:cNvSpPr>
+          <p:nvPr>
+            <p:ph type="title"/>
+          </p:nvPr>
+        </p:nvSpPr>
+        <p:spPr/>
+        <p:txBody>
+          <a:bodyPr>
+            <a:normAutofit fontScale="90000"/>
+          </a:bodyPr>
+          <a:lstStyle/>
+          <a:p>
+            <a:pPr>
+              <a:buNone/>
+            </a:pPr>
+            <a:r>
+              <a:rPr lang="pt-BR" dirty="0"/>
+              <a:t>Quadro Comparativo — 2020-2025 e Indústria</a:t>
+            </a:r>
+          </a:p>
+        </p:txBody>
+      </p:sp>
+      <p:sp>
+        <p:nvSpPr>
+          <p:cNvPr id="3" name="Slide Number Placeholder 3"/>
+          <p:cNvSpPr>
+            <a:spLocks noGrp="1"/>
+          </p:cNvSpPr>
+          <p:nvPr>
+            <p:ph type="sldNum" sz="quarter" idx="10"/>
+          </p:nvPr>
+        </p:nvSpPr>
+        <p:spPr/>
+        <p:txBody>
+          <a:bodyPr/>
+          <a:lstStyle/>
+          <a:p>
+            <a:fld id="{FB1DAA50-D663-4C2B-8494-40744BE0AC0A}" type="slidenum">
+              <a:rPr lang="pt-BR"/>
+              <a:t>11</a:t>
             </a:fld>
             <a:endParaRPr lang="pt-BR"/>
           </a:p>
@@ -14267,7 +15172,7 @@
                   </a:txBody>
                   <a:tcPr marL="45720" marR="45720" marT="22860" marB="22860">
                     <a:solidFill>
-                      <a:srgbClr val="2D2DB9"/>
+                      <a:srgbClr val="3A3A3A"/>
                     </a:solidFill>
                   </a:tcPr>
                 </a:tc>
@@ -14292,7 +15197,7 @@
                   </a:txBody>
                   <a:tcPr marL="45720" marR="45720" marT="22860" marB="22860">
                     <a:solidFill>
-                      <a:srgbClr val="2D2DB9"/>
+                      <a:srgbClr val="3A3A3A"/>
                     </a:solidFill>
                   </a:tcPr>
                 </a:tc>
@@ -14317,7 +15222,7 @@
                   </a:txBody>
                   <a:tcPr marL="45720" marR="45720" marT="22860" marB="22860">
                     <a:solidFill>
-                      <a:srgbClr val="2D2DB9"/>
+                      <a:srgbClr val="3A3A3A"/>
                     </a:solidFill>
                   </a:tcPr>
                 </a:tc>
@@ -14342,7 +15247,7 @@
                   </a:txBody>
                   <a:tcPr marL="45720" marR="45720" marT="22860" marB="22860">
                     <a:solidFill>
-                      <a:srgbClr val="2D2DB9"/>
+                      <a:srgbClr val="3A3A3A"/>
                     </a:solidFill>
                   </a:tcPr>
                 </a:tc>
@@ -14367,7 +15272,7 @@
                   </a:txBody>
                   <a:tcPr marL="45720" marR="45720" marT="22860" marB="22860">
                     <a:solidFill>
-                      <a:srgbClr val="2D2DB9"/>
+                      <a:srgbClr val="3A3A3A"/>
                     </a:solidFill>
                   </a:tcPr>
                 </a:tc>
@@ -14392,7 +15297,7 @@
                   </a:txBody>
                   <a:tcPr marL="45720" marR="45720" marT="22860" marB="22860">
                     <a:solidFill>
-                      <a:srgbClr val="2D2DB9"/>
+                      <a:srgbClr val="3A3A3A"/>
                     </a:solidFill>
                   </a:tcPr>
                 </a:tc>
@@ -14732,7 +15637,7 @@
                           </a:solidFill>
                           <a:latin typeface="Titillium Web"/>
                         </a:rPr>
-                        <a:t>Wiefling et al.</a:t>
+                        <a:t>Wiefling et al. (RBA)</a:t>
                       </a:r>
                     </a:p>
                   </a:txBody>
@@ -14889,7 +15794,7 @@
                           </a:solidFill>
                           <a:latin typeface="Titillium Web"/>
                         </a:rPr>
-                        <a:t>Ismail et al.</a:t>
+                        <a:t>Ismail et al. (anomalia)</a:t>
                       </a:r>
                     </a:p>
                   </a:txBody>
@@ -15046,7 +15951,7 @@
                           </a:solidFill>
                           <a:latin typeface="Titillium Web"/>
                         </a:rPr>
-                        <a:t>Capuano et al.</a:t>
+                        <a:t>Capuano et al. (survey XAI)</a:t>
                       </a:r>
                     </a:p>
                   </a:txBody>
@@ -15984,7 +16889,7 @@
 </p:sld>
 </file>
 
-<file path=ppt/slides/slide11.xml><?xml version="1.0" encoding="utf-8"?>
+<file path=ppt/slides/slide13.xml><?xml version="1.0" encoding="utf-8"?>
 <p:sld xmlns:a="http://schemas.openxmlformats.org/drawingml/2006/main" xmlns:r="http://schemas.openxmlformats.org/officeDocument/2006/relationships" xmlns:p="http://schemas.openxmlformats.org/presentationml/2006/main">
   <p:cSld>
     <p:spTree>
@@ -16023,7 +16928,7 @@
             </a:pPr>
             <a:r>
               <a:rPr lang="pt-BR" dirty="0"/>
-              <a:t>Matriz de Diferenciais — Proposta × Trabalhos</a:t>
+              <a:t>Matriz de Diferenciais</a:t>
             </a:r>
           </a:p>
         </p:txBody>
@@ -16045,7 +16950,7 @@
           <a:p>
             <a:fld id="{FB1DAA50-D663-4C2B-8494-40744BE0AC0A}" type="slidenum">
               <a:rPr lang="pt-BR"/>
-              <a:t>10</a:t>
+              <a:t>12</a:t>
             </a:fld>
             <a:endParaRPr lang="pt-BR"/>
           </a:p>
@@ -16141,7 +17046,7 @@
                   </a:txBody>
                   <a:tcPr marL="36000" marR="36000" marT="18000" marB="18000" anchor="ctr">
                     <a:solidFill>
-                      <a:srgbClr val="2D2DB9"/>
+                      <a:srgbClr val="3A3A3A"/>
                     </a:solidFill>
                   </a:tcPr>
                 </a:tc>
@@ -16166,7 +17071,7 @@
                   </a:txBody>
                   <a:tcPr marL="36000" marR="36000" marT="18000" marB="18000" anchor="ctr">
                     <a:solidFill>
-                      <a:srgbClr val="2D2DB9"/>
+                      <a:srgbClr val="3A3A3A"/>
                     </a:solidFill>
                   </a:tcPr>
                 </a:tc>
@@ -16191,7 +17096,7 @@
                   </a:txBody>
                   <a:tcPr marL="36000" marR="36000" marT="18000" marB="18000" anchor="ctr">
                     <a:solidFill>
-                      <a:srgbClr val="2D2DB9"/>
+                      <a:srgbClr val="3A3A3A"/>
                     </a:solidFill>
                   </a:tcPr>
                 </a:tc>
@@ -16208,9 +17113,6 @@
                           <a:solidFill>
                             <a:srgbClr val="FFFFFF"/>
                           </a:solidFill>
-                          <a:highlight>
-                            <a:srgbClr val="FFFF00"/>
-                          </a:highlight>
                           <a:latin typeface="Titillium Web"/>
                         </a:rPr>
                         <a:t>RBA</a:t>
@@ -16219,7 +17121,7 @@
                   </a:txBody>
                   <a:tcPr marL="36000" marR="36000" marT="18000" marB="18000" anchor="ctr">
                     <a:solidFill>
-                      <a:srgbClr val="2D2DB9"/>
+                      <a:srgbClr val="3A3A3A"/>
                     </a:solidFill>
                   </a:tcPr>
                 </a:tc>
@@ -16244,7 +17146,7 @@
                   </a:txBody>
                   <a:tcPr marL="36000" marR="36000" marT="18000" marB="18000" anchor="ctr">
                     <a:solidFill>
-                      <a:srgbClr val="2D2DB9"/>
+                      <a:srgbClr val="3A3A3A"/>
                     </a:solidFill>
                   </a:tcPr>
                 </a:tc>
@@ -16269,7 +17171,7 @@
                   </a:txBody>
                   <a:tcPr marL="36000" marR="36000" marT="18000" marB="18000" anchor="ctr">
                     <a:solidFill>
-                      <a:srgbClr val="2D2DB9"/>
+                      <a:srgbClr val="3A3A3A"/>
                     </a:solidFill>
                   </a:tcPr>
                 </a:tc>
@@ -17556,7 +18458,7 @@
           <a:noFill/>
         </p:spPr>
         <p:txBody>
-          <a:bodyPr wrap="square">
+          <a:bodyPr wrap="square" anchor="t">
             <a:normAutofit/>
           </a:bodyPr>
           <a:lstStyle/>
@@ -17614,7 +18516,7 @@
             </a:r>
           </a:p>
           <a:p>
-            <a:pPr algn="l">
+            <a:pPr algn="just">
               <a:spcAft>
                 <a:spcPts val="0"/>
               </a:spcAft>
@@ -17640,7 +18542,7 @@
 </p:sld>
 </file>
 
-<file path=ppt/slides/slide12.xml><?xml version="1.0" encoding="utf-8"?>
+<file path=ppt/slides/slide14.xml><?xml version="1.0" encoding="utf-8"?>
 <p:sld xmlns:a="http://schemas.openxmlformats.org/drawingml/2006/main" xmlns:r="http://schemas.openxmlformats.org/officeDocument/2006/relationships" xmlns:p="http://schemas.openxmlformats.org/presentationml/2006/main">
   <p:cSld>
     <p:spTree>
@@ -17701,7 +18603,7 @@
           <a:p>
             <a:fld id="{FB1DAA50-D663-4C2B-8494-40744BE0AC0A}" type="slidenum">
               <a:rPr lang="pt-BR"/>
-              <a:t>11</a:t>
+              <a:t>13</a:t>
             </a:fld>
             <a:endParaRPr lang="pt-BR"/>
           </a:p>
@@ -17750,7 +18652,7 @@
         <p:spPr>
           <a:xfrm>
             <a:off x="380000" y="1490000"/>
-            <a:ext cx="8450000" cy="2860000"/>
+            <a:ext cx="8450000" cy="2659080"/>
           </a:xfrm>
           <a:prstGeom prst="rect">
             <a:avLst/>
@@ -17758,7 +18660,7 @@
           <a:noFill/>
         </p:spPr>
         <p:txBody>
-          <a:bodyPr wrap="square">
+          <a:bodyPr wrap="square" anchor="t">
             <a:normAutofit/>
           </a:bodyPr>
           <a:lstStyle/>
@@ -17780,7 +18682,7 @@
             </a:r>
           </a:p>
           <a:p>
-            <a:pPr algn="l">
+            <a:pPr algn="just">
               <a:spcAft>
                 <a:spcPts val="450"/>
               </a:spcAft>
@@ -17806,12 +18708,26 @@
             </a:r>
           </a:p>
           <a:p>
-            <a:pPr algn="l">
+            <a:pPr algn="just">
               <a:spcAft>
                 <a:spcPts val="450"/>
               </a:spcAft>
               <a:buNone/>
             </a:pPr>
+            <a:endParaRPr lang="pt-BR" sz="1100" b="0" dirty="0">
+              <a:solidFill>
+                <a:srgbClr val="333333"/>
+              </a:solidFill>
+              <a:latin typeface="Titillium Web"/>
+            </a:endParaRPr>
+          </a:p>
+          <a:p>
+            <a:pPr algn="just">
+              <a:spcAft>
+                <a:spcPts val="450"/>
+              </a:spcAft>
+              <a:buNone/>
+            </a:pPr>
             <a:r>
               <a:rPr lang="pt-BR" sz="1100" b="1" dirty="0">
                 <a:solidFill>
@@ -17832,7 +18748,21 @@
             </a:r>
           </a:p>
           <a:p>
-            <a:pPr algn="l">
+            <a:pPr algn="just">
+              <a:spcAft>
+                <a:spcPts val="450"/>
+              </a:spcAft>
+              <a:buNone/>
+            </a:pPr>
+            <a:endParaRPr lang="pt-BR" sz="1100" b="0" dirty="0">
+              <a:solidFill>
+                <a:srgbClr val="333333"/>
+              </a:solidFill>
+              <a:latin typeface="Titillium Web"/>
+            </a:endParaRPr>
+          </a:p>
+          <a:p>
+            <a:pPr algn="just">
               <a:spcAft>
                 <a:spcPts val="450"/>
               </a:spcAft>
@@ -17952,12 +18882,12 @@
           <a:noFill/>
         </p:spPr>
         <p:txBody>
-          <a:bodyPr wrap="square">
+          <a:bodyPr wrap="square" anchor="t">
             <a:normAutofit/>
           </a:bodyPr>
           <a:lstStyle/>
           <a:p>
-            <a:pPr algn="l">
+            <a:pPr algn="just">
               <a:spcAft>
                 <a:spcPts val="0"/>
               </a:spcAft>
@@ -17983,7 +18913,7 @@
 </p:sld>
 </file>
 
-<file path=ppt/slides/slide13.xml><?xml version="1.0" encoding="utf-8"?>
+<file path=ppt/slides/slide15.xml><?xml version="1.0" encoding="utf-8"?>
 <p:sld xmlns:a="http://schemas.openxmlformats.org/drawingml/2006/main" xmlns:r="http://schemas.openxmlformats.org/officeDocument/2006/relationships" xmlns:p="http://schemas.openxmlformats.org/presentationml/2006/main">
   <p:cSld>
     <p:spTree>
@@ -18044,7 +18974,7 @@
           <a:p>
             <a:fld id="{FB1DAA50-D663-4C2B-8494-40744BE0AC0A}" type="slidenum">
               <a:rPr lang="pt-BR"/>
-              <a:t>12</a:t>
+              <a:t>14</a:t>
             </a:fld>
             <a:endParaRPr lang="pt-BR"/>
           </a:p>
@@ -18067,7 +18997,7 @@
           <a:noFill/>
         </p:spPr>
         <p:txBody>
-          <a:bodyPr wrap="square">
+          <a:bodyPr wrap="square" anchor="t">
             <a:normAutofit/>
           </a:bodyPr>
           <a:lstStyle/>
@@ -18089,7 +19019,7 @@
             </a:r>
           </a:p>
           <a:p>
-            <a:pPr algn="l">
+            <a:pPr algn="just">
               <a:spcAft>
                 <a:spcPts val="200"/>
               </a:spcAft>
@@ -18129,7 +19059,7 @@
             </a:endParaRPr>
           </a:p>
           <a:p>
-            <a:pPr algn="l">
+            <a:pPr algn="just">
               <a:spcAft>
                 <a:spcPts val="200"/>
               </a:spcAft>
@@ -18169,7 +19099,7 @@
             </a:endParaRPr>
           </a:p>
           <a:p>
-            <a:pPr algn="l">
+            <a:pPr algn="just">
               <a:spcAft>
                 <a:spcPts val="200"/>
               </a:spcAft>
@@ -18209,7 +19139,7 @@
             </a:endParaRPr>
           </a:p>
           <a:p>
-            <a:pPr algn="l">
+            <a:pPr algn="just">
               <a:spcAft>
                 <a:spcPts val="200"/>
               </a:spcAft>
@@ -18249,7 +19179,7 @@
             </a:endParaRPr>
           </a:p>
           <a:p>
-            <a:pPr algn="l">
+            <a:pPr algn="just">
               <a:spcAft>
                 <a:spcPts val="200"/>
               </a:spcAft>
@@ -18289,7 +19219,7 @@
             </a:endParaRPr>
           </a:p>
           <a:p>
-            <a:pPr algn="l">
+            <a:pPr algn="just">
               <a:spcAft>
                 <a:spcPts val="200"/>
               </a:spcAft>
@@ -18329,7 +19259,7 @@
             </a:endParaRPr>
           </a:p>
           <a:p>
-            <a:pPr algn="l">
+            <a:pPr algn="just">
               <a:spcAft>
                 <a:spcPts val="200"/>
               </a:spcAft>
@@ -18369,7 +19299,7 @@
             </a:endParaRPr>
           </a:p>
           <a:p>
-            <a:pPr algn="l">
+            <a:pPr algn="just">
               <a:spcAft>
                 <a:spcPts val="200"/>
               </a:spcAft>
@@ -18466,7 +19396,7 @@
             </a:r>
           </a:p>
           <a:p>
-            <a:pPr algn="l">
+            <a:pPr algn="just">
               <a:spcAft>
                 <a:spcPts val="200"/>
               </a:spcAft>
@@ -18506,7 +19436,7 @@
             </a:endParaRPr>
           </a:p>
           <a:p>
-            <a:pPr algn="l">
+            <a:pPr algn="just">
               <a:spcAft>
                 <a:spcPts val="200"/>
               </a:spcAft>
@@ -18541,7 +19471,7 @@
 </p:sld>
 </file>
 
-<file path=ppt/slides/slide14.xml><?xml version="1.0" encoding="utf-8"?>
+<file path=ppt/slides/slide16.xml><?xml version="1.0" encoding="utf-8"?>
 <p:sld xmlns:a="http://schemas.openxmlformats.org/drawingml/2006/main" xmlns:r="http://schemas.openxmlformats.org/officeDocument/2006/relationships" xmlns:p="http://schemas.openxmlformats.org/presentationml/2006/main">
   <p:cSld>
     <p:spTree>
@@ -18587,14 +19517,14 @@
           <a:effectLst/>
           <a:extLst>
             <a:ext uri="{909E8E84-426E-40dd-AFC4-6F175D3DCCD1}">
-              <a14:hiddenFill xmlns:a14="http://schemas.microsoft.com/office/drawing/2010/main" xmlns="">
+              <a14:hiddenFill xmlns="" xmlns:a14="http://schemas.microsoft.com/office/drawing/2010/main">
                 <a:solidFill>
                   <a:srgbClr val="FFFFFF"/>
                 </a:solidFill>
               </a14:hiddenFill>
             </a:ext>
             <a:ext uri="{91240B29-F687-4f45-9708-019B960494DF}">
-              <a14:hiddenLine xmlns:a14="http://schemas.microsoft.com/office/drawing/2010/main" xmlns="" w="9525" cap="flat">
+              <a14:hiddenLine xmlns="" xmlns:a14="http://schemas.microsoft.com/office/drawing/2010/main" w="9525" cap="flat">
                 <a:solidFill>
                   <a:srgbClr val="3465A4"/>
                 </a:solidFill>
@@ -18604,7 +19534,7 @@
               </a14:hiddenLine>
             </a:ext>
             <a:ext uri="{AF507438-7753-43e0-B8FC-AC1667EBCBE1}">
-              <a14:hiddenEffects xmlns:a14="http://schemas.microsoft.com/office/drawing/2010/main" xmlns="">
+              <a14:hiddenEffects xmlns="" xmlns:a14="http://schemas.microsoft.com/office/drawing/2010/main">
                 <a:effectLst>
                   <a:outerShdw blurRad="63500" dist="38099" dir="2700000" algn="ctr" rotWithShape="0">
                     <a:srgbClr val="000000">
@@ -18961,14 +19891,14 @@
           <a:effectLst/>
           <a:extLst>
             <a:ext uri="{909E8E84-426E-40dd-AFC4-6F175D3DCCD1}">
-              <a14:hiddenFill xmlns:a14="http://schemas.microsoft.com/office/drawing/2010/main" xmlns="">
+              <a14:hiddenFill xmlns="" xmlns:a14="http://schemas.microsoft.com/office/drawing/2010/main">
                 <a:solidFill>
                   <a:srgbClr val="FFFFFF"/>
                 </a:solidFill>
               </a14:hiddenFill>
             </a:ext>
             <a:ext uri="{91240B29-F687-4f45-9708-019B960494DF}">
-              <a14:hiddenLine xmlns:a14="http://schemas.microsoft.com/office/drawing/2010/main" xmlns="" w="9525" cap="flat">
+              <a14:hiddenLine xmlns="" xmlns:a14="http://schemas.microsoft.com/office/drawing/2010/main" w="9525" cap="flat">
                 <a:solidFill>
                   <a:srgbClr val="3465A4"/>
                 </a:solidFill>
@@ -18978,7 +19908,7 @@
               </a14:hiddenLine>
             </a:ext>
             <a:ext uri="{AF507438-7753-43e0-B8FC-AC1667EBCBE1}">
-              <a14:hiddenEffects xmlns:a14="http://schemas.microsoft.com/office/drawing/2010/main" xmlns="">
+              <a14:hiddenEffects xmlns="" xmlns:a14="http://schemas.microsoft.com/office/drawing/2010/main">
                 <a:effectLst>
                   <a:outerShdw blurRad="63500" dist="38099" dir="2700000" algn="ctr" rotWithShape="0">
                     <a:srgbClr val="000000">
@@ -18991,7 +19921,7 @@
           </a:extLst>
         </p:spPr>
         <p:txBody>
-          <a:bodyPr lIns="0" tIns="0" rIns="0" bIns="0" anchor="ctr"/>
+          <a:bodyPr lIns="0" tIns="0" rIns="0" bIns="0" anchor="t"/>
           <a:lstStyle>
             <a:lvl1pPr>
               <a:tabLst>
@@ -19528,12 +20458,12 @@
           <a:noFill/>
         </p:spPr>
         <p:txBody>
-          <a:bodyPr wrap="square">
+          <a:bodyPr wrap="square" anchor="t">
             <a:normAutofit/>
           </a:bodyPr>
           <a:lstStyle/>
           <a:p>
-            <a:pPr algn="l">
+            <a:pPr algn="just">
               <a:spcAft>
                 <a:spcPts val="0"/>
               </a:spcAft>
@@ -19568,12 +20498,12 @@
           <a:noFill/>
         </p:spPr>
         <p:txBody>
-          <a:bodyPr wrap="square">
+          <a:bodyPr wrap="square" anchor="t">
             <a:normAutofit/>
           </a:bodyPr>
           <a:lstStyle/>
           <a:p>
-            <a:pPr algn="l">
+            <a:pPr algn="just">
               <a:spcAft>
                 <a:spcPts val="0"/>
               </a:spcAft>
@@ -19691,7 +20621,7 @@
           <a:noFill/>
         </p:spPr>
         <p:txBody>
-          <a:bodyPr wrap="square">
+          <a:bodyPr wrap="square" anchor="t">
             <a:normAutofit/>
           </a:bodyPr>
           <a:lstStyle/>
@@ -19892,7 +20822,7 @@
           <a:noFill/>
         </p:spPr>
         <p:txBody>
-          <a:bodyPr wrap="square">
+          <a:bodyPr wrap="square" anchor="t">
             <a:normAutofit/>
           </a:bodyPr>
           <a:lstStyle/>
@@ -20093,7 +21023,7 @@
           <a:noFill/>
         </p:spPr>
         <p:txBody>
-          <a:bodyPr wrap="square">
+          <a:bodyPr wrap="square" anchor="t">
             <a:normAutofit/>
           </a:bodyPr>
           <a:lstStyle/>
@@ -20250,7 +21180,7 @@
             </a:pPr>
             <a:r>
               <a:rPr lang="pt-BR" dirty="0"/>
-              <a:t>Legenda — Siglas e Abreviações</a:t>
+              <a:t>A Proposta — Posicionamento</a:t>
             </a:r>
           </a:p>
         </p:txBody>
@@ -20280,14 +21210,759 @@
       </p:sp>
       <p:sp>
         <p:nvSpPr>
-          <p:cNvPr id="10" name="cA"/>
+          <p:cNvPr id="10" name="box1"/>
+          <p:cNvSpPr/>
+          <p:nvPr/>
+        </p:nvSpPr>
+        <p:spPr>
+          <a:xfrm>
+            <a:off x="179388" y="1424940"/>
+            <a:ext cx="8856662" cy="2980000"/>
+          </a:xfrm>
+          <a:prstGeom prst="roundRect">
+            <a:avLst>
+              <a:gd name="adj" fmla="val 3500"/>
+            </a:avLst>
+          </a:prstGeom>
+          <a:solidFill>
+            <a:srgbClr val="F2F4F6"/>
+          </a:solidFill>
+          <a:ln>
+            <a:noFill/>
+          </a:ln>
+        </p:spPr>
+        <p:txBody>
+          <a:bodyPr/>
+          <a:lstStyle/>
+          <a:p>
+            <a:pPr>
+              <a:buNone/>
+            </a:pPr>
+            <a:endParaRPr lang="pt-BR"/>
+          </a:p>
+        </p:txBody>
+      </p:sp>
+      <p:sp>
+        <p:nvSpPr>
+          <p:cNvPr id="11" name="tb1"/>
           <p:cNvSpPr txBox="1"/>
           <p:nvPr/>
         </p:nvSpPr>
         <p:spPr>
           <a:xfrm>
-            <a:off x="179388" y="1430000"/>
-            <a:ext cx="2810000" cy="4950000"/>
+            <a:off x="380000" y="1490000"/>
+            <a:ext cx="8450000" cy="2860000"/>
+          </a:xfrm>
+          <a:prstGeom prst="rect">
+            <a:avLst/>
+          </a:prstGeom>
+          <a:noFill/>
+        </p:spPr>
+        <p:txBody>
+          <a:bodyPr wrap="square" anchor="t">
+            <a:normAutofit/>
+          </a:bodyPr>
+          <a:lstStyle/>
+          <a:p>
+            <a:pPr algn="l">
+              <a:spcAft>
+                <a:spcPts val="500"/>
+              </a:spcAft>
+              <a:buNone/>
+            </a:pPr>
+            <a:r>
+              <a:rPr sz="1000" b="1" dirty="0" err="1">
+                <a:solidFill>
+                  <a:srgbClr val="00CC99"/>
+                </a:solidFill>
+              </a:rPr>
+              <a:t>Projeto</a:t>
+            </a:r>
+            <a:r>
+              <a:rPr sz="1000" b="1" dirty="0">
+                <a:solidFill>
+                  <a:srgbClr val="00CC99"/>
+                </a:solidFill>
+              </a:rPr>
+              <a:t>: Sistema </a:t>
+            </a:r>
+            <a:r>
+              <a:rPr sz="1000" b="1" dirty="0" err="1">
+                <a:solidFill>
+                  <a:srgbClr val="00CC99"/>
+                </a:solidFill>
+              </a:rPr>
+              <a:t>Autônomo</a:t>
+            </a:r>
+            <a:r>
+              <a:rPr sz="1000" b="1" dirty="0">
+                <a:solidFill>
+                  <a:srgbClr val="00CC99"/>
+                </a:solidFill>
+              </a:rPr>
+              <a:t> de </a:t>
+            </a:r>
+            <a:r>
+              <a:rPr sz="1000" b="1" dirty="0" err="1">
+                <a:solidFill>
+                  <a:srgbClr val="00CC99"/>
+                </a:solidFill>
+              </a:rPr>
+              <a:t>Autenticação</a:t>
+            </a:r>
+            <a:r>
+              <a:rPr sz="1000" b="1" dirty="0">
+                <a:solidFill>
+                  <a:srgbClr val="00CC99"/>
+                </a:solidFill>
+              </a:rPr>
+              <a:t> Contextual com Blockchain e IA</a:t>
+            </a:r>
+          </a:p>
+          <a:p>
+            <a:pPr algn="just"/>
+            <a:endParaRPr lang="pt-BR" sz="1100" b="1" dirty="0">
+              <a:solidFill>
+                <a:srgbClr val="2D2DB9"/>
+              </a:solidFill>
+            </a:endParaRPr>
+          </a:p>
+          <a:p>
+            <a:pPr algn="just"/>
+            <a:r>
+              <a:rPr sz="1100" b="1" dirty="0" err="1">
+                <a:solidFill>
+                  <a:srgbClr val="2D2DB9"/>
+                </a:solidFill>
+              </a:rPr>
+              <a:t>Objetivo</a:t>
+            </a:r>
+            <a:r>
+              <a:rPr sz="1100" b="1" dirty="0">
+                <a:solidFill>
+                  <a:srgbClr val="2D2DB9"/>
+                </a:solidFill>
+              </a:rPr>
+              <a:t>: </a:t>
+            </a:r>
+            <a:r>
+              <a:rPr sz="1100" b="0" dirty="0" err="1">
+                <a:solidFill>
+                  <a:srgbClr val="333333"/>
+                </a:solidFill>
+              </a:rPr>
+              <a:t>desenvolver</a:t>
+            </a:r>
+            <a:r>
+              <a:rPr sz="1100" b="0" dirty="0">
+                <a:solidFill>
+                  <a:srgbClr val="333333"/>
+                </a:solidFill>
+              </a:rPr>
+              <a:t> um </a:t>
+            </a:r>
+            <a:r>
+              <a:rPr sz="1100" b="0" dirty="0" err="1">
+                <a:solidFill>
+                  <a:srgbClr val="333333"/>
+                </a:solidFill>
+              </a:rPr>
+              <a:t>sistema</a:t>
+            </a:r>
+            <a:r>
+              <a:rPr sz="1100" b="0" dirty="0">
+                <a:solidFill>
+                  <a:srgbClr val="333333"/>
+                </a:solidFill>
+              </a:rPr>
+              <a:t> </a:t>
+            </a:r>
+            <a:r>
+              <a:rPr sz="1100" b="0" dirty="0" err="1">
+                <a:solidFill>
+                  <a:srgbClr val="333333"/>
+                </a:solidFill>
+              </a:rPr>
+              <a:t>autônomo</a:t>
+            </a:r>
+            <a:r>
+              <a:rPr sz="1100" b="0" dirty="0">
+                <a:solidFill>
+                  <a:srgbClr val="333333"/>
+                </a:solidFill>
+              </a:rPr>
+              <a:t> de </a:t>
+            </a:r>
+            <a:r>
+              <a:rPr sz="1100" b="0" dirty="0" err="1">
+                <a:solidFill>
+                  <a:srgbClr val="333333"/>
+                </a:solidFill>
+              </a:rPr>
+              <a:t>autenticação</a:t>
+            </a:r>
+            <a:r>
+              <a:rPr sz="1100" b="0" dirty="0">
+                <a:solidFill>
+                  <a:srgbClr val="333333"/>
+                </a:solidFill>
+              </a:rPr>
+              <a:t> contextual </a:t>
+            </a:r>
+            <a:r>
+              <a:rPr sz="1100" b="0" dirty="0" err="1">
+                <a:solidFill>
+                  <a:srgbClr val="333333"/>
+                </a:solidFill>
+              </a:rPr>
+              <a:t>que</a:t>
+            </a:r>
+            <a:r>
+              <a:rPr sz="1100" b="0" dirty="0">
+                <a:solidFill>
+                  <a:srgbClr val="333333"/>
+                </a:solidFill>
+              </a:rPr>
+              <a:t> </a:t>
+            </a:r>
+            <a:r>
+              <a:rPr sz="1100" b="0" dirty="0" err="1">
+                <a:solidFill>
+                  <a:srgbClr val="333333"/>
+                </a:solidFill>
+              </a:rPr>
+              <a:t>integre</a:t>
+            </a:r>
+            <a:r>
+              <a:rPr sz="1100" b="0" dirty="0">
+                <a:solidFill>
+                  <a:srgbClr val="333333"/>
+                </a:solidFill>
+              </a:rPr>
+              <a:t> IA e Blockchain para </a:t>
+            </a:r>
+            <a:r>
+              <a:rPr sz="1100" b="0" dirty="0" err="1">
+                <a:solidFill>
+                  <a:srgbClr val="333333"/>
+                </a:solidFill>
+              </a:rPr>
+              <a:t>reforçar</a:t>
+            </a:r>
+            <a:r>
+              <a:rPr sz="1100" b="0" dirty="0">
+                <a:solidFill>
+                  <a:srgbClr val="333333"/>
+                </a:solidFill>
+              </a:rPr>
+              <a:t> a </a:t>
+            </a:r>
+            <a:r>
+              <a:rPr sz="1100" b="0" dirty="0" err="1">
+                <a:solidFill>
+                  <a:srgbClr val="333333"/>
+                </a:solidFill>
+              </a:rPr>
+              <a:t>segurança</a:t>
+            </a:r>
+            <a:r>
+              <a:rPr sz="1100" b="0" dirty="0">
+                <a:solidFill>
+                  <a:srgbClr val="333333"/>
+                </a:solidFill>
+              </a:rPr>
+              <a:t> de </a:t>
+            </a:r>
+            <a:r>
+              <a:rPr sz="1100" b="0" dirty="0" err="1">
+                <a:solidFill>
+                  <a:srgbClr val="333333"/>
+                </a:solidFill>
+              </a:rPr>
+              <a:t>acesso</a:t>
+            </a:r>
+            <a:r>
+              <a:rPr sz="1100" b="0" dirty="0">
+                <a:solidFill>
+                  <a:srgbClr val="333333"/>
+                </a:solidFill>
+              </a:rPr>
+              <a:t> a </a:t>
+            </a:r>
+            <a:r>
+              <a:rPr sz="1100" b="0" dirty="0" err="1">
+                <a:solidFill>
+                  <a:srgbClr val="333333"/>
+                </a:solidFill>
+              </a:rPr>
+              <a:t>sistemas</a:t>
+            </a:r>
+            <a:r>
+              <a:rPr sz="1100" b="0" dirty="0">
+                <a:solidFill>
+                  <a:srgbClr val="333333"/>
+                </a:solidFill>
+              </a:rPr>
+              <a:t> </a:t>
+            </a:r>
+            <a:r>
+              <a:rPr sz="1100" b="0" dirty="0" err="1">
+                <a:solidFill>
+                  <a:srgbClr val="333333"/>
+                </a:solidFill>
+              </a:rPr>
+              <a:t>digitais</a:t>
+            </a:r>
+            <a:r>
+              <a:rPr sz="1100" b="0" dirty="0">
+                <a:solidFill>
+                  <a:srgbClr val="333333"/>
+                </a:solidFill>
+              </a:rPr>
+              <a:t>.</a:t>
+            </a:r>
+          </a:p>
+          <a:p>
+            <a:pPr algn="l"/>
+            <a:endParaRPr sz="1100" b="0" dirty="0">
+              <a:solidFill>
+                <a:srgbClr val="333333"/>
+              </a:solidFill>
+            </a:endParaRPr>
+          </a:p>
+          <a:p>
+            <a:pPr algn="just"/>
+            <a:r>
+              <a:rPr sz="1100" b="1" dirty="0">
+                <a:solidFill>
+                  <a:srgbClr val="2D2DB9"/>
+                </a:solidFill>
+              </a:rPr>
+              <a:t>(1) </a:t>
+            </a:r>
+            <a:r>
+              <a:rPr sz="1100" b="1" dirty="0" err="1">
+                <a:solidFill>
+                  <a:srgbClr val="2D2DB9"/>
+                </a:solidFill>
+              </a:rPr>
+              <a:t>Comportamento</a:t>
+            </a:r>
+            <a:r>
+              <a:rPr sz="1100" b="1" dirty="0">
+                <a:solidFill>
+                  <a:srgbClr val="2D2DB9"/>
+                </a:solidFill>
+              </a:rPr>
+              <a:t> + </a:t>
+            </a:r>
+            <a:r>
+              <a:rPr sz="1100" b="1" dirty="0" err="1">
+                <a:solidFill>
+                  <a:srgbClr val="2D2DB9"/>
+                </a:solidFill>
+              </a:rPr>
+              <a:t>contexto</a:t>
+            </a:r>
+            <a:r>
+              <a:rPr sz="1100" b="1" dirty="0">
+                <a:solidFill>
+                  <a:srgbClr val="2D2DB9"/>
+                </a:solidFill>
+              </a:rPr>
+              <a:t>: </a:t>
+            </a:r>
+            <a:r>
+              <a:rPr sz="1100" b="0" dirty="0">
+                <a:solidFill>
+                  <a:srgbClr val="333333"/>
+                </a:solidFill>
+              </a:rPr>
+              <a:t>14 </a:t>
+            </a:r>
+            <a:r>
+              <a:rPr sz="1100" b="0" dirty="0" err="1">
+                <a:solidFill>
+                  <a:srgbClr val="333333"/>
+                </a:solidFill>
+              </a:rPr>
+              <a:t>critérios</a:t>
+            </a:r>
+            <a:r>
+              <a:rPr sz="1100" b="0" dirty="0">
+                <a:solidFill>
+                  <a:srgbClr val="333333"/>
+                </a:solidFill>
+              </a:rPr>
+              <a:t> — </a:t>
+            </a:r>
+            <a:r>
+              <a:rPr sz="1100" b="0" dirty="0" err="1">
+                <a:solidFill>
+                  <a:srgbClr val="333333"/>
+                </a:solidFill>
+              </a:rPr>
+              <a:t>digitação</a:t>
+            </a:r>
+            <a:r>
+              <a:rPr sz="1100" b="0" dirty="0">
+                <a:solidFill>
+                  <a:srgbClr val="333333"/>
+                </a:solidFill>
+              </a:rPr>
+              <a:t>, </a:t>
+            </a:r>
+            <a:r>
+              <a:rPr sz="1100" b="0" dirty="0" err="1">
+                <a:solidFill>
+                  <a:srgbClr val="333333"/>
+                </a:solidFill>
+              </a:rPr>
+              <a:t>geolocalização</a:t>
+            </a:r>
+            <a:r>
+              <a:rPr sz="1100" b="0" dirty="0">
+                <a:solidFill>
+                  <a:srgbClr val="333333"/>
+                </a:solidFill>
+              </a:rPr>
+              <a:t>, </a:t>
+            </a:r>
+            <a:r>
+              <a:rPr sz="1100" b="0" dirty="0" err="1">
+                <a:solidFill>
+                  <a:srgbClr val="333333"/>
+                </a:solidFill>
+              </a:rPr>
+              <a:t>dispositivo</a:t>
+            </a:r>
+            <a:r>
+              <a:rPr sz="1100" b="0" dirty="0">
+                <a:solidFill>
+                  <a:srgbClr val="333333"/>
+                </a:solidFill>
+              </a:rPr>
+              <a:t>, </a:t>
+            </a:r>
+            <a:r>
+              <a:rPr sz="1100" b="0" dirty="0" err="1">
+                <a:solidFill>
+                  <a:srgbClr val="333333"/>
+                </a:solidFill>
+              </a:rPr>
+              <a:t>horário</a:t>
+            </a:r>
+            <a:r>
+              <a:rPr sz="1100" b="0" dirty="0">
+                <a:solidFill>
+                  <a:srgbClr val="333333"/>
+                </a:solidFill>
+              </a:rPr>
+              <a:t> e </a:t>
+            </a:r>
+            <a:r>
+              <a:rPr sz="1100" b="0" dirty="0" err="1">
+                <a:solidFill>
+                  <a:srgbClr val="333333"/>
+                </a:solidFill>
+              </a:rPr>
+              <a:t>navegação</a:t>
+            </a:r>
+            <a:r>
+              <a:rPr sz="1100" b="0" dirty="0">
+                <a:solidFill>
+                  <a:srgbClr val="333333"/>
+                </a:solidFill>
+              </a:rPr>
+              <a:t>.</a:t>
+            </a:r>
+          </a:p>
+          <a:p>
+            <a:pPr algn="just"/>
+            <a:endParaRPr lang="pt-BR" sz="1100" b="1" dirty="0">
+              <a:solidFill>
+                <a:srgbClr val="2D2DB9"/>
+              </a:solidFill>
+            </a:endParaRPr>
+          </a:p>
+          <a:p>
+            <a:pPr algn="just"/>
+            <a:r>
+              <a:rPr sz="1100" b="1" dirty="0">
+                <a:solidFill>
+                  <a:srgbClr val="2D2DB9"/>
+                </a:solidFill>
+              </a:rPr>
+              <a:t>(2) </a:t>
+            </a:r>
+            <a:r>
+              <a:rPr sz="1100" b="1" dirty="0" err="1">
+                <a:solidFill>
+                  <a:srgbClr val="2D2DB9"/>
+                </a:solidFill>
+              </a:rPr>
+              <a:t>Decisão</a:t>
+            </a:r>
+            <a:r>
+              <a:rPr sz="1100" b="1" dirty="0">
+                <a:solidFill>
+                  <a:srgbClr val="2D2DB9"/>
+                </a:solidFill>
+              </a:rPr>
+              <a:t> </a:t>
+            </a:r>
+            <a:r>
+              <a:rPr sz="1100" b="1" dirty="0" err="1">
+                <a:solidFill>
+                  <a:srgbClr val="2D2DB9"/>
+                </a:solidFill>
+              </a:rPr>
+              <a:t>adaptativa</a:t>
+            </a:r>
+            <a:r>
+              <a:rPr sz="1100" b="1" dirty="0">
+                <a:solidFill>
+                  <a:srgbClr val="2D2DB9"/>
+                </a:solidFill>
+              </a:rPr>
+              <a:t>: </a:t>
+            </a:r>
+            <a:r>
+              <a:rPr sz="1100" b="0" dirty="0">
+                <a:solidFill>
+                  <a:srgbClr val="333333"/>
+                </a:solidFill>
+              </a:rPr>
+              <a:t>ensemble Isolation Forest + Random Forest + Deep Learning, com score </a:t>
+            </a:r>
+            <a:r>
+              <a:rPr sz="1100" b="0" dirty="0" err="1">
+                <a:solidFill>
+                  <a:srgbClr val="333333"/>
+                </a:solidFill>
+              </a:rPr>
+              <a:t>contínuo</a:t>
+            </a:r>
+            <a:r>
+              <a:rPr sz="1100" b="0" dirty="0">
+                <a:solidFill>
+                  <a:srgbClr val="333333"/>
+                </a:solidFill>
+              </a:rPr>
+              <a:t> e 4 </a:t>
+            </a:r>
+            <a:r>
+              <a:rPr sz="1100" b="0" dirty="0" err="1">
+                <a:solidFill>
+                  <a:srgbClr val="333333"/>
+                </a:solidFill>
+              </a:rPr>
+              <a:t>níveis</a:t>
+            </a:r>
+            <a:r>
+              <a:rPr sz="1100" b="0" dirty="0">
+                <a:solidFill>
+                  <a:srgbClr val="333333"/>
+                </a:solidFill>
+              </a:rPr>
+              <a:t> de </a:t>
+            </a:r>
+            <a:r>
+              <a:rPr sz="1100" b="0" dirty="0" err="1">
+                <a:solidFill>
+                  <a:srgbClr val="333333"/>
+                </a:solidFill>
+              </a:rPr>
+              <a:t>resposta</a:t>
+            </a:r>
+            <a:r>
+              <a:rPr sz="1100" b="0" dirty="0">
+                <a:solidFill>
+                  <a:srgbClr val="333333"/>
+                </a:solidFill>
+              </a:rPr>
+              <a:t>.</a:t>
+            </a:r>
+          </a:p>
+          <a:p>
+            <a:pPr algn="just"/>
+            <a:endParaRPr lang="pt-BR" sz="1100" b="1" dirty="0">
+              <a:solidFill>
+                <a:srgbClr val="2D2DB9"/>
+              </a:solidFill>
+            </a:endParaRPr>
+          </a:p>
+          <a:p>
+            <a:pPr algn="just"/>
+            <a:r>
+              <a:rPr sz="1100" b="1" dirty="0">
+                <a:solidFill>
+                  <a:srgbClr val="2D2DB9"/>
+                </a:solidFill>
+              </a:rPr>
+              <a:t>(3) Auditoria </a:t>
+            </a:r>
+            <a:r>
+              <a:rPr sz="1100" b="1" dirty="0" err="1">
+                <a:solidFill>
+                  <a:srgbClr val="2D2DB9"/>
+                </a:solidFill>
+              </a:rPr>
+              <a:t>imutável</a:t>
+            </a:r>
+            <a:r>
+              <a:rPr sz="1100" b="1" dirty="0">
+                <a:solidFill>
+                  <a:srgbClr val="2D2DB9"/>
+                </a:solidFill>
+              </a:rPr>
+              <a:t>: </a:t>
+            </a:r>
+            <a:r>
+              <a:rPr sz="1100" b="0" dirty="0" err="1">
+                <a:solidFill>
+                  <a:srgbClr val="333333"/>
+                </a:solidFill>
+              </a:rPr>
+              <a:t>registro</a:t>
+            </a:r>
+            <a:r>
+              <a:rPr sz="1100" b="0" dirty="0">
+                <a:solidFill>
+                  <a:srgbClr val="333333"/>
+                </a:solidFill>
+              </a:rPr>
+              <a:t> de </a:t>
+            </a:r>
+            <a:r>
+              <a:rPr sz="1100" b="0" dirty="0" err="1">
+                <a:solidFill>
+                  <a:srgbClr val="333333"/>
+                </a:solidFill>
+              </a:rPr>
+              <a:t>cada</a:t>
+            </a:r>
+            <a:r>
+              <a:rPr sz="1100" b="0" dirty="0">
+                <a:solidFill>
+                  <a:srgbClr val="333333"/>
+                </a:solidFill>
+              </a:rPr>
+              <a:t> </a:t>
+            </a:r>
+            <a:r>
+              <a:rPr sz="1100" b="0" dirty="0" err="1">
+                <a:solidFill>
+                  <a:srgbClr val="333333"/>
+                </a:solidFill>
+              </a:rPr>
+              <a:t>decisão</a:t>
+            </a:r>
+            <a:r>
+              <a:rPr sz="1100" b="0" dirty="0">
+                <a:solidFill>
+                  <a:srgbClr val="333333"/>
+                </a:solidFill>
+              </a:rPr>
+              <a:t> </a:t>
+            </a:r>
+            <a:r>
+              <a:rPr sz="1100" b="0" dirty="0" err="1">
+                <a:solidFill>
+                  <a:srgbClr val="333333"/>
+                </a:solidFill>
+              </a:rPr>
+              <a:t>em</a:t>
+            </a:r>
+            <a:r>
+              <a:rPr sz="1100" b="0" dirty="0">
+                <a:solidFill>
+                  <a:srgbClr val="333333"/>
+                </a:solidFill>
+              </a:rPr>
+              <a:t> blockchain </a:t>
+            </a:r>
+            <a:r>
+              <a:rPr sz="1100" b="0" dirty="0" err="1">
+                <a:solidFill>
+                  <a:srgbClr val="333333"/>
+                </a:solidFill>
+              </a:rPr>
+              <a:t>permissionada</a:t>
+            </a:r>
+            <a:r>
+              <a:rPr sz="1100" b="0" dirty="0">
+                <a:solidFill>
+                  <a:srgbClr val="333333"/>
+                </a:solidFill>
+              </a:rPr>
+              <a:t> (Hyperledger Fabric), </a:t>
+            </a:r>
+            <a:r>
+              <a:rPr sz="1100" b="0" dirty="0" err="1">
+                <a:solidFill>
+                  <a:srgbClr val="333333"/>
+                </a:solidFill>
+              </a:rPr>
+              <a:t>explicável</a:t>
+            </a:r>
+            <a:r>
+              <a:rPr sz="1100" b="0" dirty="0">
+                <a:solidFill>
+                  <a:srgbClr val="333333"/>
+                </a:solidFill>
+              </a:rPr>
+              <a:t> via SHAP/XAI.</a:t>
+            </a:r>
+          </a:p>
+        </p:txBody>
+      </p:sp>
+      <p:sp>
+        <p:nvSpPr>
+          <p:cNvPr id="12" name="relbox"/>
+          <p:cNvSpPr/>
+          <p:nvPr/>
+        </p:nvSpPr>
+        <p:spPr>
+          <a:xfrm>
+            <a:off x="179388" y="4500000"/>
+            <a:ext cx="8856662" cy="1900000"/>
+          </a:xfrm>
+          <a:prstGeom prst="roundRect">
+            <a:avLst>
+              <a:gd name="adj" fmla="val 3500"/>
+            </a:avLst>
+          </a:prstGeom>
+          <a:solidFill>
+            <a:srgbClr val="E6F7F1"/>
+          </a:solidFill>
+          <a:ln w="19050">
+            <a:solidFill>
+              <a:srgbClr val="00CC99"/>
+            </a:solidFill>
+          </a:ln>
+        </p:spPr>
+        <p:txBody>
+          <a:bodyPr/>
+          <a:lstStyle/>
+          <a:p>
+            <a:pPr>
+              <a:buNone/>
+            </a:pPr>
+            <a:endParaRPr lang="pt-BR"/>
+          </a:p>
+        </p:txBody>
+      </p:sp>
+      <p:sp>
+        <p:nvSpPr>
+          <p:cNvPr id="13" name="rlbl"/>
+          <p:cNvSpPr txBox="1"/>
+          <p:nvPr/>
+        </p:nvSpPr>
+        <p:spPr>
+          <a:xfrm>
+            <a:off x="400000" y="4565000"/>
+            <a:ext cx="8420000" cy="300000"/>
           </a:xfrm>
           <a:prstGeom prst="rect">
             <a:avLst/>
@@ -20302,309 +21977,32 @@
           <a:p>
             <a:pPr algn="l">
               <a:spcAft>
-                <a:spcPts val="140"/>
+                <a:spcPts val="0"/>
               </a:spcAft>
               <a:buNone/>
             </a:pPr>
             <a:r>
-              <a:rPr lang="pt-BR" sz="1050" b="1" dirty="0">
-                <a:solidFill>
-                  <a:srgbClr val="00CC99"/>
+              <a:rPr lang="pt-BR" sz="1200" b="1" dirty="0">
+                <a:solidFill>
+                  <a:srgbClr val="2D2DB9"/>
                 </a:solidFill>
                 <a:latin typeface="Titillium Web"/>
               </a:rPr>
-              <a:t>IA &amp; Aprendizado de Máquina</a:t>
-            </a:r>
-          </a:p>
-          <a:p>
-            <a:pPr algn="l">
-              <a:spcAft>
-                <a:spcPts val="300"/>
-              </a:spcAft>
-              <a:buNone/>
-            </a:pPr>
-            <a:r>
-              <a:rPr lang="pt-BR" sz="900" b="1" dirty="0">
-                <a:solidFill>
-                  <a:srgbClr val="2D2DB9"/>
-                </a:solidFill>
-                <a:latin typeface="Titillium Web"/>
-              </a:rPr>
-              <a:t>ML — </a:t>
-            </a:r>
-            <a:r>
-              <a:rPr lang="pt-BR" sz="900" b="0" dirty="0">
-                <a:solidFill>
-                  <a:srgbClr val="333333"/>
-                </a:solidFill>
-                <a:latin typeface="Titillium Web"/>
-              </a:rPr>
-              <a:t>Machine Learning</a:t>
-            </a:r>
-          </a:p>
-          <a:p>
-            <a:pPr algn="l">
-              <a:spcAft>
-                <a:spcPts val="300"/>
-              </a:spcAft>
-              <a:buNone/>
-            </a:pPr>
-            <a:r>
-              <a:rPr lang="pt-BR" sz="900" b="1" dirty="0">
-                <a:solidFill>
-                  <a:srgbClr val="2D2DB9"/>
-                </a:solidFill>
-                <a:latin typeface="Titillium Web"/>
-              </a:rPr>
-              <a:t>DL — </a:t>
-            </a:r>
-            <a:r>
-              <a:rPr lang="pt-BR" sz="900" b="0" dirty="0">
-                <a:solidFill>
-                  <a:srgbClr val="333333"/>
-                </a:solidFill>
-                <a:latin typeface="Titillium Web"/>
-              </a:rPr>
-              <a:t>Deep Learning</a:t>
-            </a:r>
-          </a:p>
-          <a:p>
-            <a:pPr algn="l">
-              <a:spcAft>
-                <a:spcPts val="300"/>
-              </a:spcAft>
-              <a:buNone/>
-            </a:pPr>
-            <a:r>
-              <a:rPr lang="pt-BR" sz="900" b="1" dirty="0">
-                <a:solidFill>
-                  <a:srgbClr val="2D2DB9"/>
-                </a:solidFill>
-                <a:latin typeface="Titillium Web"/>
-              </a:rPr>
-              <a:t>LSTM — </a:t>
-            </a:r>
-            <a:r>
-              <a:rPr lang="pt-BR" sz="900" b="0" dirty="0">
-                <a:solidFill>
-                  <a:srgbClr val="333333"/>
-                </a:solidFill>
-                <a:latin typeface="Titillium Web"/>
-              </a:rPr>
-              <a:t>rede neural recorrente</a:t>
-            </a:r>
-          </a:p>
-          <a:p>
-            <a:pPr algn="l">
-              <a:spcAft>
-                <a:spcPts val="300"/>
-              </a:spcAft>
-              <a:buNone/>
-            </a:pPr>
-            <a:r>
-              <a:rPr lang="pt-BR" sz="900" b="1" dirty="0">
-                <a:solidFill>
-                  <a:srgbClr val="2D2DB9"/>
-                </a:solidFill>
-                <a:latin typeface="Titillium Web"/>
-              </a:rPr>
-              <a:t>CNN — </a:t>
-            </a:r>
-            <a:r>
-              <a:rPr lang="pt-BR" sz="900" b="0" dirty="0">
-                <a:solidFill>
-                  <a:srgbClr val="333333"/>
-                </a:solidFill>
-                <a:latin typeface="Titillium Web"/>
-              </a:rPr>
-              <a:t>rede neural convolucional</a:t>
-            </a:r>
-          </a:p>
-          <a:p>
-            <a:pPr algn="l">
-              <a:spcAft>
-                <a:spcPts val="300"/>
-              </a:spcAft>
-              <a:buNone/>
-            </a:pPr>
-            <a:r>
-              <a:rPr lang="pt-BR" sz="900" b="1" dirty="0">
-                <a:solidFill>
-                  <a:srgbClr val="2D2DB9"/>
-                </a:solidFill>
-                <a:latin typeface="Titillium Web"/>
-              </a:rPr>
-              <a:t>iForest/IF — </a:t>
-            </a:r>
-            <a:r>
-              <a:rPr lang="pt-BR" sz="900" b="0" dirty="0">
-                <a:solidFill>
-                  <a:srgbClr val="333333"/>
-                </a:solidFill>
-                <a:latin typeface="Titillium Web"/>
-              </a:rPr>
-              <a:t>Isolation Forest</a:t>
-            </a:r>
-          </a:p>
-          <a:p>
-            <a:pPr algn="l">
-              <a:spcAft>
-                <a:spcPts val="300"/>
-              </a:spcAft>
-              <a:buNone/>
-            </a:pPr>
-            <a:r>
-              <a:rPr lang="pt-BR" sz="900" b="1" dirty="0">
-                <a:solidFill>
-                  <a:srgbClr val="2D2DB9"/>
-                </a:solidFill>
-                <a:latin typeface="Titillium Web"/>
-              </a:rPr>
-              <a:t>RF — </a:t>
-            </a:r>
-            <a:r>
-              <a:rPr lang="pt-BR" sz="900" b="0" dirty="0">
-                <a:solidFill>
-                  <a:srgbClr val="333333"/>
-                </a:solidFill>
-                <a:latin typeface="Titillium Web"/>
-              </a:rPr>
-              <a:t>Random Forest</a:t>
-            </a:r>
-          </a:p>
-          <a:p>
-            <a:pPr algn="l">
-              <a:spcAft>
-                <a:spcPts val="140"/>
-              </a:spcAft>
-              <a:buNone/>
-            </a:pPr>
-            <a:r>
-              <a:rPr lang="pt-BR" sz="1050" b="1" dirty="0">
-                <a:solidFill>
-                  <a:srgbClr val="00CC99"/>
-                </a:solidFill>
-                <a:latin typeface="Titillium Web"/>
-              </a:rPr>
-              <a:t>Explicabilidade &amp; Segurança</a:t>
-            </a:r>
-          </a:p>
-          <a:p>
-            <a:pPr algn="l">
-              <a:spcAft>
-                <a:spcPts val="300"/>
-              </a:spcAft>
-              <a:buNone/>
-            </a:pPr>
-            <a:r>
-              <a:rPr lang="pt-BR" sz="900" b="1" dirty="0">
-                <a:solidFill>
-                  <a:srgbClr val="2D2DB9"/>
-                </a:solidFill>
-                <a:latin typeface="Titillium Web"/>
-              </a:rPr>
-              <a:t>XAI — </a:t>
-            </a:r>
-            <a:r>
-              <a:rPr lang="pt-BR" sz="900" b="0" dirty="0">
-                <a:solidFill>
-                  <a:srgbClr val="333333"/>
-                </a:solidFill>
-                <a:latin typeface="Titillium Web"/>
-              </a:rPr>
-              <a:t>IA Explicável</a:t>
-            </a:r>
-          </a:p>
-          <a:p>
-            <a:pPr algn="l">
-              <a:spcAft>
-                <a:spcPts val="300"/>
-              </a:spcAft>
-              <a:buNone/>
-            </a:pPr>
-            <a:r>
-              <a:rPr lang="pt-BR" sz="900" b="1" dirty="0">
-                <a:solidFill>
-                  <a:srgbClr val="2D2DB9"/>
-                </a:solidFill>
-                <a:latin typeface="Titillium Web"/>
-              </a:rPr>
-              <a:t>SHAP — </a:t>
-            </a:r>
-            <a:r>
-              <a:rPr lang="pt-BR" sz="900" b="0" dirty="0">
-                <a:solidFill>
-                  <a:srgbClr val="333333"/>
-                </a:solidFill>
-                <a:latin typeface="Titillium Web"/>
-              </a:rPr>
-              <a:t>SHapley Additive exPlanations</a:t>
-            </a:r>
-          </a:p>
-          <a:p>
-            <a:pPr algn="l">
-              <a:spcAft>
-                <a:spcPts val="300"/>
-              </a:spcAft>
-              <a:buNone/>
-            </a:pPr>
-            <a:r>
-              <a:rPr lang="pt-BR" sz="900" b="1" dirty="0">
-                <a:solidFill>
-                  <a:srgbClr val="2D2DB9"/>
-                </a:solidFill>
-                <a:latin typeface="Titillium Web"/>
-              </a:rPr>
-              <a:t>LIME — </a:t>
-            </a:r>
-            <a:r>
-              <a:rPr lang="pt-BR" sz="900" b="0" dirty="0">
-                <a:solidFill>
-                  <a:srgbClr val="333333"/>
-                </a:solidFill>
-                <a:latin typeface="Titillium Web"/>
-              </a:rPr>
-              <a:t>Local Interpretable Model-agnostic Expl.</a:t>
-            </a:r>
-          </a:p>
-          <a:p>
-            <a:pPr algn="l">
-              <a:spcAft>
-                <a:spcPts val="300"/>
-              </a:spcAft>
-              <a:buNone/>
-            </a:pPr>
-            <a:r>
-              <a:rPr lang="pt-BR" sz="900" b="1" dirty="0">
-                <a:solidFill>
-                  <a:srgbClr val="2D2DB9"/>
-                </a:solidFill>
-                <a:latin typeface="Titillium Web"/>
-              </a:rPr>
-              <a:t>IDS — </a:t>
-            </a:r>
-            <a:r>
-              <a:rPr lang="pt-BR" sz="900" b="0" dirty="0">
-                <a:solidFill>
-                  <a:srgbClr val="333333"/>
-                </a:solidFill>
-                <a:latin typeface="Titillium Web"/>
-              </a:rPr>
-              <a:t>Intrusion Detection System</a:t>
+              <a:t>Lacuna que a proposta preenche</a:t>
             </a:r>
           </a:p>
         </p:txBody>
       </p:sp>
       <p:sp>
         <p:nvSpPr>
-          <p:cNvPr id="11" name="cB"/>
+          <p:cNvPr id="14" name="rtxt"/>
           <p:cNvSpPr txBox="1"/>
           <p:nvPr/>
         </p:nvSpPr>
         <p:spPr>
           <a:xfrm>
-            <a:off x="3172462" y="1430000"/>
-            <a:ext cx="2810000" cy="4950000"/>
+            <a:off x="400000" y="4900000"/>
+            <a:ext cx="8420000" cy="1450000"/>
           </a:xfrm>
           <a:prstGeom prst="rect">
             <a:avLst/>
@@ -20612,619 +22010,24 @@
           <a:noFill/>
         </p:spPr>
         <p:txBody>
-          <a:bodyPr wrap="square">
+          <a:bodyPr wrap="square" anchor="t">
             <a:normAutofit/>
           </a:bodyPr>
           <a:lstStyle/>
           <a:p>
-            <a:pPr algn="l">
+            <a:pPr algn="just">
               <a:spcAft>
-                <a:spcPts val="140"/>
+                <a:spcPts val="0"/>
               </a:spcAft>
               <a:buNone/>
             </a:pPr>
             <a:r>
-              <a:rPr lang="pt-BR" sz="1050" b="1" dirty="0">
-                <a:solidFill>
-                  <a:srgbClr val="00CC99"/>
-                </a:solidFill>
-                <a:latin typeface="Titillium Web"/>
-              </a:rPr>
-              <a:t>Métricas</a:t>
-            </a:r>
-          </a:p>
-          <a:p>
-            <a:pPr algn="l">
-              <a:spcAft>
-                <a:spcPts val="300"/>
-              </a:spcAft>
-              <a:buNone/>
-            </a:pPr>
-            <a:r>
-              <a:rPr lang="pt-BR" sz="900" b="1" dirty="0">
-                <a:solidFill>
-                  <a:srgbClr val="2D2DB9"/>
-                </a:solidFill>
-                <a:latin typeface="Titillium Web"/>
-              </a:rPr>
-              <a:t>EER — </a:t>
-            </a:r>
-            <a:r>
-              <a:rPr lang="pt-BR" sz="900" b="0" dirty="0">
+              <a:rPr sz="1150" b="0">
                 <a:solidFill>
                   <a:srgbClr val="333333"/>
                 </a:solidFill>
-                <a:latin typeface="Titillium Web"/>
-              </a:rPr>
-              <a:t>Equal Error Rate (menor = melhor)</a:t>
-            </a:r>
-          </a:p>
-          <a:p>
-            <a:pPr algn="l">
-              <a:spcAft>
-                <a:spcPts val="300"/>
-              </a:spcAft>
-              <a:buNone/>
-            </a:pPr>
-            <a:r>
-              <a:rPr lang="pt-BR" sz="900" b="1" dirty="0">
-                <a:solidFill>
-                  <a:srgbClr val="2D2DB9"/>
-                </a:solidFill>
-                <a:latin typeface="Titillium Web"/>
-              </a:rPr>
-              <a:t>AUC — </a:t>
-            </a:r>
-            <a:r>
-              <a:rPr lang="pt-BR" sz="900" b="0" dirty="0">
-                <a:solidFill>
-                  <a:srgbClr val="333333"/>
-                </a:solidFill>
-                <a:latin typeface="Titillium Web"/>
-              </a:rPr>
-              <a:t>área sob a curva ROC</a:t>
-            </a:r>
-          </a:p>
-          <a:p>
-            <a:pPr algn="l">
-              <a:spcAft>
-                <a:spcPts val="140"/>
-              </a:spcAft>
-              <a:buNone/>
-            </a:pPr>
-            <a:r>
-              <a:rPr lang="pt-BR" sz="1050" b="1" dirty="0">
-                <a:solidFill>
-                  <a:srgbClr val="00CC99"/>
-                </a:solidFill>
-                <a:latin typeface="Titillium Web"/>
-              </a:rPr>
-              <a:t>Autenticação</a:t>
-            </a:r>
-          </a:p>
-          <a:p>
-            <a:pPr algn="l">
-              <a:spcAft>
-                <a:spcPts val="300"/>
-              </a:spcAft>
-              <a:buNone/>
-            </a:pPr>
-            <a:r>
-              <a:rPr lang="pt-BR" sz="900" b="1" dirty="0">
-                <a:solidFill>
-                  <a:srgbClr val="2D2DB9"/>
-                </a:solidFill>
-                <a:latin typeface="Titillium Web"/>
-              </a:rPr>
-              <a:t>RBA — </a:t>
-            </a:r>
-            <a:r>
-              <a:rPr lang="pt-BR" sz="900" b="0" dirty="0">
-                <a:solidFill>
-                  <a:srgbClr val="333333"/>
-                </a:solidFill>
-                <a:latin typeface="Titillium Web"/>
-              </a:rPr>
-              <a:t>Risk-Based Authentication</a:t>
-            </a:r>
-          </a:p>
-          <a:p>
-            <a:pPr algn="l">
-              <a:spcAft>
-                <a:spcPts val="300"/>
-              </a:spcAft>
-              <a:buNone/>
-            </a:pPr>
-            <a:r>
-              <a:rPr lang="pt-BR" sz="900" b="1" dirty="0">
-                <a:solidFill>
-                  <a:srgbClr val="2D2DB9"/>
-                </a:solidFill>
-                <a:latin typeface="Titillium Web"/>
-              </a:rPr>
-              <a:t>MFA/2FA — </a:t>
-            </a:r>
-            <a:r>
-              <a:rPr lang="pt-BR" sz="900" b="0" dirty="0">
-                <a:solidFill>
-                  <a:srgbClr val="333333"/>
-                </a:solidFill>
-                <a:latin typeface="Titillium Web"/>
-              </a:rPr>
-              <a:t>autenticação multifator / 2 etapas</a:t>
-            </a:r>
-          </a:p>
-          <a:p>
-            <a:pPr algn="l">
-              <a:spcAft>
-                <a:spcPts val="300"/>
-              </a:spcAft>
-              <a:buNone/>
-            </a:pPr>
-            <a:r>
-              <a:rPr lang="pt-BR" sz="900" b="1" dirty="0">
-                <a:solidFill>
-                  <a:srgbClr val="2D2DB9"/>
-                </a:solidFill>
-                <a:latin typeface="Titillium Web"/>
-              </a:rPr>
-              <a:t>KYC — </a:t>
-            </a:r>
-            <a:r>
-              <a:rPr lang="pt-BR" sz="900" b="0" dirty="0">
-                <a:solidFill>
-                  <a:srgbClr val="333333"/>
-                </a:solidFill>
-                <a:latin typeface="Titillium Web"/>
-              </a:rPr>
-              <a:t>Know Your Customer</a:t>
-            </a:r>
-          </a:p>
-          <a:p>
-            <a:pPr algn="l">
-              <a:spcAft>
-                <a:spcPts val="300"/>
-              </a:spcAft>
-              <a:buNone/>
-            </a:pPr>
-            <a:r>
-              <a:rPr lang="pt-BR" sz="900" b="1" dirty="0">
-                <a:solidFill>
-                  <a:srgbClr val="2D2DB9"/>
-                </a:solidFill>
-                <a:latin typeface="Titillium Web"/>
-              </a:rPr>
-              <a:t>OCR — </a:t>
-            </a:r>
-            <a:r>
-              <a:rPr lang="pt-BR" sz="900" b="0" dirty="0">
-                <a:solidFill>
-                  <a:srgbClr val="333333"/>
-                </a:solidFill>
-                <a:latin typeface="Titillium Web"/>
-              </a:rPr>
-              <a:t>Reconhecimento Óptico de Caracteres</a:t>
-            </a:r>
-          </a:p>
-          <a:p>
-            <a:pPr algn="l">
-              <a:spcAft>
-                <a:spcPts val="300"/>
-              </a:spcAft>
-              <a:buNone/>
-            </a:pPr>
-            <a:r>
-              <a:rPr lang="pt-BR" sz="900" b="1" dirty="0">
-                <a:solidFill>
-                  <a:srgbClr val="2D2DB9"/>
-                </a:solidFill>
-                <a:latin typeface="Titillium Web"/>
-              </a:rPr>
-              <a:t>RTT — </a:t>
-            </a:r>
-            <a:r>
-              <a:rPr lang="pt-BR" sz="900" b="0" dirty="0">
-                <a:solidFill>
-                  <a:srgbClr val="333333"/>
-                </a:solidFill>
-                <a:latin typeface="Titillium Web"/>
-              </a:rPr>
-              <a:t>Round-Trip Time</a:t>
-            </a:r>
-          </a:p>
-          <a:p>
-            <a:pPr algn="l">
-              <a:spcAft>
-                <a:spcPts val="300"/>
-              </a:spcAft>
-              <a:buNone/>
-            </a:pPr>
-            <a:r>
-              <a:rPr lang="pt-BR" sz="900" b="1" dirty="0">
-                <a:solidFill>
-                  <a:srgbClr val="2D2DB9"/>
-                </a:solidFill>
-                <a:latin typeface="Titillium Web"/>
-              </a:rPr>
-              <a:t>IP — </a:t>
-            </a:r>
-            <a:r>
-              <a:rPr lang="pt-BR" sz="900" b="0" dirty="0">
-                <a:solidFill>
-                  <a:srgbClr val="333333"/>
-                </a:solidFill>
-                <a:latin typeface="Titillium Web"/>
-              </a:rPr>
-              <a:t>Internet Protocol</a:t>
-            </a:r>
-          </a:p>
-        </p:txBody>
-      </p:sp>
-      <p:sp>
-        <p:nvSpPr>
-          <p:cNvPr id="12" name="cC"/>
-          <p:cNvSpPr txBox="1"/>
-          <p:nvPr/>
-        </p:nvSpPr>
-        <p:spPr>
-          <a:xfrm>
-            <a:off x="6165536" y="1430000"/>
-            <a:ext cx="2810000" cy="4950000"/>
-          </a:xfrm>
-          <a:prstGeom prst="rect">
-            <a:avLst/>
-          </a:prstGeom>
-          <a:noFill/>
-        </p:spPr>
-        <p:txBody>
-          <a:bodyPr wrap="square">
-            <a:normAutofit/>
-          </a:bodyPr>
-          <a:lstStyle/>
-          <a:p>
-            <a:pPr algn="l">
-              <a:spcAft>
-                <a:spcPts val="140"/>
-              </a:spcAft>
-              <a:buNone/>
-            </a:pPr>
-            <a:r>
-              <a:rPr lang="pt-BR" sz="1050" b="1" dirty="0">
-                <a:solidFill>
-                  <a:srgbClr val="00CC99"/>
-                </a:solidFill>
-                <a:latin typeface="Titillium Web"/>
-              </a:rPr>
-              <a:t>Datasets</a:t>
-            </a:r>
-          </a:p>
-          <a:p>
-            <a:pPr algn="l">
-              <a:spcAft>
-                <a:spcPts val="300"/>
-              </a:spcAft>
-              <a:buNone/>
-            </a:pPr>
-            <a:r>
-              <a:rPr lang="pt-BR" sz="900" b="1" dirty="0">
-                <a:solidFill>
-                  <a:srgbClr val="2D2DB9"/>
-                </a:solidFill>
-                <a:latin typeface="Titillium Web"/>
-              </a:rPr>
-              <a:t>Aalto — </a:t>
-            </a:r>
-            <a:r>
-              <a:rPr lang="pt-BR" sz="900" b="0" dirty="0">
-                <a:solidFill>
-                  <a:srgbClr val="333333"/>
-                </a:solidFill>
-                <a:latin typeface="Titillium Web"/>
-              </a:rPr>
-              <a:t>base de digitação de larga escala</a:t>
-            </a:r>
-          </a:p>
-          <a:p>
-            <a:pPr algn="l">
-              <a:spcAft>
-                <a:spcPts val="300"/>
-              </a:spcAft>
-              <a:buNone/>
-            </a:pPr>
-            <a:r>
-              <a:rPr lang="pt-BR" sz="900" b="1" dirty="0">
-                <a:solidFill>
-                  <a:srgbClr val="2D2DB9"/>
-                </a:solidFill>
-                <a:latin typeface="Titillium Web"/>
-              </a:rPr>
-              <a:t>CMU — </a:t>
-            </a:r>
-            <a:r>
-              <a:rPr lang="pt-BR" sz="900" b="0" dirty="0">
-                <a:solidFill>
-                  <a:srgbClr val="333333"/>
-                </a:solidFill>
-                <a:latin typeface="Titillium Web"/>
-              </a:rPr>
-              <a:t>benchmark de keystroke (Carnegie Mellon)</a:t>
-            </a:r>
-          </a:p>
-          <a:p>
-            <a:pPr algn="l">
-              <a:spcAft>
-                <a:spcPts val="300"/>
-              </a:spcAft>
-              <a:buNone/>
-            </a:pPr>
-            <a:r>
-              <a:rPr lang="pt-BR" sz="900" b="1" dirty="0">
-                <a:solidFill>
-                  <a:srgbClr val="2D2DB9"/>
-                </a:solidFill>
-                <a:latin typeface="Titillium Web"/>
-              </a:rPr>
-              <a:t>NSL-KDD — </a:t>
-            </a:r>
-            <a:r>
-              <a:rPr lang="pt-BR" sz="900" b="0" dirty="0">
-                <a:solidFill>
-                  <a:srgbClr val="333333"/>
-                </a:solidFill>
-                <a:latin typeface="Titillium Web"/>
-              </a:rPr>
-              <a:t>dataset de detecção de intrusão</a:t>
-            </a:r>
-          </a:p>
-          <a:p>
-            <a:pPr algn="l">
-              <a:spcAft>
-                <a:spcPts val="140"/>
-              </a:spcAft>
-              <a:buNone/>
-            </a:pPr>
-            <a:r>
-              <a:rPr lang="pt-BR" sz="1050" b="1" dirty="0">
-                <a:solidFill>
-                  <a:srgbClr val="00CC99"/>
-                </a:solidFill>
-                <a:latin typeface="Titillium Web"/>
-              </a:rPr>
-              <a:t>Veículos &amp; Órgãos</a:t>
-            </a:r>
-          </a:p>
-          <a:p>
-            <a:pPr algn="l">
-              <a:spcAft>
-                <a:spcPts val="300"/>
-              </a:spcAft>
-              <a:buNone/>
-            </a:pPr>
-            <a:r>
-              <a:rPr lang="pt-BR" sz="900" b="1" dirty="0">
-                <a:solidFill>
-                  <a:srgbClr val="2D2DB9"/>
-                </a:solidFill>
-                <a:latin typeface="Titillium Web"/>
-              </a:rPr>
-              <a:t>TBIOM — </a:t>
-            </a:r>
-            <a:r>
-              <a:rPr lang="pt-BR" sz="900" b="0" dirty="0">
-                <a:solidFill>
-                  <a:srgbClr val="333333"/>
-                </a:solidFill>
-                <a:latin typeface="Titillium Web"/>
-              </a:rPr>
-              <a:t>IEEE T. Biometrics, Behavior &amp; Identity</a:t>
-            </a:r>
-          </a:p>
-          <a:p>
-            <a:pPr algn="l">
-              <a:spcAft>
-                <a:spcPts val="300"/>
-              </a:spcAft>
-              <a:buNone/>
-            </a:pPr>
-            <a:r>
-              <a:rPr lang="pt-BR" sz="900" b="1" dirty="0">
-                <a:solidFill>
-                  <a:srgbClr val="2D2DB9"/>
-                </a:solidFill>
-                <a:latin typeface="Titillium Web"/>
-              </a:rPr>
-              <a:t>TOPS — </a:t>
-            </a:r>
-            <a:r>
-              <a:rPr lang="pt-BR" sz="900" b="0" dirty="0">
-                <a:solidFill>
-                  <a:srgbClr val="333333"/>
-                </a:solidFill>
-                <a:latin typeface="Titillium Web"/>
-              </a:rPr>
-              <a:t>ACM T. on Privacy and Security</a:t>
-            </a:r>
-          </a:p>
-          <a:p>
-            <a:pPr algn="l">
-              <a:spcAft>
-                <a:spcPts val="300"/>
-              </a:spcAft>
-              <a:buNone/>
-            </a:pPr>
-            <a:r>
-              <a:rPr lang="pt-BR" sz="900" b="1" dirty="0">
-                <a:solidFill>
-                  <a:srgbClr val="2D2DB9"/>
-                </a:solidFill>
-                <a:latin typeface="Titillium Web"/>
-              </a:rPr>
-              <a:t>TIFS — </a:t>
-            </a:r>
-            <a:r>
-              <a:rPr lang="pt-BR" sz="900" b="0" dirty="0">
-                <a:solidFill>
-                  <a:srgbClr val="333333"/>
-                </a:solidFill>
-                <a:latin typeface="Titillium Web"/>
-              </a:rPr>
-              <a:t>IEEE T. Information Forensics &amp; Security</a:t>
-            </a:r>
-          </a:p>
-          <a:p>
-            <a:pPr algn="l">
-              <a:spcAft>
-                <a:spcPts val="300"/>
-              </a:spcAft>
-              <a:buNone/>
-            </a:pPr>
-            <a:r>
-              <a:rPr lang="pt-BR" sz="900" b="1" dirty="0">
-                <a:solidFill>
-                  <a:srgbClr val="2D2DB9"/>
-                </a:solidFill>
-                <a:latin typeface="Titillium Web"/>
-              </a:rPr>
-              <a:t>ICDM — </a:t>
-            </a:r>
-            <a:r>
-              <a:rPr lang="pt-BR" sz="900" b="0" dirty="0">
-                <a:solidFill>
-                  <a:srgbClr val="333333"/>
-                </a:solidFill>
-                <a:latin typeface="Titillium Web"/>
-              </a:rPr>
-              <a:t>IEEE Int. Conf. on Data Mining</a:t>
-            </a:r>
-          </a:p>
-          <a:p>
-            <a:pPr algn="l">
-              <a:spcAft>
-                <a:spcPts val="300"/>
-              </a:spcAft>
-              <a:buNone/>
-            </a:pPr>
-            <a:r>
-              <a:rPr lang="pt-BR" sz="900" b="1" dirty="0">
-                <a:solidFill>
-                  <a:srgbClr val="2D2DB9"/>
-                </a:solidFill>
-                <a:latin typeface="Titillium Web"/>
-              </a:rPr>
-              <a:t>DSN — </a:t>
-            </a:r>
-            <a:r>
-              <a:rPr lang="pt-BR" sz="900" b="0" dirty="0">
-                <a:solidFill>
-                  <a:srgbClr val="333333"/>
-                </a:solidFill>
-                <a:latin typeface="Titillium Web"/>
-              </a:rPr>
-              <a:t>Dependable Systems and Networks</a:t>
-            </a:r>
-          </a:p>
-          <a:p>
-            <a:pPr algn="l">
-              <a:spcAft>
-                <a:spcPts val="300"/>
-              </a:spcAft>
-              <a:buNone/>
-            </a:pPr>
-            <a:r>
-              <a:rPr lang="pt-BR" sz="900" b="1" dirty="0">
-                <a:solidFill>
-                  <a:srgbClr val="2D2DB9"/>
-                </a:solidFill>
-                <a:latin typeface="Titillium Web"/>
-              </a:rPr>
-              <a:t>FC — </a:t>
-            </a:r>
-            <a:r>
-              <a:rPr lang="pt-BR" sz="900" b="0" dirty="0">
-                <a:solidFill>
-                  <a:srgbClr val="333333"/>
-                </a:solidFill>
-                <a:latin typeface="Titillium Web"/>
-              </a:rPr>
-              <a:t>Financial Cryptography</a:t>
-            </a:r>
-          </a:p>
-          <a:p>
-            <a:pPr algn="l">
-              <a:spcAft>
-                <a:spcPts val="300"/>
-              </a:spcAft>
-              <a:buNone/>
-            </a:pPr>
-            <a:r>
-              <a:rPr lang="pt-BR" sz="900" b="1" dirty="0">
-                <a:solidFill>
-                  <a:srgbClr val="2D2DB9"/>
-                </a:solidFill>
-                <a:latin typeface="Titillium Web"/>
-              </a:rPr>
-              <a:t>CSUR — </a:t>
-            </a:r>
-            <a:r>
-              <a:rPr lang="pt-BR" sz="900" b="0" dirty="0">
-                <a:solidFill>
-                  <a:srgbClr val="333333"/>
-                </a:solidFill>
-                <a:latin typeface="Titillium Web"/>
-              </a:rPr>
-              <a:t>ACM Computing Surveys</a:t>
-            </a:r>
-          </a:p>
-          <a:p>
-            <a:pPr algn="l">
-              <a:spcAft>
-                <a:spcPts val="300"/>
-              </a:spcAft>
-              <a:buNone/>
-            </a:pPr>
-            <a:r>
-              <a:rPr lang="pt-BR" sz="900" b="1" dirty="0">
-                <a:solidFill>
-                  <a:srgbClr val="2D2DB9"/>
-                </a:solidFill>
-                <a:latin typeface="Titillium Web"/>
-              </a:rPr>
-              <a:t>NIST — </a:t>
-            </a:r>
-            <a:r>
-              <a:rPr lang="pt-BR" sz="900" b="0" dirty="0">
-                <a:solidFill>
-                  <a:srgbClr val="333333"/>
-                </a:solidFill>
-                <a:latin typeface="Titillium Web"/>
-              </a:rPr>
-              <a:t>Nat. Institute of Standards and Tech.</a:t>
-            </a:r>
-          </a:p>
-          <a:p>
-            <a:pPr algn="l">
-              <a:spcAft>
-                <a:spcPts val="300"/>
-              </a:spcAft>
-              <a:buNone/>
-            </a:pPr>
-            <a:r>
-              <a:rPr lang="pt-BR" sz="900" b="1" dirty="0">
-                <a:solidFill>
-                  <a:srgbClr val="2D2DB9"/>
-                </a:solidFill>
-                <a:latin typeface="Titillium Web"/>
-              </a:rPr>
-              <a:t>INPI — </a:t>
-            </a:r>
-            <a:r>
-              <a:rPr lang="pt-BR" sz="900" b="0" dirty="0">
-                <a:solidFill>
-                  <a:srgbClr val="333333"/>
-                </a:solidFill>
-                <a:latin typeface="Titillium Web"/>
-              </a:rPr>
-              <a:t>Inst. Nacional da Propriedade Industrial</a:t>
+              </a:rPr>
+              <a:t>A revisão a seguir mostrará que nenhum trabalho reúne os três eixos simultaneamente: a literatura avança em cada frente isoladamente (biometria, RBA, detecção de anomalias, auditoria). A integração ponta a ponta — decisão adaptativa explicável acoplada à auditoria imutável — é o diferencial central desta proposta.</a:t>
             </a:r>
           </a:p>
         </p:txBody>
@@ -21276,7 +22079,7 @@
             </a:pPr>
             <a:r>
               <a:rPr lang="pt-BR" dirty="0"/>
-              <a:t>O Comportamento como Vetor de Segurança</a:t>
+              <a:t>Legenda — Siglas e Abreviações</a:t>
             </a:r>
           </a:p>
         </p:txBody>
@@ -21306,48 +22109,14 @@
       </p:sp>
       <p:sp>
         <p:nvSpPr>
-          <p:cNvPr id="10" name="box1"/>
-          <p:cNvSpPr/>
-          <p:nvPr/>
-        </p:nvSpPr>
-        <p:spPr>
-          <a:xfrm>
-            <a:off x="179388" y="1424940"/>
-            <a:ext cx="8856662" cy="2980000"/>
-          </a:xfrm>
-          <a:prstGeom prst="roundRect">
-            <a:avLst>
-              <a:gd name="adj" fmla="val 3500"/>
-            </a:avLst>
-          </a:prstGeom>
-          <a:solidFill>
-            <a:srgbClr val="F2F4F6"/>
-          </a:solidFill>
-          <a:ln>
-            <a:noFill/>
-          </a:ln>
-        </p:spPr>
-        <p:txBody>
-          <a:bodyPr/>
-          <a:lstStyle/>
-          <a:p>
-            <a:pPr>
-              <a:buNone/>
-            </a:pPr>
-            <a:endParaRPr lang="pt-BR"/>
-          </a:p>
-        </p:txBody>
-      </p:sp>
-      <p:sp>
-        <p:nvSpPr>
-          <p:cNvPr id="11" name="tb1"/>
+          <p:cNvPr id="10" name="cA"/>
           <p:cNvSpPr txBox="1"/>
           <p:nvPr/>
         </p:nvSpPr>
         <p:spPr>
           <a:xfrm>
-            <a:off x="380000" y="1490000"/>
-            <a:ext cx="8450000" cy="2860000"/>
+            <a:off x="179388" y="1430000"/>
+            <a:ext cx="2810000" cy="4950000"/>
           </a:xfrm>
           <a:prstGeom prst="rect">
             <a:avLst/>
@@ -21355,190 +22124,316 @@
           <a:noFill/>
         </p:spPr>
         <p:txBody>
-          <a:bodyPr wrap="square">
+          <a:bodyPr wrap="square" anchor="t">
             <a:normAutofit/>
           </a:bodyPr>
           <a:lstStyle/>
           <a:p>
             <a:pPr algn="l">
               <a:spcAft>
-                <a:spcPts val="500"/>
+                <a:spcPts val="140"/>
               </a:spcAft>
               <a:buNone/>
             </a:pPr>
             <a:r>
-              <a:rPr lang="pt-BR" sz="1000" b="1" dirty="0">
+              <a:rPr lang="pt-BR" sz="1050" b="1" dirty="0">
                 <a:solidFill>
                   <a:srgbClr val="00CC99"/>
                 </a:solidFill>
                 <a:latin typeface="Titillium Web"/>
               </a:rPr>
-              <a:t>NIST Zero Trust (2020) · Surveys de Biometria Comportamental (2021-2024)</a:t>
+              <a:t>IA &amp; Aprendizado de Máquina</a:t>
             </a:r>
           </a:p>
           <a:p>
             <a:pPr algn="l">
               <a:spcAft>
-                <a:spcPts val="450"/>
+                <a:spcPts val="300"/>
               </a:spcAft>
               <a:buNone/>
             </a:pPr>
             <a:r>
-              <a:rPr lang="pt-BR" sz="1100" b="1" dirty="0">
+              <a:rPr lang="pt-BR" sz="900" b="1" dirty="0">
                 <a:solidFill>
                   <a:srgbClr val="2D2DB9"/>
                 </a:solidFill>
                 <a:latin typeface="Titillium Web"/>
               </a:rPr>
-              <a:t>NIST SP 800-207 — Zero Trust (2020): </a:t>
-            </a:r>
-            <a:r>
-              <a:rPr lang="pt-BR" sz="1100" b="0" dirty="0">
+              <a:t>ML — </a:t>
+            </a:r>
+            <a:r>
+              <a:rPr lang="pt-BR" sz="900" b="0" dirty="0">
                 <a:solidFill>
                   <a:srgbClr val="333333"/>
                 </a:solidFill>
                 <a:latin typeface="Titillium Web"/>
               </a:rPr>
-              <a:t>estabelece a verificação CONTÍNUA no lugar da confiança de perímetro; a política de acesso é DINÂMICA e considera atributos comportamentais (padrões de uso e desvios) a cada requisição.</a:t>
-            </a:r>
-          </a:p>
-          <a:p>
-            <a:pPr algn="just">
-              <a:spcAft>
-                <a:spcPts val="450"/>
-              </a:spcAft>
-              <a:buNone/>
-            </a:pPr>
-            <a:endParaRPr lang="pt-BR" sz="1100" b="1" dirty="0">
-              <a:solidFill>
-                <a:srgbClr val="2D2DB9"/>
-              </a:solidFill>
-              <a:latin typeface="Titillium Web"/>
-            </a:endParaRPr>
+              <a:t>Machine Learning</a:t>
+            </a:r>
           </a:p>
           <a:p>
             <a:pPr algn="l">
               <a:spcAft>
-                <a:spcPts val="450"/>
+                <a:spcPts val="300"/>
               </a:spcAft>
               <a:buNone/>
             </a:pPr>
             <a:r>
-              <a:rPr lang="pt-BR" sz="1100" b="1" dirty="0" err="1">
+              <a:rPr lang="pt-BR" sz="900" b="1" dirty="0">
                 <a:solidFill>
                   <a:srgbClr val="2D2DB9"/>
                 </a:solidFill>
                 <a:latin typeface="Titillium Web"/>
               </a:rPr>
-              <a:t>Surveys</a:t>
-            </a:r>
-            <a:r>
-              <a:rPr lang="pt-BR" sz="1100" b="1" dirty="0">
-                <a:solidFill>
-                  <a:srgbClr val="2D2DB9"/>
+              <a:t>DL — </a:t>
+            </a:r>
+            <a:r>
+              <a:rPr lang="pt-BR" sz="900" b="0" dirty="0">
+                <a:solidFill>
+                  <a:srgbClr val="333333"/>
                 </a:solidFill>
                 <a:latin typeface="Titillium Web"/>
               </a:rPr>
-              <a:t> (Stylios et al., 2021; Abuhamad et al., 2021): </a:t>
-            </a:r>
-            <a:r>
-              <a:rPr lang="pt-BR" sz="1100" b="0" dirty="0">
-                <a:solidFill>
-                  <a:srgbClr val="333333"/>
-                </a:solidFill>
-                <a:latin typeface="Titillium Web"/>
-              </a:rPr>
-              <a:t>consolidam a autenticação CONTÍNUA por comportamento — digitação, toque, marcha, mouse — com modelos ML/DL avaliados por EER e AUC sobre 140+ abordagens.</a:t>
+              <a:t>Deep Learning</a:t>
             </a:r>
           </a:p>
           <a:p>
             <a:pPr algn="l">
               <a:spcAft>
-                <a:spcPts val="450"/>
+                <a:spcPts val="300"/>
               </a:spcAft>
               <a:buNone/>
             </a:pPr>
-            <a:endParaRPr lang="pt-BR" sz="1100" b="1" dirty="0">
-              <a:solidFill>
-                <a:srgbClr val="2D2DB9"/>
-              </a:solidFill>
-              <a:latin typeface="Titillium Web"/>
-            </a:endParaRPr>
+            <a:r>
+              <a:rPr lang="pt-BR" sz="900" b="1" dirty="0">
+                <a:solidFill>
+                  <a:srgbClr val="2D2DB9"/>
+                </a:solidFill>
+                <a:latin typeface="Titillium Web"/>
+              </a:rPr>
+              <a:t>LSTM — </a:t>
+            </a:r>
+            <a:r>
+              <a:rPr lang="pt-BR" sz="900" b="0" dirty="0">
+                <a:solidFill>
+                  <a:srgbClr val="333333"/>
+                </a:solidFill>
+                <a:latin typeface="Titillium Web"/>
+              </a:rPr>
+              <a:t>rede neural recorrente</a:t>
+            </a:r>
           </a:p>
           <a:p>
             <a:pPr algn="l">
               <a:spcAft>
-                <a:spcPts val="450"/>
+                <a:spcPts val="300"/>
               </a:spcAft>
               <a:buNone/>
             </a:pPr>
             <a:r>
-              <a:rPr lang="pt-BR" sz="1100" b="1" dirty="0">
+              <a:rPr lang="pt-BR" sz="900" b="1" dirty="0">
                 <a:solidFill>
                   <a:srgbClr val="2D2DB9"/>
                 </a:solidFill>
                 <a:latin typeface="Titillium Web"/>
               </a:rPr>
-              <a:t>Mouse Dynamics Survey (ACM CSUR, 2024): </a:t>
-            </a:r>
-            <a:r>
-              <a:rPr lang="pt-BR" sz="1100" b="0" dirty="0">
+              <a:t>CNN — </a:t>
+            </a:r>
+            <a:r>
+              <a:rPr lang="pt-BR" sz="900" b="0" dirty="0">
                 <a:solidFill>
                   <a:srgbClr val="333333"/>
                 </a:solidFill>
                 <a:latin typeface="Titillium Web"/>
               </a:rPr>
-              <a:t>sinais comportamentais são difíceis de falsificar e reforçam a segurança de sistemas existentes, adequados ao monitoramento contínuo e não-intrusivo.</a:t>
+              <a:t>rede neural convolucional</a:t>
+            </a:r>
+          </a:p>
+          <a:p>
+            <a:pPr algn="l">
+              <a:spcAft>
+                <a:spcPts val="300"/>
+              </a:spcAft>
+              <a:buNone/>
+            </a:pPr>
+            <a:r>
+              <a:rPr lang="pt-BR" sz="900" b="1" dirty="0">
+                <a:solidFill>
+                  <a:srgbClr val="2D2DB9"/>
+                </a:solidFill>
+                <a:latin typeface="Titillium Web"/>
+              </a:rPr>
+              <a:t>iForest/IF — </a:t>
+            </a:r>
+            <a:r>
+              <a:rPr lang="pt-BR" sz="900" b="0" dirty="0">
+                <a:solidFill>
+                  <a:srgbClr val="333333"/>
+                </a:solidFill>
+                <a:latin typeface="Titillium Web"/>
+              </a:rPr>
+              <a:t>Isolation Forest</a:t>
+            </a:r>
+          </a:p>
+          <a:p>
+            <a:pPr algn="l">
+              <a:spcAft>
+                <a:spcPts val="300"/>
+              </a:spcAft>
+              <a:buNone/>
+            </a:pPr>
+            <a:r>
+              <a:rPr lang="pt-BR" sz="900" b="1" dirty="0">
+                <a:solidFill>
+                  <a:srgbClr val="2D2DB9"/>
+                </a:solidFill>
+                <a:latin typeface="Titillium Web"/>
+              </a:rPr>
+              <a:t>RF — </a:t>
+            </a:r>
+            <a:r>
+              <a:rPr lang="pt-BR" sz="900" b="0" dirty="0">
+                <a:solidFill>
+                  <a:srgbClr val="333333"/>
+                </a:solidFill>
+                <a:latin typeface="Titillium Web"/>
+              </a:rPr>
+              <a:t>Random Forest</a:t>
+            </a:r>
+          </a:p>
+          <a:p>
+            <a:pPr algn="l">
+              <a:spcAft>
+                <a:spcPts val="140"/>
+              </a:spcAft>
+              <a:buNone/>
+            </a:pPr>
+            <a:r>
+              <a:rPr lang="pt-BR" sz="1050" b="1" dirty="0">
+                <a:solidFill>
+                  <a:srgbClr val="00CC99"/>
+                </a:solidFill>
+                <a:latin typeface="Titillium Web"/>
+              </a:rPr>
+              <a:t>Explicabilidade &amp; Segurança</a:t>
+            </a:r>
+          </a:p>
+          <a:p>
+            <a:pPr algn="l">
+              <a:spcAft>
+                <a:spcPts val="300"/>
+              </a:spcAft>
+              <a:buNone/>
+            </a:pPr>
+            <a:r>
+              <a:rPr lang="pt-BR" sz="900" b="1" dirty="0">
+                <a:solidFill>
+                  <a:srgbClr val="2D2DB9"/>
+                </a:solidFill>
+                <a:latin typeface="Titillium Web"/>
+              </a:rPr>
+              <a:t>XAI — </a:t>
+            </a:r>
+            <a:r>
+              <a:rPr lang="pt-BR" sz="900" b="0" dirty="0">
+                <a:solidFill>
+                  <a:srgbClr val="333333"/>
+                </a:solidFill>
+                <a:latin typeface="Titillium Web"/>
+              </a:rPr>
+              <a:t>IA Explicável</a:t>
+            </a:r>
+          </a:p>
+          <a:p>
+            <a:pPr algn="l">
+              <a:spcAft>
+                <a:spcPts val="300"/>
+              </a:spcAft>
+              <a:buNone/>
+            </a:pPr>
+            <a:r>
+              <a:rPr lang="pt-BR" sz="900" b="1" dirty="0">
+                <a:solidFill>
+                  <a:srgbClr val="2D2DB9"/>
+                </a:solidFill>
+                <a:latin typeface="Titillium Web"/>
+              </a:rPr>
+              <a:t>SHAP — </a:t>
+            </a:r>
+            <a:r>
+              <a:rPr lang="pt-BR" sz="900" b="0" dirty="0">
+                <a:solidFill>
+                  <a:srgbClr val="333333"/>
+                </a:solidFill>
+                <a:latin typeface="Titillium Web"/>
+              </a:rPr>
+              <a:t>SHapley Additive exPlanations</a:t>
+            </a:r>
+          </a:p>
+          <a:p>
+            <a:pPr algn="l">
+              <a:spcAft>
+                <a:spcPts val="300"/>
+              </a:spcAft>
+              <a:buNone/>
+            </a:pPr>
+            <a:r>
+              <a:rPr lang="pt-BR" sz="900" b="1" dirty="0">
+                <a:solidFill>
+                  <a:srgbClr val="2D2DB9"/>
+                </a:solidFill>
+                <a:latin typeface="Titillium Web"/>
+              </a:rPr>
+              <a:t>LIME — </a:t>
+            </a:r>
+            <a:r>
+              <a:rPr lang="pt-BR" sz="900" b="0" dirty="0">
+                <a:solidFill>
+                  <a:srgbClr val="333333"/>
+                </a:solidFill>
+                <a:latin typeface="Titillium Web"/>
+              </a:rPr>
+              <a:t>Local Interpretable Model-agnostic Expl.</a:t>
+            </a:r>
+          </a:p>
+          <a:p>
+            <a:pPr algn="l">
+              <a:spcAft>
+                <a:spcPts val="300"/>
+              </a:spcAft>
+              <a:buNone/>
+            </a:pPr>
+            <a:r>
+              <a:rPr lang="pt-BR" sz="900" b="1" dirty="0">
+                <a:solidFill>
+                  <a:srgbClr val="2D2DB9"/>
+                </a:solidFill>
+                <a:latin typeface="Titillium Web"/>
+              </a:rPr>
+              <a:t>IDS — </a:t>
+            </a:r>
+            <a:r>
+              <a:rPr lang="pt-BR" sz="900" b="0" dirty="0">
+                <a:solidFill>
+                  <a:srgbClr val="333333"/>
+                </a:solidFill>
+                <a:latin typeface="Titillium Web"/>
+              </a:rPr>
+              <a:t>Intrusion Detection System</a:t>
             </a:r>
           </a:p>
         </p:txBody>
       </p:sp>
       <p:sp>
         <p:nvSpPr>
-          <p:cNvPr id="12" name="relbox"/>
-          <p:cNvSpPr/>
-          <p:nvPr/>
-        </p:nvSpPr>
-        <p:spPr>
-          <a:xfrm>
-            <a:off x="179388" y="4500000"/>
-            <a:ext cx="8856662" cy="1900000"/>
-          </a:xfrm>
-          <a:prstGeom prst="roundRect">
-            <a:avLst>
-              <a:gd name="adj" fmla="val 3500"/>
-            </a:avLst>
-          </a:prstGeom>
-          <a:solidFill>
-            <a:srgbClr val="E6F7F1"/>
-          </a:solidFill>
-          <a:ln w="19050">
-            <a:solidFill>
-              <a:srgbClr val="00CC99"/>
-            </a:solidFill>
-          </a:ln>
-        </p:spPr>
-        <p:txBody>
-          <a:bodyPr/>
-          <a:lstStyle/>
-          <a:p>
-            <a:pPr>
-              <a:buNone/>
-            </a:pPr>
-            <a:endParaRPr lang="pt-BR"/>
-          </a:p>
-        </p:txBody>
-      </p:sp>
-      <p:sp>
-        <p:nvSpPr>
-          <p:cNvPr id="13" name="rlbl"/>
+          <p:cNvPr id="11" name="cB"/>
           <p:cNvSpPr txBox="1"/>
           <p:nvPr/>
         </p:nvSpPr>
         <p:spPr>
           <a:xfrm>
-            <a:off x="400000" y="4565000"/>
-            <a:ext cx="8420000" cy="300000"/>
+            <a:off x="3172462" y="1430000"/>
+            <a:ext cx="2810000" cy="4950000"/>
           </a:xfrm>
           <a:prstGeom prst="rect">
             <a:avLst/>
@@ -21546,39 +22441,264 @@
           <a:noFill/>
         </p:spPr>
         <p:txBody>
-          <a:bodyPr wrap="square">
+          <a:bodyPr wrap="square" anchor="t">
             <a:normAutofit/>
           </a:bodyPr>
           <a:lstStyle/>
           <a:p>
             <a:pPr algn="l">
               <a:spcAft>
-                <a:spcPts val="0"/>
+                <a:spcPts val="140"/>
               </a:spcAft>
               <a:buNone/>
             </a:pPr>
             <a:r>
-              <a:rPr lang="pt-BR" sz="1200" b="1" dirty="0">
+              <a:rPr lang="pt-BR" sz="1050" b="1" dirty="0">
+                <a:solidFill>
+                  <a:srgbClr val="00CC99"/>
+                </a:solidFill>
+                <a:latin typeface="Titillium Web"/>
+              </a:rPr>
+              <a:t>Métricas</a:t>
+            </a:r>
+          </a:p>
+          <a:p>
+            <a:pPr algn="l">
+              <a:spcAft>
+                <a:spcPts val="300"/>
+              </a:spcAft>
+              <a:buNone/>
+            </a:pPr>
+            <a:r>
+              <a:rPr lang="pt-BR" sz="900" b="1" dirty="0">
                 <a:solidFill>
                   <a:srgbClr val="2D2DB9"/>
                 </a:solidFill>
                 <a:latin typeface="Titillium Web"/>
               </a:rPr>
-              <a:t>Relação com a sua proposta</a:t>
+              <a:t>EER — </a:t>
+            </a:r>
+            <a:r>
+              <a:rPr lang="pt-BR" sz="900" b="0" dirty="0">
+                <a:solidFill>
+                  <a:srgbClr val="333333"/>
+                </a:solidFill>
+                <a:latin typeface="Titillium Web"/>
+              </a:rPr>
+              <a:t>Equal Error Rate (menor = melhor)</a:t>
+            </a:r>
+          </a:p>
+          <a:p>
+            <a:pPr algn="l">
+              <a:spcAft>
+                <a:spcPts val="300"/>
+              </a:spcAft>
+              <a:buNone/>
+            </a:pPr>
+            <a:r>
+              <a:rPr lang="pt-BR" sz="900" b="1" dirty="0">
+                <a:solidFill>
+                  <a:srgbClr val="2D2DB9"/>
+                </a:solidFill>
+                <a:latin typeface="Titillium Web"/>
+              </a:rPr>
+              <a:t>AUC — </a:t>
+            </a:r>
+            <a:r>
+              <a:rPr lang="pt-BR" sz="900" b="0" dirty="0">
+                <a:solidFill>
+                  <a:srgbClr val="333333"/>
+                </a:solidFill>
+                <a:latin typeface="Titillium Web"/>
+              </a:rPr>
+              <a:t>área sob a curva ROC</a:t>
+            </a:r>
+          </a:p>
+          <a:p>
+            <a:pPr algn="l">
+              <a:spcAft>
+                <a:spcPts val="140"/>
+              </a:spcAft>
+              <a:buNone/>
+            </a:pPr>
+            <a:r>
+              <a:rPr lang="pt-BR" sz="1050" b="1" dirty="0">
+                <a:solidFill>
+                  <a:srgbClr val="00CC99"/>
+                </a:solidFill>
+                <a:latin typeface="Titillium Web"/>
+              </a:rPr>
+              <a:t>Autenticação</a:t>
+            </a:r>
+          </a:p>
+          <a:p>
+            <a:pPr algn="l">
+              <a:spcAft>
+                <a:spcPts val="300"/>
+              </a:spcAft>
+              <a:buNone/>
+            </a:pPr>
+            <a:r>
+              <a:rPr lang="pt-BR" sz="900" b="1" dirty="0">
+                <a:solidFill>
+                  <a:srgbClr val="2D2DB9"/>
+                </a:solidFill>
+                <a:latin typeface="Titillium Web"/>
+              </a:rPr>
+              <a:t>RBA — </a:t>
+            </a:r>
+            <a:r>
+              <a:rPr lang="pt-BR" sz="900" b="0" dirty="0">
+                <a:solidFill>
+                  <a:srgbClr val="333333"/>
+                </a:solidFill>
+                <a:latin typeface="Titillium Web"/>
+              </a:rPr>
+              <a:t>Risk-Based Authentication</a:t>
+            </a:r>
+          </a:p>
+          <a:p>
+            <a:pPr algn="l">
+              <a:spcAft>
+                <a:spcPts val="300"/>
+              </a:spcAft>
+              <a:buNone/>
+            </a:pPr>
+            <a:r>
+              <a:rPr lang="pt-BR" sz="900" b="1" dirty="0">
+                <a:solidFill>
+                  <a:srgbClr val="2D2DB9"/>
+                </a:solidFill>
+                <a:latin typeface="Titillium Web"/>
+              </a:rPr>
+              <a:t>MFA/2FA — </a:t>
+            </a:r>
+            <a:r>
+              <a:rPr lang="pt-BR" sz="900" b="0" dirty="0">
+                <a:solidFill>
+                  <a:srgbClr val="333333"/>
+                </a:solidFill>
+                <a:latin typeface="Titillium Web"/>
+              </a:rPr>
+              <a:t>autenticação multifator / 2 etapas</a:t>
+            </a:r>
+          </a:p>
+          <a:p>
+            <a:pPr algn="l">
+              <a:spcAft>
+                <a:spcPts val="300"/>
+              </a:spcAft>
+              <a:buNone/>
+            </a:pPr>
+            <a:r>
+              <a:rPr lang="pt-BR" sz="900" b="1" dirty="0">
+                <a:solidFill>
+                  <a:srgbClr val="2D2DB9"/>
+                </a:solidFill>
+                <a:latin typeface="Titillium Web"/>
+              </a:rPr>
+              <a:t>KYC — </a:t>
+            </a:r>
+            <a:r>
+              <a:rPr lang="pt-BR" sz="900" b="0" dirty="0">
+                <a:solidFill>
+                  <a:srgbClr val="333333"/>
+                </a:solidFill>
+                <a:latin typeface="Titillium Web"/>
+              </a:rPr>
+              <a:t>Know Your Customer</a:t>
+            </a:r>
+          </a:p>
+          <a:p>
+            <a:pPr algn="l">
+              <a:spcAft>
+                <a:spcPts val="300"/>
+              </a:spcAft>
+              <a:buNone/>
+            </a:pPr>
+            <a:r>
+              <a:rPr lang="pt-BR" sz="900" b="1" dirty="0">
+                <a:solidFill>
+                  <a:srgbClr val="2D2DB9"/>
+                </a:solidFill>
+                <a:latin typeface="Titillium Web"/>
+              </a:rPr>
+              <a:t>OCR — </a:t>
+            </a:r>
+            <a:r>
+              <a:rPr lang="pt-BR" sz="900" b="0" dirty="0">
+                <a:solidFill>
+                  <a:srgbClr val="333333"/>
+                </a:solidFill>
+                <a:latin typeface="Titillium Web"/>
+              </a:rPr>
+              <a:t>Reconhecimento Óptico de Caracteres</a:t>
+            </a:r>
+          </a:p>
+          <a:p>
+            <a:pPr algn="l">
+              <a:spcAft>
+                <a:spcPts val="300"/>
+              </a:spcAft>
+              <a:buNone/>
+            </a:pPr>
+            <a:r>
+              <a:rPr lang="pt-BR" sz="900" b="1" dirty="0">
+                <a:solidFill>
+                  <a:srgbClr val="2D2DB9"/>
+                </a:solidFill>
+                <a:latin typeface="Titillium Web"/>
+              </a:rPr>
+              <a:t>RTT — </a:t>
+            </a:r>
+            <a:r>
+              <a:rPr lang="pt-BR" sz="900" b="0" dirty="0">
+                <a:solidFill>
+                  <a:srgbClr val="333333"/>
+                </a:solidFill>
+                <a:latin typeface="Titillium Web"/>
+              </a:rPr>
+              <a:t>Round-Trip Time</a:t>
+            </a:r>
+          </a:p>
+          <a:p>
+            <a:pPr algn="l">
+              <a:spcAft>
+                <a:spcPts val="300"/>
+              </a:spcAft>
+              <a:buNone/>
+            </a:pPr>
+            <a:r>
+              <a:rPr lang="pt-BR" sz="900" b="1" dirty="0">
+                <a:solidFill>
+                  <a:srgbClr val="2D2DB9"/>
+                </a:solidFill>
+                <a:latin typeface="Titillium Web"/>
+              </a:rPr>
+              <a:t>IP — </a:t>
+            </a:r>
+            <a:r>
+              <a:rPr lang="pt-BR" sz="900" b="0" dirty="0">
+                <a:solidFill>
+                  <a:srgbClr val="333333"/>
+                </a:solidFill>
+                <a:latin typeface="Titillium Web"/>
+              </a:rPr>
+              <a:t>Internet Protocol</a:t>
             </a:r>
           </a:p>
         </p:txBody>
       </p:sp>
       <p:sp>
         <p:nvSpPr>
-          <p:cNvPr id="14" name="rtxt"/>
+          <p:cNvPr id="12" name="cC"/>
           <p:cNvSpPr txBox="1"/>
           <p:nvPr/>
         </p:nvSpPr>
         <p:spPr>
           <a:xfrm>
-            <a:off x="400000" y="4900000"/>
-            <a:ext cx="8420000" cy="1450000"/>
+            <a:off x="6165536" y="1430000"/>
+            <a:ext cx="2810000" cy="4950000"/>
           </a:xfrm>
           <a:prstGeom prst="rect">
             <a:avLst/>
@@ -21586,25 +22706,354 @@
           <a:noFill/>
         </p:spPr>
         <p:txBody>
-          <a:bodyPr wrap="square">
+          <a:bodyPr wrap="square" anchor="t">
             <a:normAutofit/>
           </a:bodyPr>
           <a:lstStyle/>
           <a:p>
-            <a:pPr algn="just">
+            <a:pPr algn="l">
               <a:spcAft>
-                <a:spcPts val="0"/>
+                <a:spcPts val="140"/>
               </a:spcAft>
               <a:buNone/>
             </a:pPr>
             <a:r>
-              <a:rPr lang="pt-BR" sz="1150" b="0" dirty="0">
+              <a:rPr lang="pt-BR" sz="1050" b="1" dirty="0">
+                <a:solidFill>
+                  <a:srgbClr val="00CC99"/>
+                </a:solidFill>
+                <a:latin typeface="Titillium Web"/>
+              </a:rPr>
+              <a:t>Datasets</a:t>
+            </a:r>
+          </a:p>
+          <a:p>
+            <a:pPr algn="l">
+              <a:spcAft>
+                <a:spcPts val="300"/>
+              </a:spcAft>
+              <a:buNone/>
+            </a:pPr>
+            <a:r>
+              <a:rPr lang="pt-BR" sz="900" b="1" dirty="0">
+                <a:solidFill>
+                  <a:srgbClr val="2D2DB9"/>
+                </a:solidFill>
+                <a:latin typeface="Titillium Web"/>
+              </a:rPr>
+              <a:t>Aalto — </a:t>
+            </a:r>
+            <a:r>
+              <a:rPr lang="pt-BR" sz="900" b="0" dirty="0">
                 <a:solidFill>
                   <a:srgbClr val="333333"/>
                 </a:solidFill>
                 <a:latin typeface="Titillium Web"/>
               </a:rPr>
-              <a:t>A proposta adota o comportamento como EIXO CENTRAL de segurança: em vez de validar a identidade apenas no login, monitora 14 sinais comportamentais e contextuais (digitação, geolocalização, dispositivo, horário, navegação) e recalcula o nível de confiança a cada interação — materializando a verificação contínua do Zero Trust.</a:t>
+              <a:t>base de digitação de larga escala</a:t>
+            </a:r>
+          </a:p>
+          <a:p>
+            <a:pPr algn="l">
+              <a:spcAft>
+                <a:spcPts val="300"/>
+              </a:spcAft>
+              <a:buNone/>
+            </a:pPr>
+            <a:r>
+              <a:rPr lang="pt-BR" sz="900" b="1" dirty="0">
+                <a:solidFill>
+                  <a:srgbClr val="2D2DB9"/>
+                </a:solidFill>
+                <a:latin typeface="Titillium Web"/>
+              </a:rPr>
+              <a:t>CMU — </a:t>
+            </a:r>
+            <a:r>
+              <a:rPr lang="pt-BR" sz="900" b="0" dirty="0">
+                <a:solidFill>
+                  <a:srgbClr val="333333"/>
+                </a:solidFill>
+                <a:latin typeface="Titillium Web"/>
+              </a:rPr>
+              <a:t>benchmark de keystroke (Carnegie Mellon)</a:t>
+            </a:r>
+          </a:p>
+          <a:p>
+            <a:pPr algn="l">
+              <a:spcAft>
+                <a:spcPts val="300"/>
+              </a:spcAft>
+              <a:buNone/>
+            </a:pPr>
+            <a:r>
+              <a:rPr lang="pt-BR" sz="900" b="1" dirty="0">
+                <a:solidFill>
+                  <a:srgbClr val="2D2DB9"/>
+                </a:solidFill>
+                <a:latin typeface="Titillium Web"/>
+              </a:rPr>
+              <a:t>NSL-KDD — </a:t>
+            </a:r>
+            <a:r>
+              <a:rPr lang="pt-BR" sz="900" b="0" dirty="0">
+                <a:solidFill>
+                  <a:srgbClr val="333333"/>
+                </a:solidFill>
+                <a:latin typeface="Titillium Web"/>
+              </a:rPr>
+              <a:t>dataset de detecção de intrusão</a:t>
+            </a:r>
+          </a:p>
+          <a:p>
+            <a:pPr algn="l">
+              <a:spcAft>
+                <a:spcPts val="140"/>
+              </a:spcAft>
+              <a:buNone/>
+            </a:pPr>
+            <a:r>
+              <a:rPr lang="pt-BR" sz="1050" b="1" dirty="0">
+                <a:solidFill>
+                  <a:srgbClr val="00CC99"/>
+                </a:solidFill>
+                <a:latin typeface="Titillium Web"/>
+              </a:rPr>
+              <a:t>Veículos &amp; Órgãos</a:t>
+            </a:r>
+          </a:p>
+          <a:p>
+            <a:pPr algn="l">
+              <a:spcAft>
+                <a:spcPts val="300"/>
+              </a:spcAft>
+              <a:buNone/>
+            </a:pPr>
+            <a:r>
+              <a:rPr lang="pt-BR" sz="900" b="1" dirty="0">
+                <a:solidFill>
+                  <a:srgbClr val="2D2DB9"/>
+                </a:solidFill>
+                <a:latin typeface="Titillium Web"/>
+              </a:rPr>
+              <a:t>TBIOM — </a:t>
+            </a:r>
+            <a:r>
+              <a:rPr lang="pt-BR" sz="900" b="0" dirty="0">
+                <a:solidFill>
+                  <a:srgbClr val="333333"/>
+                </a:solidFill>
+                <a:latin typeface="Titillium Web"/>
+              </a:rPr>
+              <a:t>IEEE T. Biometrics, Behavior &amp; Identity</a:t>
+            </a:r>
+          </a:p>
+          <a:p>
+            <a:pPr algn="l">
+              <a:spcAft>
+                <a:spcPts val="300"/>
+              </a:spcAft>
+              <a:buNone/>
+            </a:pPr>
+            <a:r>
+              <a:rPr lang="pt-BR" sz="900" b="1" dirty="0">
+                <a:solidFill>
+                  <a:srgbClr val="2D2DB9"/>
+                </a:solidFill>
+                <a:latin typeface="Titillium Web"/>
+              </a:rPr>
+              <a:t>TOPS — </a:t>
+            </a:r>
+            <a:r>
+              <a:rPr lang="pt-BR" sz="900" b="0" dirty="0">
+                <a:solidFill>
+                  <a:srgbClr val="333333"/>
+                </a:solidFill>
+                <a:latin typeface="Titillium Web"/>
+              </a:rPr>
+              <a:t>ACM T. on Privacy and Security</a:t>
+            </a:r>
+          </a:p>
+          <a:p>
+            <a:pPr algn="l">
+              <a:spcAft>
+                <a:spcPts val="300"/>
+              </a:spcAft>
+              <a:buNone/>
+            </a:pPr>
+            <a:r>
+              <a:rPr lang="pt-BR" sz="900" b="1" dirty="0">
+                <a:solidFill>
+                  <a:srgbClr val="2D2DB9"/>
+                </a:solidFill>
+                <a:latin typeface="Titillium Web"/>
+              </a:rPr>
+              <a:t>TIFS — </a:t>
+            </a:r>
+            <a:r>
+              <a:rPr lang="pt-BR" sz="900" b="0" dirty="0">
+                <a:solidFill>
+                  <a:srgbClr val="333333"/>
+                </a:solidFill>
+                <a:latin typeface="Titillium Web"/>
+              </a:rPr>
+              <a:t>IEEE T. Information Forensics &amp; Security</a:t>
+            </a:r>
+          </a:p>
+          <a:p>
+            <a:pPr algn="l">
+              <a:spcAft>
+                <a:spcPts val="300"/>
+              </a:spcAft>
+              <a:buNone/>
+            </a:pPr>
+            <a:r>
+              <a:rPr lang="pt-BR" sz="900" b="1" dirty="0">
+                <a:solidFill>
+                  <a:srgbClr val="2D2DB9"/>
+                </a:solidFill>
+                <a:latin typeface="Titillium Web"/>
+              </a:rPr>
+              <a:t>ICDM — </a:t>
+            </a:r>
+            <a:r>
+              <a:rPr lang="pt-BR" sz="900" b="0" dirty="0">
+                <a:solidFill>
+                  <a:srgbClr val="333333"/>
+                </a:solidFill>
+                <a:latin typeface="Titillium Web"/>
+              </a:rPr>
+              <a:t>IEEE Int. Conf. on Data Mining</a:t>
+            </a:r>
+          </a:p>
+          <a:p>
+            <a:pPr algn="l">
+              <a:spcAft>
+                <a:spcPts val="300"/>
+              </a:spcAft>
+              <a:buNone/>
+            </a:pPr>
+            <a:r>
+              <a:rPr lang="pt-BR" sz="900" b="1" dirty="0">
+                <a:solidFill>
+                  <a:srgbClr val="2D2DB9"/>
+                </a:solidFill>
+                <a:latin typeface="Titillium Web"/>
+              </a:rPr>
+              <a:t>DSN — </a:t>
+            </a:r>
+            <a:r>
+              <a:rPr lang="pt-BR" sz="900" b="0" dirty="0">
+                <a:solidFill>
+                  <a:srgbClr val="333333"/>
+                </a:solidFill>
+                <a:latin typeface="Titillium Web"/>
+              </a:rPr>
+              <a:t>Dependable Systems and Networks</a:t>
+            </a:r>
+          </a:p>
+          <a:p>
+            <a:pPr algn="l">
+              <a:spcAft>
+                <a:spcPts val="300"/>
+              </a:spcAft>
+              <a:buNone/>
+            </a:pPr>
+            <a:r>
+              <a:rPr lang="pt-BR" sz="900" b="1" dirty="0">
+                <a:solidFill>
+                  <a:srgbClr val="2D2DB9"/>
+                </a:solidFill>
+                <a:latin typeface="Titillium Web"/>
+              </a:rPr>
+              <a:t>FC — </a:t>
+            </a:r>
+            <a:r>
+              <a:rPr lang="pt-BR" sz="900" b="0" dirty="0">
+                <a:solidFill>
+                  <a:srgbClr val="333333"/>
+                </a:solidFill>
+                <a:latin typeface="Titillium Web"/>
+              </a:rPr>
+              <a:t>Financial Cryptography</a:t>
+            </a:r>
+          </a:p>
+          <a:p>
+            <a:pPr algn="l">
+              <a:spcAft>
+                <a:spcPts val="300"/>
+              </a:spcAft>
+              <a:buNone/>
+            </a:pPr>
+            <a:r>
+              <a:rPr lang="pt-BR" sz="900" b="1" dirty="0">
+                <a:solidFill>
+                  <a:srgbClr val="2D2DB9"/>
+                </a:solidFill>
+                <a:latin typeface="Titillium Web"/>
+              </a:rPr>
+              <a:t>CSUR — </a:t>
+            </a:r>
+            <a:r>
+              <a:rPr lang="pt-BR" sz="900" b="0" dirty="0">
+                <a:solidFill>
+                  <a:srgbClr val="333333"/>
+                </a:solidFill>
+                <a:latin typeface="Titillium Web"/>
+              </a:rPr>
+              <a:t>ACM Computing Surveys</a:t>
+            </a:r>
+          </a:p>
+          <a:p>
+            <a:pPr algn="l">
+              <a:spcAft>
+                <a:spcPts val="300"/>
+              </a:spcAft>
+              <a:buNone/>
+            </a:pPr>
+            <a:r>
+              <a:rPr lang="pt-BR" sz="900" b="1" dirty="0">
+                <a:solidFill>
+                  <a:srgbClr val="2D2DB9"/>
+                </a:solidFill>
+                <a:latin typeface="Titillium Web"/>
+              </a:rPr>
+              <a:t>NIST — </a:t>
+            </a:r>
+            <a:r>
+              <a:rPr lang="pt-BR" sz="900" b="0" dirty="0">
+                <a:solidFill>
+                  <a:srgbClr val="333333"/>
+                </a:solidFill>
+                <a:latin typeface="Titillium Web"/>
+              </a:rPr>
+              <a:t>Nat. Institute of Standards and Tech.</a:t>
+            </a:r>
+          </a:p>
+          <a:p>
+            <a:pPr algn="l">
+              <a:spcAft>
+                <a:spcPts val="300"/>
+              </a:spcAft>
+              <a:buNone/>
+            </a:pPr>
+            <a:r>
+              <a:rPr lang="pt-BR" sz="900" b="1" dirty="0">
+                <a:solidFill>
+                  <a:srgbClr val="2D2DB9"/>
+                </a:solidFill>
+                <a:latin typeface="Titillium Web"/>
+              </a:rPr>
+              <a:t>INPI — </a:t>
+            </a:r>
+            <a:r>
+              <a:rPr lang="pt-BR" sz="900" b="0" dirty="0">
+                <a:solidFill>
+                  <a:srgbClr val="333333"/>
+                </a:solidFill>
+                <a:latin typeface="Titillium Web"/>
+              </a:rPr>
+              <a:t>Inst. Nacional da Propriedade Industrial</a:t>
             </a:r>
           </a:p>
         </p:txBody>
@@ -21656,7 +23105,7 @@
             </a:pPr>
             <a:r>
               <a:rPr lang="pt-BR" dirty="0"/>
-              <a:t>Biometria de Digitação (Keystroke)</a:t>
+              <a:t>O Comportamento como Vetor de Segurança</a:t>
             </a:r>
           </a:p>
         </p:txBody>
@@ -21735,7 +23184,7 @@
           <a:noFill/>
         </p:spPr>
         <p:txBody>
-          <a:bodyPr wrap="square">
+          <a:bodyPr wrap="square" anchor="t">
             <a:normAutofit/>
           </a:bodyPr>
           <a:lstStyle/>
@@ -21753,11 +23202,11 @@
                 </a:solidFill>
                 <a:latin typeface="Titillium Web"/>
               </a:rPr>
-              <a:t>TypeNet (2022) · TypeFormer (2024) · base: Killourhy &amp; Maxion (2009) · unico</a:t>
-            </a:r>
-          </a:p>
-          <a:p>
-            <a:pPr algn="l">
+              <a:t>NIST Zero Trust (2020) · Surveys de Biometria Comportamental (2021-2024)</a:t>
+            </a:r>
+          </a:p>
+          <a:p>
+            <a:pPr algn="just">
               <a:spcAft>
                 <a:spcPts val="450"/>
               </a:spcAft>
@@ -21770,7 +23219,7 @@
                 </a:solidFill>
                 <a:latin typeface="Titillium Web"/>
               </a:rPr>
-              <a:t>TypeNet (Acien et al., IEEE TBIOM 2022): </a:t>
+              <a:t>NIST SP 800-207 — Zero Trust (2020): </a:t>
             </a:r>
             <a:r>
               <a:rPr lang="pt-BR" sz="1100" b="0" dirty="0">
@@ -21779,11 +23228,11 @@
                 </a:solidFill>
                 <a:latin typeface="Titillium Web"/>
               </a:rPr>
-              <a:t>rede Siamese LSTM para digitação livre, treinada nas bases Aalto com 168.000 sujeitos; EER de 2,2% no desktop (5 sequências) e escala para 100.000 usuários — estado da arte em larga escala.</a:t>
-            </a:r>
-          </a:p>
-          <a:p>
-            <a:pPr algn="l">
+              <a:t>estabelece a verificação CONTÍNUA no lugar da confiança de perímetro; a política de acesso é DINÂMICA e considera atributos comportamentais (padrões de uso e desvios) a cada requisição.</a:t>
+            </a:r>
+          </a:p>
+          <a:p>
+            <a:pPr algn="just">
               <a:spcAft>
                 <a:spcPts val="450"/>
               </a:spcAft>
@@ -21797,7 +23246,7 @@
             </a:endParaRPr>
           </a:p>
           <a:p>
-            <a:pPr algn="l">
+            <a:pPr algn="just">
               <a:spcAft>
                 <a:spcPts val="450"/>
               </a:spcAft>
@@ -21810,7 +23259,7 @@
                 </a:solidFill>
                 <a:latin typeface="Titillium Web"/>
               </a:rPr>
-              <a:t>TypeFormer</a:t>
+              <a:t>Surveys</a:t>
             </a:r>
             <a:r>
               <a:rPr lang="pt-BR" sz="1100" b="1" dirty="0">
@@ -21819,7 +23268,7 @@
                 </a:solidFill>
                 <a:latin typeface="Titillium Web"/>
               </a:rPr>
-              <a:t> (Stragapede et al., 2024): </a:t>
+              <a:t> (Stylios et al., 2021; Abuhamad et al., 2021): </a:t>
             </a:r>
             <a:r>
               <a:rPr lang="pt-BR" sz="1100" b="0" dirty="0">
@@ -21828,7 +23277,7 @@
                 </a:solidFill>
                 <a:latin typeface="Titillium Web"/>
               </a:rPr>
-              <a:t>arquitetura Transformer (módulos temporal e de canal, self-attention) para digitação livre em mobile; supera LSTM com EER de 3,25% usando 5 sessões de enrollment.</a:t>
+              <a:t>consolidam a autenticação CONTÍNUA por comportamento — digitação, toque, marcha, mouse — com modelos ML/DL avaliados por EER e AUC sobre 140+ abordagens.</a:t>
             </a:r>
           </a:p>
           <a:p>
@@ -21859,7 +23308,7 @@
                 </a:solidFill>
                 <a:latin typeface="Titillium Web"/>
               </a:rPr>
-              <a:t>Base e indústria: </a:t>
+              <a:t>Mouse Dynamics Survey (ACM CSUR, 2024): </a:t>
             </a:r>
             <a:r>
               <a:rPr lang="pt-BR" sz="1100" b="0" dirty="0">
@@ -21868,7 +23317,7 @@
                 </a:solidFill>
                 <a:latin typeface="Titillium Web"/>
               </a:rPr>
-              <a:t>Killourhy &amp; Maxion (2009) definiram o benchmark CMU (EER ~9,6%); a unico aplica biometria FACIAL (CNN) — precisa, porém one-shot, validada só na entrada.</a:t>
+              <a:t>sinais comportamentais são difíceis de falsificar e reforçam a segurança de sistemas existentes, adequados ao monitoramento contínuo e não-intrusivo.</a:t>
             </a:r>
           </a:p>
         </p:txBody>
@@ -21966,7 +23415,7 @@
           <a:noFill/>
         </p:spPr>
         <p:txBody>
-          <a:bodyPr wrap="square">
+          <a:bodyPr wrap="square" anchor="t">
             <a:normAutofit/>
           </a:bodyPr>
           <a:lstStyle/>
@@ -21984,7 +23433,7 @@
                 </a:solidFill>
                 <a:latin typeface="Titillium Web"/>
               </a:rPr>
-              <a:t>A proposta usa a digitação como sinal comportamental, mas — diferente do TypeNet/TypeFormer, que avaliam offline um único traço — a integra a 14 features de contexto, a um ensemble de 3 modelos e à decisão CONTÍNUA na web, com cada veredito auditável em blockchain e explicável via SHAP.</a:t>
+              <a:t>A proposta adota o comportamento como EIXO CENTRAL de segurança: em vez de validar a identidade apenas no login, monitora 14 sinais comportamentais e contextuais (digitação, geolocalização, dispositivo, horário, navegação) e recalcula o nível de confiança a cada interação — materializando a verificação contínua do Zero Trust.</a:t>
             </a:r>
           </a:p>
         </p:txBody>
@@ -22036,7 +23485,7 @@
             </a:pPr>
             <a:r>
               <a:rPr lang="pt-BR" dirty="0"/>
-              <a:t>Autenticação Adaptativa e Risk-Based (RBA)</a:t>
+              <a:t>Biometria de Digitação (Keystroke)</a:t>
             </a:r>
           </a:p>
         </p:txBody>
@@ -22115,7 +23564,7 @@
           <a:noFill/>
         </p:spPr>
         <p:txBody>
-          <a:bodyPr wrap="square">
+          <a:bodyPr wrap="square" anchor="t">
             <a:normAutofit/>
           </a:bodyPr>
           <a:lstStyle/>
@@ -22133,7 +23582,33 @@
                 </a:solidFill>
                 <a:latin typeface="Titillium Web"/>
               </a:rPr>
-              <a:t>Wiefling et al. (2023, 2021) · gov.br / Serpro</a:t>
+              <a:t>TypeNet (2022) · TypeFormer (2024) · base: Killourhy &amp; Maxion (2009) · unico</a:t>
+            </a:r>
+          </a:p>
+          <a:p>
+            <a:pPr algn="just">
+              <a:spcAft>
+                <a:spcPts val="450"/>
+              </a:spcAft>
+              <a:buNone/>
+            </a:pPr>
+            <a:r>
+              <a:rPr lang="pt-BR" sz="1100" b="1" dirty="0">
+                <a:solidFill>
+                  <a:srgbClr val="2D2DB9"/>
+                </a:solidFill>
+                <a:latin typeface="Titillium Web"/>
+              </a:rPr>
+              <a:t>TypeNet (Acien et al., IEEE TBIOM 2022): </a:t>
+            </a:r>
+            <a:r>
+              <a:rPr lang="pt-BR" sz="1100" b="0" dirty="0">
+                <a:solidFill>
+                  <a:srgbClr val="333333"/>
+                </a:solidFill>
+                <a:latin typeface="Titillium Web"/>
+              </a:rPr>
+              <a:t>rede Siamese LSTM para digitação livre, treinada nas bases Aalto com 168.000 sujeitos; EER de 2,2% no desktop (5 sequências) e escala para 100.000 usuários — estado da arte em larga escala.</a:t>
             </a:r>
           </a:p>
           <a:p>
@@ -22143,6 +23618,29 @@
               </a:spcAft>
               <a:buNone/>
             </a:pPr>
+            <a:endParaRPr lang="pt-BR" sz="1100" b="1" dirty="0">
+              <a:solidFill>
+                <a:srgbClr val="2D2DB9"/>
+              </a:solidFill>
+              <a:latin typeface="Titillium Web"/>
+            </a:endParaRPr>
+          </a:p>
+          <a:p>
+            <a:pPr algn="just">
+              <a:spcAft>
+                <a:spcPts val="450"/>
+              </a:spcAft>
+              <a:buNone/>
+            </a:pPr>
+            <a:r>
+              <a:rPr lang="pt-BR" sz="1100" b="1" dirty="0" err="1">
+                <a:solidFill>
+                  <a:srgbClr val="2D2DB9"/>
+                </a:solidFill>
+                <a:latin typeface="Titillium Web"/>
+              </a:rPr>
+              <a:t>TypeFormer</a:t>
+            </a:r>
             <a:r>
               <a:rPr lang="pt-BR" sz="1100" b="1" dirty="0">
                 <a:solidFill>
@@ -22150,7 +23648,7 @@
                 </a:solidFill>
                 <a:latin typeface="Titillium Web"/>
               </a:rPr>
-              <a:t>Wiefling et al. (ACM TOPS 2023): </a:t>
+              <a:t> (Stragapede et al., 2024): </a:t>
             </a:r>
             <a:r>
               <a:rPr lang="pt-BR" sz="1100" b="0" dirty="0">
@@ -22159,7 +23657,7 @@
                 </a:solidFill>
                 <a:latin typeface="Titillium Web"/>
               </a:rPr>
-              <a:t>primeira análise de longo prazo de RBA em serviço real de larga escala — 3,3 milhões de usuários e 31,3 milhões de logins. Propõe ML para otimizar a configuração e o round-trip time (RTT) como alternativa ao IP.</a:t>
+              <a:t>arquitetura Transformer (módulos temporal e de canal, self-attention) para digitação livre em mobile; supera LSTM com EER de 3,25% usando 5 sessões de enrollment.</a:t>
             </a:r>
           </a:p>
           <a:p>
@@ -22169,38 +23667,12 @@
               </a:spcAft>
               <a:buNone/>
             </a:pPr>
-            <a:endParaRPr lang="pt-BR" sz="1100" b="0" dirty="0">
+            <a:endParaRPr lang="pt-BR" sz="1100" b="1" dirty="0">
               <a:solidFill>
-                <a:srgbClr val="333333"/>
+                <a:srgbClr val="2D2DB9"/>
               </a:solidFill>
               <a:latin typeface="Titillium Web"/>
             </a:endParaRPr>
-          </a:p>
-          <a:p>
-            <a:pPr algn="l">
-              <a:spcAft>
-                <a:spcPts val="450"/>
-              </a:spcAft>
-              <a:buNone/>
-            </a:pPr>
-            <a:r>
-              <a:rPr lang="pt-BR" sz="1100" b="1" dirty="0">
-                <a:solidFill>
-                  <a:srgbClr val="2D2DB9"/>
-                </a:solidFill>
-                <a:latin typeface="Titillium Web"/>
-              </a:rPr>
-              <a:t>Wiefling et al. (FC 2021): </a:t>
-            </a:r>
-            <a:r>
-              <a:rPr lang="pt-BR" sz="1100" b="0" dirty="0">
-                <a:solidFill>
-                  <a:srgbClr val="333333"/>
-                </a:solidFill>
-                <a:latin typeface="Titillium Web"/>
-              </a:rPr>
-              <a:t>estudo de 1,8 ano com 780 usuários e 247 features; o RBA precisa ser ajustado por serviço — pequenas mudanças afetam fortemente segurança e usabilidade.</a:t>
-            </a:r>
           </a:p>
           <a:p>
             <a:pPr algn="just">
@@ -22209,20 +23681,6 @@
               </a:spcAft>
               <a:buNone/>
             </a:pPr>
-            <a:endParaRPr lang="pt-BR" sz="1100" b="0" dirty="0">
-              <a:solidFill>
-                <a:srgbClr val="333333"/>
-              </a:solidFill>
-              <a:latin typeface="Titillium Web"/>
-            </a:endParaRPr>
-          </a:p>
-          <a:p>
-            <a:pPr algn="l">
-              <a:spcAft>
-                <a:spcPts val="450"/>
-              </a:spcAft>
-              <a:buNone/>
-            </a:pPr>
             <a:r>
               <a:rPr lang="pt-BR" sz="1100" b="1" dirty="0">
                 <a:solidFill>
@@ -22230,7 +23688,7 @@
                 </a:solidFill>
                 <a:latin typeface="Titillium Web"/>
               </a:rPr>
-              <a:t>gov.br / Serpro: </a:t>
+              <a:t>Base e indústria: </a:t>
             </a:r>
             <a:r>
               <a:rPr lang="pt-BR" sz="1100" b="0" dirty="0">
@@ -22239,7 +23697,7 @@
                 </a:solidFill>
                 <a:latin typeface="Titillium Web"/>
               </a:rPr>
-              <a:t>maior identidade digital pública (115M+ usuários), com 2FA e 3 níveis FIXOS (bronze/prata/ouro) definidos pelo serviço — não pelo comportamento.</a:t>
+              <a:t>Killourhy &amp; Maxion (2009) definiram o benchmark CMU (EER ~9,6%); a unico aplica biometria FACIAL (CNN) — precisa, porém one-shot, validada só na entrada.</a:t>
             </a:r>
           </a:p>
         </p:txBody>
@@ -22273,10 +23731,10 @@
           <a:bodyPr/>
           <a:lstStyle/>
           <a:p>
-            <a:pPr algn="just">
+            <a:pPr>
               <a:buNone/>
             </a:pPr>
-            <a:endParaRPr lang="pt-BR" dirty="0"/>
+            <a:endParaRPr lang="pt-BR"/>
           </a:p>
         </p:txBody>
       </p:sp>
@@ -22337,7 +23795,7 @@
           <a:noFill/>
         </p:spPr>
         <p:txBody>
-          <a:bodyPr wrap="square">
+          <a:bodyPr wrap="square" anchor="t">
             <a:normAutofit/>
           </a:bodyPr>
           <a:lstStyle/>
@@ -22355,7 +23813,7 @@
                 </a:solidFill>
                 <a:latin typeface="Titillium Web"/>
               </a:rPr>
-              <a:t>A proposta implementa o RBA de forma ABERTA e explicável: recalcula um SCORE CONTÍNUO (0,0-1,0) a partir de 14 sinais (não só o IP), escalona a resposta em 4 níveis (permitir/MFA/MFA+alerta/bloquear) e registra cada decisão em blockchain — endereçando a opacidade apontada por Wiefling.</a:t>
+              <a:t>A proposta usa a digitação como sinal comportamental, mas — diferente do TypeNet/TypeFormer, que avaliam offline um único traço — a integra a 14 features de contexto, a um ensemble de 3 modelos e à decisão CONTÍNUA na web, com cada veredito auditável em blockchain e explicável via SHAP.</a:t>
             </a:r>
           </a:p>
         </p:txBody>
@@ -22407,7 +23865,7 @@
             </a:pPr>
             <a:r>
               <a:rPr lang="pt-BR" dirty="0"/>
-              <a:t>KYC, Antifraude e Orquestração (Indústria)</a:t>
+              <a:t>Autenticação Adaptativa e Risk-Based (RBA)</a:t>
             </a:r>
           </a:p>
         </p:txBody>
@@ -22486,7 +23944,7 @@
           <a:noFill/>
         </p:spPr>
         <p:txBody>
-          <a:bodyPr wrap="square">
+          <a:bodyPr wrap="square" anchor="t">
             <a:normAutofit/>
           </a:bodyPr>
           <a:lstStyle/>
@@ -22504,7 +23962,33 @@
                 </a:solidFill>
                 <a:latin typeface="Titillium Web"/>
               </a:rPr>
-              <a:t>idwall (2016) · CAF — Combate à Fraude (2019)</a:t>
+              <a:t>Wiefling et al. (2023, 2021) · gov.br / Serpro</a:t>
+            </a:r>
+          </a:p>
+          <a:p>
+            <a:pPr algn="just">
+              <a:spcAft>
+                <a:spcPts val="450"/>
+              </a:spcAft>
+              <a:buNone/>
+            </a:pPr>
+            <a:r>
+              <a:rPr lang="pt-BR" sz="1100" b="1" dirty="0">
+                <a:solidFill>
+                  <a:srgbClr val="2D2DB9"/>
+                </a:solidFill>
+                <a:latin typeface="Titillium Web"/>
+              </a:rPr>
+              <a:t>Wiefling et al. (ACM TOPS 2023): </a:t>
+            </a:r>
+            <a:r>
+              <a:rPr lang="pt-BR" sz="1100" b="0" dirty="0">
+                <a:solidFill>
+                  <a:srgbClr val="333333"/>
+                </a:solidFill>
+                <a:latin typeface="Titillium Web"/>
+              </a:rPr>
+              <a:t>primeira análise de longo prazo de RBA em serviço real de larga escala — 3,3 milhões de usuários e 31,3 milhões de logins. Propõe ML para otimizar a configuração e o round-trip time (RTT) como alternativa ao IP.</a:t>
             </a:r>
           </a:p>
           <a:p>
@@ -22514,35 +23998,9 @@
               </a:spcAft>
               <a:buNone/>
             </a:pPr>
-            <a:r>
-              <a:rPr lang="pt-BR" sz="1200" b="1" dirty="0">
-                <a:solidFill>
-                  <a:srgbClr val="2D2DB9"/>
-                </a:solidFill>
-                <a:latin typeface="Titillium Web"/>
-              </a:rPr>
-              <a:t>idwall: </a:t>
-            </a:r>
-            <a:r>
-              <a:rPr lang="pt-BR" sz="1200" b="0" dirty="0">
-                <a:solidFill>
-                  <a:srgbClr val="333333"/>
-                </a:solidFill>
-                <a:latin typeface="Titillium Web"/>
-              </a:rPr>
-              <a:t>plataforma de identidade com pipeline de ML — OCR para extração documental, validação documental e biométrica e background check, com laboratório de antifraude. Atua na ENTRADA (onboarding / KYC).</a:t>
-            </a:r>
-          </a:p>
-          <a:p>
-            <a:pPr algn="l">
-              <a:spcAft>
-                <a:spcPts val="450"/>
-              </a:spcAft>
-              <a:buNone/>
-            </a:pPr>
-            <a:endParaRPr lang="pt-BR" sz="1200" b="1" dirty="0">
+            <a:endParaRPr lang="pt-BR" sz="1100" b="0" dirty="0">
               <a:solidFill>
-                <a:srgbClr val="2D2DB9"/>
+                <a:srgbClr val="333333"/>
               </a:solidFill>
               <a:latin typeface="Titillium Web"/>
             </a:endParaRPr>
@@ -22555,22 +24013,62 @@
               <a:buNone/>
             </a:pPr>
             <a:r>
-              <a:rPr lang="pt-BR" sz="1200" b="1" dirty="0">
+              <a:rPr lang="pt-BR" sz="1100" b="1" dirty="0">
                 <a:solidFill>
                   <a:srgbClr val="2D2DB9"/>
                 </a:solidFill>
                 <a:latin typeface="Titillium Web"/>
               </a:rPr>
-              <a:t>CAF — Combate à Fraude: </a:t>
-            </a:r>
-            <a:r>
-              <a:rPr lang="pt-BR" sz="1200" b="0" dirty="0">
+              <a:t>Wiefling et al. (FC 2021): </a:t>
+            </a:r>
+            <a:r>
+              <a:rPr lang="pt-BR" sz="1100" b="0" dirty="0">
                 <a:solidFill>
                   <a:srgbClr val="333333"/>
                 </a:solidFill>
                 <a:latin typeface="Titillium Web"/>
               </a:rPr>
-              <a:t>orquestração de identidade combinando documentoscopia, biometria facial e IA, com foco em fraude transacional e enriquecimento por API judicial.</a:t>
+              <a:t>estudo de 1,8 ano com 780 usuários e 247 features; o RBA precisa ser ajustado por serviço — pequenas mudanças afetam fortemente segurança e usabilidade.</a:t>
+            </a:r>
+          </a:p>
+          <a:p>
+            <a:pPr algn="just">
+              <a:spcAft>
+                <a:spcPts val="450"/>
+              </a:spcAft>
+              <a:buNone/>
+            </a:pPr>
+            <a:endParaRPr lang="pt-BR" sz="1100" b="0" dirty="0">
+              <a:solidFill>
+                <a:srgbClr val="333333"/>
+              </a:solidFill>
+              <a:latin typeface="Titillium Web"/>
+            </a:endParaRPr>
+          </a:p>
+          <a:p>
+            <a:pPr algn="just">
+              <a:spcAft>
+                <a:spcPts val="450"/>
+              </a:spcAft>
+              <a:buNone/>
+            </a:pPr>
+            <a:r>
+              <a:rPr lang="pt-BR" sz="1100" b="1" dirty="0">
+                <a:solidFill>
+                  <a:srgbClr val="2D2DB9"/>
+                </a:solidFill>
+                <a:latin typeface="Titillium Web"/>
+              </a:rPr>
+              <a:t>gov.br / Serpro: </a:t>
+            </a:r>
+            <a:r>
+              <a:rPr lang="pt-BR" sz="1100" b="0" dirty="0">
+                <a:solidFill>
+                  <a:srgbClr val="333333"/>
+                </a:solidFill>
+                <a:latin typeface="Titillium Web"/>
+              </a:rPr>
+              <a:t>maior identidade digital pública (115M+ usuários), com 2FA e 3 níveis FIXOS (bronze/prata/ouro) definidos pelo serviço — não pelo comportamento.</a:t>
             </a:r>
           </a:p>
         </p:txBody>
@@ -22604,10 +24102,10 @@
           <a:bodyPr/>
           <a:lstStyle/>
           <a:p>
-            <a:pPr>
+            <a:pPr algn="just">
               <a:buNone/>
             </a:pPr>
-            <a:endParaRPr lang="pt-BR"/>
+            <a:endParaRPr lang="pt-BR" dirty="0"/>
           </a:p>
         </p:txBody>
       </p:sp>
@@ -22668,7 +24166,7 @@
           <a:noFill/>
         </p:spPr>
         <p:txBody>
-          <a:bodyPr wrap="square">
+          <a:bodyPr wrap="square" anchor="t">
             <a:normAutofit/>
           </a:bodyPr>
           <a:lstStyle/>
@@ -22686,7 +24184,7 @@
                 </a:solidFill>
                 <a:latin typeface="Titillium Web"/>
               </a:rPr>
-              <a:t>Ambas são robustas na verificação de entrada, mas operam como caixa-preta e encerram a análise após o onboarding. A proposta atua DURANTE a sessão (autenticação contínua), com ensemble EXPLICÁVEL via SHAP, detecção de DERIVA comportamental e trilha imutável em blockchain — além de ser aberta e reprodutível.</a:t>
+              <a:t>A proposta implementa o RBA de forma ABERTA e explicável: recalcula um SCORE CONTÍNUO (0,0-1,0) a partir de 14 sinais (não só o IP), escalona a resposta em 4 níveis (permitir/MFA/MFA+alerta/bloquear) e registra cada decisão em blockchain — endereçando a opacidade apontada por Wiefling.</a:t>
             </a:r>
           </a:p>
         </p:txBody>
@@ -22738,7 +24236,7 @@
             </a:pPr>
             <a:r>
               <a:rPr lang="pt-BR" dirty="0"/>
-              <a:t>Detecção de Anomalias e Explicabilidade (XAI)</a:t>
+              <a:t>KYC, Antifraude e Orquestração (Indústria)</a:t>
             </a:r>
           </a:p>
         </p:txBody>
@@ -22817,7 +24315,7 @@
           <a:noFill/>
         </p:spPr>
         <p:txBody>
-          <a:bodyPr wrap="square">
+          <a:bodyPr wrap="square" anchor="t">
             <a:normAutofit/>
           </a:bodyPr>
           <a:lstStyle/>
@@ -22835,7 +24333,33 @@
                 </a:solidFill>
                 <a:latin typeface="Titillium Web"/>
               </a:rPr>
-              <a:t>Ismail et al. (2024) · Capuano et al. — Survey XAI (2022) · bases: iForest (2008), SHAP (2017)</a:t>
+              <a:t>idwall (2016) · CAF — Combate à Fraude (2019)</a:t>
+            </a:r>
+          </a:p>
+          <a:p>
+            <a:pPr algn="just">
+              <a:spcAft>
+                <a:spcPts val="450"/>
+              </a:spcAft>
+              <a:buNone/>
+            </a:pPr>
+            <a:r>
+              <a:rPr lang="pt-BR" sz="1200" b="1" dirty="0">
+                <a:solidFill>
+                  <a:srgbClr val="2D2DB9"/>
+                </a:solidFill>
+                <a:latin typeface="Titillium Web"/>
+              </a:rPr>
+              <a:t>idwall: </a:t>
+            </a:r>
+            <a:r>
+              <a:rPr lang="pt-BR" sz="1200" b="0" dirty="0">
+                <a:solidFill>
+                  <a:srgbClr val="333333"/>
+                </a:solidFill>
+                <a:latin typeface="Titillium Web"/>
+              </a:rPr>
+              <a:t>plataforma de identidade com pipeline de ML — OCR para extração documental, validação documental e biométrica e background check, com laboratório de antifraude. Atua na ENTRADA (onboarding / KYC).</a:t>
             </a:r>
           </a:p>
           <a:p>
@@ -22845,64 +24369,12 @@
               </a:spcAft>
               <a:buNone/>
             </a:pPr>
-            <a:r>
-              <a:rPr lang="pt-BR" sz="1100" b="1" dirty="0">
-                <a:solidFill>
-                  <a:srgbClr val="2D2DB9"/>
-                </a:solidFill>
-                <a:latin typeface="Titillium Web"/>
-              </a:rPr>
-              <a:t>Ismail et al. (PeerJ CS, 2024): </a:t>
-            </a:r>
-            <a:r>
-              <a:rPr lang="pt-BR" sz="1100" b="0" dirty="0">
-                <a:solidFill>
-                  <a:srgbClr val="333333"/>
-                </a:solidFill>
-                <a:latin typeface="Titillium Web"/>
-              </a:rPr>
-              <a:t>detecção de anomalias one-class para keystroke no benchmark CMU (51 sujeitos), comparando 15 técnicas. O Isolation Forest obtém EER de 8,59% (AUC 96,55%) e o melhor (HBOS) EER de 5,97%.</a:t>
-            </a:r>
-          </a:p>
-          <a:p>
-            <a:pPr algn="l">
-              <a:spcAft>
-                <a:spcPts val="450"/>
-              </a:spcAft>
-              <a:buNone/>
-            </a:pPr>
-            <a:endParaRPr lang="pt-BR" sz="1100" b="0" dirty="0">
+            <a:endParaRPr lang="pt-BR" sz="1200" b="1" dirty="0">
               <a:solidFill>
-                <a:srgbClr val="333333"/>
+                <a:srgbClr val="2D2DB9"/>
               </a:solidFill>
               <a:latin typeface="Titillium Web"/>
             </a:endParaRPr>
-          </a:p>
-          <a:p>
-            <a:pPr algn="l">
-              <a:spcAft>
-                <a:spcPts val="450"/>
-              </a:spcAft>
-              <a:buNone/>
-            </a:pPr>
-            <a:r>
-              <a:rPr lang="pt-BR" sz="1100" b="1" dirty="0">
-                <a:solidFill>
-                  <a:srgbClr val="2D2DB9"/>
-                </a:solidFill>
-                <a:latin typeface="Titillium Web"/>
-              </a:rPr>
-              <a:t>Capuano et al. (IEEE Access, 2022): </a:t>
-            </a:r>
-            <a:r>
-              <a:rPr lang="pt-BR" sz="1100" b="0" dirty="0">
-                <a:solidFill>
-                  <a:srgbClr val="333333"/>
-                </a:solidFill>
-                <a:latin typeface="Titillium Web"/>
-              </a:rPr>
-              <a:t>survey de XAI em cibersegurança (300+ trabalhos) que identifica SHAP e LIME como métodos model-agnostic predominantes, distinguindo explicações locais e globais.</a:t>
-            </a:r>
           </a:p>
           <a:p>
             <a:pPr algn="just">
@@ -22911,37 +24383,23 @@
               </a:spcAft>
               <a:buNone/>
             </a:pPr>
-            <a:endParaRPr lang="pt-BR" sz="1100" b="0" dirty="0">
-              <a:solidFill>
-                <a:srgbClr val="333333"/>
-              </a:solidFill>
-              <a:latin typeface="Titillium Web"/>
-            </a:endParaRPr>
-          </a:p>
-          <a:p>
-            <a:pPr algn="l">
-              <a:spcAft>
-                <a:spcPts val="450"/>
-              </a:spcAft>
-              <a:buNone/>
-            </a:pPr>
-            <a:r>
-              <a:rPr lang="pt-BR" sz="1100" b="1" dirty="0">
+            <a:r>
+              <a:rPr lang="pt-BR" sz="1200" b="1" dirty="0">
                 <a:solidFill>
                   <a:srgbClr val="2D2DB9"/>
                 </a:solidFill>
                 <a:latin typeface="Titillium Web"/>
               </a:rPr>
-              <a:t>Bases: </a:t>
-            </a:r>
-            <a:r>
-              <a:rPr lang="pt-BR" sz="1100" b="0" dirty="0">
+              <a:t>CAF — Combate à Fraude: </a:t>
+            </a:r>
+            <a:r>
+              <a:rPr lang="pt-BR" sz="1200" b="0" dirty="0">
                 <a:solidFill>
                   <a:srgbClr val="333333"/>
                 </a:solidFill>
                 <a:latin typeface="Titillium Web"/>
               </a:rPr>
-              <a:t>Isolation Forest (Liu et al., 2008) e SHAP (Lundberg &amp; Lee, 2017) fundamentam a detecção de anomalias e a explicabilidade.</a:t>
+              <a:t>orquestração de identidade combinando documentoscopia, biometria facial e IA, com foco em fraude transacional e enriquecimento por API judicial.</a:t>
             </a:r>
           </a:p>
         </p:txBody>
@@ -23039,7 +24497,7 @@
           <a:noFill/>
         </p:spPr>
         <p:txBody>
-          <a:bodyPr wrap="square">
+          <a:bodyPr wrap="square" anchor="t">
             <a:normAutofit/>
           </a:bodyPr>
           <a:lstStyle/>
@@ -23057,7 +24515,7 @@
                 </a:solidFill>
                 <a:latin typeface="Titillium Web"/>
               </a:rPr>
-              <a:t>A proposta orquestra o Isolation Forest (peso 40%) com Random Forest e Deep Learning num score único e aplica o SHAP à AUTENTICAÇÃO por login — não à intrusão de rede —, persistindo a explicação em blockchain. Converte técnicas isoladas em um pipeline integrado e auditável.</a:t>
+              <a:t>Ambas são robustas na verificação de entrada, mas operam como caixa-preta e encerram a análise após o onboarding. A proposta atua DURANTE a sessão (autenticação contínua), com ensemble EXPLICÁVEL via SHAP, detecção de DERIVA comportamental e trilha imutável em blockchain — além de ser aberta e reprodutível.</a:t>
             </a:r>
           </a:p>
         </p:txBody>
@@ -23109,7 +24567,7 @@
             </a:pPr>
             <a:r>
               <a:rPr lang="pt-BR" dirty="0"/>
-              <a:t>Pesquisa no INPI</a:t>
+              <a:t>Detecção de Anomalias e Explicabilidade (XAI)</a:t>
             </a:r>
           </a:p>
         </p:txBody>
@@ -23139,14 +24597,14 @@
       </p:sp>
       <p:sp>
         <p:nvSpPr>
-          <p:cNvPr id="10" name="L"/>
+          <p:cNvPr id="10" name="box1"/>
           <p:cNvSpPr/>
           <p:nvPr/>
         </p:nvSpPr>
         <p:spPr>
           <a:xfrm>
-            <a:off x="179388" y="1430000"/>
-            <a:ext cx="4250000" cy="2520000"/>
+            <a:off x="179388" y="1424940"/>
+            <a:ext cx="8856662" cy="2980000"/>
           </a:xfrm>
           <a:prstGeom prst="roundRect">
             <a:avLst>
@@ -23173,14 +24631,14 @@
       </p:sp>
       <p:sp>
         <p:nvSpPr>
-          <p:cNvPr id="11" name="Lt"/>
+          <p:cNvPr id="11" name="tb1"/>
           <p:cNvSpPr txBox="1"/>
           <p:nvPr/>
         </p:nvSpPr>
         <p:spPr>
           <a:xfrm>
-            <a:off x="349388" y="1500000"/>
-            <a:ext cx="3910000" cy="330000"/>
+            <a:off x="380000" y="1490000"/>
+            <a:ext cx="8450000" cy="2860000"/>
           </a:xfrm>
           <a:prstGeom prst="rect">
             <a:avLst/>
@@ -23188,341 +24646,145 @@
           <a:noFill/>
         </p:spPr>
         <p:txBody>
-          <a:bodyPr wrap="square">
+          <a:bodyPr wrap="square" anchor="t">
             <a:normAutofit/>
           </a:bodyPr>
           <a:lstStyle/>
           <a:p>
+            <a:pPr algn="just">
+              <a:spcAft>
+                <a:spcPts val="500"/>
+              </a:spcAft>
+              <a:buNone/>
+            </a:pPr>
+            <a:r>
+              <a:rPr lang="pt-BR" sz="1000" b="1" dirty="0">
+                <a:solidFill>
+                  <a:srgbClr val="00CC99"/>
+                </a:solidFill>
+                <a:latin typeface="Titillium Web"/>
+              </a:rPr>
+              <a:t>Ismail et al. — anomalia keystroke (2024) · Capuano et al. — survey XAI (2022) · bases: iForest (2008), SHAP (2017)</a:t>
+            </a:r>
+          </a:p>
+          <a:p>
+            <a:pPr algn="just">
+              <a:spcAft>
+                <a:spcPts val="450"/>
+              </a:spcAft>
+              <a:buNone/>
+            </a:pPr>
+            <a:r>
+              <a:rPr lang="pt-BR" sz="1100" b="1" dirty="0">
+                <a:solidFill>
+                  <a:srgbClr val="2D2DB9"/>
+                </a:solidFill>
+                <a:latin typeface="Titillium Web"/>
+              </a:rPr>
+              <a:t>Ismail et al. — anomalia em keystroke (PeerJ CS, 2024): </a:t>
+            </a:r>
+            <a:r>
+              <a:rPr lang="pt-BR" sz="1100" b="0" dirty="0">
+                <a:solidFill>
+                  <a:srgbClr val="333333"/>
+                </a:solidFill>
+                <a:latin typeface="Titillium Web"/>
+              </a:rPr>
+              <a:t>detecção de anomalias one-class para keystroke no benchmark CMU (51 sujeitos), comparando 15 técnicas. O Isolation Forest obtém EER de 8,59% (AUC 96,55%) e o melhor (HBOS) EER de 5,97%.</a:t>
+            </a:r>
+          </a:p>
+          <a:p>
             <a:pPr algn="l">
               <a:spcAft>
-                <a:spcPts val="0"/>
+                <a:spcPts val="450"/>
               </a:spcAft>
               <a:buNone/>
             </a:pPr>
-            <a:r>
-              <a:rPr lang="pt-BR" sz="1200" b="1" dirty="0">
+            <a:endParaRPr lang="pt-BR" sz="1100" b="0" dirty="0">
+              <a:solidFill>
+                <a:srgbClr val="333333"/>
+              </a:solidFill>
+              <a:latin typeface="Titillium Web"/>
+            </a:endParaRPr>
+          </a:p>
+          <a:p>
+            <a:pPr algn="just">
+              <a:spcAft>
+                <a:spcPts val="450"/>
+              </a:spcAft>
+              <a:buNone/>
+            </a:pPr>
+            <a:r>
+              <a:rPr lang="pt-BR" sz="1100" b="1" dirty="0">
                 <a:solidFill>
                   <a:srgbClr val="2D2DB9"/>
                 </a:solidFill>
                 <a:latin typeface="Titillium Web"/>
               </a:rPr>
-              <a:t>Resultados da Busca</a:t>
+              <a:t>Capuano et al. — survey de XAI (IEEE Access, 2022): </a:t>
+            </a:r>
+            <a:r>
+              <a:rPr lang="pt-BR" sz="1100" b="0" dirty="0">
+                <a:solidFill>
+                  <a:srgbClr val="333333"/>
+                </a:solidFill>
+                <a:latin typeface="Titillium Web"/>
+              </a:rPr>
+              <a:t>survey de XAI em cibersegurança (300+ trabalhos) que identifica SHAP e LIME como métodos model-agnostic predominantes, distinguindo explicações locais e globais.</a:t>
+            </a:r>
+          </a:p>
+          <a:p>
+            <a:pPr algn="just">
+              <a:spcAft>
+                <a:spcPts val="450"/>
+              </a:spcAft>
+              <a:buNone/>
+            </a:pPr>
+            <a:endParaRPr lang="pt-BR" sz="1100" b="0" dirty="0">
+              <a:solidFill>
+                <a:srgbClr val="333333"/>
+              </a:solidFill>
+              <a:latin typeface="Titillium Web"/>
+            </a:endParaRPr>
+          </a:p>
+          <a:p>
+            <a:pPr algn="just">
+              <a:spcAft>
+                <a:spcPts val="450"/>
+              </a:spcAft>
+              <a:buNone/>
+            </a:pPr>
+            <a:r>
+              <a:rPr lang="pt-BR" sz="1100" b="1" dirty="0">
+                <a:solidFill>
+                  <a:srgbClr val="2D2DB9"/>
+                </a:solidFill>
+                <a:latin typeface="Titillium Web"/>
+              </a:rPr>
+              <a:t>Bases: </a:t>
+            </a:r>
+            <a:r>
+              <a:rPr lang="pt-BR" sz="1100" b="0" dirty="0">
+                <a:solidFill>
+                  <a:srgbClr val="333333"/>
+                </a:solidFill>
+                <a:latin typeface="Titillium Web"/>
+              </a:rPr>
+              <a:t>Isolation Forest (Liu et al., 2008) e SHAP (Lundberg &amp; Lee, 2017) fundamentam a detecção de anomalias e a explicabilidade.</a:t>
             </a:r>
           </a:p>
         </p:txBody>
       </p:sp>
       <p:sp>
         <p:nvSpPr>
-          <p:cNvPr id="12" name="Lb"/>
-          <p:cNvSpPr txBox="1"/>
-          <p:nvPr/>
-        </p:nvSpPr>
-        <p:spPr>
-          <a:xfrm>
-            <a:off x="349388" y="1880000"/>
-            <a:ext cx="3910000" cy="2000000"/>
-          </a:xfrm>
-          <a:prstGeom prst="rect">
-            <a:avLst/>
-          </a:prstGeom>
-          <a:noFill/>
-        </p:spPr>
-        <p:txBody>
-          <a:bodyPr wrap="square">
-            <a:normAutofit/>
-          </a:bodyPr>
-          <a:lstStyle/>
-          <a:p>
-            <a:pPr algn="l">
-              <a:spcAft>
-                <a:spcPts val="300"/>
-              </a:spcAft>
-              <a:buNone/>
-            </a:pPr>
-            <a:r>
-              <a:rPr lang="pt-BR" sz="1000" b="1" dirty="0">
-                <a:solidFill>
-                  <a:srgbClr val="00CC99"/>
-                </a:solidFill>
-                <a:latin typeface="Titillium Web"/>
-              </a:rPr>
-              <a:t>•  </a:t>
-            </a:r>
-            <a:r>
-              <a:rPr lang="pt-BR" sz="1000" b="0" dirty="0">
-                <a:solidFill>
-                  <a:srgbClr val="333333"/>
-                </a:solidFill>
-                <a:latin typeface="Titillium Web"/>
-              </a:rPr>
-              <a:t>~47 pedidos de patentes ligados a blockchain</a:t>
-            </a:r>
-          </a:p>
-          <a:p>
-            <a:pPr algn="l">
-              <a:spcAft>
-                <a:spcPts val="300"/>
-              </a:spcAft>
-              <a:buNone/>
-            </a:pPr>
-            <a:r>
-              <a:rPr lang="pt-BR" sz="1000" b="1" dirty="0">
-                <a:solidFill>
-                  <a:srgbClr val="00CC99"/>
-                </a:solidFill>
-                <a:latin typeface="Titillium Web"/>
-              </a:rPr>
-              <a:t>•  </a:t>
-            </a:r>
-            <a:r>
-              <a:rPr lang="pt-BR" sz="1000" b="0" dirty="0">
-                <a:solidFill>
-                  <a:srgbClr val="333333"/>
-                </a:solidFill>
-                <a:latin typeface="Titillium Web"/>
-              </a:rPr>
-              <a:t>Nenhum combina todos os elementos da proposta</a:t>
-            </a:r>
-          </a:p>
-          <a:p>
-            <a:pPr algn="l">
-              <a:spcAft>
-                <a:spcPts val="300"/>
-              </a:spcAft>
-              <a:buNone/>
-            </a:pPr>
-            <a:r>
-              <a:rPr lang="pt-BR" sz="1000" b="1" dirty="0">
-                <a:solidFill>
-                  <a:srgbClr val="00CC99"/>
-                </a:solidFill>
-                <a:latin typeface="Titillium Web"/>
-              </a:rPr>
-              <a:t>•  </a:t>
-            </a:r>
-            <a:r>
-              <a:rPr lang="pt-BR" sz="1000" b="0" dirty="0">
-                <a:solidFill>
-                  <a:srgbClr val="333333"/>
-                </a:solidFill>
-                <a:latin typeface="Titillium Web"/>
-              </a:rPr>
-              <a:t>Sem biometria comportamental + ML + blockchain</a:t>
-            </a:r>
-          </a:p>
-          <a:p>
-            <a:pPr algn="l">
-              <a:spcAft>
-                <a:spcPts val="300"/>
-              </a:spcAft>
-              <a:buNone/>
-            </a:pPr>
-            <a:r>
-              <a:rPr lang="pt-BR" sz="1000" b="1" dirty="0">
-                <a:solidFill>
-                  <a:srgbClr val="00CC99"/>
-                </a:solidFill>
-                <a:latin typeface="Titillium Web"/>
-              </a:rPr>
-              <a:t>•  </a:t>
-            </a:r>
-            <a:r>
-              <a:rPr lang="pt-BR" sz="1000" b="0" dirty="0">
-                <a:solidFill>
-                  <a:srgbClr val="333333"/>
-                </a:solidFill>
-                <a:latin typeface="Titillium Web"/>
-              </a:rPr>
-              <a:t>Patentes da unico em biometria facial</a:t>
-            </a:r>
-          </a:p>
-        </p:txBody>
-      </p:sp>
-      <p:sp>
-        <p:nvSpPr>
-          <p:cNvPr id="13" name="R"/>
+          <p:cNvPr id="12" name="relbox"/>
           <p:cNvSpPr/>
           <p:nvPr/>
         </p:nvSpPr>
         <p:spPr>
           <a:xfrm>
-            <a:off x="4786050" y="1430000"/>
-            <a:ext cx="4250000" cy="2520000"/>
-          </a:xfrm>
-          <a:prstGeom prst="roundRect">
-            <a:avLst>
-              <a:gd name="adj" fmla="val 3500"/>
-            </a:avLst>
-          </a:prstGeom>
-          <a:solidFill>
-            <a:srgbClr val="F2F4F6"/>
-          </a:solidFill>
-          <a:ln>
-            <a:noFill/>
-          </a:ln>
-        </p:spPr>
-        <p:txBody>
-          <a:bodyPr/>
-          <a:lstStyle/>
-          <a:p>
-            <a:pPr>
-              <a:buNone/>
-            </a:pPr>
-            <a:endParaRPr lang="pt-BR"/>
-          </a:p>
-        </p:txBody>
-      </p:sp>
-      <p:sp>
-        <p:nvSpPr>
-          <p:cNvPr id="14" name="Rt"/>
-          <p:cNvSpPr txBox="1"/>
-          <p:nvPr/>
-        </p:nvSpPr>
-        <p:spPr>
-          <a:xfrm>
-            <a:off x="4956050" y="1500000"/>
-            <a:ext cx="3910000" cy="330000"/>
-          </a:xfrm>
-          <a:prstGeom prst="rect">
-            <a:avLst/>
-          </a:prstGeom>
-          <a:noFill/>
-        </p:spPr>
-        <p:txBody>
-          <a:bodyPr wrap="square">
-            <a:normAutofit/>
-          </a:bodyPr>
-          <a:lstStyle/>
-          <a:p>
-            <a:pPr algn="l">
-              <a:spcAft>
-                <a:spcPts val="0"/>
-              </a:spcAft>
-              <a:buNone/>
-            </a:pPr>
-            <a:r>
-              <a:rPr lang="pt-BR" sz="1200" b="1" dirty="0">
-                <a:solidFill>
-                  <a:srgbClr val="2D2DB9"/>
-                </a:solidFill>
-                <a:latin typeface="Titillium Web"/>
-              </a:rPr>
-              <a:t>Diretrizes de IA no INPI (2025)</a:t>
-            </a:r>
-          </a:p>
-        </p:txBody>
-      </p:sp>
-      <p:sp>
-        <p:nvSpPr>
-          <p:cNvPr id="15" name="Rb"/>
-          <p:cNvSpPr txBox="1"/>
-          <p:nvPr/>
-        </p:nvSpPr>
-        <p:spPr>
-          <a:xfrm>
-            <a:off x="4956050" y="1880000"/>
-            <a:ext cx="3910000" cy="2000000"/>
-          </a:xfrm>
-          <a:prstGeom prst="rect">
-            <a:avLst/>
-          </a:prstGeom>
-          <a:noFill/>
-        </p:spPr>
-        <p:txBody>
-          <a:bodyPr wrap="square">
-            <a:normAutofit/>
-          </a:bodyPr>
-          <a:lstStyle/>
-          <a:p>
-            <a:pPr algn="l">
-              <a:spcAft>
-                <a:spcPts val="300"/>
-              </a:spcAft>
-              <a:buNone/>
-            </a:pPr>
-            <a:r>
-              <a:rPr lang="pt-BR" sz="1000" b="1" dirty="0">
-                <a:solidFill>
-                  <a:srgbClr val="00CC99"/>
-                </a:solidFill>
-                <a:latin typeface="Titillium Web"/>
-              </a:rPr>
-              <a:t>•  </a:t>
-            </a:r>
-            <a:r>
-              <a:rPr lang="pt-BR" sz="1000" b="0" dirty="0">
-                <a:solidFill>
-                  <a:srgbClr val="333333"/>
-                </a:solidFill>
-                <a:latin typeface="Titillium Web"/>
-              </a:rPr>
-              <a:t>Consulta pública sobre patentes de IA</a:t>
-            </a:r>
-          </a:p>
-          <a:p>
-            <a:pPr algn="l">
-              <a:spcAft>
-                <a:spcPts val="300"/>
-              </a:spcAft>
-              <a:buNone/>
-            </a:pPr>
-            <a:r>
-              <a:rPr lang="pt-BR" sz="1000" b="1" dirty="0">
-                <a:solidFill>
-                  <a:srgbClr val="00CC99"/>
-                </a:solidFill>
-                <a:latin typeface="Titillium Web"/>
-              </a:rPr>
-              <a:t>•  </a:t>
-            </a:r>
-            <a:r>
-              <a:rPr lang="pt-BR" sz="1000" b="0" dirty="0">
-                <a:solidFill>
-                  <a:srgbClr val="333333"/>
-                </a:solidFill>
-                <a:latin typeface="Titillium Web"/>
-              </a:rPr>
-              <a:t>Modelos e invenções baseadas/assistidas por IA</a:t>
-            </a:r>
-          </a:p>
-          <a:p>
-            <a:pPr algn="l">
-              <a:spcAft>
-                <a:spcPts val="300"/>
-              </a:spcAft>
-              <a:buNone/>
-            </a:pPr>
-            <a:r>
-              <a:rPr lang="pt-BR" sz="1000" b="1" dirty="0">
-                <a:solidFill>
-                  <a:srgbClr val="00CC99"/>
-                </a:solidFill>
-                <a:latin typeface="Titillium Web"/>
-              </a:rPr>
-              <a:t>•  </a:t>
-            </a:r>
-            <a:r>
-              <a:rPr lang="pt-BR" sz="1000" b="0" dirty="0">
-                <a:solidFill>
-                  <a:srgbClr val="333333"/>
-                </a:solidFill>
-                <a:latin typeface="Titillium Web"/>
-              </a:rPr>
-              <a:t>Amadurecimento regulatório para proteção futura</a:t>
-            </a:r>
-          </a:p>
-        </p:txBody>
-      </p:sp>
-      <p:sp>
-        <p:nvSpPr>
-          <p:cNvPr id="16" name="rel"/>
-          <p:cNvSpPr/>
-          <p:nvPr/>
-        </p:nvSpPr>
-        <p:spPr>
-          <a:xfrm>
-            <a:off x="179388" y="4120000"/>
-            <a:ext cx="8856662" cy="2270000"/>
+            <a:off x="179388" y="4500000"/>
+            <a:ext cx="8856662" cy="1900000"/>
           </a:xfrm>
           <a:prstGeom prst="roundRect">
             <a:avLst>
@@ -23551,14 +24813,14 @@
       </p:sp>
       <p:sp>
         <p:nvSpPr>
-          <p:cNvPr id="17" name="rl"/>
+          <p:cNvPr id="13" name="rlbl"/>
           <p:cNvSpPr txBox="1"/>
           <p:nvPr/>
         </p:nvSpPr>
         <p:spPr>
           <a:xfrm>
-            <a:off x="400000" y="4190000"/>
-            <a:ext cx="8420000" cy="330000"/>
+            <a:off x="400000" y="4565000"/>
+            <a:ext cx="8420000" cy="300000"/>
           </a:xfrm>
           <a:prstGeom prst="rect">
             <a:avLst/>
@@ -23584,21 +24846,21 @@
                 </a:solidFill>
                 <a:latin typeface="Titillium Web"/>
               </a:rPr>
-              <a:t>Relação com a Proposta</a:t>
+              <a:t>Relação com a sua proposta</a:t>
             </a:r>
           </a:p>
         </p:txBody>
       </p:sp>
       <p:sp>
         <p:nvSpPr>
-          <p:cNvPr id="18" name="rt"/>
+          <p:cNvPr id="14" name="rtxt"/>
           <p:cNvSpPr txBox="1"/>
           <p:nvPr/>
         </p:nvSpPr>
         <p:spPr>
           <a:xfrm>
-            <a:off x="400000" y="4560000"/>
-            <a:ext cx="8420000" cy="1750000"/>
+            <a:off x="400000" y="4900000"/>
+            <a:ext cx="8420000" cy="1450000"/>
           </a:xfrm>
           <a:prstGeom prst="rect">
             <a:avLst/>
@@ -23606,7 +24868,7 @@
           <a:noFill/>
         </p:spPr>
         <p:txBody>
-          <a:bodyPr wrap="square">
+          <a:bodyPr wrap="square" anchor="t">
             <a:normAutofit/>
           </a:bodyPr>
           <a:lstStyle/>
@@ -23618,13 +24880,13 @@
               <a:buNone/>
             </a:pPr>
             <a:r>
-              <a:rPr lang="pt-BR" sz="1200" b="0" dirty="0">
+              <a:rPr lang="pt-BR" sz="1150" b="0" dirty="0">
                 <a:solidFill>
                   <a:srgbClr val="333333"/>
                 </a:solidFill>
                 <a:latin typeface="Titillium Web"/>
               </a:rPr>
-              <a:t>A ausência de patentes que integrem autenticação adaptativa com ML comportamental, blockchain e explicabilidade de IA evidencia o caráter inovador da proposta: elementos que, isolados, já têm registro, mas que em conjunto representam uma contribuição original.</a:t>
+              <a:t>A proposta orquestra o Isolation Forest (peso 40%) com Random Forest e Deep Learning num score único e aplica o SHAP à AUTENTICAÇÃO por login — não à intrusão de rede —, persistindo a explicação em blockchain. Converte técnicas isoladas em um pipeline integrado e auditável.</a:t>
             </a:r>
           </a:p>
         </p:txBody>
@@ -23883,7 +25145,7 @@
         <a:effectLst/>
         <a:extLst>
           <a:ext uri="{AF507438-7753-43e0-B8FC-AC1667EBCBE1}">
-            <a14:hiddenEffects xmlns:a14="http://schemas.microsoft.com/office/drawing/2010/main" xmlns="">
+            <a14:hiddenEffects xmlns="" xmlns:a14="http://schemas.microsoft.com/office/drawing/2010/main">
               <a:effectLst>
                 <a:outerShdw blurRad="63500" dist="38099" dir="2700000" algn="ctr" rotWithShape="0">
                   <a:schemeClr val="bg2">
@@ -23959,7 +25221,7 @@
         <a:effectLst/>
         <a:extLst>
           <a:ext uri="{AF507438-7753-43e0-B8FC-AC1667EBCBE1}">
-            <a14:hiddenEffects xmlns:a14="http://schemas.microsoft.com/office/drawing/2010/main" xmlns="">
+            <a14:hiddenEffects xmlns="" xmlns:a14="http://schemas.microsoft.com/office/drawing/2010/main">
               <a:effectLst>
                 <a:outerShdw blurRad="63500" dist="38099" dir="2700000" algn="ctr" rotWithShape="0">
                   <a:schemeClr val="bg2">
@@ -24545,7 +25807,7 @@
         <a:effectLst/>
         <a:extLst>
           <a:ext uri="{AF507438-7753-43e0-B8FC-AC1667EBCBE1}">
-            <a14:hiddenEffects xmlns:a14="http://schemas.microsoft.com/office/drawing/2010/main" xmlns="">
+            <a14:hiddenEffects xmlns="" xmlns:a14="http://schemas.microsoft.com/office/drawing/2010/main">
               <a:effectLst>
                 <a:outerShdw blurRad="63500" dist="38099" dir="2700000" algn="ctr" rotWithShape="0">
                   <a:schemeClr val="bg2">
@@ -24621,7 +25883,7 @@
         <a:effectLst/>
         <a:extLst>
           <a:ext uri="{AF507438-7753-43e0-B8FC-AC1667EBCBE1}">
-            <a14:hiddenEffects xmlns:a14="http://schemas.microsoft.com/office/drawing/2010/main" xmlns="">
+            <a14:hiddenEffects xmlns="" xmlns:a14="http://schemas.microsoft.com/office/drawing/2010/main">
               <a:effectLst>
                 <a:outerShdw blurRad="63500" dist="38099" dir="2700000" algn="ctr" rotWithShape="0">
                   <a:schemeClr val="bg2">
@@ -25207,7 +26469,7 @@
         <a:effectLst/>
         <a:extLst>
           <a:ext uri="{AF507438-7753-43e0-B8FC-AC1667EBCBE1}">
-            <a14:hiddenEffects xmlns:a14="http://schemas.microsoft.com/office/drawing/2010/main" xmlns="">
+            <a14:hiddenEffects xmlns="" xmlns:a14="http://schemas.microsoft.com/office/drawing/2010/main">
               <a:effectLst>
                 <a:outerShdw blurRad="63500" dist="38099" dir="2700000" algn="ctr" rotWithShape="0">
                   <a:schemeClr val="bg2">
@@ -25283,7 +26545,7 @@
         <a:effectLst/>
         <a:extLst>
           <a:ext uri="{AF507438-7753-43e0-B8FC-AC1667EBCBE1}">
-            <a14:hiddenEffects xmlns:a14="http://schemas.microsoft.com/office/drawing/2010/main" xmlns="">
+            <a14:hiddenEffects xmlns="" xmlns:a14="http://schemas.microsoft.com/office/drawing/2010/main">
               <a:effectLst>
                 <a:outerShdw blurRad="63500" dist="38099" dir="2700000" algn="ctr" rotWithShape="0">
                   <a:schemeClr val="bg2">
